--- a/public/menuz_executive_pitch_deck.pptx
+++ b/public/menuz_executive_pitch_deck.pptx
@@ -18,6 +18,9 @@
     <p:sldId id="266" r:id="rId17"/>
     <p:sldId id="267" r:id="rId18"/>
     <p:sldId id="268" r:id="rId19"/>
+    <p:sldId id="269" r:id="rId20"/>
+    <p:sldId id="270" r:id="rId21"/>
+    <p:sldId id="271" r:id="rId22"/>
   </p:sldIdLst>
   <p:sldSz cx="12191695" cy="6858000" type="screen4x3"/>
   <p:notesSz cx="6858000" cy="9144000"/>
@@ -3233,7 +3236,7 @@
               </a:defRPr>
             </a:pPr>
             <a:r>
-              <a:t>The Restaurant Experience &amp; Kitchen Operating System</a:t>
+              <a:t>The Complete Dine-In Operating System &amp; Growth Engine</a:t>
             </a:r>
           </a:p>
         </p:txBody>
@@ -3269,7 +3272,7 @@
               </a:defRPr>
             </a:pPr>
             <a:r>
-              <a:t>Turn Every Table into High-Margin Orders, Real-Time Collaboration &amp; Direct Kitchen Precision.</a:t>
+              <a:t>Everything a Modern Restaurant Needs: Interactive Menus, Real-Time Table Sync, Chef AI, Direct Kitchen KOT, and Owner-Configurable Viral Growth.</a:t>
             </a:r>
           </a:p>
           <a:p>
@@ -3285,7 +3288,7 @@
               </a:defRPr>
             </a:pPr>
             <a:r>
-              <a:t>Multiplayer Table Sync • English / Hindi / Marathi • Direct Kitchen KOT • Chef AI Concierge • Viral Instagram Cards</a:t>
+              <a:t>What Exactly Is This Product? • Complete Feature Breakdown &amp; Architectural Overview</a:t>
             </a:r>
           </a:p>
         </p:txBody>
@@ -3321,7 +3324,7 @@
               </a:defRPr>
             </a:pPr>
             <a:r>
-              <a:t>CONFIDENTIAL EXECUTIVE PRODUCT &amp; OPERATIONS DECK • 2026 EDITION • MENUZ PLATFORM</a:t>
+              <a:t>CONFIDENTIAL EXECUTIVE PRODUCT OVERVIEW • 2026 EDITION • MENUZ PLATFORM</a:t>
             </a:r>
           </a:p>
         </p:txBody>
@@ -3359,7 +3362,7 @@
             <a:avLst/>
           </a:prstGeom>
           <a:solidFill>
-            <a:srgbClr val="FDFBF7"/>
+            <a:srgbClr val="1C1917"/>
           </a:solidFill>
           <a:ln>
             <a:noFill/>
@@ -3395,8 +3398,8 @@
         </p:nvSpPr>
         <p:spPr>
           <a:xfrm>
-            <a:off x="731520" y="411480"/>
-            <a:ext cx="10515600" cy="320040"/>
+            <a:off x="731520" y="365760"/>
+            <a:ext cx="10515600" cy="292608"/>
           </a:xfrm>
           <a:prstGeom prst="rect">
             <a:avLst/>
@@ -3418,7 +3421,7 @@
               </a:defRPr>
             </a:pPr>
             <a:r>
-              <a:t>PLATFORM MULTI-TENANCY</a:t>
+              <a:t>FRAUD PROTECTION</a:t>
             </a:r>
           </a:p>
         </p:txBody>
@@ -3431,8 +3434,8 @@
         </p:nvSpPr>
         <p:spPr>
           <a:xfrm>
-            <a:off x="731520" y="731520"/>
-            <a:ext cx="10515600" cy="548640"/>
+            <a:off x="731520" y="685800"/>
+            <a:ext cx="10515600" cy="502920"/>
           </a:xfrm>
           <a:prstGeom prst="rect">
             <a:avLst/>
@@ -3446,15 +3449,15 @@
           <a:lstStyle/>
           <a:p>
             <a:pPr>
-              <a:defRPr sz="2400" b="1">
-                <a:solidFill>
-                  <a:srgbClr val="1C1917"/>
+              <a:defRPr sz="2200" b="1">
+                <a:solidFill>
+                  <a:srgbClr val="FFFFFF"/>
                 </a:solidFill>
                 <a:latin typeface="Georgia"/>
               </a:defRPr>
             </a:pPr>
             <a:r>
-              <a:t>Multi-Restaurant Persistence &amp; Master Image Library</a:t>
+              <a:t>Anti-Cheat Voucher Security &amp; Gamified Lucky Wheel</a:t>
             </a:r>
           </a:p>
         </p:txBody>
@@ -3467,7 +3470,7 @@
         </p:nvSpPr>
         <p:spPr>
           <a:xfrm>
-            <a:off x="731520" y="1298448"/>
+            <a:off x="731520" y="1234440"/>
             <a:ext cx="10515600" cy="365760"/>
           </a:xfrm>
           <a:prstGeom prst="rect">
@@ -3482,15 +3485,15 @@
           <a:lstStyle/>
           <a:p>
             <a:pPr>
-              <a:defRPr sz="1200">
-                <a:solidFill>
-                  <a:srgbClr val="57534E"/>
-                </a:solidFill>
-                <a:latin typeface="Arial"/>
-              </a:defRPr>
-            </a:pPr>
-            <a:r>
-              <a:t>Managing hundreds of partner restaurants with bulletproof data persistence and media organization.</a:t>
+              <a:defRPr sz="1150">
+                <a:solidFill>
+                  <a:srgbClr val="D6D3D1"/>
+                </a:solidFill>
+                <a:latin typeface="Arial"/>
+              </a:defRPr>
+            </a:pPr>
+            <a:r>
+              <a:t>Diners love winning table rewards — while owners are 100% protected against screenshot fraud.</a:t>
             </a:r>
           </a:p>
         </p:txBody>
@@ -3503,19 +3506,17 @@
         </p:nvSpPr>
         <p:spPr>
           <a:xfrm>
-            <a:off x="731520" y="1920240"/>
-            <a:ext cx="3328416" cy="4114800"/>
+            <a:off x="731520" y="1828800"/>
+            <a:ext cx="5120640" cy="4297680"/>
           </a:xfrm>
           <a:prstGeom prst="roundRect">
             <a:avLst/>
           </a:prstGeom>
           <a:solidFill>
-            <a:srgbClr val="FFFFFF"/>
+            <a:srgbClr val="292524"/>
           </a:solidFill>
-          <a:ln w="12700">
-            <a:solidFill>
-              <a:srgbClr val="E7E5E4"/>
-            </a:solidFill>
+          <a:ln>
+            <a:noFill/>
           </a:ln>
         </p:spPr>
         <p:style>
@@ -3548,8 +3549,8 @@
         </p:nvSpPr>
         <p:spPr>
           <a:xfrm>
-            <a:off x="1005840" y="2194560"/>
-            <a:ext cx="2779776" cy="3474720"/>
+            <a:off x="1005840" y="2103120"/>
+            <a:ext cx="4572000" cy="3749039"/>
           </a:xfrm>
           <a:prstGeom prst="rect">
             <a:avLst/>
@@ -3563,7 +3564,7 @@
           <a:lstStyle/>
           <a:p>
             <a:pPr>
-              <a:defRPr sz="1800" b="1">
+              <a:defRPr sz="1900" b="1">
                 <a:solidFill>
                   <a:srgbClr val="E85D04"/>
                 </a:solidFill>
@@ -3571,23 +3572,71 @@
               </a:defRPr>
             </a:pPr>
             <a:r>
-              <a:t>Curated Restaurant Image Library</a:t>
+              <a:t>Interactive Lucky Wheel</a:t>
             </a:r>
           </a:p>
           <a:p>
             <a:pPr>
               <a:spcBef>
-                <a:spcPts val="1400"/>
+                <a:spcPts val="1000"/>
               </a:spcBef>
-              <a:defRPr sz="1200">
-                <a:solidFill>
-                  <a:srgbClr val="57534E"/>
-                </a:solidFill>
-                <a:latin typeface="Arial"/>
-              </a:defRPr>
-            </a:pPr>
-            <a:r>
-              <a:t>The master image library is strictly organized by restaurant listings with high-resolution culinary photography partitioned per restaurant — eliminating media clutter.</a:t>
+              <a:defRPr sz="1100">
+                <a:solidFill>
+                  <a:srgbClr val="FFFFFF"/>
+                </a:solidFill>
+                <a:latin typeface="Arial"/>
+              </a:defRPr>
+            </a:pPr>
+            <a:r>
+              <a:t>🎉 Exciting visual wheel spin immediately on QR scan.</a:t>
+            </a:r>
+          </a:p>
+          <a:p>
+            <a:pPr>
+              <a:spcBef>
+                <a:spcPts val="1000"/>
+              </a:spcBef>
+              <a:defRPr sz="1100">
+                <a:solidFill>
+                  <a:srgbClr val="FFFFFF"/>
+                </a:solidFill>
+                <a:latin typeface="Arial"/>
+              </a:defRPr>
+            </a:pPr>
+            <a:r>
+              <a:t>🎉 Customizable prizes: 15% off food bill, free signature dessert, or mocktail upgrade.</a:t>
+            </a:r>
+          </a:p>
+          <a:p>
+            <a:pPr>
+              <a:spcBef>
+                <a:spcPts val="1000"/>
+              </a:spcBef>
+              <a:defRPr sz="1100">
+                <a:solidFill>
+                  <a:srgbClr val="FFFFFF"/>
+                </a:solidFill>
+                <a:latin typeface="Arial"/>
+              </a:defRPr>
+            </a:pPr>
+            <a:r>
+              <a:t>🎉 Creates instant excitement at table entry, guaranteeing diners stay and dine.</a:t>
+            </a:r>
+          </a:p>
+          <a:p>
+            <a:pPr>
+              <a:spcBef>
+                <a:spcPts val="1000"/>
+              </a:spcBef>
+              <a:defRPr sz="1100">
+                <a:solidFill>
+                  <a:srgbClr val="FFFFFF"/>
+                </a:solidFill>
+                <a:latin typeface="Arial"/>
+              </a:defRPr>
+            </a:pPr>
+            <a:r>
+              <a:t>🎉 Ties reward redemption directly to billing.</a:t>
             </a:r>
           </a:p>
         </p:txBody>
@@ -3600,19 +3649,17 @@
         </p:nvSpPr>
         <p:spPr>
           <a:xfrm>
-            <a:off x="4389120" y="1920240"/>
-            <a:ext cx="3328416" cy="4114800"/>
+            <a:off x="6309360" y="1828800"/>
+            <a:ext cx="5120640" cy="4297680"/>
           </a:xfrm>
           <a:prstGeom prst="roundRect">
             <a:avLst/>
           </a:prstGeom>
           <a:solidFill>
-            <a:srgbClr val="FFFFFF"/>
+            <a:srgbClr val="292524"/>
           </a:solidFill>
-          <a:ln w="12700">
-            <a:solidFill>
-              <a:srgbClr val="E7E5E4"/>
-            </a:solidFill>
+          <a:ln>
+            <a:noFill/>
           </a:ln>
         </p:spPr>
         <p:style>
@@ -3645,8 +3692,8 @@
         </p:nvSpPr>
         <p:spPr>
           <a:xfrm>
-            <a:off x="4663440" y="2194560"/>
-            <a:ext cx="2779776" cy="3474720"/>
+            <a:off x="6583680" y="2103120"/>
+            <a:ext cx="4572000" cy="3749039"/>
           </a:xfrm>
           <a:prstGeom prst="rect">
             <a:avLst/>
@@ -3660,128 +3707,63 @@
           <a:lstStyle/>
           <a:p>
             <a:pPr>
-              <a:defRPr sz="1800" b="1">
-                <a:solidFill>
-                  <a:srgbClr val="E85D04"/>
+              <a:defRPr sz="1900" b="1">
+                <a:solidFill>
+                  <a:srgbClr val="059669"/>
                 </a:solidFill>
                 <a:latin typeface="Georgia"/>
               </a:defRPr>
             </a:pPr>
             <a:r>
-              <a:t>Independent Branded Websites</a:t>
+              <a:t>Triple Anti-Cheat Security</a:t>
             </a:r>
           </a:p>
           <a:p>
             <a:pPr>
               <a:spcBef>
-                <a:spcPts val="1400"/>
+                <a:spcPts val="1200"/>
               </a:spcBef>
-              <a:defRPr sz="1200">
-                <a:solidFill>
-                  <a:srgbClr val="57534E"/>
-                </a:solidFill>
-                <a:latin typeface="Arial"/>
-              </a:defRPr>
-            </a:pPr>
-            <a:r>
-              <a:t>Each restaurant operates on its own dedicated route (/r/:restaurantSlug) or custom domain, featuring custom logos, cuisines, and styling.</a:t>
-            </a:r>
-          </a:p>
-        </p:txBody>
-      </p:sp>
-      <p:sp>
-        <p:nvSpPr>
-          <p:cNvPr id="10" name="Rounded Rectangle 9"/>
-          <p:cNvSpPr/>
-          <p:nvPr/>
-        </p:nvSpPr>
-        <p:spPr>
-          <a:xfrm>
-            <a:off x="8046720" y="1920240"/>
-            <a:ext cx="3328416" cy="4114800"/>
-          </a:xfrm>
-          <a:prstGeom prst="roundRect">
-            <a:avLst/>
-          </a:prstGeom>
-          <a:solidFill>
-            <a:srgbClr val="FFFFFF"/>
-          </a:solidFill>
-          <a:ln w="12700">
-            <a:solidFill>
-              <a:srgbClr val="E7E5E4"/>
-            </a:solidFill>
-          </a:ln>
-        </p:spPr>
-        <p:style>
-          <a:lnRef idx="1">
-            <a:schemeClr val="accent1"/>
-          </a:lnRef>
-          <a:fillRef idx="3">
-            <a:schemeClr val="accent1"/>
-          </a:fillRef>
-          <a:effectRef idx="2">
-            <a:schemeClr val="accent1"/>
-          </a:effectRef>
-          <a:fontRef idx="minor">
-            <a:schemeClr val="lt1"/>
-          </a:fontRef>
-        </p:style>
-        <p:txBody>
-          <a:bodyPr rtlCol="0" anchor="ctr"/>
-          <a:lstStyle/>
-          <a:p>
-            <a:pPr algn="ctr"/>
-          </a:p>
-        </p:txBody>
-      </p:sp>
-      <p:sp>
-        <p:nvSpPr>
-          <p:cNvPr id="11" name="TextBox 10"/>
-          <p:cNvSpPr txBox="1"/>
-          <p:nvPr/>
-        </p:nvSpPr>
-        <p:spPr>
-          <a:xfrm>
-            <a:off x="8321040" y="2194560"/>
-            <a:ext cx="2779776" cy="3474720"/>
-          </a:xfrm>
-          <a:prstGeom prst="rect">
-            <a:avLst/>
-          </a:prstGeom>
-          <a:noFill/>
-        </p:spPr>
-        <p:txBody>
-          <a:bodyPr wrap="square">
-            <a:spAutoFit/>
-          </a:bodyPr>
-          <a:lstStyle/>
-          <a:p>
-            <a:pPr>
-              <a:defRPr sz="1800" b="1">
-                <a:solidFill>
-                  <a:srgbClr val="E85D04"/>
-                </a:solidFill>
-                <a:latin typeface="Georgia"/>
-              </a:defRPr>
-            </a:pPr>
-            <a:r>
-              <a:t>Permanent LocalStorage Persistence</a:t>
+              <a:defRPr sz="1100">
+                <a:solidFill>
+                  <a:srgbClr val="D6D3D1"/>
+                </a:solidFill>
+                <a:latin typeface="Arial"/>
+              </a:defRPr>
+            </a:pPr>
+            <a:r>
+              <a:t>🔒 Live 15-Minute Dynamic Clock: Voucher display features a live ticking seconds countdown. Reused screenshots or static forwarded images are instantly spotted and rejected.</a:t>
             </a:r>
           </a:p>
           <a:p>
             <a:pPr>
               <a:spcBef>
-                <a:spcPts val="1400"/>
+                <a:spcPts val="1200"/>
               </a:spcBef>
-              <a:defRPr sz="1200">
-                <a:solidFill>
-                  <a:srgbClr val="57534E"/>
-                </a:solidFill>
-                <a:latin typeface="Arial"/>
-              </a:defRPr>
-            </a:pPr>
-            <a:r>
-              <a:t>Onboarded restaurants, custom menus, and smart settings are permanently saved — ensuring newly registered restaurants never disappear on reload.</a:t>
+              <a:defRPr sz="1100">
+                <a:solidFill>
+                  <a:srgbClr val="D6D3D1"/>
+                </a:solidFill>
+                <a:latin typeface="Arial"/>
+              </a:defRPr>
+            </a:pPr>
+            <a:r>
+              <a:t>🔒 Waiter PIN Verification (1234): Server physically types PIN 1234 on diner's screen to permanently void the voucher upon billing.</a:t>
+            </a:r>
+          </a:p>
+          <a:p>
+            <a:pPr>
+              <a:spcBef>
+                <a:spcPts val="1200"/>
+              </a:spcBef>
+              <a:defRPr sz="1100">
+                <a:solidFill>
+                  <a:srgbClr val="D6D3D1"/>
+                </a:solidFill>
+                <a:latin typeface="Arial"/>
+              </a:defRPr>
+            </a:pPr>
+            <a:r>
+              <a:t>🔒 Single-Use Table Lock: Vouchers are cryptographically locked to Table X and session ID — cannot be passed around to other diners.</a:t>
             </a:r>
           </a:p>
         </p:txBody>
@@ -3855,8 +3837,8 @@
         </p:nvSpPr>
         <p:spPr>
           <a:xfrm>
-            <a:off x="731520" y="411480"/>
-            <a:ext cx="10515600" cy="320040"/>
+            <a:off x="731520" y="365760"/>
+            <a:ext cx="10515600" cy="292608"/>
           </a:xfrm>
           <a:prstGeom prst="rect">
             <a:avLst/>
@@ -3878,7 +3860,7 @@
               </a:defRPr>
             </a:pPr>
             <a:r>
-              <a:t>REPUTATION MANAGEMENT</a:t>
+              <a:t>KITCHEN OPERATIONS</a:t>
             </a:r>
           </a:p>
         </p:txBody>
@@ -3891,8 +3873,8 @@
         </p:nvSpPr>
         <p:spPr>
           <a:xfrm>
-            <a:off x="731520" y="731520"/>
-            <a:ext cx="10515600" cy="548640"/>
+            <a:off x="731520" y="685800"/>
+            <a:ext cx="10515600" cy="502920"/>
           </a:xfrm>
           <a:prstGeom prst="rect">
             <a:avLst/>
@@ -3906,7 +3888,7 @@
           <a:lstStyle/>
           <a:p>
             <a:pPr>
-              <a:defRPr sz="2400" b="1">
+              <a:defRPr sz="2200" b="1">
                 <a:solidFill>
                   <a:srgbClr val="1C1917"/>
                 </a:solidFill>
@@ -3914,7 +3896,7 @@
               </a:defRPr>
             </a:pPr>
             <a:r>
-              <a:t>The 4-Step Review Booster &amp; Private Floor Shield</a:t>
+              <a:t>Direct Kitchen KOT &amp; Universal POS Bridge</a:t>
             </a:r>
           </a:p>
         </p:txBody>
@@ -3927,7 +3909,7 @@
         </p:nvSpPr>
         <p:spPr>
           <a:xfrm>
-            <a:off x="731520" y="1298448"/>
+            <a:off x="731520" y="1234440"/>
             <a:ext cx="10515600" cy="365760"/>
           </a:xfrm>
           <a:prstGeom prst="rect">
@@ -3942,7 +3924,7 @@
           <a:lstStyle/>
           <a:p>
             <a:pPr>
-              <a:defRPr sz="1200">
+              <a:defRPr sz="1150">
                 <a:solidFill>
                   <a:srgbClr val="57534E"/>
                 </a:solidFill>
@@ -3950,7 +3932,7 @@
               </a:defRPr>
             </a:pPr>
             <a:r>
-              <a:t>How Menuz turns happy diners into verified 5-star Google reviews while eliminating negative feedback.</a:t>
+              <a:t>Owner-controlled order dispatching with triple-redundant thermal printing failover.</a:t>
             </a:r>
           </a:p>
         </p:txBody>
@@ -3963,8 +3945,8 @@
         </p:nvSpPr>
         <p:spPr>
           <a:xfrm>
-            <a:off x="731520" y="1920240"/>
-            <a:ext cx="5120640" cy="1965960"/>
+            <a:off x="731520" y="1828800"/>
+            <a:ext cx="5120640" cy="4297680"/>
           </a:xfrm>
           <a:prstGeom prst="roundRect">
             <a:avLst/>
@@ -4008,8 +3990,8 @@
         </p:nvSpPr>
         <p:spPr>
           <a:xfrm>
-            <a:off x="1005840" y="2148840"/>
-            <a:ext cx="4572000" cy="1508760"/>
+            <a:off x="1005840" y="2103120"/>
+            <a:ext cx="4572000" cy="3749039"/>
           </a:xfrm>
           <a:prstGeom prst="rect">
             <a:avLst/>
@@ -4023,7 +4005,7 @@
           <a:lstStyle/>
           <a:p>
             <a:pPr>
-              <a:defRPr sz="1600" b="1">
+              <a:defRPr sz="1800" b="1">
                 <a:solidFill>
                   <a:srgbClr val="E85D04"/>
                 </a:solidFill>
@@ -4031,23 +4013,71 @@
               </a:defRPr>
             </a:pPr>
             <a:r>
-              <a:t>Step 1: AI Review Generator</a:t>
+              <a:t>Mode A: Direct Auto-KOT to Kitchen</a:t>
             </a:r>
           </a:p>
           <a:p>
             <a:pPr>
               <a:spcBef>
-                <a:spcPts val="600"/>
+                <a:spcPts val="900"/>
               </a:spcBef>
-              <a:defRPr sz="1150">
-                <a:solidFill>
-                  <a:srgbClr val="57534E"/>
-                </a:solidFill>
-                <a:latin typeface="Arial"/>
-              </a:defRPr>
-            </a:pPr>
-            <a:r>
-              <a:t>Diner taps 'Claim Reward'. AI drafts a tailored review based on ordered dishes, highlighting chef craftsmanship &amp; ambiance.</a:t>
+              <a:defRPr sz="1100">
+                <a:solidFill>
+                  <a:srgbClr val="1C1917"/>
+                </a:solidFill>
+                <a:latin typeface="Arial"/>
+              </a:defRPr>
+            </a:pPr>
+            <a:r>
+              <a:t>⚡ Fires 80mm ESC/POS thermal ticket directly in kitchen in 1 second.</a:t>
+            </a:r>
+          </a:p>
+          <a:p>
+            <a:pPr>
+              <a:spcBef>
+                <a:spcPts val="900"/>
+              </a:spcBef>
+              <a:defRPr sz="1100">
+                <a:solidFill>
+                  <a:srgbClr val="1C1917"/>
+                </a:solidFill>
+                <a:latin typeface="Arial"/>
+              </a:defRPr>
+            </a:pPr>
+            <a:r>
+              <a:t>⚡ Zero waiter re-typing — eliminates handwritten mistakes and delays.</a:t>
+            </a:r>
+          </a:p>
+          <a:p>
+            <a:pPr>
+              <a:spcBef>
+                <a:spcPts val="900"/>
+              </a:spcBef>
+              <a:defRPr sz="1100">
+                <a:solidFill>
+                  <a:srgbClr val="1C1917"/>
+                </a:solidFill>
+                <a:latin typeface="Arial"/>
+              </a:defRPr>
+            </a:pPr>
+            <a:r>
+              <a:t>⚡ Pre-configured preparation notes (spice level, allergen notes, guest tags).</a:t>
+            </a:r>
+          </a:p>
+          <a:p>
+            <a:pPr>
+              <a:spcBef>
+                <a:spcPts val="900"/>
+              </a:spcBef>
+              <a:defRPr sz="1100">
+                <a:solidFill>
+                  <a:srgbClr val="1C1917"/>
+                </a:solidFill>
+                <a:latin typeface="Arial"/>
+              </a:defRPr>
+            </a:pPr>
+            <a:r>
+              <a:t>⚡ Best for: High-turnover cafes, bistros, QSRs, and casual dining.</a:t>
             </a:r>
           </a:p>
         </p:txBody>
@@ -4060,8 +4090,8 @@
         </p:nvSpPr>
         <p:spPr>
           <a:xfrm>
-            <a:off x="6217920" y="1920240"/>
-            <a:ext cx="5120640" cy="1965960"/>
+            <a:off x="6309360" y="1828800"/>
+            <a:ext cx="5120640" cy="4297680"/>
           </a:xfrm>
           <a:prstGeom prst="roundRect">
             <a:avLst/>
@@ -4105,8 +4135,8 @@
         </p:nvSpPr>
         <p:spPr>
           <a:xfrm>
-            <a:off x="6492240" y="2148840"/>
-            <a:ext cx="4572000" cy="1508760"/>
+            <a:off x="6583680" y="2103120"/>
+            <a:ext cx="4572000" cy="3749039"/>
           </a:xfrm>
           <a:prstGeom prst="rect">
             <a:avLst/>
@@ -4120,225 +4150,79 @@
           <a:lstStyle/>
           <a:p>
             <a:pPr>
-              <a:defRPr sz="1600" b="1">
-                <a:solidFill>
-                  <a:srgbClr val="E85D04"/>
+              <a:defRPr sz="1800" b="1">
+                <a:solidFill>
+                  <a:srgbClr val="2563EB"/>
                 </a:solidFill>
                 <a:latin typeface="Georgia"/>
               </a:defRPr>
             </a:pPr>
             <a:r>
-              <a:t>Step 2: Verification Check</a:t>
+              <a:t>Mode B: Floor Captain Review First</a:t>
             </a:r>
           </a:p>
           <a:p>
             <a:pPr>
               <a:spcBef>
-                <a:spcPts val="600"/>
+                <a:spcPts val="900"/>
               </a:spcBef>
-              <a:defRPr sz="1150">
-                <a:solidFill>
-                  <a:srgbClr val="57534E"/>
-                </a:solidFill>
-                <a:latin typeface="Arial"/>
-              </a:defRPr>
-            </a:pPr>
-            <a:r>
-              <a:t>Smart verification gate ensures the guest has genuinely copied the review before proceeding to the reward step.</a:t>
-            </a:r>
-          </a:p>
-        </p:txBody>
-      </p:sp>
-      <p:sp>
-        <p:nvSpPr>
-          <p:cNvPr id="10" name="Rounded Rectangle 9"/>
-          <p:cNvSpPr/>
-          <p:nvPr/>
-        </p:nvSpPr>
-        <p:spPr>
-          <a:xfrm>
-            <a:off x="731520" y="4114800"/>
-            <a:ext cx="5120640" cy="1965960"/>
-          </a:xfrm>
-          <a:prstGeom prst="roundRect">
-            <a:avLst/>
-          </a:prstGeom>
-          <a:solidFill>
-            <a:srgbClr val="FFFFFF"/>
-          </a:solidFill>
-          <a:ln w="12700">
-            <a:solidFill>
-              <a:srgbClr val="E7E5E4"/>
-            </a:solidFill>
-          </a:ln>
-        </p:spPr>
-        <p:style>
-          <a:lnRef idx="1">
-            <a:schemeClr val="accent1"/>
-          </a:lnRef>
-          <a:fillRef idx="3">
-            <a:schemeClr val="accent1"/>
-          </a:fillRef>
-          <a:effectRef idx="2">
-            <a:schemeClr val="accent1"/>
-          </a:effectRef>
-          <a:fontRef idx="minor">
-            <a:schemeClr val="lt1"/>
-          </a:fontRef>
-        </p:style>
-        <p:txBody>
-          <a:bodyPr rtlCol="0" anchor="ctr"/>
-          <a:lstStyle/>
-          <a:p>
-            <a:pPr algn="ctr"/>
-          </a:p>
-        </p:txBody>
-      </p:sp>
-      <p:sp>
-        <p:nvSpPr>
-          <p:cNvPr id="11" name="TextBox 10"/>
-          <p:cNvSpPr txBox="1"/>
-          <p:nvPr/>
-        </p:nvSpPr>
-        <p:spPr>
-          <a:xfrm>
-            <a:off x="1005840" y="4343400"/>
-            <a:ext cx="4572000" cy="1508760"/>
-          </a:xfrm>
-          <a:prstGeom prst="rect">
-            <a:avLst/>
-          </a:prstGeom>
-          <a:noFill/>
-        </p:spPr>
-        <p:txBody>
-          <a:bodyPr wrap="square">
-            <a:spAutoFit/>
-          </a:bodyPr>
-          <a:lstStyle/>
-          <a:p>
-            <a:pPr>
-              <a:defRPr sz="1600" b="1">
-                <a:solidFill>
-                  <a:srgbClr val="E85D04"/>
-                </a:solidFill>
-                <a:latin typeface="Georgia"/>
-              </a:defRPr>
-            </a:pPr>
-            <a:r>
-              <a:t>Step 3: Spin-to-Win Wheel</a:t>
+              <a:defRPr sz="1100">
+                <a:solidFill>
+                  <a:srgbClr val="1C1917"/>
+                </a:solidFill>
+                <a:latin typeface="Arial"/>
+              </a:defRPr>
+            </a:pPr>
+            <a:r>
+              <a:t>👨‍✈️ Order appears on Captain / Manager Floor Tablet first for quick verification.</a:t>
             </a:r>
           </a:p>
           <a:p>
             <a:pPr>
               <a:spcBef>
-                <a:spcPts val="600"/>
+                <a:spcPts val="900"/>
               </a:spcBef>
-              <a:defRPr sz="1150">
-                <a:solidFill>
-                  <a:srgbClr val="57534E"/>
-                </a:solidFill>
-                <a:latin typeface="Arial"/>
-              </a:defRPr>
-            </a:pPr>
-            <a:r>
-              <a:t>An interactive, celebratory lucky wheel lets the guest spin for a complimentary dessert, cocktail, or reward.</a:t>
-            </a:r>
-          </a:p>
-        </p:txBody>
-      </p:sp>
-      <p:sp>
-        <p:nvSpPr>
-          <p:cNvPr id="12" name="Rounded Rectangle 11"/>
-          <p:cNvSpPr/>
-          <p:nvPr/>
-        </p:nvSpPr>
-        <p:spPr>
-          <a:xfrm>
-            <a:off x="6217920" y="4114800"/>
-            <a:ext cx="5120640" cy="1965960"/>
-          </a:xfrm>
-          <a:prstGeom prst="roundRect">
-            <a:avLst/>
-          </a:prstGeom>
-          <a:solidFill>
-            <a:srgbClr val="FFFFFF"/>
-          </a:solidFill>
-          <a:ln w="12700">
-            <a:solidFill>
-              <a:srgbClr val="E7E5E4"/>
-            </a:solidFill>
-          </a:ln>
-        </p:spPr>
-        <p:style>
-          <a:lnRef idx="1">
-            <a:schemeClr val="accent1"/>
-          </a:lnRef>
-          <a:fillRef idx="3">
-            <a:schemeClr val="accent1"/>
-          </a:fillRef>
-          <a:effectRef idx="2">
-            <a:schemeClr val="accent1"/>
-          </a:effectRef>
-          <a:fontRef idx="minor">
-            <a:schemeClr val="lt1"/>
-          </a:fontRef>
-        </p:style>
-        <p:txBody>
-          <a:bodyPr rtlCol="0" anchor="ctr"/>
-          <a:lstStyle/>
-          <a:p>
-            <a:pPr algn="ctr"/>
-          </a:p>
-        </p:txBody>
-      </p:sp>
-      <p:sp>
-        <p:nvSpPr>
-          <p:cNvPr id="13" name="TextBox 12"/>
-          <p:cNvSpPr txBox="1"/>
-          <p:nvPr/>
-        </p:nvSpPr>
-        <p:spPr>
-          <a:xfrm>
-            <a:off x="6492240" y="4343400"/>
-            <a:ext cx="4572000" cy="1508760"/>
-          </a:xfrm>
-          <a:prstGeom prst="rect">
-            <a:avLst/>
-          </a:prstGeom>
-          <a:noFill/>
-        </p:spPr>
-        <p:txBody>
-          <a:bodyPr wrap="square">
-            <a:spAutoFit/>
-          </a:bodyPr>
-          <a:lstStyle/>
-          <a:p>
-            <a:pPr>
-              <a:defRPr sz="1600" b="1">
-                <a:solidFill>
-                  <a:srgbClr val="2563EB"/>
-                </a:solidFill>
-                <a:latin typeface="Georgia"/>
-              </a:defRPr>
-            </a:pPr>
-            <a:r>
-              <a:t>Step 4: Sub-4 Star Floor Shield</a:t>
+              <a:defRPr sz="1100">
+                <a:solidFill>
+                  <a:srgbClr val="1C1917"/>
+                </a:solidFill>
+                <a:latin typeface="Arial"/>
+              </a:defRPr>
+            </a:pPr>
+            <a:r>
+              <a:t>👨‍✈️ Captain checks bar inventory, course pacing, and guest preferences.</a:t>
             </a:r>
           </a:p>
           <a:p>
             <a:pPr>
               <a:spcBef>
-                <a:spcPts val="600"/>
+                <a:spcPts val="900"/>
               </a:spcBef>
-              <a:defRPr sz="1150">
-                <a:solidFill>
-                  <a:srgbClr val="57534E"/>
-                </a:solidFill>
-                <a:latin typeface="Arial"/>
-              </a:defRPr>
-            </a:pPr>
-            <a:r>
-              <a:t>Ratings under 4 stars remain strictly internal and trigger an instant red alert on the manager console for tableside recovery.</a:t>
+              <a:defRPr sz="1100">
+                <a:solidFill>
+                  <a:srgbClr val="1C1917"/>
+                </a:solidFill>
+                <a:latin typeface="Arial"/>
+              </a:defRPr>
+            </a:pPr>
+            <a:r>
+              <a:t>👨‍✈️ Captain taps 'Approve &amp; Fire' to send ticket to kitchen printers.</a:t>
+            </a:r>
+          </a:p>
+          <a:p>
+            <a:pPr>
+              <a:spcBef>
+                <a:spcPts val="900"/>
+              </a:spcBef>
+              <a:defRPr sz="1100">
+                <a:solidFill>
+                  <a:srgbClr val="1C1917"/>
+                </a:solidFill>
+                <a:latin typeface="Arial"/>
+              </a:defRPr>
+            </a:pPr>
+            <a:r>
+              <a:t>👨‍✈️ Best for: Multi-course fine dining, rooftop lounges, and banquet service.</a:t>
             </a:r>
           </a:p>
         </p:txBody>
@@ -4412,8 +4296,8 @@
         </p:nvSpPr>
         <p:spPr>
           <a:xfrm>
-            <a:off x="731520" y="411480"/>
-            <a:ext cx="10515600" cy="320040"/>
+            <a:off x="731520" y="365760"/>
+            <a:ext cx="10515600" cy="292608"/>
           </a:xfrm>
           <a:prstGeom prst="rect">
             <a:avLst/>
@@ -4435,7 +4319,7 @@
               </a:defRPr>
             </a:pPr>
             <a:r>
-              <a:t>PARTNERSHIP &amp; ROLLOUT</a:t>
+              <a:t>FLOOR MANAGEMENT</a:t>
             </a:r>
           </a:p>
         </p:txBody>
@@ -4448,8 +4332,8 @@
         </p:nvSpPr>
         <p:spPr>
           <a:xfrm>
-            <a:off x="731520" y="731520"/>
-            <a:ext cx="10515600" cy="548640"/>
+            <a:off x="731520" y="685800"/>
+            <a:ext cx="10515600" cy="502920"/>
           </a:xfrm>
           <a:prstGeom prst="rect">
             <a:avLst/>
@@ -4463,7 +4347,7 @@
           <a:lstStyle/>
           <a:p>
             <a:pPr>
-              <a:defRPr sz="2400" b="1">
+              <a:defRPr sz="2200" b="1">
                 <a:solidFill>
                   <a:srgbClr val="FFFFFF"/>
                 </a:solidFill>
@@ -4471,7 +4355,7 @@
               </a:defRPr>
             </a:pPr>
             <a:r>
-              <a:t>Direct Access Onboarding (No Arbitrary Trials)</a:t>
+              <a:t>Live Floor Operations Hub &amp; Kitchen Display (KDS)</a:t>
             </a:r>
           </a:p>
         </p:txBody>
@@ -4484,7 +4368,7 @@
         </p:nvSpPr>
         <p:spPr>
           <a:xfrm>
-            <a:off x="731520" y="1298448"/>
+            <a:off x="731520" y="1234440"/>
             <a:ext cx="10515600" cy="365760"/>
           </a:xfrm>
           <a:prstGeom prst="rect">
@@ -4499,7 +4383,7 @@
           <a:lstStyle/>
           <a:p>
             <a:pPr>
-              <a:defRPr sz="1200">
+              <a:defRPr sz="1150">
                 <a:solidFill>
                   <a:srgbClr val="D6D3D1"/>
                 </a:solidFill>
@@ -4507,7 +4391,7 @@
               </a:defRPr>
             </a:pPr>
             <a:r>
-              <a:t>You control access directly — granting instant, complete capabilities to partner restaurants.</a:t>
+              <a:t>Real-time tablet command center for floor managers, captains, and kitchen expeditors.</a:t>
             </a:r>
           </a:p>
         </p:txBody>
@@ -4520,8 +4404,8 @@
         </p:nvSpPr>
         <p:spPr>
           <a:xfrm>
-            <a:off x="731520" y="1920240"/>
-            <a:ext cx="10728655" cy="4206240"/>
+            <a:off x="731520" y="1828800"/>
+            <a:ext cx="10728655" cy="4297680"/>
           </a:xfrm>
           <a:prstGeom prst="roundRect">
             <a:avLst/>
@@ -4563,8 +4447,8 @@
         </p:nvSpPr>
         <p:spPr>
           <a:xfrm>
-            <a:off x="1097280" y="2194560"/>
-            <a:ext cx="9966960" cy="3657600"/>
+            <a:off x="1097280" y="2103120"/>
+            <a:ext cx="9966960" cy="3749039"/>
           </a:xfrm>
           <a:prstGeom prst="rect">
             <a:avLst/>
@@ -4578,7 +4462,7 @@
           <a:lstStyle/>
           <a:p>
             <a:pPr>
-              <a:defRPr sz="2000" b="1">
+              <a:defRPr sz="1900" b="1">
                 <a:solidFill>
                   <a:srgbClr val="E85D04"/>
                 </a:solidFill>
@@ -4586,7 +4470,7 @@
               </a:defRPr>
             </a:pPr>
             <a:r>
-              <a:t>Fast 3-Stage Restaurant Launch Process</a:t>
+              <a:t>Comprehensive Floor Operations Capabilities</a:t>
             </a:r>
           </a:p>
           <a:p>
@@ -4594,7 +4478,7 @@
               <a:spcBef>
                 <a:spcPts val="1200"/>
               </a:spcBef>
-              <a:defRPr sz="1200">
+              <a:defRPr sz="1150">
                 <a:solidFill>
                   <a:srgbClr val="FFFFFF"/>
                 </a:solidFill>
@@ -4602,11 +4486,7 @@
               </a:defRPr>
             </a:pPr>
             <a:r>
-              <a:t>🚀 Step 1: Direct Access Grant &amp; Profile Setup (15 Mins)</a:t>
-            </a:r>
-            <a:br/>
-            <a:r>
-              <a:t>   Directly onboard the restaurant without trial restrictions or expiry counters. Upload logo, authentic photography, and configure chef backstory.</a:t>
+              <a:t>📟 Real-Time Table Map &amp; Status: Live visual grid of all tables (Green = Active Dining, Amber = Ordering, Blue = Bill Requested, Gray = Vacant).</a:t>
             </a:r>
           </a:p>
           <a:p>
@@ -4614,7 +4494,7 @@
               <a:spcBef>
                 <a:spcPts val="1200"/>
               </a:spcBef>
-              <a:defRPr sz="1200">
+              <a:defRPr sz="1150">
                 <a:solidFill>
                   <a:srgbClr val="FFFFFF"/>
                 </a:solidFill>
@@ -4622,11 +4502,7 @@
               </a:defRPr>
             </a:pPr>
             <a:r>
-              <a:t>🚀 Step 2: Smart Operations Configuration (5 Mins)</a:t>
-            </a:r>
-            <a:br/>
-            <a:r>
-              <a:t>   Toggle Direct KOT routing, set Happy Hour surge pricing, configure Chef Pairings bundle discounts, and select language preferences.</a:t>
+              <a:t>📟 Service Call Management: Instant push alerts for 'Waiter Summoned', 'Water Needed', or 'Bill Requested' with response time tracking.</a:t>
             </a:r>
           </a:p>
           <a:p>
@@ -4634,7 +4510,7 @@
               <a:spcBef>
                 <a:spcPts val="1200"/>
               </a:spcBef>
-              <a:defRPr sz="1200">
+              <a:defRPr sz="1150">
                 <a:solidFill>
                   <a:srgbClr val="FFFFFF"/>
                 </a:solidFill>
@@ -4642,11 +4518,23 @@
               </a:defRPr>
             </a:pPr>
             <a:r>
-              <a:t>🚀 Step 3: QR Stands Deployment &amp; Live Floor Operations</a:t>
-            </a:r>
-            <a:br/>
-            <a:r>
-              <a:t>   Place acrylic QR codes on dining tables. Diners experience real-time table sync, multilingual menus, and automated 5-star review generation.</a:t>
+              <a:t>📟 Kitchen Expeditor Timers: Color-coded order preparation clocks (Green &lt;15m, Amber 15-25m, Red &gt;25m) prevent table food delays.</a:t>
+            </a:r>
+          </a:p>
+          <a:p>
+            <a:pPr>
+              <a:spcBef>
+                <a:spcPts val="1200"/>
+              </a:spcBef>
+              <a:defRPr sz="1150">
+                <a:solidFill>
+                  <a:srgbClr val="FFFFFF"/>
+                </a:solidFill>
+                <a:latin typeface="Arial"/>
+              </a:defRPr>
+            </a:pPr>
+            <a:r>
+              <a:t>📟 Universal POS Adapters: Native bi-directional adapters for Petpooja (50k+ Indian outlets), RoyalPOS (Pune local), Recaho (PCMC), and RanceLab Chains, plus direct ESC/POS hardware printing.</a:t>
             </a:r>
           </a:p>
         </p:txBody>
@@ -4684,6 +4572,1022 @@
             <a:avLst/>
           </a:prstGeom>
           <a:solidFill>
+            <a:srgbClr val="FDFBF7"/>
+          </a:solidFill>
+          <a:ln>
+            <a:noFill/>
+          </a:ln>
+        </p:spPr>
+        <p:style>
+          <a:lnRef idx="1">
+            <a:schemeClr val="accent1"/>
+          </a:lnRef>
+          <a:fillRef idx="3">
+            <a:schemeClr val="accent1"/>
+          </a:fillRef>
+          <a:effectRef idx="2">
+            <a:schemeClr val="accent1"/>
+          </a:effectRef>
+          <a:fontRef idx="minor">
+            <a:schemeClr val="lt1"/>
+          </a:fontRef>
+        </p:style>
+        <p:txBody>
+          <a:bodyPr rtlCol="0" anchor="ctr"/>
+          <a:lstStyle/>
+          <a:p>
+            <a:pPr algn="ctr"/>
+          </a:p>
+        </p:txBody>
+      </p:sp>
+      <p:sp>
+        <p:nvSpPr>
+          <p:cNvPr id="3" name="TextBox 2"/>
+          <p:cNvSpPr txBox="1"/>
+          <p:nvPr/>
+        </p:nvSpPr>
+        <p:spPr>
+          <a:xfrm>
+            <a:off x="731520" y="365760"/>
+            <a:ext cx="10515600" cy="292608"/>
+          </a:xfrm>
+          <a:prstGeom prst="rect">
+            <a:avLst/>
+          </a:prstGeom>
+          <a:noFill/>
+        </p:spPr>
+        <p:txBody>
+          <a:bodyPr wrap="square" lIns="0" rIns="0" tIns="0" bIns="0">
+            <a:spAutoFit/>
+          </a:bodyPr>
+          <a:lstStyle/>
+          <a:p>
+            <a:pPr>
+              <a:defRPr sz="1000" b="1">
+                <a:solidFill>
+                  <a:srgbClr val="E85D04"/>
+                </a:solidFill>
+                <a:latin typeface="Arial"/>
+              </a:defRPr>
+            </a:pPr>
+            <a:r>
+              <a:t>FAST DEPLOYMENT</a:t>
+            </a:r>
+          </a:p>
+        </p:txBody>
+      </p:sp>
+      <p:sp>
+        <p:nvSpPr>
+          <p:cNvPr id="4" name="TextBox 3"/>
+          <p:cNvSpPr txBox="1"/>
+          <p:nvPr/>
+        </p:nvSpPr>
+        <p:spPr>
+          <a:xfrm>
+            <a:off x="731520" y="685800"/>
+            <a:ext cx="10515600" cy="502920"/>
+          </a:xfrm>
+          <a:prstGeom prst="rect">
+            <a:avLst/>
+          </a:prstGeom>
+          <a:noFill/>
+        </p:spPr>
+        <p:txBody>
+          <a:bodyPr wrap="square" lIns="0" rIns="0" tIns="0" bIns="0">
+            <a:spAutoFit/>
+          </a:bodyPr>
+          <a:lstStyle/>
+          <a:p>
+            <a:pPr>
+              <a:defRPr sz="2200" b="1">
+                <a:solidFill>
+                  <a:srgbClr val="1C1917"/>
+                </a:solidFill>
+                <a:latin typeface="Georgia"/>
+              </a:defRPr>
+            </a:pPr>
+            <a:r>
+              <a:t>5-Minute AI Onboarding Studio &amp; Multi-Tenant Platform</a:t>
+            </a:r>
+          </a:p>
+        </p:txBody>
+      </p:sp>
+      <p:sp>
+        <p:nvSpPr>
+          <p:cNvPr id="5" name="TextBox 4"/>
+          <p:cNvSpPr txBox="1"/>
+          <p:nvPr/>
+        </p:nvSpPr>
+        <p:spPr>
+          <a:xfrm>
+            <a:off x="731520" y="1234440"/>
+            <a:ext cx="10515600" cy="365760"/>
+          </a:xfrm>
+          <a:prstGeom prst="rect">
+            <a:avLst/>
+          </a:prstGeom>
+          <a:noFill/>
+        </p:spPr>
+        <p:txBody>
+          <a:bodyPr wrap="square" lIns="0" rIns="0" tIns="0" bIns="0">
+            <a:spAutoFit/>
+          </a:bodyPr>
+          <a:lstStyle/>
+          <a:p>
+            <a:pPr>
+              <a:defRPr sz="1150">
+                <a:solidFill>
+                  <a:srgbClr val="57534E"/>
+                </a:solidFill>
+                <a:latin typeface="Arial"/>
+              </a:defRPr>
+            </a:pPr>
+            <a:r>
+              <a:t>Get any restaurant live in under 5 minutes with voice intake and partitioned cloud storage.</a:t>
+            </a:r>
+          </a:p>
+        </p:txBody>
+      </p:sp>
+      <p:sp>
+        <p:nvSpPr>
+          <p:cNvPr id="6" name="Rounded Rectangle 5"/>
+          <p:cNvSpPr/>
+          <p:nvPr/>
+        </p:nvSpPr>
+        <p:spPr>
+          <a:xfrm>
+            <a:off x="731520" y="1828800"/>
+            <a:ext cx="3328416" cy="4297680"/>
+          </a:xfrm>
+          <a:prstGeom prst="roundRect">
+            <a:avLst/>
+          </a:prstGeom>
+          <a:solidFill>
+            <a:srgbClr val="FFFFFF"/>
+          </a:solidFill>
+          <a:ln w="12700">
+            <a:solidFill>
+              <a:srgbClr val="E7E5E4"/>
+            </a:solidFill>
+          </a:ln>
+        </p:spPr>
+        <p:style>
+          <a:lnRef idx="1">
+            <a:schemeClr val="accent1"/>
+          </a:lnRef>
+          <a:fillRef idx="3">
+            <a:schemeClr val="accent1"/>
+          </a:fillRef>
+          <a:effectRef idx="2">
+            <a:schemeClr val="accent1"/>
+          </a:effectRef>
+          <a:fontRef idx="minor">
+            <a:schemeClr val="lt1"/>
+          </a:fontRef>
+        </p:style>
+        <p:txBody>
+          <a:bodyPr rtlCol="0" anchor="ctr"/>
+          <a:lstStyle/>
+          <a:p>
+            <a:pPr algn="ctr"/>
+          </a:p>
+        </p:txBody>
+      </p:sp>
+      <p:sp>
+        <p:nvSpPr>
+          <p:cNvPr id="7" name="TextBox 6"/>
+          <p:cNvSpPr txBox="1"/>
+          <p:nvPr/>
+        </p:nvSpPr>
+        <p:spPr>
+          <a:xfrm>
+            <a:off x="1005840" y="2103120"/>
+            <a:ext cx="2779776" cy="3657600"/>
+          </a:xfrm>
+          <a:prstGeom prst="rect">
+            <a:avLst/>
+          </a:prstGeom>
+          <a:noFill/>
+        </p:spPr>
+        <p:txBody>
+          <a:bodyPr wrap="square">
+            <a:spAutoFit/>
+          </a:bodyPr>
+          <a:lstStyle/>
+          <a:p>
+            <a:pPr>
+              <a:defRPr sz="1700" b="1">
+                <a:solidFill>
+                  <a:srgbClr val="E85D04"/>
+                </a:solidFill>
+                <a:latin typeface="Georgia"/>
+              </a:defRPr>
+            </a:pPr>
+            <a:r>
+              <a:t>AI Menu &amp; Recipe Intake</a:t>
+            </a:r>
+          </a:p>
+          <a:p>
+            <a:pPr>
+              <a:spcBef>
+                <a:spcPts val="400"/>
+              </a:spcBef>
+              <a:defRPr sz="1000" b="1">
+                <a:solidFill>
+                  <a:srgbClr val="2563EB"/>
+                </a:solidFill>
+                <a:latin typeface="Arial"/>
+              </a:defRPr>
+            </a:pPr>
+            <a:r>
+              <a:t>VOICE &amp; 1-CLICK AUTO-DRAFT</a:t>
+            </a:r>
+          </a:p>
+          <a:p>
+            <a:pPr>
+              <a:spcBef>
+                <a:spcPts val="1400"/>
+              </a:spcBef>
+              <a:defRPr sz="1150">
+                <a:solidFill>
+                  <a:srgbClr val="57534E"/>
+                </a:solidFill>
+                <a:latin typeface="Arial"/>
+              </a:defRPr>
+            </a:pPr>
+            <a:r>
+              <a:t>Chefs speak or upload a photo of the paper menu. AI auto-extracts dish names, categorizes courses, drafts flavor notes, and calibrates spice ratings in minutes.</a:t>
+            </a:r>
+          </a:p>
+        </p:txBody>
+      </p:sp>
+      <p:sp>
+        <p:nvSpPr>
+          <p:cNvPr id="8" name="Rounded Rectangle 7"/>
+          <p:cNvSpPr/>
+          <p:nvPr/>
+        </p:nvSpPr>
+        <p:spPr>
+          <a:xfrm>
+            <a:off x="4389120" y="1828800"/>
+            <a:ext cx="3328416" cy="4297680"/>
+          </a:xfrm>
+          <a:prstGeom prst="roundRect">
+            <a:avLst/>
+          </a:prstGeom>
+          <a:solidFill>
+            <a:srgbClr val="FFFFFF"/>
+          </a:solidFill>
+          <a:ln w="12700">
+            <a:solidFill>
+              <a:srgbClr val="E7E5E4"/>
+            </a:solidFill>
+          </a:ln>
+        </p:spPr>
+        <p:style>
+          <a:lnRef idx="1">
+            <a:schemeClr val="accent1"/>
+          </a:lnRef>
+          <a:fillRef idx="3">
+            <a:schemeClr val="accent1"/>
+          </a:fillRef>
+          <a:effectRef idx="2">
+            <a:schemeClr val="accent1"/>
+          </a:effectRef>
+          <a:fontRef idx="minor">
+            <a:schemeClr val="lt1"/>
+          </a:fontRef>
+        </p:style>
+        <p:txBody>
+          <a:bodyPr rtlCol="0" anchor="ctr"/>
+          <a:lstStyle/>
+          <a:p>
+            <a:pPr algn="ctr"/>
+          </a:p>
+        </p:txBody>
+      </p:sp>
+      <p:sp>
+        <p:nvSpPr>
+          <p:cNvPr id="9" name="TextBox 8"/>
+          <p:cNvSpPr txBox="1"/>
+          <p:nvPr/>
+        </p:nvSpPr>
+        <p:spPr>
+          <a:xfrm>
+            <a:off x="4663440" y="2103120"/>
+            <a:ext cx="2779776" cy="3657600"/>
+          </a:xfrm>
+          <a:prstGeom prst="rect">
+            <a:avLst/>
+          </a:prstGeom>
+          <a:noFill/>
+        </p:spPr>
+        <p:txBody>
+          <a:bodyPr wrap="square">
+            <a:spAutoFit/>
+          </a:bodyPr>
+          <a:lstStyle/>
+          <a:p>
+            <a:pPr>
+              <a:defRPr sz="1700" b="1">
+                <a:solidFill>
+                  <a:srgbClr val="E85D04"/>
+                </a:solidFill>
+                <a:latin typeface="Georgia"/>
+              </a:defRPr>
+            </a:pPr>
+            <a:r>
+              <a:t>Partitioned Media Library</a:t>
+            </a:r>
+          </a:p>
+          <a:p>
+            <a:pPr>
+              <a:spcBef>
+                <a:spcPts val="400"/>
+              </a:spcBef>
+              <a:defRPr sz="1000" b="1">
+                <a:solidFill>
+                  <a:srgbClr val="2563EB"/>
+                </a:solidFill>
+                <a:latin typeface="Arial"/>
+              </a:defRPr>
+            </a:pPr>
+            <a:r>
+              <a:t>ISOLATED CLOUD STORAGE</a:t>
+            </a:r>
+          </a:p>
+          <a:p>
+            <a:pPr>
+              <a:spcBef>
+                <a:spcPts val="1400"/>
+              </a:spcBef>
+              <a:defRPr sz="1150">
+                <a:solidFill>
+                  <a:srgbClr val="57534E"/>
+                </a:solidFill>
+                <a:latin typeface="Arial"/>
+              </a:defRPr>
+            </a:pPr>
+            <a:r>
+              <a:t>Every partner restaurant has an isolated cloud image bank. High-res dish photography and branding are segregated permanently with zero cross-tenant clutter.</a:t>
+            </a:r>
+          </a:p>
+        </p:txBody>
+      </p:sp>
+      <p:sp>
+        <p:nvSpPr>
+          <p:cNvPr id="10" name="Rounded Rectangle 9"/>
+          <p:cNvSpPr/>
+          <p:nvPr/>
+        </p:nvSpPr>
+        <p:spPr>
+          <a:xfrm>
+            <a:off x="8046720" y="1828800"/>
+            <a:ext cx="3328416" cy="4297680"/>
+          </a:xfrm>
+          <a:prstGeom prst="roundRect">
+            <a:avLst/>
+          </a:prstGeom>
+          <a:solidFill>
+            <a:srgbClr val="FFFFFF"/>
+          </a:solidFill>
+          <a:ln w="12700">
+            <a:solidFill>
+              <a:srgbClr val="E7E5E4"/>
+            </a:solidFill>
+          </a:ln>
+        </p:spPr>
+        <p:style>
+          <a:lnRef idx="1">
+            <a:schemeClr val="accent1"/>
+          </a:lnRef>
+          <a:fillRef idx="3">
+            <a:schemeClr val="accent1"/>
+          </a:fillRef>
+          <a:effectRef idx="2">
+            <a:schemeClr val="accent1"/>
+          </a:effectRef>
+          <a:fontRef idx="minor">
+            <a:schemeClr val="lt1"/>
+          </a:fontRef>
+        </p:style>
+        <p:txBody>
+          <a:bodyPr rtlCol="0" anchor="ctr"/>
+          <a:lstStyle/>
+          <a:p>
+            <a:pPr algn="ctr"/>
+          </a:p>
+        </p:txBody>
+      </p:sp>
+      <p:sp>
+        <p:nvSpPr>
+          <p:cNvPr id="11" name="TextBox 10"/>
+          <p:cNvSpPr txBox="1"/>
+          <p:nvPr/>
+        </p:nvSpPr>
+        <p:spPr>
+          <a:xfrm>
+            <a:off x="8321040" y="2103120"/>
+            <a:ext cx="2779776" cy="3657600"/>
+          </a:xfrm>
+          <a:prstGeom prst="rect">
+            <a:avLst/>
+          </a:prstGeom>
+          <a:noFill/>
+        </p:spPr>
+        <p:txBody>
+          <a:bodyPr wrap="square">
+            <a:spAutoFit/>
+          </a:bodyPr>
+          <a:lstStyle/>
+          <a:p>
+            <a:pPr>
+              <a:defRPr sz="1700" b="1">
+                <a:solidFill>
+                  <a:srgbClr val="E85D04"/>
+                </a:solidFill>
+                <a:latin typeface="Georgia"/>
+              </a:defRPr>
+            </a:pPr>
+            <a:r>
+              <a:t>Standalone Branded Routes</a:t>
+            </a:r>
+          </a:p>
+          <a:p>
+            <a:pPr>
+              <a:spcBef>
+                <a:spcPts val="400"/>
+              </a:spcBef>
+              <a:defRPr sz="1000" b="1">
+                <a:solidFill>
+                  <a:srgbClr val="2563EB"/>
+                </a:solidFill>
+                <a:latin typeface="Arial"/>
+              </a:defRPr>
+            </a:pPr>
+            <a:r>
+              <a:t>CUSTOM URLS &amp; DOMAINS</a:t>
+            </a:r>
+          </a:p>
+          <a:p>
+            <a:pPr>
+              <a:spcBef>
+                <a:spcPts val="1400"/>
+              </a:spcBef>
+              <a:defRPr sz="1150">
+                <a:solidFill>
+                  <a:srgbClr val="57534E"/>
+                </a:solidFill>
+                <a:latin typeface="Arial"/>
+              </a:defRPr>
+            </a:pPr>
+            <a:r>
+              <a:t>Each restaurant operates on a dedicated URL (/r/:restaurantSlug) with custom brand theme, logo, and table tokens for direct Google Maps and bio links.</a:t>
+            </a:r>
+          </a:p>
+        </p:txBody>
+      </p:sp>
+    </p:spTree>
+  </p:cSld>
+  <p:clrMapOvr>
+    <a:masterClrMapping/>
+  </p:clrMapOvr>
+</p:sld>
+</file>
+
+<file path=ppt/slides/slide14.xml><?xml version="1.0" encoding="utf-8"?>
+<p:sld xmlns:a="http://schemas.openxmlformats.org/drawingml/2006/main" xmlns:p="http://schemas.openxmlformats.org/presentationml/2006/main" xmlns:r="http://schemas.openxmlformats.org/officeDocument/2006/relationships">
+  <p:cSld>
+    <p:spTree>
+      <p:nvGrpSpPr>
+        <p:cNvPr id="1" name=""/>
+        <p:cNvGrpSpPr/>
+        <p:nvPr/>
+      </p:nvGrpSpPr>
+      <p:grpSpPr/>
+      <p:sp>
+        <p:nvSpPr>
+          <p:cNvPr id="2" name="Rectangle 1"/>
+          <p:cNvSpPr/>
+          <p:nvPr/>
+        </p:nvSpPr>
+        <p:spPr>
+          <a:xfrm>
+            <a:off x="0" y="0"/>
+            <a:ext cx="12191695" cy="6858000"/>
+          </a:xfrm>
+          <a:prstGeom prst="rect">
+            <a:avLst/>
+          </a:prstGeom>
+          <a:solidFill>
+            <a:srgbClr val="FDFBF7"/>
+          </a:solidFill>
+          <a:ln>
+            <a:noFill/>
+          </a:ln>
+        </p:spPr>
+        <p:style>
+          <a:lnRef idx="1">
+            <a:schemeClr val="accent1"/>
+          </a:lnRef>
+          <a:fillRef idx="3">
+            <a:schemeClr val="accent1"/>
+          </a:fillRef>
+          <a:effectRef idx="2">
+            <a:schemeClr val="accent1"/>
+          </a:effectRef>
+          <a:fontRef idx="minor">
+            <a:schemeClr val="lt1"/>
+          </a:fontRef>
+        </p:style>
+        <p:txBody>
+          <a:bodyPr rtlCol="0" anchor="ctr"/>
+          <a:lstStyle/>
+          <a:p>
+            <a:pPr algn="ctr"/>
+          </a:p>
+        </p:txBody>
+      </p:sp>
+      <p:sp>
+        <p:nvSpPr>
+          <p:cNvPr id="3" name="TextBox 2"/>
+          <p:cNvSpPr txBox="1"/>
+          <p:nvPr/>
+        </p:nvSpPr>
+        <p:spPr>
+          <a:xfrm>
+            <a:off x="731520" y="365760"/>
+            <a:ext cx="10515600" cy="292608"/>
+          </a:xfrm>
+          <a:prstGeom prst="rect">
+            <a:avLst/>
+          </a:prstGeom>
+          <a:noFill/>
+        </p:spPr>
+        <p:txBody>
+          <a:bodyPr wrap="square" lIns="0" rIns="0" tIns="0" bIns="0">
+            <a:spAutoFit/>
+          </a:bodyPr>
+          <a:lstStyle/>
+          <a:p>
+            <a:pPr>
+              <a:defRPr sz="1000" b="1">
+                <a:solidFill>
+                  <a:srgbClr val="E85D04"/>
+                </a:solidFill>
+                <a:latin typeface="Arial"/>
+              </a:defRPr>
+            </a:pPr>
+            <a:r>
+              <a:t>REGIONAL INCLUSIVITY</a:t>
+            </a:r>
+          </a:p>
+        </p:txBody>
+      </p:sp>
+      <p:sp>
+        <p:nvSpPr>
+          <p:cNvPr id="4" name="TextBox 3"/>
+          <p:cNvSpPr txBox="1"/>
+          <p:nvPr/>
+        </p:nvSpPr>
+        <p:spPr>
+          <a:xfrm>
+            <a:off x="731520" y="685800"/>
+            <a:ext cx="10515600" cy="502920"/>
+          </a:xfrm>
+          <a:prstGeom prst="rect">
+            <a:avLst/>
+          </a:prstGeom>
+          <a:noFill/>
+        </p:spPr>
+        <p:txBody>
+          <a:bodyPr wrap="square" lIns="0" rIns="0" tIns="0" bIns="0">
+            <a:spAutoFit/>
+          </a:bodyPr>
+          <a:lstStyle/>
+          <a:p>
+            <a:pPr>
+              <a:defRPr sz="2200" b="1">
+                <a:solidFill>
+                  <a:srgbClr val="1C1917"/>
+                </a:solidFill>
+                <a:latin typeface="Georgia"/>
+              </a:defRPr>
+            </a:pPr>
+            <a:r>
+              <a:t>Multilingual Dining: English Primary, Hindi &amp; Marathi</a:t>
+            </a:r>
+          </a:p>
+        </p:txBody>
+      </p:sp>
+      <p:sp>
+        <p:nvSpPr>
+          <p:cNvPr id="5" name="TextBox 4"/>
+          <p:cNvSpPr txBox="1"/>
+          <p:nvPr/>
+        </p:nvSpPr>
+        <p:spPr>
+          <a:xfrm>
+            <a:off x="731520" y="1234440"/>
+            <a:ext cx="10515600" cy="365760"/>
+          </a:xfrm>
+          <a:prstGeom prst="rect">
+            <a:avLst/>
+          </a:prstGeom>
+          <a:noFill/>
+        </p:spPr>
+        <p:txBody>
+          <a:bodyPr wrap="square" lIns="0" rIns="0" tIns="0" bIns="0">
+            <a:spAutoFit/>
+          </a:bodyPr>
+          <a:lstStyle/>
+          <a:p>
+            <a:pPr>
+              <a:defRPr sz="1150">
+                <a:solidFill>
+                  <a:srgbClr val="57534E"/>
+                </a:solidFill>
+                <a:latin typeface="Arial"/>
+              </a:defRPr>
+            </a:pPr>
+            <a:r>
+              <a:t>Preserving global appeal while honoring local hospitality and regional language preference.</a:t>
+            </a:r>
+          </a:p>
+        </p:txBody>
+      </p:sp>
+      <p:sp>
+        <p:nvSpPr>
+          <p:cNvPr id="6" name="Rounded Rectangle 5"/>
+          <p:cNvSpPr/>
+          <p:nvPr/>
+        </p:nvSpPr>
+        <p:spPr>
+          <a:xfrm>
+            <a:off x="731520" y="1828800"/>
+            <a:ext cx="3328416" cy="4297680"/>
+          </a:xfrm>
+          <a:prstGeom prst="roundRect">
+            <a:avLst/>
+          </a:prstGeom>
+          <a:solidFill>
+            <a:srgbClr val="FFFFFF"/>
+          </a:solidFill>
+          <a:ln w="12700">
+            <a:solidFill>
+              <a:srgbClr val="E7E5E4"/>
+            </a:solidFill>
+          </a:ln>
+        </p:spPr>
+        <p:style>
+          <a:lnRef idx="1">
+            <a:schemeClr val="accent1"/>
+          </a:lnRef>
+          <a:fillRef idx="3">
+            <a:schemeClr val="accent1"/>
+          </a:fillRef>
+          <a:effectRef idx="2">
+            <a:schemeClr val="accent1"/>
+          </a:effectRef>
+          <a:fontRef idx="minor">
+            <a:schemeClr val="lt1"/>
+          </a:fontRef>
+        </p:style>
+        <p:txBody>
+          <a:bodyPr rtlCol="0" anchor="ctr"/>
+          <a:lstStyle/>
+          <a:p>
+            <a:pPr algn="ctr"/>
+          </a:p>
+        </p:txBody>
+      </p:sp>
+      <p:sp>
+        <p:nvSpPr>
+          <p:cNvPr id="7" name="TextBox 6"/>
+          <p:cNvSpPr txBox="1"/>
+          <p:nvPr/>
+        </p:nvSpPr>
+        <p:spPr>
+          <a:xfrm>
+            <a:off x="1005840" y="2103120"/>
+            <a:ext cx="2779776" cy="3657600"/>
+          </a:xfrm>
+          <a:prstGeom prst="rect">
+            <a:avLst/>
+          </a:prstGeom>
+          <a:noFill/>
+        </p:spPr>
+        <p:txBody>
+          <a:bodyPr wrap="square">
+            <a:spAutoFit/>
+          </a:bodyPr>
+          <a:lstStyle/>
+          <a:p>
+            <a:pPr>
+              <a:defRPr sz="1700" b="1">
+                <a:solidFill>
+                  <a:srgbClr val="E85D04"/>
+                </a:solidFill>
+                <a:latin typeface="Georgia"/>
+              </a:defRPr>
+            </a:pPr>
+            <a:r>
+              <a:t>English (Default Primary)</a:t>
+            </a:r>
+          </a:p>
+          <a:p>
+            <a:pPr>
+              <a:spcBef>
+                <a:spcPts val="400"/>
+              </a:spcBef>
+              <a:defRPr sz="1000" b="1">
+                <a:solidFill>
+                  <a:srgbClr val="2563EB"/>
+                </a:solidFill>
+                <a:latin typeface="Arial"/>
+              </a:defRPr>
+            </a:pPr>
+            <a:r>
+              <a:t>STRICT RULE: ALWAYS FIRST</a:t>
+            </a:r>
+          </a:p>
+          <a:p>
+            <a:pPr>
+              <a:spcBef>
+                <a:spcPts val="1400"/>
+              </a:spcBef>
+              <a:defRPr sz="1150">
+                <a:solidFill>
+                  <a:srgbClr val="57534E"/>
+                </a:solidFill>
+                <a:latin typeface="Arial"/>
+              </a:defRPr>
+            </a:pPr>
+            <a:r>
+              <a:t>English is hardcoded as the primary launch language for 100% of devices. No arbitrary IP or browser locale redirection. Global diners feel instantly at home.</a:t>
+            </a:r>
+          </a:p>
+        </p:txBody>
+      </p:sp>
+      <p:sp>
+        <p:nvSpPr>
+          <p:cNvPr id="8" name="Rounded Rectangle 7"/>
+          <p:cNvSpPr/>
+          <p:nvPr/>
+        </p:nvSpPr>
+        <p:spPr>
+          <a:xfrm>
+            <a:off x="4389120" y="1828800"/>
+            <a:ext cx="3328416" cy="4297680"/>
+          </a:xfrm>
+          <a:prstGeom prst="roundRect">
+            <a:avLst/>
+          </a:prstGeom>
+          <a:solidFill>
+            <a:srgbClr val="FFFFFF"/>
+          </a:solidFill>
+          <a:ln w="12700">
+            <a:solidFill>
+              <a:srgbClr val="E7E5E4"/>
+            </a:solidFill>
+          </a:ln>
+        </p:spPr>
+        <p:style>
+          <a:lnRef idx="1">
+            <a:schemeClr val="accent1"/>
+          </a:lnRef>
+          <a:fillRef idx="3">
+            <a:schemeClr val="accent1"/>
+          </a:fillRef>
+          <a:effectRef idx="2">
+            <a:schemeClr val="accent1"/>
+          </a:effectRef>
+          <a:fontRef idx="minor">
+            <a:schemeClr val="lt1"/>
+          </a:fontRef>
+        </p:style>
+        <p:txBody>
+          <a:bodyPr rtlCol="0" anchor="ctr"/>
+          <a:lstStyle/>
+          <a:p>
+            <a:pPr algn="ctr"/>
+          </a:p>
+        </p:txBody>
+      </p:sp>
+      <p:sp>
+        <p:nvSpPr>
+          <p:cNvPr id="9" name="TextBox 8"/>
+          <p:cNvSpPr txBox="1"/>
+          <p:nvPr/>
+        </p:nvSpPr>
+        <p:spPr>
+          <a:xfrm>
+            <a:off x="4663440" y="2103120"/>
+            <a:ext cx="2779776" cy="3657600"/>
+          </a:xfrm>
+          <a:prstGeom prst="rect">
+            <a:avLst/>
+          </a:prstGeom>
+          <a:noFill/>
+        </p:spPr>
+        <p:txBody>
+          <a:bodyPr wrap="square">
+            <a:spAutoFit/>
+          </a:bodyPr>
+          <a:lstStyle/>
+          <a:p>
+            <a:pPr>
+              <a:defRPr sz="1700" b="1">
+                <a:solidFill>
+                  <a:srgbClr val="1C1917"/>
+                </a:solidFill>
+                <a:latin typeface="Georgia"/>
+              </a:defRPr>
+            </a:pPr>
+            <a:r>
+              <a:t>हिन्दी (Hindi Native)</a:t>
+            </a:r>
+          </a:p>
+          <a:p>
+            <a:pPr>
+              <a:spcBef>
+                <a:spcPts val="400"/>
+              </a:spcBef>
+              <a:defRPr sz="1000" b="1">
+                <a:solidFill>
+                  <a:srgbClr val="059669"/>
+                </a:solidFill>
+                <a:latin typeface="Arial"/>
+              </a:defRPr>
+            </a:pPr>
+            <a:r>
+              <a:t>PHYSICAL 1-CLICK TOGGLE</a:t>
+            </a:r>
+          </a:p>
+          <a:p>
+            <a:pPr>
+              <a:spcBef>
+                <a:spcPts val="1400"/>
+              </a:spcBef>
+              <a:defRPr sz="1150">
+                <a:solidFill>
+                  <a:srgbClr val="57534E"/>
+                </a:solidFill>
+                <a:latin typeface="Arial"/>
+              </a:defRPr>
+            </a:pPr>
+            <a:r>
+              <a:t>Comprehensive native translation for Starters, Main Course, Biryani, special kitchen cooking notes (खास स्वयंपाक सूचना), and kitchen dispatch.</a:t>
+            </a:r>
+          </a:p>
+        </p:txBody>
+      </p:sp>
+      <p:sp>
+        <p:nvSpPr>
+          <p:cNvPr id="10" name="Rounded Rectangle 9"/>
+          <p:cNvSpPr/>
+          <p:nvPr/>
+        </p:nvSpPr>
+        <p:spPr>
+          <a:xfrm>
+            <a:off x="8046720" y="1828800"/>
+            <a:ext cx="3328416" cy="4297680"/>
+          </a:xfrm>
+          <a:prstGeom prst="roundRect">
+            <a:avLst/>
+          </a:prstGeom>
+          <a:solidFill>
+            <a:srgbClr val="FFFFFF"/>
+          </a:solidFill>
+          <a:ln w="12700">
+            <a:solidFill>
+              <a:srgbClr val="E7E5E4"/>
+            </a:solidFill>
+          </a:ln>
+        </p:spPr>
+        <p:style>
+          <a:lnRef idx="1">
+            <a:schemeClr val="accent1"/>
+          </a:lnRef>
+          <a:fillRef idx="3">
+            <a:schemeClr val="accent1"/>
+          </a:fillRef>
+          <a:effectRef idx="2">
+            <a:schemeClr val="accent1"/>
+          </a:effectRef>
+          <a:fontRef idx="minor">
+            <a:schemeClr val="lt1"/>
+          </a:fontRef>
+        </p:style>
+        <p:txBody>
+          <a:bodyPr rtlCol="0" anchor="ctr"/>
+          <a:lstStyle/>
+          <a:p>
+            <a:pPr algn="ctr"/>
+          </a:p>
+        </p:txBody>
+      </p:sp>
+      <p:sp>
+        <p:nvSpPr>
+          <p:cNvPr id="11" name="TextBox 10"/>
+          <p:cNvSpPr txBox="1"/>
+          <p:nvPr/>
+        </p:nvSpPr>
+        <p:spPr>
+          <a:xfrm>
+            <a:off x="8321040" y="2103120"/>
+            <a:ext cx="2779776" cy="3657600"/>
+          </a:xfrm>
+          <a:prstGeom prst="rect">
+            <a:avLst/>
+          </a:prstGeom>
+          <a:noFill/>
+        </p:spPr>
+        <p:txBody>
+          <a:bodyPr wrap="square">
+            <a:spAutoFit/>
+          </a:bodyPr>
+          <a:lstStyle/>
+          <a:p>
+            <a:pPr>
+              <a:defRPr sz="1700" b="1">
+                <a:solidFill>
+                  <a:srgbClr val="1C1917"/>
+                </a:solidFill>
+                <a:latin typeface="Georgia"/>
+              </a:defRPr>
+            </a:pPr>
+            <a:r>
+              <a:t>मराठी (Marathi Native)</a:t>
+            </a:r>
+          </a:p>
+          <a:p>
+            <a:pPr>
+              <a:spcBef>
+                <a:spcPts val="400"/>
+              </a:spcBef>
+              <a:defRPr sz="1000" b="1">
+                <a:solidFill>
+                  <a:srgbClr val="059669"/>
+                </a:solidFill>
+                <a:latin typeface="Arial"/>
+              </a:defRPr>
+            </a:pPr>
+            <a:r>
+              <a:t>LOCAL CULTURAL RESONANCE</a:t>
+            </a:r>
+          </a:p>
+          <a:p>
+            <a:pPr>
+              <a:spcBef>
+                <a:spcPts val="1400"/>
+              </a:spcBef>
+              <a:defRPr sz="1150">
+                <a:solidFill>
+                  <a:srgbClr val="57534E"/>
+                </a:solidFill>
+                <a:latin typeface="Arial"/>
+              </a:defRPr>
+            </a:pPr>
+            <a:r>
+              <a:t>Full regional translation celebrating Maharashtra's food culture (बिर्याणी, स्टार्टर्स, गोड पदार्थ, कॅप्टनला बोलवा), providing warm familiarity for family dining.</a:t>
+            </a:r>
+          </a:p>
+        </p:txBody>
+      </p:sp>
+    </p:spTree>
+  </p:cSld>
+  <p:clrMapOvr>
+    <a:masterClrMapping/>
+  </p:clrMapOvr>
+</p:sld>
+</file>
+
+<file path=ppt/slides/slide15.xml><?xml version="1.0" encoding="utf-8"?>
+<p:sld xmlns:a="http://schemas.openxmlformats.org/drawingml/2006/main" xmlns:p="http://schemas.openxmlformats.org/presentationml/2006/main" xmlns:r="http://schemas.openxmlformats.org/officeDocument/2006/relationships">
+  <p:cSld>
+    <p:spTree>
+      <p:nvGrpSpPr>
+        <p:cNvPr id="1" name=""/>
+        <p:cNvGrpSpPr/>
+        <p:nvPr/>
+      </p:nvGrpSpPr>
+      <p:grpSpPr/>
+      <p:sp>
+        <p:nvSpPr>
+          <p:cNvPr id="2" name="Rectangle 1"/>
+          <p:cNvSpPr/>
+          <p:nvPr/>
+        </p:nvSpPr>
+        <p:spPr>
+          <a:xfrm>
+            <a:off x="0" y="0"/>
+            <a:ext cx="12191695" cy="6858000"/>
+          </a:xfrm>
+          <a:prstGeom prst="rect">
+            <a:avLst/>
+          </a:prstGeom>
+          <a:solidFill>
             <a:srgbClr val="1C1917"/>
           </a:solidFill>
           <a:ln>
@@ -4720,8 +5624,159 @@
         </p:nvSpPr>
         <p:spPr>
           <a:xfrm>
-            <a:off x="731520" y="1371600"/>
-            <a:ext cx="10728655" cy="4114800"/>
+            <a:off x="731520" y="365760"/>
+            <a:ext cx="10515600" cy="292608"/>
+          </a:xfrm>
+          <a:prstGeom prst="rect">
+            <a:avLst/>
+          </a:prstGeom>
+          <a:noFill/>
+        </p:spPr>
+        <p:txBody>
+          <a:bodyPr wrap="square" lIns="0" rIns="0" tIns="0" bIns="0">
+            <a:spAutoFit/>
+          </a:bodyPr>
+          <a:lstStyle/>
+          <a:p>
+            <a:pPr>
+              <a:defRPr sz="1000" b="1">
+                <a:solidFill>
+                  <a:srgbClr val="E85D04"/>
+                </a:solidFill>
+                <a:latin typeface="Arial"/>
+              </a:defRPr>
+            </a:pPr>
+            <a:r>
+              <a:t>COMMERCIAL MODEL</a:t>
+            </a:r>
+          </a:p>
+        </p:txBody>
+      </p:sp>
+      <p:sp>
+        <p:nvSpPr>
+          <p:cNvPr id="4" name="TextBox 3"/>
+          <p:cNvSpPr txBox="1"/>
+          <p:nvPr/>
+        </p:nvSpPr>
+        <p:spPr>
+          <a:xfrm>
+            <a:off x="731520" y="685800"/>
+            <a:ext cx="10515600" cy="502920"/>
+          </a:xfrm>
+          <a:prstGeom prst="rect">
+            <a:avLst/>
+          </a:prstGeom>
+          <a:noFill/>
+        </p:spPr>
+        <p:txBody>
+          <a:bodyPr wrap="square" lIns="0" rIns="0" tIns="0" bIns="0">
+            <a:spAutoFit/>
+          </a:bodyPr>
+          <a:lstStyle/>
+          <a:p>
+            <a:pPr>
+              <a:defRPr sz="2200" b="1">
+                <a:solidFill>
+                  <a:srgbClr val="FFFFFF"/>
+                </a:solidFill>
+                <a:latin typeface="Georgia"/>
+              </a:defRPr>
+            </a:pPr>
+            <a:r>
+              <a:t>Direct Access Onboarding (No Arbitrary Trials) &amp; 0% Commission</a:t>
+            </a:r>
+          </a:p>
+        </p:txBody>
+      </p:sp>
+      <p:sp>
+        <p:nvSpPr>
+          <p:cNvPr id="5" name="TextBox 4"/>
+          <p:cNvSpPr txBox="1"/>
+          <p:nvPr/>
+        </p:nvSpPr>
+        <p:spPr>
+          <a:xfrm>
+            <a:off x="731520" y="1234440"/>
+            <a:ext cx="10515600" cy="365760"/>
+          </a:xfrm>
+          <a:prstGeom prst="rect">
+            <a:avLst/>
+          </a:prstGeom>
+          <a:noFill/>
+        </p:spPr>
+        <p:txBody>
+          <a:bodyPr wrap="square" lIns="0" rIns="0" tIns="0" bIns="0">
+            <a:spAutoFit/>
+          </a:bodyPr>
+          <a:lstStyle/>
+          <a:p>
+            <a:pPr>
+              <a:defRPr sz="1150">
+                <a:solidFill>
+                  <a:srgbClr val="D6D3D1"/>
+                </a:solidFill>
+                <a:latin typeface="Arial"/>
+              </a:defRPr>
+            </a:pPr>
+            <a:r>
+              <a:t>You control access directly — granting complete capabilities to partner restaurants with transparent economics.</a:t>
+            </a:r>
+          </a:p>
+        </p:txBody>
+      </p:sp>
+      <p:sp>
+        <p:nvSpPr>
+          <p:cNvPr id="6" name="Rounded Rectangle 5"/>
+          <p:cNvSpPr/>
+          <p:nvPr/>
+        </p:nvSpPr>
+        <p:spPr>
+          <a:xfrm>
+            <a:off x="731520" y="1828800"/>
+            <a:ext cx="10728655" cy="4297680"/>
+          </a:xfrm>
+          <a:prstGeom prst="roundRect">
+            <a:avLst/>
+          </a:prstGeom>
+          <a:solidFill>
+            <a:srgbClr val="292524"/>
+          </a:solidFill>
+          <a:ln>
+            <a:noFill/>
+          </a:ln>
+        </p:spPr>
+        <p:style>
+          <a:lnRef idx="1">
+            <a:schemeClr val="accent1"/>
+          </a:lnRef>
+          <a:fillRef idx="3">
+            <a:schemeClr val="accent1"/>
+          </a:fillRef>
+          <a:effectRef idx="2">
+            <a:schemeClr val="accent1"/>
+          </a:effectRef>
+          <a:fontRef idx="minor">
+            <a:schemeClr val="lt1"/>
+          </a:fontRef>
+        </p:style>
+        <p:txBody>
+          <a:bodyPr rtlCol="0" anchor="ctr"/>
+          <a:lstStyle/>
+          <a:p>
+            <a:pPr algn="ctr"/>
+          </a:p>
+        </p:txBody>
+      </p:sp>
+      <p:sp>
+        <p:nvSpPr>
+          <p:cNvPr id="7" name="TextBox 6"/>
+          <p:cNvSpPr txBox="1"/>
+          <p:nvPr/>
+        </p:nvSpPr>
+        <p:spPr>
+          <a:xfrm>
+            <a:off x="1097280" y="2103120"/>
+            <a:ext cx="9966960" cy="3749039"/>
           </a:xfrm>
           <a:prstGeom prst="rect">
             <a:avLst/>
@@ -4735,15 +5790,15 @@
           <a:lstStyle/>
           <a:p>
             <a:pPr>
-              <a:defRPr sz="3600" b="1">
-                <a:solidFill>
-                  <a:srgbClr val="FFFFFF"/>
+              <a:defRPr sz="1900" b="1">
+                <a:solidFill>
+                  <a:srgbClr val="E85D04"/>
                 </a:solidFill>
                 <a:latin typeface="Georgia"/>
               </a:defRPr>
             </a:pPr>
             <a:r>
-              <a:t>Transform Your Restaurant Operations Today</a:t>
+              <a:t>Transparent Commercial Model &amp; Ownership</a:t>
             </a:r>
           </a:p>
           <a:p>
@@ -4751,15 +5806,160 @@
               <a:spcBef>
                 <a:spcPts val="1200"/>
               </a:spcBef>
-              <a:defRPr sz="1800">
-                <a:solidFill>
-                  <a:srgbClr val="E85D04"/>
+              <a:defRPr sz="1150">
+                <a:solidFill>
+                  <a:srgbClr val="FFFFFF"/>
+                </a:solidFill>
+                <a:latin typeface="Arial"/>
+              </a:defRPr>
+            </a:pPr>
+            <a:r>
+              <a:t>💼 Direct Access Onboarding: Removed arbitrary 7-day trial counters. As the platform owner, you grant full operational access directly to restaurants on demand.</a:t>
+            </a:r>
+          </a:p>
+          <a:p>
+            <a:pPr>
+              <a:spcBef>
+                <a:spcPts val="1200"/>
+              </a:spcBef>
+              <a:defRPr sz="1150">
+                <a:solidFill>
+                  <a:srgbClr val="FFFFFF"/>
+                </a:solidFill>
+                <a:latin typeface="Arial"/>
+              </a:defRPr>
+            </a:pPr>
+            <a:r>
+              <a:t>💼 Flat ₹1,999 / Month Flat Subscription: Zero commission on food sales. Restaurants keep 100% of their billing revenue — saving thousands compared to 20-30% aggregator fees.</a:t>
+            </a:r>
+          </a:p>
+          <a:p>
+            <a:pPr>
+              <a:spcBef>
+                <a:spcPts val="1200"/>
+              </a:spcBef>
+              <a:defRPr sz="1150">
+                <a:solidFill>
+                  <a:srgbClr val="FFFFFF"/>
+                </a:solidFill>
+                <a:latin typeface="Arial"/>
+              </a:defRPr>
+            </a:pPr>
+            <a:r>
+              <a:t>💼 100% Customer Data Ownership: Restaurants own their verified customer WhatsApp numbers and dining histories for festival and weekend remarketing.</a:t>
+            </a:r>
+          </a:p>
+          <a:p>
+            <a:pPr>
+              <a:spcBef>
+                <a:spcPts val="1200"/>
+              </a:spcBef>
+              <a:defRPr sz="1150">
+                <a:solidFill>
+                  <a:srgbClr val="FFFFFF"/>
+                </a:solidFill>
+                <a:latin typeface="Arial"/>
+              </a:defRPr>
+            </a:pPr>
+            <a:r>
+              <a:t>💼 High-Durability Acrylic Stands Included: Premium acrylic QR table stands and kitchen thermal printer configuration guides supplied on rollout.</a:t>
+            </a:r>
+          </a:p>
+        </p:txBody>
+      </p:sp>
+    </p:spTree>
+  </p:cSld>
+  <p:clrMapOvr>
+    <a:masterClrMapping/>
+  </p:clrMapOvr>
+</p:sld>
+</file>
+
+<file path=ppt/slides/slide16.xml><?xml version="1.0" encoding="utf-8"?>
+<p:sld xmlns:a="http://schemas.openxmlformats.org/drawingml/2006/main" xmlns:p="http://schemas.openxmlformats.org/presentationml/2006/main" xmlns:r="http://schemas.openxmlformats.org/officeDocument/2006/relationships">
+  <p:cSld>
+    <p:spTree>
+      <p:nvGrpSpPr>
+        <p:cNvPr id="1" name=""/>
+        <p:cNvGrpSpPr/>
+        <p:nvPr/>
+      </p:nvGrpSpPr>
+      <p:grpSpPr/>
+      <p:sp>
+        <p:nvSpPr>
+          <p:cNvPr id="2" name="Rectangle 1"/>
+          <p:cNvSpPr/>
+          <p:nvPr/>
+        </p:nvSpPr>
+        <p:spPr>
+          <a:xfrm>
+            <a:off x="0" y="0"/>
+            <a:ext cx="12191695" cy="6858000"/>
+          </a:xfrm>
+          <a:prstGeom prst="rect">
+            <a:avLst/>
+          </a:prstGeom>
+          <a:solidFill>
+            <a:srgbClr val="1C1917"/>
+          </a:solidFill>
+          <a:ln>
+            <a:noFill/>
+          </a:ln>
+        </p:spPr>
+        <p:style>
+          <a:lnRef idx="1">
+            <a:schemeClr val="accent1"/>
+          </a:lnRef>
+          <a:fillRef idx="3">
+            <a:schemeClr val="accent1"/>
+          </a:fillRef>
+          <a:effectRef idx="2">
+            <a:schemeClr val="accent1"/>
+          </a:effectRef>
+          <a:fontRef idx="minor">
+            <a:schemeClr val="lt1"/>
+          </a:fontRef>
+        </p:style>
+        <p:txBody>
+          <a:bodyPr rtlCol="0" anchor="ctr"/>
+          <a:lstStyle/>
+          <a:p>
+            <a:pPr algn="ctr"/>
+          </a:p>
+        </p:txBody>
+      </p:sp>
+      <p:sp>
+        <p:nvSpPr>
+          <p:cNvPr id="3" name="TextBox 2"/>
+          <p:cNvSpPr txBox="1"/>
+          <p:nvPr/>
+        </p:nvSpPr>
+        <p:spPr>
+          <a:xfrm>
+            <a:off x="731520" y="1097280"/>
+            <a:ext cx="10728655" cy="4754880"/>
+          </a:xfrm>
+          <a:prstGeom prst="rect">
+            <a:avLst/>
+          </a:prstGeom>
+          <a:noFill/>
+        </p:spPr>
+        <p:txBody>
+          <a:bodyPr wrap="square">
+            <a:spAutoFit/>
+          </a:bodyPr>
+          <a:lstStyle/>
+          <a:p>
+            <a:pPr>
+              <a:defRPr sz="3600" b="1">
+                <a:solidFill>
+                  <a:srgbClr val="FFFFFF"/>
                 </a:solidFill>
                 <a:latin typeface="Georgia"/>
               </a:defRPr>
             </a:pPr>
             <a:r>
-              <a:t>Real-Time Collaboration • Multilingual Inclusivity • Direct Kitchen KOT • 5-Star Reputation</a:t>
+              <a:t>Transform Your Restaurant with Menuz</a:t>
             </a:r>
           </a:p>
           <a:p>
@@ -4767,7 +5967,23 @@
               <a:spcBef>
                 <a:spcPts val="1000"/>
               </a:spcBef>
-              <a:defRPr sz="1400">
+              <a:defRPr sz="1800">
+                <a:solidFill>
+                  <a:srgbClr val="E85D04"/>
+                </a:solidFill>
+                <a:latin typeface="Georgia"/>
+              </a:defRPr>
+            </a:pPr>
+            <a:r>
+              <a:t>Interactive Menus • Multiplayer Sync • Direct Kitchen KOT • Viral Growth • 0% Commission</a:t>
+            </a:r>
+          </a:p>
+          <a:p>
+            <a:pPr>
+              <a:spcBef>
+                <a:spcPts val="900"/>
+              </a:spcBef>
+              <a:defRPr sz="1350">
                 <a:solidFill>
                   <a:srgbClr val="E7E5E4"/>
                 </a:solidFill>
@@ -4775,15 +5991,15 @@
               </a:defRPr>
             </a:pPr>
             <a:r>
-              <a:t>✓  +22% Average Ticket Value via Smart Pairings</a:t>
+              <a:t>✓  +22% Average Ticket Value via Smart Pairings &amp; Upsells</a:t>
             </a:r>
           </a:p>
           <a:p>
             <a:pPr>
               <a:spcBef>
-                <a:spcPts val="1000"/>
+                <a:spcPts val="900"/>
               </a:spcBef>
-              <a:defRPr sz="1400">
+              <a:defRPr sz="1350">
                 <a:solidFill>
                   <a:srgbClr val="E7E5E4"/>
                 </a:solidFill>
@@ -4791,15 +6007,15 @@
               </a:defRPr>
             </a:pPr>
             <a:r>
-              <a:t>✓  +300 Verified 5-Star Google Reviews Every Month</a:t>
+              <a:t>✓  +300 Verified 5-Star Reviews or Viral Instagram Stories Monthly</a:t>
             </a:r>
           </a:p>
           <a:p>
             <a:pPr>
               <a:spcBef>
-                <a:spcPts val="1000"/>
+                <a:spcPts val="900"/>
               </a:spcBef>
-              <a:defRPr sz="1400">
+              <a:defRPr sz="1350">
                 <a:solidFill>
                   <a:srgbClr val="E7E5E4"/>
                 </a:solidFill>
@@ -4807,15 +6023,15 @@
               </a:defRPr>
             </a:pPr>
             <a:r>
-              <a:t>✓  Zero Lost Orders with Multi-Channel KOT Failover</a:t>
+              <a:t>✓  Zero Lost Orders with Multi-Channel KOT Failover (Port 9100 / LAN / POS)</a:t>
             </a:r>
           </a:p>
           <a:p>
             <a:pPr>
               <a:spcBef>
-                <a:spcPts val="1000"/>
+                <a:spcPts val="900"/>
               </a:spcBef>
-              <a:defRPr sz="1400">
+              <a:defRPr sz="1350">
                 <a:solidFill>
                   <a:srgbClr val="E7E5E4"/>
                 </a:solidFill>
@@ -4823,13 +6039,13 @@
               </a:defRPr>
             </a:pPr>
             <a:r>
-              <a:t>✓  Full Hindi, Marathi &amp; English Language Coverage</a:t>
+              <a:t>✓  Diner Service Response Times Cut from 10 Mins to Under 60 Seconds</a:t>
             </a:r>
           </a:p>
           <a:p>
             <a:pPr>
               <a:spcBef>
-                <a:spcPts val="2000"/>
+                <a:spcPts val="1800"/>
               </a:spcBef>
               <a:defRPr sz="1300" b="1">
                 <a:solidFill>
@@ -4913,8 +6129,8 @@
         </p:nvSpPr>
         <p:spPr>
           <a:xfrm>
-            <a:off x="731520" y="411480"/>
-            <a:ext cx="10515600" cy="320040"/>
+            <a:off x="731520" y="365760"/>
+            <a:ext cx="10515600" cy="292608"/>
           </a:xfrm>
           <a:prstGeom prst="rect">
             <a:avLst/>
@@ -4936,7 +6152,7 @@
               </a:defRPr>
             </a:pPr>
             <a:r>
-              <a:t>INDUSTRY CHALLENGE</a:t>
+              <a:t>PRODUCT OVERVIEW</a:t>
             </a:r>
           </a:p>
         </p:txBody>
@@ -4949,8 +6165,8 @@
         </p:nvSpPr>
         <p:spPr>
           <a:xfrm>
-            <a:off x="731520" y="731520"/>
-            <a:ext cx="10515600" cy="548640"/>
+            <a:off x="731520" y="685800"/>
+            <a:ext cx="10515600" cy="502920"/>
           </a:xfrm>
           <a:prstGeom prst="rect">
             <a:avLst/>
@@ -4964,7 +6180,7 @@
           <a:lstStyle/>
           <a:p>
             <a:pPr>
-              <a:defRPr sz="2400" b="1">
+              <a:defRPr sz="2200" b="1">
                 <a:solidFill>
                   <a:srgbClr val="1C1917"/>
                 </a:solidFill>
@@ -4972,7 +6188,7 @@
               </a:defRPr>
             </a:pPr>
             <a:r>
-              <a:t>The Three Critical Profit Leaks in Modern Dining</a:t>
+              <a:t>What Exactly Is Menuz?</a:t>
             </a:r>
           </a:p>
         </p:txBody>
@@ -4985,7 +6201,7 @@
         </p:nvSpPr>
         <p:spPr>
           <a:xfrm>
-            <a:off x="731520" y="1298448"/>
+            <a:off x="731520" y="1234440"/>
             <a:ext cx="10515600" cy="365760"/>
           </a:xfrm>
           <a:prstGeom prst="rect">
@@ -5000,7 +6216,7 @@
           <a:lstStyle/>
           <a:p>
             <a:pPr>
-              <a:defRPr sz="1200">
+              <a:defRPr sz="1150">
                 <a:solidFill>
                   <a:srgbClr val="57534E"/>
                 </a:solidFill>
@@ -5008,7 +6224,7 @@
               </a:defRPr>
             </a:pPr>
             <a:r>
-              <a:t>Why traditional paper menus and standalone POS terminals cost restaurants up to 30% in lost revenue.</a:t>
+              <a:t>An all-in-one web-based operating system that transforms dine-in tables into high-speed, high-margin, viral dining hubs.</a:t>
             </a:r>
           </a:p>
         </p:txBody>
@@ -5021,8 +6237,8 @@
         </p:nvSpPr>
         <p:spPr>
           <a:xfrm>
-            <a:off x="731520" y="1920240"/>
-            <a:ext cx="3328416" cy="4114800"/>
+            <a:off x="731520" y="1828800"/>
+            <a:ext cx="3328416" cy="2057400"/>
           </a:xfrm>
           <a:prstGeom prst="roundRect">
             <a:avLst/>
@@ -5066,8 +6282,8 @@
         </p:nvSpPr>
         <p:spPr>
           <a:xfrm>
-            <a:off x="1005840" y="2286000"/>
-            <a:ext cx="2779776" cy="3383280"/>
+            <a:off x="960120" y="2057400"/>
+            <a:ext cx="2871216" cy="1600200"/>
           </a:xfrm>
           <a:prstGeom prst="rect">
             <a:avLst/>
@@ -5081,7 +6297,7 @@
           <a:lstStyle/>
           <a:p>
             <a:pPr>
-              <a:defRPr sz="1800" b="1">
+              <a:defRPr sz="1400" b="1">
                 <a:solidFill>
                   <a:srgbClr val="E85D04"/>
                 </a:solidFill>
@@ -5089,15 +6305,15 @@
               </a:defRPr>
             </a:pPr>
             <a:r>
-              <a:t>01. Diners Left Without Guidance</a:t>
+              <a:t>1. Digital Interactive Menu</a:t>
             </a:r>
           </a:p>
           <a:p>
             <a:pPr>
               <a:spcBef>
-                <a:spcPts val="1600"/>
+                <a:spcPts val="800"/>
               </a:spcBef>
-              <a:defRPr sz="1200">
+              <a:defRPr sz="1100">
                 <a:solidFill>
                   <a:srgbClr val="57534E"/>
                 </a:solidFill>
@@ -5105,7 +6321,7 @@
               </a:defRPr>
             </a:pPr>
             <a:r>
-              <a:t>Waiters are rushed and under-trained. They cannot articulate chef heritage, secret recipes, or suggest high-margin wine &amp; cocktail pairings. Up to 40% of diners stick to safe, low-margin staples.</a:t>
+              <a:t>Zero app download. Diners scan table QR code to explore high-res dishes, calibrated spice meters, calorie counts, chef secret notes, and dietary filters.</a:t>
             </a:r>
           </a:p>
         </p:txBody>
@@ -5118,8 +6334,8 @@
         </p:nvSpPr>
         <p:spPr>
           <a:xfrm>
-            <a:off x="4389120" y="1920240"/>
-            <a:ext cx="3328416" cy="4114800"/>
+            <a:off x="4389120" y="1828800"/>
+            <a:ext cx="3328416" cy="2057400"/>
           </a:xfrm>
           <a:prstGeom prst="roundRect">
             <a:avLst/>
@@ -5163,8 +6379,8 @@
         </p:nvSpPr>
         <p:spPr>
           <a:xfrm>
-            <a:off x="4663440" y="2286000"/>
-            <a:ext cx="2779776" cy="3383280"/>
+            <a:off x="4617720" y="2057400"/>
+            <a:ext cx="2871216" cy="1600200"/>
           </a:xfrm>
           <a:prstGeom prst="rect">
             <a:avLst/>
@@ -5178,7 +6394,7 @@
           <a:lstStyle/>
           <a:p>
             <a:pPr>
-              <a:defRPr sz="1800" b="1">
+              <a:defRPr sz="1400" b="1">
                 <a:solidFill>
                   <a:srgbClr val="E85D04"/>
                 </a:solidFill>
@@ -5186,15 +6402,15 @@
               </a:defRPr>
             </a:pPr>
             <a:r>
-              <a:t>02. Brittle POS &amp; Delayed KOTs</a:t>
+              <a:t>2. Real-Time Multiplayer Sync</a:t>
             </a:r>
           </a:p>
           <a:p>
             <a:pPr>
               <a:spcBef>
-                <a:spcPts val="1600"/>
+                <a:spcPts val="800"/>
               </a:spcBef>
-              <a:defRPr sz="1200">
+              <a:defRPr sz="1100">
                 <a:solidFill>
                   <a:srgbClr val="57534E"/>
                 </a:solidFill>
@@ -5202,7 +6418,7 @@
               </a:defRPr>
             </a:pPr>
             <a:r>
-              <a:t>Cloud-only POS systems drop orders during peak Wi-Fi fluctuations. Orders pile up, kitchen preparation gets delayed, and hungry guests experience frustrating table waits.</a:t>
+              <a:t>Everyone at Table 4 co-orders together in real-time. Live shared cart tray with guest tags prevents duplicate orders and unifies billing.</a:t>
             </a:r>
           </a:p>
         </p:txBody>
@@ -5215,8 +6431,8 @@
         </p:nvSpPr>
         <p:spPr>
           <a:xfrm>
-            <a:off x="8046720" y="1920240"/>
-            <a:ext cx="3328416" cy="4114800"/>
+            <a:off x="8046720" y="1828800"/>
+            <a:ext cx="3328416" cy="2057400"/>
           </a:xfrm>
           <a:prstGeom prst="roundRect">
             <a:avLst/>
@@ -5260,8 +6476,8 @@
         </p:nvSpPr>
         <p:spPr>
           <a:xfrm>
-            <a:off x="8321040" y="2286000"/>
-            <a:ext cx="2779776" cy="3383280"/>
+            <a:off x="8275320" y="2057400"/>
+            <a:ext cx="2871216" cy="1600200"/>
           </a:xfrm>
           <a:prstGeom prst="rect">
             <a:avLst/>
@@ -5275,7 +6491,7 @@
           <a:lstStyle/>
           <a:p>
             <a:pPr>
-              <a:defRPr sz="1800" b="1">
+              <a:defRPr sz="1400" b="1">
                 <a:solidFill>
                   <a:srgbClr val="E85D04"/>
                 </a:solidFill>
@@ -5283,15 +6499,15 @@
               </a:defRPr>
             </a:pPr>
             <a:r>
-              <a:t>03. Lost Reviews &amp; Language Gaps</a:t>
+              <a:t>3. Chef AI Concierge &amp; Upsells</a:t>
             </a:r>
           </a:p>
           <a:p>
             <a:pPr>
               <a:spcBef>
-                <a:spcPts val="1600"/>
+                <a:spcPts val="800"/>
               </a:spcBef>
-              <a:defRPr sz="1200">
+              <a:defRPr sz="1100">
                 <a:solidFill>
                   <a:srgbClr val="57534E"/>
                 </a:solidFill>
@@ -5299,7 +6515,298 @@
               </a:defRPr>
             </a:pPr>
             <a:r>
-              <a:t>Satisfied guests leave without posting a Google review, while one upset guest posts a permanent 1-star rating. Furthermore, non-English speaking diners face awkward communication hurdles.</a:t>
+              <a:t>Trained on head chef's marinades and owner's upsell rules. Suggests high-margin wine, mocktail, and side pairings (+22% average check).</a:t>
+            </a:r>
+          </a:p>
+        </p:txBody>
+      </p:sp>
+      <p:sp>
+        <p:nvSpPr>
+          <p:cNvPr id="12" name="Rounded Rectangle 11"/>
+          <p:cNvSpPr/>
+          <p:nvPr/>
+        </p:nvSpPr>
+        <p:spPr>
+          <a:xfrm>
+            <a:off x="731520" y="4114800"/>
+            <a:ext cx="3328416" cy="2057400"/>
+          </a:xfrm>
+          <a:prstGeom prst="roundRect">
+            <a:avLst/>
+          </a:prstGeom>
+          <a:solidFill>
+            <a:srgbClr val="FFFFFF"/>
+          </a:solidFill>
+          <a:ln w="12700">
+            <a:solidFill>
+              <a:srgbClr val="E7E5E4"/>
+            </a:solidFill>
+          </a:ln>
+        </p:spPr>
+        <p:style>
+          <a:lnRef idx="1">
+            <a:schemeClr val="accent1"/>
+          </a:lnRef>
+          <a:fillRef idx="3">
+            <a:schemeClr val="accent1"/>
+          </a:fillRef>
+          <a:effectRef idx="2">
+            <a:schemeClr val="accent1"/>
+          </a:effectRef>
+          <a:fontRef idx="minor">
+            <a:schemeClr val="lt1"/>
+          </a:fontRef>
+        </p:style>
+        <p:txBody>
+          <a:bodyPr rtlCol="0" anchor="ctr"/>
+          <a:lstStyle/>
+          <a:p>
+            <a:pPr algn="ctr"/>
+          </a:p>
+        </p:txBody>
+      </p:sp>
+      <p:sp>
+        <p:nvSpPr>
+          <p:cNvPr id="13" name="TextBox 12"/>
+          <p:cNvSpPr txBox="1"/>
+          <p:nvPr/>
+        </p:nvSpPr>
+        <p:spPr>
+          <a:xfrm>
+            <a:off x="960120" y="4343400"/>
+            <a:ext cx="2871216" cy="1600200"/>
+          </a:xfrm>
+          <a:prstGeom prst="rect">
+            <a:avLst/>
+          </a:prstGeom>
+          <a:noFill/>
+        </p:spPr>
+        <p:txBody>
+          <a:bodyPr wrap="square">
+            <a:spAutoFit/>
+          </a:bodyPr>
+          <a:lstStyle/>
+          <a:p>
+            <a:pPr>
+              <a:defRPr sz="1400" b="1">
+                <a:solidFill>
+                  <a:srgbClr val="E85D04"/>
+                </a:solidFill>
+                <a:latin typeface="Georgia"/>
+              </a:defRPr>
+            </a:pPr>
+            <a:r>
+              <a:t>4. Direct Kitchen KOT Routing</a:t>
+            </a:r>
+          </a:p>
+          <a:p>
+            <a:pPr>
+              <a:spcBef>
+                <a:spcPts val="800"/>
+              </a:spcBef>
+              <a:defRPr sz="1100">
+                <a:solidFill>
+                  <a:srgbClr val="57534E"/>
+                </a:solidFill>
+                <a:latin typeface="Arial"/>
+              </a:defRPr>
+            </a:pPr>
+            <a:r>
+              <a:t>Owner-controlled: Send orders directly to kitchen thermal printers in 1 second (Mode A) or route to floor captain for approval (Mode B).</a:t>
+            </a:r>
+          </a:p>
+        </p:txBody>
+      </p:sp>
+      <p:sp>
+        <p:nvSpPr>
+          <p:cNvPr id="14" name="Rounded Rectangle 13"/>
+          <p:cNvSpPr/>
+          <p:nvPr/>
+        </p:nvSpPr>
+        <p:spPr>
+          <a:xfrm>
+            <a:off x="4389120" y="4114800"/>
+            <a:ext cx="3328416" cy="2057400"/>
+          </a:xfrm>
+          <a:prstGeom prst="roundRect">
+            <a:avLst/>
+          </a:prstGeom>
+          <a:solidFill>
+            <a:srgbClr val="FFFFFF"/>
+          </a:solidFill>
+          <a:ln w="12700">
+            <a:solidFill>
+              <a:srgbClr val="E7E5E4"/>
+            </a:solidFill>
+          </a:ln>
+        </p:spPr>
+        <p:style>
+          <a:lnRef idx="1">
+            <a:schemeClr val="accent1"/>
+          </a:lnRef>
+          <a:fillRef idx="3">
+            <a:schemeClr val="accent1"/>
+          </a:fillRef>
+          <a:effectRef idx="2">
+            <a:schemeClr val="accent1"/>
+          </a:effectRef>
+          <a:fontRef idx="minor">
+            <a:schemeClr val="lt1"/>
+          </a:fontRef>
+        </p:style>
+        <p:txBody>
+          <a:bodyPr rtlCol="0" anchor="ctr"/>
+          <a:lstStyle/>
+          <a:p>
+            <a:pPr algn="ctr"/>
+          </a:p>
+        </p:txBody>
+      </p:sp>
+      <p:sp>
+        <p:nvSpPr>
+          <p:cNvPr id="15" name="TextBox 14"/>
+          <p:cNvSpPr txBox="1"/>
+          <p:nvPr/>
+        </p:nvSpPr>
+        <p:spPr>
+          <a:xfrm>
+            <a:off x="4617720" y="4343400"/>
+            <a:ext cx="2871216" cy="1600200"/>
+          </a:xfrm>
+          <a:prstGeom prst="rect">
+            <a:avLst/>
+          </a:prstGeom>
+          <a:noFill/>
+        </p:spPr>
+        <p:txBody>
+          <a:bodyPr wrap="square">
+            <a:spAutoFit/>
+          </a:bodyPr>
+          <a:lstStyle/>
+          <a:p>
+            <a:pPr>
+              <a:defRPr sz="1400" b="1">
+                <a:solidFill>
+                  <a:srgbClr val="E85D04"/>
+                </a:solidFill>
+                <a:latin typeface="Georgia"/>
+              </a:defRPr>
+            </a:pPr>
+            <a:r>
+              <a:t>5. Owner-Configurable Viral Growth</a:t>
+            </a:r>
+          </a:p>
+          <a:p>
+            <a:pPr>
+              <a:spcBef>
+                <a:spcPts val="800"/>
+              </a:spcBef>
+              <a:defRPr sz="1100">
+                <a:solidFill>
+                  <a:srgbClr val="57534E"/>
+                </a:solidFill>
+                <a:latin typeface="Arial"/>
+              </a:defRPr>
+            </a:pPr>
+            <a:r>
+              <a:t>Owner chooses: unlock table rewards via 5-Star Google Reviews OR 9:16 Instagram Stories with restaurant tags.</a:t>
+            </a:r>
+          </a:p>
+        </p:txBody>
+      </p:sp>
+      <p:sp>
+        <p:nvSpPr>
+          <p:cNvPr id="16" name="Rounded Rectangle 15"/>
+          <p:cNvSpPr/>
+          <p:nvPr/>
+        </p:nvSpPr>
+        <p:spPr>
+          <a:xfrm>
+            <a:off x="8046720" y="4114800"/>
+            <a:ext cx="3328416" cy="2057400"/>
+          </a:xfrm>
+          <a:prstGeom prst="roundRect">
+            <a:avLst/>
+          </a:prstGeom>
+          <a:solidFill>
+            <a:srgbClr val="FFFFFF"/>
+          </a:solidFill>
+          <a:ln w="12700">
+            <a:solidFill>
+              <a:srgbClr val="E7E5E4"/>
+            </a:solidFill>
+          </a:ln>
+        </p:spPr>
+        <p:style>
+          <a:lnRef idx="1">
+            <a:schemeClr val="accent1"/>
+          </a:lnRef>
+          <a:fillRef idx="3">
+            <a:schemeClr val="accent1"/>
+          </a:fillRef>
+          <a:effectRef idx="2">
+            <a:schemeClr val="accent1"/>
+          </a:effectRef>
+          <a:fontRef idx="minor">
+            <a:schemeClr val="lt1"/>
+          </a:fontRef>
+        </p:style>
+        <p:txBody>
+          <a:bodyPr rtlCol="0" anchor="ctr"/>
+          <a:lstStyle/>
+          <a:p>
+            <a:pPr algn="ctr"/>
+          </a:p>
+        </p:txBody>
+      </p:sp>
+      <p:sp>
+        <p:nvSpPr>
+          <p:cNvPr id="17" name="TextBox 16"/>
+          <p:cNvSpPr txBox="1"/>
+          <p:nvPr/>
+        </p:nvSpPr>
+        <p:spPr>
+          <a:xfrm>
+            <a:off x="8275320" y="4343400"/>
+            <a:ext cx="2871216" cy="1600200"/>
+          </a:xfrm>
+          <a:prstGeom prst="rect">
+            <a:avLst/>
+          </a:prstGeom>
+          <a:noFill/>
+        </p:spPr>
+        <p:txBody>
+          <a:bodyPr wrap="square">
+            <a:spAutoFit/>
+          </a:bodyPr>
+          <a:lstStyle/>
+          <a:p>
+            <a:pPr>
+              <a:defRPr sz="1400" b="1">
+                <a:solidFill>
+                  <a:srgbClr val="E85D04"/>
+                </a:solidFill>
+                <a:latin typeface="Georgia"/>
+              </a:defRPr>
+            </a:pPr>
+            <a:r>
+              <a:t>6. Floor Operations &amp; Service SOS</a:t>
+            </a:r>
+          </a:p>
+          <a:p>
+            <a:pPr>
+              <a:spcBef>
+                <a:spcPts val="800"/>
+              </a:spcBef>
+              <a:defRPr sz="1100">
+                <a:solidFill>
+                  <a:srgbClr val="57534E"/>
+                </a:solidFill>
+                <a:latin typeface="Arial"/>
+              </a:defRPr>
+            </a:pPr>
+            <a:r>
+              <a:t>Waiters called with 1 tap ('Call Waiter', 'Water', 'Bill'). Real-time manager tablet hub for table occupancy and prep timers.</a:t>
             </a:r>
           </a:p>
         </p:txBody>
@@ -5337,7 +6844,7 @@
             <a:avLst/>
           </a:prstGeom>
           <a:solidFill>
-            <a:srgbClr val="FDFBF7"/>
+            <a:srgbClr val="1C1917"/>
           </a:solidFill>
           <a:ln>
             <a:noFill/>
@@ -5373,8 +6880,8 @@
         </p:nvSpPr>
         <p:spPr>
           <a:xfrm>
-            <a:off x="731520" y="411480"/>
-            <a:ext cx="10515600" cy="320040"/>
+            <a:off x="731520" y="365760"/>
+            <a:ext cx="10515600" cy="292608"/>
           </a:xfrm>
           <a:prstGeom prst="rect">
             <a:avLst/>
@@ -5396,7 +6903,7 @@
               </a:defRPr>
             </a:pPr>
             <a:r>
-              <a:t>COMPREHENSIVE ARCHITECTURE</a:t>
+              <a:t>DINER TABLE INTERFACE</a:t>
             </a:r>
           </a:p>
         </p:txBody>
@@ -5409,8 +6916,8 @@
         </p:nvSpPr>
         <p:spPr>
           <a:xfrm>
-            <a:off x="731520" y="731520"/>
-            <a:ext cx="10515600" cy="548640"/>
+            <a:off x="731520" y="685800"/>
+            <a:ext cx="10515600" cy="502920"/>
           </a:xfrm>
           <a:prstGeom prst="rect">
             <a:avLst/>
@@ -5424,15 +6931,15 @@
           <a:lstStyle/>
           <a:p>
             <a:pPr>
-              <a:defRPr sz="2400" b="1">
-                <a:solidFill>
-                  <a:srgbClr val="1C1917"/>
+              <a:defRPr sz="2200" b="1">
+                <a:solidFill>
+                  <a:srgbClr val="FFFFFF"/>
                 </a:solidFill>
                 <a:latin typeface="Georgia"/>
               </a:defRPr>
             </a:pPr>
             <a:r>
-              <a:t>The Menuz Connected Dining Platform</a:t>
+              <a:t>Visual Digital Menu: Engaging Appetites Before Ordering</a:t>
             </a:r>
           </a:p>
         </p:txBody>
@@ -5445,7 +6952,7 @@
         </p:nvSpPr>
         <p:spPr>
           <a:xfrm>
-            <a:off x="731520" y="1298448"/>
+            <a:off x="731520" y="1234440"/>
             <a:ext cx="10515600" cy="365760"/>
           </a:xfrm>
           <a:prstGeom prst="rect">
@@ -5460,15 +6967,15 @@
           <a:lstStyle/>
           <a:p>
             <a:pPr>
-              <a:defRPr sz="1200">
-                <a:solidFill>
-                  <a:srgbClr val="57534E"/>
-                </a:solidFill>
-                <a:latin typeface="Arial"/>
-              </a:defRPr>
-            </a:pPr>
-            <a:r>
-              <a:t>Six integrated layers designed for diners, kitchen brigades, and restaurant owners.</a:t>
+              <a:defRPr sz="1150">
+                <a:solidFill>
+                  <a:srgbClr val="D6D3D1"/>
+                </a:solidFill>
+                <a:latin typeface="Arial"/>
+              </a:defRPr>
+            </a:pPr>
+            <a:r>
+              <a:t>Replacing flat paper text with rich culinary storytelling, calibrated heat meters, and smart dietary tags.</a:t>
             </a:r>
           </a:p>
         </p:txBody>
@@ -5482,18 +6989,16 @@
         <p:spPr>
           <a:xfrm>
             <a:off x="731520" y="1828800"/>
-            <a:ext cx="3328416" cy="1965960"/>
+            <a:ext cx="5120640" cy="4297680"/>
           </a:xfrm>
           <a:prstGeom prst="roundRect">
             <a:avLst/>
           </a:prstGeom>
           <a:solidFill>
-            <a:srgbClr val="FFFFFF"/>
+            <a:srgbClr val="292524"/>
           </a:solidFill>
-          <a:ln w="12700">
-            <a:solidFill>
-              <a:srgbClr val="E7E5E4"/>
-            </a:solidFill>
+          <a:ln>
+            <a:noFill/>
           </a:ln>
         </p:spPr>
         <p:style>
@@ -5526,8 +7031,8 @@
         </p:nvSpPr>
         <p:spPr>
           <a:xfrm>
-            <a:off x="960120" y="2057400"/>
-            <a:ext cx="2871216" cy="1508760"/>
+            <a:off x="1005840" y="2103120"/>
+            <a:ext cx="4572000" cy="3749039"/>
           </a:xfrm>
           <a:prstGeom prst="rect">
             <a:avLst/>
@@ -5541,15 +7046,15 @@
           <a:lstStyle/>
           <a:p>
             <a:pPr>
-              <a:defRPr sz="1400" b="1">
-                <a:solidFill>
-                  <a:srgbClr val="1C1917"/>
+              <a:defRPr sz="1900" b="1">
+                <a:solidFill>
+                  <a:srgbClr val="E85D04"/>
                 </a:solidFill>
                 <a:latin typeface="Georgia"/>
               </a:defRPr>
             </a:pPr>
             <a:r>
-              <a:t>📱 Real-Time Multiplayer Table Sync</a:t>
+              <a:t>Visual Menu Architecture</a:t>
             </a:r>
           </a:p>
           <a:p>
@@ -5557,15 +7062,79 @@
               <a:spcBef>
                 <a:spcPts val="800"/>
               </a:spcBef>
-              <a:defRPr sz="1100">
-                <a:solidFill>
-                  <a:srgbClr val="57534E"/>
-                </a:solidFill>
-                <a:latin typeface="Arial"/>
-              </a:defRPr>
-            </a:pPr>
-            <a:r>
-              <a:t>Multiple diners at the same table add dishes together with live guest indicators and joint tray management.</a:t>
+              <a:defRPr sz="1050">
+                <a:solidFill>
+                  <a:srgbClr val="D6D3D1"/>
+                </a:solidFill>
+                <a:latin typeface="Arial"/>
+              </a:defRPr>
+            </a:pPr>
+            <a:r>
+              <a:t>• High-Resolution Photography: Every signature dish showcases authentic culinary plating, driving immediate appetite stimulation.</a:t>
+            </a:r>
+          </a:p>
+          <a:p>
+            <a:pPr>
+              <a:spcBef>
+                <a:spcPts val="800"/>
+              </a:spcBef>
+              <a:defRPr sz="1050">
+                <a:solidFill>
+                  <a:srgbClr val="D6D3D1"/>
+                </a:solidFill>
+                <a:latin typeface="Arial"/>
+              </a:defRPr>
+            </a:pPr>
+            <a:r>
+              <a:t>• Spice Meter Calibration (1-5): Clear visual heat rating (1 = Mild Cashew Cream, 5 = Fiery Guntur Chili) prevents customer spice mismatch.</a:t>
+            </a:r>
+          </a:p>
+          <a:p>
+            <a:pPr>
+              <a:spcBef>
+                <a:spcPts val="800"/>
+              </a:spcBef>
+              <a:defRPr sz="1050">
+                <a:solidFill>
+                  <a:srgbClr val="D6D3D1"/>
+                </a:solidFill>
+                <a:latin typeface="Arial"/>
+              </a:defRPr>
+            </a:pPr>
+            <a:r>
+              <a:t>• Calorie &amp; Nutritional Info: Calorie counters and macro indicators for health-conscious diners.</a:t>
+            </a:r>
+          </a:p>
+          <a:p>
+            <a:pPr>
+              <a:spcBef>
+                <a:spcPts val="800"/>
+              </a:spcBef>
+              <a:defRPr sz="1050">
+                <a:solidFill>
+                  <a:srgbClr val="D6D3D1"/>
+                </a:solidFill>
+                <a:latin typeface="Arial"/>
+              </a:defRPr>
+            </a:pPr>
+            <a:r>
+              <a:t>• Dietary &amp; Allergen Badges: Instant filtering for Pure Veg (🟢), Non-Veg (🔴), Vegan, Jain (नो रूट वेजिटेबल्स), and 100% Gluten-Free items.</a:t>
+            </a:r>
+          </a:p>
+          <a:p>
+            <a:pPr>
+              <a:spcBef>
+                <a:spcPts val="800"/>
+              </a:spcBef>
+              <a:defRPr sz="1050">
+                <a:solidFill>
+                  <a:srgbClr val="D6D3D1"/>
+                </a:solidFill>
+                <a:latin typeface="Arial"/>
+              </a:defRPr>
+            </a:pPr>
+            <a:r>
+              <a:t>• Chef's Secret Notes &amp; Lore: Shares slow-braising times, charcoal tandoor techniques, and hand-ground spice stories directly with guests.</a:t>
             </a:r>
           </a:p>
         </p:txBody>
@@ -5578,19 +7147,17 @@
         </p:nvSpPr>
         <p:spPr>
           <a:xfrm>
-            <a:off x="4389120" y="1828800"/>
-            <a:ext cx="3328416" cy="1965960"/>
+            <a:off x="6309360" y="1828800"/>
+            <a:ext cx="5120640" cy="4297680"/>
           </a:xfrm>
           <a:prstGeom prst="roundRect">
             <a:avLst/>
           </a:prstGeom>
           <a:solidFill>
-            <a:srgbClr val="FFFFFF"/>
+            <a:srgbClr val="292524"/>
           </a:solidFill>
-          <a:ln w="12700">
-            <a:solidFill>
-              <a:srgbClr val="E7E5E4"/>
-            </a:solidFill>
+          <a:ln>
+            <a:noFill/>
           </a:ln>
         </p:spPr>
         <p:style>
@@ -5623,8 +7190,8 @@
         </p:nvSpPr>
         <p:spPr>
           <a:xfrm>
-            <a:off x="4617720" y="2057400"/>
-            <a:ext cx="2871216" cy="1508760"/>
+            <a:off x="6583680" y="2103120"/>
+            <a:ext cx="4572000" cy="3749039"/>
           </a:xfrm>
           <a:prstGeom prst="rect">
             <a:avLst/>
@@ -5638,419 +7205,79 @@
           <a:lstStyle/>
           <a:p>
             <a:pPr>
-              <a:defRPr sz="1400" b="1">
-                <a:solidFill>
-                  <a:srgbClr val="1C1917"/>
+              <a:defRPr sz="1900" b="1">
+                <a:solidFill>
+                  <a:srgbClr val="059669"/>
                 </a:solidFill>
                 <a:latin typeface="Georgia"/>
               </a:defRPr>
             </a:pPr>
             <a:r>
-              <a:t>🌐 Multilingual Engine (EN / HI / MR)</a:t>
+              <a:t>Table Service Controls</a:t>
             </a:r>
           </a:p>
           <a:p>
             <a:pPr>
               <a:spcBef>
-                <a:spcPts val="800"/>
+                <a:spcPts val="1200"/>
               </a:spcBef>
               <a:defRPr sz="1100">
                 <a:solidFill>
-                  <a:srgbClr val="57534E"/>
-                </a:solidFill>
-                <a:latin typeface="Arial"/>
-              </a:defRPr>
-            </a:pPr>
-            <a:r>
-              <a:t>English as the default primary language, with physical 1-click toggles for Hindi (हिन्दी) &amp; Marathi (मराठी).</a:t>
-            </a:r>
-          </a:p>
-        </p:txBody>
-      </p:sp>
-      <p:sp>
-        <p:nvSpPr>
-          <p:cNvPr id="10" name="Rounded Rectangle 9"/>
-          <p:cNvSpPr/>
-          <p:nvPr/>
-        </p:nvSpPr>
-        <p:spPr>
-          <a:xfrm>
-            <a:off x="8046720" y="1828800"/>
-            <a:ext cx="3328416" cy="1965960"/>
-          </a:xfrm>
-          <a:prstGeom prst="roundRect">
-            <a:avLst/>
-          </a:prstGeom>
-          <a:solidFill>
-            <a:srgbClr val="FFFFFF"/>
-          </a:solidFill>
-          <a:ln w="12700">
-            <a:solidFill>
-              <a:srgbClr val="E7E5E4"/>
-            </a:solidFill>
-          </a:ln>
-        </p:spPr>
-        <p:style>
-          <a:lnRef idx="1">
-            <a:schemeClr val="accent1"/>
-          </a:lnRef>
-          <a:fillRef idx="3">
-            <a:schemeClr val="accent1"/>
-          </a:fillRef>
-          <a:effectRef idx="2">
-            <a:schemeClr val="accent1"/>
-          </a:effectRef>
-          <a:fontRef idx="minor">
-            <a:schemeClr val="lt1"/>
-          </a:fontRef>
-        </p:style>
-        <p:txBody>
-          <a:bodyPr rtlCol="0" anchor="ctr"/>
-          <a:lstStyle/>
-          <a:p>
-            <a:pPr algn="ctr"/>
-          </a:p>
-        </p:txBody>
-      </p:sp>
-      <p:sp>
-        <p:nvSpPr>
-          <p:cNvPr id="11" name="TextBox 10"/>
-          <p:cNvSpPr txBox="1"/>
-          <p:nvPr/>
-        </p:nvSpPr>
-        <p:spPr>
-          <a:xfrm>
-            <a:off x="8275320" y="2057400"/>
-            <a:ext cx="2871216" cy="1508760"/>
-          </a:xfrm>
-          <a:prstGeom prst="rect">
-            <a:avLst/>
-          </a:prstGeom>
-          <a:noFill/>
-        </p:spPr>
-        <p:txBody>
-          <a:bodyPr wrap="square">
-            <a:spAutoFit/>
-          </a:bodyPr>
-          <a:lstStyle/>
-          <a:p>
-            <a:pPr>
-              <a:defRPr sz="1400" b="1">
-                <a:solidFill>
-                  <a:srgbClr val="1C1917"/>
-                </a:solidFill>
-                <a:latin typeface="Georgia"/>
-              </a:defRPr>
-            </a:pPr>
-            <a:r>
-              <a:t>⚡ Direct Kitchen KOT Engine</a:t>
+                  <a:srgbClr val="FFFFFF"/>
+                </a:solidFill>
+                <a:latin typeface="Arial"/>
+              </a:defRPr>
+            </a:pPr>
+            <a:r>
+              <a:t>✓ 1-Tap Waiter Call System: Diners never wave their hands frantically. 1 button tap dispatches instant notification: 'Table 4 needs assistance'.</a:t>
             </a:r>
           </a:p>
           <a:p>
             <a:pPr>
               <a:spcBef>
-                <a:spcPts val="800"/>
+                <a:spcPts val="1200"/>
               </a:spcBef>
               <a:defRPr sz="1100">
                 <a:solidFill>
-                  <a:srgbClr val="57534E"/>
-                </a:solidFill>
-                <a:latin typeface="Arial"/>
-              </a:defRPr>
-            </a:pPr>
-            <a:r>
-              <a:t>Owner-controlled direct routing to kitchen thermal printers &amp; POS lines, bypassing manual floor delays.</a:t>
-            </a:r>
-          </a:p>
-        </p:txBody>
-      </p:sp>
-      <p:sp>
-        <p:nvSpPr>
-          <p:cNvPr id="12" name="Rounded Rectangle 11"/>
-          <p:cNvSpPr/>
-          <p:nvPr/>
-        </p:nvSpPr>
-        <p:spPr>
-          <a:xfrm>
-            <a:off x="731520" y="4023360"/>
-            <a:ext cx="3328416" cy="1965960"/>
-          </a:xfrm>
-          <a:prstGeom prst="roundRect">
-            <a:avLst/>
-          </a:prstGeom>
-          <a:solidFill>
-            <a:srgbClr val="FFFFFF"/>
-          </a:solidFill>
-          <a:ln w="12700">
-            <a:solidFill>
-              <a:srgbClr val="E7E5E4"/>
-            </a:solidFill>
-          </a:ln>
-        </p:spPr>
-        <p:style>
-          <a:lnRef idx="1">
-            <a:schemeClr val="accent1"/>
-          </a:lnRef>
-          <a:fillRef idx="3">
-            <a:schemeClr val="accent1"/>
-          </a:fillRef>
-          <a:effectRef idx="2">
-            <a:schemeClr val="accent1"/>
-          </a:effectRef>
-          <a:fontRef idx="minor">
-            <a:schemeClr val="lt1"/>
-          </a:fontRef>
-        </p:style>
-        <p:txBody>
-          <a:bodyPr rtlCol="0" anchor="ctr"/>
-          <a:lstStyle/>
-          <a:p>
-            <a:pPr algn="ctr"/>
-          </a:p>
-        </p:txBody>
-      </p:sp>
-      <p:sp>
-        <p:nvSpPr>
-          <p:cNvPr id="13" name="TextBox 12"/>
-          <p:cNvSpPr txBox="1"/>
-          <p:nvPr/>
-        </p:nvSpPr>
-        <p:spPr>
-          <a:xfrm>
-            <a:off x="960120" y="4251960"/>
-            <a:ext cx="2871216" cy="1508760"/>
-          </a:xfrm>
-          <a:prstGeom prst="rect">
-            <a:avLst/>
-          </a:prstGeom>
-          <a:noFill/>
-        </p:spPr>
-        <p:txBody>
-          <a:bodyPr wrap="square">
-            <a:spAutoFit/>
-          </a:bodyPr>
-          <a:lstStyle/>
-          <a:p>
-            <a:pPr>
-              <a:defRPr sz="1400" b="1">
-                <a:solidFill>
-                  <a:srgbClr val="1C1917"/>
-                </a:solidFill>
-                <a:latin typeface="Georgia"/>
-              </a:defRPr>
-            </a:pPr>
-            <a:r>
-              <a:t>🧑‍🍳 Chef AI Sommelier &amp; Pairings</a:t>
+                  <a:srgbClr val="FFFFFF"/>
+                </a:solidFill>
+                <a:latin typeface="Arial"/>
+              </a:defRPr>
+            </a:pPr>
+            <a:r>
+              <a:t>✓ Specific Service Pings: Dedicated quick-actions: 'Request Water', 'Request Bill', 'Clean Table' alerts floor staff immediately.</a:t>
             </a:r>
           </a:p>
           <a:p>
             <a:pPr>
               <a:spcBef>
-                <a:spcPts val="800"/>
+                <a:spcPts val="1200"/>
               </a:spcBef>
               <a:defRPr sz="1100">
                 <a:solidFill>
-                  <a:srgbClr val="57534E"/>
-                </a:solidFill>
-                <a:latin typeface="Arial"/>
-              </a:defRPr>
-            </a:pPr>
-            <a:r>
-              <a:t>Curated wine/beverage pairings, auto-scrolling chef advice, and bundle discounts that increase order size by 20%+.</a:t>
-            </a:r>
-          </a:p>
-        </p:txBody>
-      </p:sp>
-      <p:sp>
-        <p:nvSpPr>
-          <p:cNvPr id="14" name="Rounded Rectangle 13"/>
-          <p:cNvSpPr/>
-          <p:nvPr/>
-        </p:nvSpPr>
-        <p:spPr>
-          <a:xfrm>
-            <a:off x="4389120" y="4023360"/>
-            <a:ext cx="3328416" cy="1965960"/>
-          </a:xfrm>
-          <a:prstGeom prst="roundRect">
-            <a:avLst/>
-          </a:prstGeom>
-          <a:solidFill>
-            <a:srgbClr val="FFFFFF"/>
-          </a:solidFill>
-          <a:ln w="12700">
-            <a:solidFill>
-              <a:srgbClr val="E7E5E4"/>
-            </a:solidFill>
-          </a:ln>
-        </p:spPr>
-        <p:style>
-          <a:lnRef idx="1">
-            <a:schemeClr val="accent1"/>
-          </a:lnRef>
-          <a:fillRef idx="3">
-            <a:schemeClr val="accent1"/>
-          </a:fillRef>
-          <a:effectRef idx="2">
-            <a:schemeClr val="accent1"/>
-          </a:effectRef>
-          <a:fontRef idx="minor">
-            <a:schemeClr val="lt1"/>
-          </a:fontRef>
-        </p:style>
-        <p:txBody>
-          <a:bodyPr rtlCol="0" anchor="ctr"/>
-          <a:lstStyle/>
-          <a:p>
-            <a:pPr algn="ctr"/>
-          </a:p>
-        </p:txBody>
-      </p:sp>
-      <p:sp>
-        <p:nvSpPr>
-          <p:cNvPr id="15" name="TextBox 14"/>
-          <p:cNvSpPr txBox="1"/>
-          <p:nvPr/>
-        </p:nvSpPr>
-        <p:spPr>
-          <a:xfrm>
-            <a:off x="4617720" y="4251960"/>
-            <a:ext cx="2871216" cy="1508760"/>
-          </a:xfrm>
-          <a:prstGeom prst="rect">
-            <a:avLst/>
-          </a:prstGeom>
-          <a:noFill/>
-        </p:spPr>
-        <p:txBody>
-          <a:bodyPr wrap="square">
-            <a:spAutoFit/>
-          </a:bodyPr>
-          <a:lstStyle/>
-          <a:p>
-            <a:pPr>
-              <a:defRPr sz="1400" b="1">
-                <a:solidFill>
-                  <a:srgbClr val="1C1917"/>
-                </a:solidFill>
-                <a:latin typeface="Georgia"/>
-              </a:defRPr>
-            </a:pPr>
-            <a:r>
-              <a:t>📸 Viral Instagram Story Studio</a:t>
+                  <a:srgbClr val="FFFFFF"/>
+                </a:solidFill>
+                <a:latin typeface="Arial"/>
+              </a:defRPr>
+            </a:pPr>
+            <a:r>
+              <a:t>✓ Active Order Tracking: Guests view their live order status: 'Order Received', 'In Tandoor / Preparing', 'Served'.</a:t>
             </a:r>
           </a:p>
           <a:p>
             <a:pPr>
               <a:spcBef>
-                <a:spcPts val="800"/>
+                <a:spcPts val="1200"/>
               </a:spcBef>
               <a:defRPr sz="1100">
                 <a:solidFill>
-                  <a:srgbClr val="57534E"/>
-                </a:solidFill>
-                <a:latin typeface="Arial"/>
-              </a:defRPr>
-            </a:pPr>
-            <a:r>
-              <a:t>Automated 9:16 vertical story cards featuring restaurant photography and tags for diner social sharing.</a:t>
-            </a:r>
-          </a:p>
-        </p:txBody>
-      </p:sp>
-      <p:sp>
-        <p:nvSpPr>
-          <p:cNvPr id="16" name="Rounded Rectangle 15"/>
-          <p:cNvSpPr/>
-          <p:nvPr/>
-        </p:nvSpPr>
-        <p:spPr>
-          <a:xfrm>
-            <a:off x="8046720" y="4023360"/>
-            <a:ext cx="3328416" cy="1965960"/>
-          </a:xfrm>
-          <a:prstGeom prst="roundRect">
-            <a:avLst/>
-          </a:prstGeom>
-          <a:solidFill>
-            <a:srgbClr val="FFFFFF"/>
-          </a:solidFill>
-          <a:ln w="12700">
-            <a:solidFill>
-              <a:srgbClr val="E7E5E4"/>
-            </a:solidFill>
-          </a:ln>
-        </p:spPr>
-        <p:style>
-          <a:lnRef idx="1">
-            <a:schemeClr val="accent1"/>
-          </a:lnRef>
-          <a:fillRef idx="3">
-            <a:schemeClr val="accent1"/>
-          </a:fillRef>
-          <a:effectRef idx="2">
-            <a:schemeClr val="accent1"/>
-          </a:effectRef>
-          <a:fontRef idx="minor">
-            <a:schemeClr val="lt1"/>
-          </a:fontRef>
-        </p:style>
-        <p:txBody>
-          <a:bodyPr rtlCol="0" anchor="ctr"/>
-          <a:lstStyle/>
-          <a:p>
-            <a:pPr algn="ctr"/>
-          </a:p>
-        </p:txBody>
-      </p:sp>
-      <p:sp>
-        <p:nvSpPr>
-          <p:cNvPr id="17" name="TextBox 16"/>
-          <p:cNvSpPr txBox="1"/>
-          <p:nvPr/>
-        </p:nvSpPr>
-        <p:spPr>
-          <a:xfrm>
-            <a:off x="8275320" y="4251960"/>
-            <a:ext cx="2871216" cy="1508760"/>
-          </a:xfrm>
-          <a:prstGeom prst="rect">
-            <a:avLst/>
-          </a:prstGeom>
-          <a:noFill/>
-        </p:spPr>
-        <p:txBody>
-          <a:bodyPr wrap="square">
-            <a:spAutoFit/>
-          </a:bodyPr>
-          <a:lstStyle/>
-          <a:p>
-            <a:pPr>
-              <a:defRPr sz="1400" b="1">
-                <a:solidFill>
-                  <a:srgbClr val="1C1917"/>
-                </a:solidFill>
-                <a:latin typeface="Georgia"/>
-              </a:defRPr>
-            </a:pPr>
-            <a:r>
-              <a:t>⭐ 4-Step Review Booster &amp; Floor Shield</a:t>
-            </a:r>
-          </a:p>
-          <a:p>
-            <a:pPr>
-              <a:spcBef>
-                <a:spcPts val="800"/>
-              </a:spcBef>
-              <a:defRPr sz="1100">
-                <a:solidFill>
-                  <a:srgbClr val="57534E"/>
-                </a:solidFill>
-                <a:latin typeface="Arial"/>
-              </a:defRPr>
-            </a:pPr>
-            <a:r>
-              <a:t>AI review generator + Google Maps verification + spin-to-win dessert wheel, with private sub-4 star manager alerts.</a:t>
+                  <a:srgbClr val="FFFFFF"/>
+                </a:solidFill>
+                <a:latin typeface="Arial"/>
+              </a:defRPr>
+            </a:pPr>
+            <a:r>
+              <a:t>✓ Zero App Downloads: Runs entirely inside standard mobile browsers (Safari / Chrome) via lightweight PWA architecture.</a:t>
             </a:r>
           </a:p>
         </p:txBody>
@@ -6088,7 +7315,7 @@
             <a:avLst/>
           </a:prstGeom>
           <a:solidFill>
-            <a:srgbClr val="1C1917"/>
+            <a:srgbClr val="FDFBF7"/>
           </a:solidFill>
           <a:ln>
             <a:noFill/>
@@ -6124,8 +7351,8 @@
         </p:nvSpPr>
         <p:spPr>
           <a:xfrm>
-            <a:off x="731520" y="411480"/>
-            <a:ext cx="10515600" cy="320040"/>
+            <a:off x="731520" y="365760"/>
+            <a:ext cx="10515600" cy="292608"/>
           </a:xfrm>
           <a:prstGeom prst="rect">
             <a:avLst/>
@@ -6160,8 +7387,8 @@
         </p:nvSpPr>
         <p:spPr>
           <a:xfrm>
-            <a:off x="731520" y="731520"/>
-            <a:ext cx="10515600" cy="548640"/>
+            <a:off x="731520" y="685800"/>
+            <a:ext cx="10515600" cy="502920"/>
           </a:xfrm>
           <a:prstGeom prst="rect">
             <a:avLst/>
@@ -6175,15 +7402,15 @@
           <a:lstStyle/>
           <a:p>
             <a:pPr>
-              <a:defRPr sz="2400" b="1">
-                <a:solidFill>
-                  <a:srgbClr val="FFFFFF"/>
+              <a:defRPr sz="2200" b="1">
+                <a:solidFill>
+                  <a:srgbClr val="1C1917"/>
                 </a:solidFill>
                 <a:latin typeface="Georgia"/>
               </a:defRPr>
             </a:pPr>
             <a:r>
-              <a:t>Live Table Cart Sync &amp; Joint Ordering</a:t>
+              <a:t>Real-Time Table Sync: Group Dining Reimagined</a:t>
             </a:r>
           </a:p>
         </p:txBody>
@@ -6196,7 +7423,7 @@
         </p:nvSpPr>
         <p:spPr>
           <a:xfrm>
-            <a:off x="731520" y="1298448"/>
+            <a:off x="731520" y="1234440"/>
             <a:ext cx="10515600" cy="365760"/>
           </a:xfrm>
           <a:prstGeom prst="rect">
@@ -6211,15 +7438,15 @@
           <a:lstStyle/>
           <a:p>
             <a:pPr>
-              <a:defRPr sz="1200">
-                <a:solidFill>
-                  <a:srgbClr val="D6D3D1"/>
-                </a:solidFill>
-                <a:latin typeface="Arial"/>
-              </a:defRPr>
-            </a:pPr>
-            <a:r>
-              <a:t>Transform dining from isolated smartphone screens into an engaging group ritual.</a:t>
+              <a:defRPr sz="1150">
+                <a:solidFill>
+                  <a:srgbClr val="57534E"/>
+                </a:solidFill>
+                <a:latin typeface="Arial"/>
+              </a:defRPr>
+            </a:pPr>
+            <a:r>
+              <a:t>Multiple phones at the same table add dishes together into one synchronized live cart.</a:t>
             </a:r>
           </a:p>
         </p:txBody>
@@ -6232,17 +7459,19 @@
         </p:nvSpPr>
         <p:spPr>
           <a:xfrm>
-            <a:off x="731520" y="1920240"/>
-            <a:ext cx="5120640" cy="4114800"/>
+            <a:off x="731520" y="1828800"/>
+            <a:ext cx="3328416" cy="4297680"/>
           </a:xfrm>
           <a:prstGeom prst="roundRect">
             <a:avLst/>
           </a:prstGeom>
           <a:solidFill>
-            <a:srgbClr val="292524"/>
+            <a:srgbClr val="FFFFFF"/>
           </a:solidFill>
-          <a:ln>
-            <a:noFill/>
+          <a:ln w="12700">
+            <a:solidFill>
+              <a:srgbClr val="E7E5E4"/>
+            </a:solidFill>
           </a:ln>
         </p:spPr>
         <p:style>
@@ -6275,8 +7504,8 @@
         </p:nvSpPr>
         <p:spPr>
           <a:xfrm>
-            <a:off x="1097280" y="2194560"/>
-            <a:ext cx="4389120" cy="3474720"/>
+            <a:off x="1005840" y="2103120"/>
+            <a:ext cx="2779776" cy="3657600"/>
           </a:xfrm>
           <a:prstGeom prst="rect">
             <a:avLst/>
@@ -6290,7 +7519,7 @@
           <a:lstStyle/>
           <a:p>
             <a:pPr>
-              <a:defRPr sz="2000" b="1">
+              <a:defRPr sz="1700" b="1">
                 <a:solidFill>
                   <a:srgbClr val="E85D04"/>
                 </a:solidFill>
@@ -6298,71 +7527,39 @@
               </a:defRPr>
             </a:pPr>
             <a:r>
-              <a:t>How Multiplayer Table Sync Works</a:t>
+              <a:t>Live Shared Table Tray</a:t>
             </a:r>
           </a:p>
           <a:p>
             <a:pPr>
               <a:spcBef>
-                <a:spcPts val="1000"/>
+                <a:spcPts val="400"/>
+              </a:spcBef>
+              <a:defRPr sz="1000" b="1">
+                <a:solidFill>
+                  <a:srgbClr val="2563EB"/>
+                </a:solidFill>
+                <a:latin typeface="Arial"/>
+              </a:defRPr>
+            </a:pPr>
+            <a:r>
+              <a:t>HOW IT WORKS</a:t>
+            </a:r>
+          </a:p>
+          <a:p>
+            <a:pPr>
+              <a:spcBef>
+                <a:spcPts val="1400"/>
               </a:spcBef>
               <a:defRPr sz="1150">
                 <a:solidFill>
-                  <a:srgbClr val="D6D3D1"/>
-                </a:solidFill>
-                <a:latin typeface="Arial"/>
-              </a:defRPr>
-            </a:pPr>
-            <a:r>
-              <a:t>• Zero App Installation: Guests scan the table QR code and are instantly grouped into Table X's live shared dining session.</a:t>
-            </a:r>
-          </a:p>
-          <a:p>
-            <a:pPr>
-              <a:spcBef>
-                <a:spcPts val="1000"/>
-              </a:spcBef>
-              <a:defRPr sz="1150">
-                <a:solidFill>
-                  <a:srgbClr val="D6D3D1"/>
-                </a:solidFill>
-                <a:latin typeface="Arial"/>
-              </a:defRPr>
-            </a:pPr>
-            <a:r>
-              <a:t>• Multi-Guest Attribution: Each added dish displays the guest identifier (e.g. '👤 Guest 2') so everyone knows who ordered what.</a:t>
-            </a:r>
-          </a:p>
-          <a:p>
-            <a:pPr>
-              <a:spcBef>
-                <a:spcPts val="1000"/>
-              </a:spcBef>
-              <a:defRPr sz="1150">
-                <a:solidFill>
-                  <a:srgbClr val="D6D3D1"/>
-                </a:solidFill>
-                <a:latin typeface="Arial"/>
-              </a:defRPr>
-            </a:pPr>
-            <a:r>
-              <a:t>• Instant Tray Synchronization: Quantities, customizations, and spice levels update dynamically across all phones at the table in real-time.</a:t>
-            </a:r>
-          </a:p>
-          <a:p>
-            <a:pPr>
-              <a:spcBef>
-                <a:spcPts val="1000"/>
-              </a:spcBef>
-              <a:defRPr sz="1150">
-                <a:solidFill>
-                  <a:srgbClr val="D6D3D1"/>
-                </a:solidFill>
-                <a:latin typeface="Arial"/>
-              </a:defRPr>
-            </a:pPr>
-            <a:r>
-              <a:t>• Single Joint Kitchen Dispatch: Table can review the unified order, add special cooking notes, and dispatch directly to the kitchen in one click.</a:t>
+                  <a:srgbClr val="57534E"/>
+                </a:solidFill>
+                <a:latin typeface="Arial"/>
+              </a:defRPr>
+            </a:pPr>
+            <a:r>
+              <a:t>When a family or group sits at Table 4, everyone scans the QR code. All phones connect to the same shared table session via WebSockets with &lt;100ms sync latency.</a:t>
             </a:r>
           </a:p>
         </p:txBody>
@@ -6375,17 +7572,19 @@
         </p:nvSpPr>
         <p:spPr>
           <a:xfrm>
-            <a:off x="6217920" y="1920240"/>
-            <a:ext cx="5212080" cy="4114800"/>
+            <a:off x="4389120" y="1828800"/>
+            <a:ext cx="3328416" cy="4297680"/>
           </a:xfrm>
           <a:prstGeom prst="roundRect">
             <a:avLst/>
           </a:prstGeom>
           <a:solidFill>
-            <a:srgbClr val="292524"/>
+            <a:srgbClr val="FFFFFF"/>
           </a:solidFill>
-          <a:ln>
-            <a:noFill/>
+          <a:ln w="12700">
+            <a:solidFill>
+              <a:srgbClr val="E7E5E4"/>
+            </a:solidFill>
           </a:ln>
         </p:spPr>
         <p:style>
@@ -6418,8 +7617,8 @@
         </p:nvSpPr>
         <p:spPr>
           <a:xfrm>
-            <a:off x="6583680" y="2194560"/>
-            <a:ext cx="4480560" cy="3474720"/>
+            <a:off x="4663440" y="2103120"/>
+            <a:ext cx="2779776" cy="3657600"/>
           </a:xfrm>
           <a:prstGeom prst="rect">
             <a:avLst/>
@@ -6433,15 +7632,31 @@
           <a:lstStyle/>
           <a:p>
             <a:pPr>
-              <a:defRPr sz="2000" b="1">
-                <a:solidFill>
-                  <a:srgbClr val="059669"/>
+              <a:defRPr sz="1700" b="1">
+                <a:solidFill>
+                  <a:srgbClr val="E85D04"/>
                 </a:solidFill>
                 <a:latin typeface="Georgia"/>
               </a:defRPr>
             </a:pPr>
             <a:r>
-              <a:t>Operational &amp; Business Impact</a:t>
+              <a:t>Clear Guest Attribution</a:t>
+            </a:r>
+          </a:p>
+          <a:p>
+            <a:pPr>
+              <a:spcBef>
+                <a:spcPts val="400"/>
+              </a:spcBef>
+              <a:defRPr sz="1000" b="1">
+                <a:solidFill>
+                  <a:srgbClr val="2563EB"/>
+                </a:solidFill>
+                <a:latin typeface="Arial"/>
+              </a:defRPr>
+            </a:pPr>
+            <a:r>
+              <a:t>WHO ORDERED WHAT</a:t>
             </a:r>
           </a:p>
           <a:p>
@@ -6449,15 +7664,112 @@
               <a:spcBef>
                 <a:spcPts val="1400"/>
               </a:spcBef>
-              <a:defRPr sz="1200">
-                <a:solidFill>
-                  <a:srgbClr val="FFFFFF"/>
-                </a:solidFill>
-                <a:latin typeface="Arial"/>
-              </a:defRPr>
-            </a:pPr>
-            <a:r>
-              <a:t>✓ No Disjointed Tickets: Prevents duplicate or fragmented orders coming from the same table at different times.</a:t>
+              <a:defRPr sz="1150">
+                <a:solidFill>
+                  <a:srgbClr val="57534E"/>
+                </a:solidFill>
+                <a:latin typeface="Arial"/>
+              </a:defRPr>
+            </a:pPr>
+            <a:r>
+              <a:t>Every dish in the cart displays the diner's identifier ('👤 Guest 1 - Host', '👤 Guest 2 - Rohan'). Eliminates confusion over who ordered what dish.</a:t>
+            </a:r>
+          </a:p>
+        </p:txBody>
+      </p:sp>
+      <p:sp>
+        <p:nvSpPr>
+          <p:cNvPr id="10" name="Rounded Rectangle 9"/>
+          <p:cNvSpPr/>
+          <p:nvPr/>
+        </p:nvSpPr>
+        <p:spPr>
+          <a:xfrm>
+            <a:off x="8046720" y="1828800"/>
+            <a:ext cx="3328416" cy="4297680"/>
+          </a:xfrm>
+          <a:prstGeom prst="roundRect">
+            <a:avLst/>
+          </a:prstGeom>
+          <a:solidFill>
+            <a:srgbClr val="FFFFFF"/>
+          </a:solidFill>
+          <a:ln w="12700">
+            <a:solidFill>
+              <a:srgbClr val="E7E5E4"/>
+            </a:solidFill>
+          </a:ln>
+        </p:spPr>
+        <p:style>
+          <a:lnRef idx="1">
+            <a:schemeClr val="accent1"/>
+          </a:lnRef>
+          <a:fillRef idx="3">
+            <a:schemeClr val="accent1"/>
+          </a:fillRef>
+          <a:effectRef idx="2">
+            <a:schemeClr val="accent1"/>
+          </a:effectRef>
+          <a:fontRef idx="minor">
+            <a:schemeClr val="lt1"/>
+          </a:fontRef>
+        </p:style>
+        <p:txBody>
+          <a:bodyPr rtlCol="0" anchor="ctr"/>
+          <a:lstStyle/>
+          <a:p>
+            <a:pPr algn="ctr"/>
+          </a:p>
+        </p:txBody>
+      </p:sp>
+      <p:sp>
+        <p:nvSpPr>
+          <p:cNvPr id="11" name="TextBox 10"/>
+          <p:cNvSpPr txBox="1"/>
+          <p:nvPr/>
+        </p:nvSpPr>
+        <p:spPr>
+          <a:xfrm>
+            <a:off x="8321040" y="2103120"/>
+            <a:ext cx="2779776" cy="3657600"/>
+          </a:xfrm>
+          <a:prstGeom prst="rect">
+            <a:avLst/>
+          </a:prstGeom>
+          <a:noFill/>
+        </p:spPr>
+        <p:txBody>
+          <a:bodyPr wrap="square">
+            <a:spAutoFit/>
+          </a:bodyPr>
+          <a:lstStyle/>
+          <a:p>
+            <a:pPr>
+              <a:defRPr sz="1700" b="1">
+                <a:solidFill>
+                  <a:srgbClr val="E85D04"/>
+                </a:solidFill>
+                <a:latin typeface="Georgia"/>
+              </a:defRPr>
+            </a:pPr>
+            <a:r>
+              <a:t>Zero Duplicate Orders</a:t>
+            </a:r>
+          </a:p>
+          <a:p>
+            <a:pPr>
+              <a:spcBef>
+                <a:spcPts val="400"/>
+              </a:spcBef>
+              <a:defRPr sz="1000" b="1">
+                <a:solidFill>
+                  <a:srgbClr val="2563EB"/>
+                </a:solidFill>
+                <a:latin typeface="Arial"/>
+              </a:defRPr>
+            </a:pPr>
+            <a:r>
+              <a:t>KITCHEN EFFICIENCY</a:t>
             </a:r>
           </a:p>
           <a:p>
@@ -6465,31 +7777,15 @@
               <a:spcBef>
                 <a:spcPts val="1400"/>
               </a:spcBef>
-              <a:defRPr sz="1200">
-                <a:solidFill>
-                  <a:srgbClr val="FFFFFF"/>
-                </a:solidFill>
-                <a:latin typeface="Arial"/>
-              </a:defRPr>
-            </a:pPr>
-            <a:r>
-              <a:t>✓ Higher Average Order Value (+22%): Guests see appetizing items and cocktail pairings ordered by table companions and add their own.</a:t>
-            </a:r>
-          </a:p>
-          <a:p>
-            <a:pPr>
-              <a:spcBef>
-                <a:spcPts val="1400"/>
-              </a:spcBef>
-              <a:defRPr sz="1200">
-                <a:solidFill>
-                  <a:srgbClr val="FFFFFF"/>
-                </a:solidFill>
-                <a:latin typeface="Arial"/>
-              </a:defRPr>
-            </a:pPr>
-            <a:r>
-              <a:t>✓ Drastic Floor Labor Savings: Waitstaff no longer spend 8-12 minutes per table writing down individual orders; they focus on hospitality.</a:t>
+              <a:defRPr sz="1150">
+                <a:solidFill>
+                  <a:srgbClr val="57534E"/>
+                </a:solidFill>
+                <a:latin typeface="Arial"/>
+              </a:defRPr>
+            </a:pPr>
+            <a:r>
+              <a:t>Table reviews the unified cart together before dispatch. Eliminates disjointed orders and ensures the kitchen receives one harmonious KOT.</a:t>
             </a:r>
           </a:p>
         </p:txBody>
@@ -6527,7 +7823,7 @@
             <a:avLst/>
           </a:prstGeom>
           <a:solidFill>
-            <a:srgbClr val="FDFBF7"/>
+            <a:srgbClr val="1C1917"/>
           </a:solidFill>
           <a:ln>
             <a:noFill/>
@@ -6563,8 +7859,8 @@
         </p:nvSpPr>
         <p:spPr>
           <a:xfrm>
-            <a:off x="731520" y="411480"/>
-            <a:ext cx="10515600" cy="320040"/>
+            <a:off x="731520" y="365760"/>
+            <a:ext cx="10515600" cy="292608"/>
           </a:xfrm>
           <a:prstGeom prst="rect">
             <a:avLst/>
@@ -6586,7 +7882,7 @@
               </a:defRPr>
             </a:pPr>
             <a:r>
-              <a:t>REGIONAL INCLUSIVITY</a:t>
+              <a:t>AI DINING CONCIERGE</a:t>
             </a:r>
           </a:p>
         </p:txBody>
@@ -6599,8 +7895,8 @@
         </p:nvSpPr>
         <p:spPr>
           <a:xfrm>
-            <a:off x="731520" y="731520"/>
-            <a:ext cx="10515600" cy="548640"/>
+            <a:off x="731520" y="685800"/>
+            <a:ext cx="10515600" cy="502920"/>
           </a:xfrm>
           <a:prstGeom prst="rect">
             <a:avLst/>
@@ -6614,15 +7910,15 @@
           <a:lstStyle/>
           <a:p>
             <a:pPr>
-              <a:defRPr sz="2400" b="1">
-                <a:solidFill>
-                  <a:srgbClr val="1C1917"/>
+              <a:defRPr sz="2200" b="1">
+                <a:solidFill>
+                  <a:srgbClr val="FFFFFF"/>
                 </a:solidFill>
                 <a:latin typeface="Georgia"/>
               </a:defRPr>
             </a:pPr>
             <a:r>
-              <a:t>Multilingual Dining: English Primary, Hindi &amp; Marathi</a:t>
+              <a:t>Chef AI Sommelier: Always Answering, Auto-Scrolling</a:t>
             </a:r>
           </a:p>
         </p:txBody>
@@ -6635,7 +7931,7 @@
         </p:nvSpPr>
         <p:spPr>
           <a:xfrm>
-            <a:off x="731520" y="1298448"/>
+            <a:off x="731520" y="1234440"/>
             <a:ext cx="10515600" cy="365760"/>
           </a:xfrm>
           <a:prstGeom prst="rect">
@@ -6650,15 +7946,15 @@
           <a:lstStyle/>
           <a:p>
             <a:pPr>
-              <a:defRPr sz="1200">
-                <a:solidFill>
-                  <a:srgbClr val="57534E"/>
-                </a:solidFill>
-                <a:latin typeface="Arial"/>
-              </a:defRPr>
-            </a:pPr>
-            <a:r>
-              <a:t>Preserving global appeal while honoring local hospitality and regional language preference.</a:t>
+              <a:defRPr sz="1150">
+                <a:solidFill>
+                  <a:srgbClr val="D6D3D1"/>
+                </a:solidFill>
+                <a:latin typeface="Arial"/>
+              </a:defRPr>
+            </a:pPr>
+            <a:r>
+              <a:t>A personalized conversational AI trained directly on your head chef's recipes and owner's upsell rules.</a:t>
             </a:r>
           </a:p>
         </p:txBody>
@@ -6671,19 +7967,17 @@
         </p:nvSpPr>
         <p:spPr>
           <a:xfrm>
-            <a:off x="731520" y="1920240"/>
-            <a:ext cx="3328416" cy="4114800"/>
+            <a:off x="731520" y="1828800"/>
+            <a:ext cx="10728655" cy="4297680"/>
           </a:xfrm>
           <a:prstGeom prst="roundRect">
             <a:avLst/>
           </a:prstGeom>
           <a:solidFill>
-            <a:srgbClr val="FFFFFF"/>
+            <a:srgbClr val="292524"/>
           </a:solidFill>
-          <a:ln w="12700">
-            <a:solidFill>
-              <a:srgbClr val="E7E5E4"/>
-            </a:solidFill>
+          <a:ln>
+            <a:noFill/>
           </a:ln>
         </p:spPr>
         <p:style>
@@ -6716,8 +8010,8 @@
         </p:nvSpPr>
         <p:spPr>
           <a:xfrm>
-            <a:off x="1005840" y="2194560"/>
-            <a:ext cx="2779776" cy="3474720"/>
+            <a:off x="1097280" y="2103120"/>
+            <a:ext cx="9966960" cy="3749039"/>
           </a:xfrm>
           <a:prstGeom prst="rect">
             <a:avLst/>
@@ -6731,7 +8025,7 @@
           <a:lstStyle/>
           <a:p>
             <a:pPr>
-              <a:defRPr sz="1800" b="1">
+              <a:defRPr sz="1900" b="1">
                 <a:solidFill>
                   <a:srgbClr val="E85D04"/>
                 </a:solidFill>
@@ -6739,265 +8033,71 @@
               </a:defRPr>
             </a:pPr>
             <a:r>
-              <a:t>English (Default Primary)</a:t>
+              <a:t>Key Conversational Capabilities &amp; UX Upgrades</a:t>
             </a:r>
           </a:p>
           <a:p>
             <a:pPr>
               <a:spcBef>
-                <a:spcPts val="400"/>
+                <a:spcPts val="1200"/>
               </a:spcBef>
-              <a:defRPr sz="1000" b="1">
-                <a:solidFill>
-                  <a:srgbClr val="2563EB"/>
-                </a:solidFill>
-                <a:latin typeface="Arial"/>
-              </a:defRPr>
-            </a:pPr>
-            <a:r>
-              <a:t>STRICT RULE: ALWAYS FIRST</a:t>
+              <a:defRPr sz="1150">
+                <a:solidFill>
+                  <a:srgbClr val="FFFFFF"/>
+                </a:solidFill>
+                <a:latin typeface="Arial"/>
+              </a:defRPr>
+            </a:pPr>
+            <a:r>
+              <a:t>✨ Auto-Scroll Response UX: When a diner taps a suggestion chip (e.g. 'Is the Butter Chicken spicy?', 'Pair a wine with Dal Makhani'), the chat window automatically follows the response so the diner reads the answer without physical scrolling.</a:t>
             </a:r>
           </a:p>
           <a:p>
             <a:pPr>
               <a:spcBef>
-                <a:spcPts val="1400"/>
+                <a:spcPts val="1200"/>
               </a:spcBef>
-              <a:defRPr sz="1200">
-                <a:solidFill>
-                  <a:srgbClr val="57534E"/>
-                </a:solidFill>
-                <a:latin typeface="Arial"/>
-              </a:defRPr>
-            </a:pPr>
-            <a:r>
-              <a:t>English is hardcoded as the primary launch language for 100% of devices. No arbitrary IP or browser locale redirection. Global diners feel instantly at home.</a:t>
-            </a:r>
-          </a:p>
-        </p:txBody>
-      </p:sp>
-      <p:sp>
-        <p:nvSpPr>
-          <p:cNvPr id="8" name="Rounded Rectangle 7"/>
-          <p:cNvSpPr/>
-          <p:nvPr/>
-        </p:nvSpPr>
-        <p:spPr>
-          <a:xfrm>
-            <a:off x="4389120" y="1920240"/>
-            <a:ext cx="3328416" cy="4114800"/>
-          </a:xfrm>
-          <a:prstGeom prst="roundRect">
-            <a:avLst/>
-          </a:prstGeom>
-          <a:solidFill>
-            <a:srgbClr val="FFFFFF"/>
-          </a:solidFill>
-          <a:ln w="12700">
-            <a:solidFill>
-              <a:srgbClr val="E7E5E4"/>
-            </a:solidFill>
-          </a:ln>
-        </p:spPr>
-        <p:style>
-          <a:lnRef idx="1">
-            <a:schemeClr val="accent1"/>
-          </a:lnRef>
-          <a:fillRef idx="3">
-            <a:schemeClr val="accent1"/>
-          </a:fillRef>
-          <a:effectRef idx="2">
-            <a:schemeClr val="accent1"/>
-          </a:effectRef>
-          <a:fontRef idx="minor">
-            <a:schemeClr val="lt1"/>
-          </a:fontRef>
-        </p:style>
-        <p:txBody>
-          <a:bodyPr rtlCol="0" anchor="ctr"/>
-          <a:lstStyle/>
-          <a:p>
-            <a:pPr algn="ctr"/>
-          </a:p>
-        </p:txBody>
-      </p:sp>
-      <p:sp>
-        <p:nvSpPr>
-          <p:cNvPr id="9" name="TextBox 8"/>
-          <p:cNvSpPr txBox="1"/>
-          <p:nvPr/>
-        </p:nvSpPr>
-        <p:spPr>
-          <a:xfrm>
-            <a:off x="4663440" y="2194560"/>
-            <a:ext cx="2779776" cy="3474720"/>
-          </a:xfrm>
-          <a:prstGeom prst="rect">
-            <a:avLst/>
-          </a:prstGeom>
-          <a:noFill/>
-        </p:spPr>
-        <p:txBody>
-          <a:bodyPr wrap="square">
-            <a:spAutoFit/>
-          </a:bodyPr>
-          <a:lstStyle/>
-          <a:p>
-            <a:pPr>
-              <a:defRPr sz="1800" b="1">
-                <a:solidFill>
-                  <a:srgbClr val="1C1917"/>
-                </a:solidFill>
-                <a:latin typeface="Georgia"/>
-              </a:defRPr>
-            </a:pPr>
-            <a:r>
-              <a:t>हिन्दी (Hindi Native)</a:t>
+              <a:defRPr sz="1150">
+                <a:solidFill>
+                  <a:srgbClr val="FFFFFF"/>
+                </a:solidFill>
+                <a:latin typeface="Arial"/>
+              </a:defRPr>
+            </a:pPr>
+            <a:r>
+              <a:t>✨ Trained by Head Chef: Speaks with authentic authority on secret charcoal marinades, spice calibrations, and cooking times. Zero hallucinations — answers only from your verified recipe dataset.</a:t>
             </a:r>
           </a:p>
           <a:p>
             <a:pPr>
               <a:spcBef>
-                <a:spcPts val="400"/>
+                <a:spcPts val="1200"/>
               </a:spcBef>
-              <a:defRPr sz="1000" b="1">
-                <a:solidFill>
-                  <a:srgbClr val="059669"/>
-                </a:solidFill>
-                <a:latin typeface="Arial"/>
-              </a:defRPr>
-            </a:pPr>
-            <a:r>
-              <a:t>PHYSICAL 1-CLICK TOGGLE</a:t>
+              <a:defRPr sz="1150">
+                <a:solidFill>
+                  <a:srgbClr val="FFFFFF"/>
+                </a:solidFill>
+                <a:latin typeface="Arial"/>
+              </a:defRPr>
+            </a:pPr>
+            <a:r>
+              <a:t>✨ Trained by Restaurant Owner: Subtly steers diners toward high-margin coolers, tandoori breads, and signature house desserts, increasing table check size naturally.</a:t>
             </a:r>
           </a:p>
           <a:p>
             <a:pPr>
               <a:spcBef>
-                <a:spcPts val="1400"/>
+                <a:spcPts val="1200"/>
               </a:spcBef>
-              <a:defRPr sz="1200">
-                <a:solidFill>
-                  <a:srgbClr val="57534E"/>
-                </a:solidFill>
-                <a:latin typeface="Arial"/>
-              </a:defRPr>
-            </a:pPr>
-            <a:r>
-              <a:t>Comprehensive native translation for Starters, Main Course, Biryani, special kitchen cooking notes (खास स्वयंपाक सूचना), and kitchen dispatch.</a:t>
-            </a:r>
-          </a:p>
-        </p:txBody>
-      </p:sp>
-      <p:sp>
-        <p:nvSpPr>
-          <p:cNvPr id="10" name="Rounded Rectangle 9"/>
-          <p:cNvSpPr/>
-          <p:nvPr/>
-        </p:nvSpPr>
-        <p:spPr>
-          <a:xfrm>
-            <a:off x="8046720" y="1920240"/>
-            <a:ext cx="3328416" cy="4114800"/>
-          </a:xfrm>
-          <a:prstGeom prst="roundRect">
-            <a:avLst/>
-          </a:prstGeom>
-          <a:solidFill>
-            <a:srgbClr val="FFFFFF"/>
-          </a:solidFill>
-          <a:ln w="12700">
-            <a:solidFill>
-              <a:srgbClr val="E7E5E4"/>
-            </a:solidFill>
-          </a:ln>
-        </p:spPr>
-        <p:style>
-          <a:lnRef idx="1">
-            <a:schemeClr val="accent1"/>
-          </a:lnRef>
-          <a:fillRef idx="3">
-            <a:schemeClr val="accent1"/>
-          </a:fillRef>
-          <a:effectRef idx="2">
-            <a:schemeClr val="accent1"/>
-          </a:effectRef>
-          <a:fontRef idx="minor">
-            <a:schemeClr val="lt1"/>
-          </a:fontRef>
-        </p:style>
-        <p:txBody>
-          <a:bodyPr rtlCol="0" anchor="ctr"/>
-          <a:lstStyle/>
-          <a:p>
-            <a:pPr algn="ctr"/>
-          </a:p>
-        </p:txBody>
-      </p:sp>
-      <p:sp>
-        <p:nvSpPr>
-          <p:cNvPr id="11" name="TextBox 10"/>
-          <p:cNvSpPr txBox="1"/>
-          <p:nvPr/>
-        </p:nvSpPr>
-        <p:spPr>
-          <a:xfrm>
-            <a:off x="8321040" y="2194560"/>
-            <a:ext cx="2779776" cy="3474720"/>
-          </a:xfrm>
-          <a:prstGeom prst="rect">
-            <a:avLst/>
-          </a:prstGeom>
-          <a:noFill/>
-        </p:spPr>
-        <p:txBody>
-          <a:bodyPr wrap="square">
-            <a:spAutoFit/>
-          </a:bodyPr>
-          <a:lstStyle/>
-          <a:p>
-            <a:pPr>
-              <a:defRPr sz="1800" b="1">
-                <a:solidFill>
-                  <a:srgbClr val="1C1917"/>
-                </a:solidFill>
-                <a:latin typeface="Georgia"/>
-              </a:defRPr>
-            </a:pPr>
-            <a:r>
-              <a:t>मराठी (Marathi Native)</a:t>
-            </a:r>
-          </a:p>
-          <a:p>
-            <a:pPr>
-              <a:spcBef>
-                <a:spcPts val="400"/>
-              </a:spcBef>
-              <a:defRPr sz="1000" b="1">
-                <a:solidFill>
-                  <a:srgbClr val="059669"/>
-                </a:solidFill>
-                <a:latin typeface="Arial"/>
-              </a:defRPr>
-            </a:pPr>
-            <a:r>
-              <a:t>LOCAL CULTURAL RESONANCE</a:t>
-            </a:r>
-          </a:p>
-          <a:p>
-            <a:pPr>
-              <a:spcBef>
-                <a:spcPts val="1400"/>
-              </a:spcBef>
-              <a:defRPr sz="1200">
-                <a:solidFill>
-                  <a:srgbClr val="57534E"/>
-                </a:solidFill>
-                <a:latin typeface="Arial"/>
-              </a:defRPr>
-            </a:pPr>
-            <a:r>
-              <a:t>Full regional translation celebrating Maharashtra's food culture (बिर्याणी, स्टार्टर्स, गोड पदार्थ, कॅप्टनला बोलवा), providing warm familiarity for family dining.</a:t>
+              <a:defRPr sz="1150">
+                <a:solidFill>
+                  <a:srgbClr val="FFFFFF"/>
+                </a:solidFill>
+                <a:latin typeface="Arial"/>
+              </a:defRPr>
+            </a:pPr>
+            <a:r>
+              <a:t>✨ Allergy &amp; Dietary Guarantee: Verifies kitchen cross-contamination safety protocols for gluten-free, nut-free, and Jain requirements with 100% confidence.</a:t>
             </a:r>
           </a:p>
         </p:txBody>
@@ -7071,8 +8171,8 @@
         </p:nvSpPr>
         <p:spPr>
           <a:xfrm>
-            <a:off x="731520" y="411480"/>
-            <a:ext cx="10515600" cy="320040"/>
+            <a:off x="731520" y="365760"/>
+            <a:ext cx="10515600" cy="292608"/>
           </a:xfrm>
           <a:prstGeom prst="rect">
             <a:avLst/>
@@ -7094,7 +8194,7 @@
               </a:defRPr>
             </a:pPr>
             <a:r>
-              <a:t>KITCHEN OPERATIONS</a:t>
+              <a:t>REVENUE ENGINE</a:t>
             </a:r>
           </a:p>
         </p:txBody>
@@ -7107,8 +8207,8 @@
         </p:nvSpPr>
         <p:spPr>
           <a:xfrm>
-            <a:off x="731520" y="731520"/>
-            <a:ext cx="10515600" cy="548640"/>
+            <a:off x="731520" y="685800"/>
+            <a:ext cx="10515600" cy="502920"/>
           </a:xfrm>
           <a:prstGeom prst="rect">
             <a:avLst/>
@@ -7122,7 +8222,7 @@
           <a:lstStyle/>
           <a:p>
             <a:pPr>
-              <a:defRPr sz="2400" b="1">
+              <a:defRPr sz="2200" b="1">
                 <a:solidFill>
                   <a:srgbClr val="1C1917"/>
                 </a:solidFill>
@@ -7130,7 +8230,7 @@
               </a:defRPr>
             </a:pPr>
             <a:r>
-              <a:t>Direct Kitchen KOT: 100% Owner-Controlled &amp; Optional</a:t>
+              <a:t>Smart Chef Pairings &amp; High-Margin Upsell Engine</a:t>
             </a:r>
           </a:p>
         </p:txBody>
@@ -7143,7 +8243,7 @@
         </p:nvSpPr>
         <p:spPr>
           <a:xfrm>
-            <a:off x="731520" y="1298448"/>
+            <a:off x="731520" y="1234440"/>
             <a:ext cx="10515600" cy="365760"/>
           </a:xfrm>
           <a:prstGeom prst="rect">
@@ -7158,7 +8258,7 @@
           <a:lstStyle/>
           <a:p>
             <a:pPr>
-              <a:defRPr sz="1200">
+              <a:defRPr sz="1150">
                 <a:solidFill>
                   <a:srgbClr val="57534E"/>
                 </a:solidFill>
@@ -7166,7 +8266,7 @@
               </a:defRPr>
             </a:pPr>
             <a:r>
-              <a:t>Empowering the restaurant owner to choose between automated line printing and manual captain approval.</a:t>
+              <a:t>Increasing average ticket sizes by +22% with contextual beverage &amp; side bundle suggestions.</a:t>
             </a:r>
           </a:p>
         </p:txBody>
@@ -7179,8 +8279,8 @@
         </p:nvSpPr>
         <p:spPr>
           <a:xfrm>
-            <a:off x="731520" y="1920240"/>
-            <a:ext cx="5120640" cy="4206240"/>
+            <a:off x="731520" y="1828800"/>
+            <a:ext cx="3328416" cy="4297680"/>
           </a:xfrm>
           <a:prstGeom prst="roundRect">
             <a:avLst/>
@@ -7224,8 +8324,8 @@
         </p:nvSpPr>
         <p:spPr>
           <a:xfrm>
-            <a:off x="1005840" y="2194560"/>
-            <a:ext cx="4572000" cy="3657600"/>
+            <a:off x="1005840" y="2103120"/>
+            <a:ext cx="2779776" cy="3657600"/>
           </a:xfrm>
           <a:prstGeom prst="rect">
             <a:avLst/>
@@ -7239,7 +8339,7 @@
           <a:lstStyle/>
           <a:p>
             <a:pPr>
-              <a:defRPr sz="1800" b="1">
+              <a:defRPr sz="1700" b="1">
                 <a:solidFill>
                   <a:srgbClr val="E85D04"/>
                 </a:solidFill>
@@ -7247,71 +8347,39 @@
               </a:defRPr>
             </a:pPr>
             <a:r>
-              <a:t>Mode A: Direct Auto-KOT to Kitchen</a:t>
+              <a:t>Contextual Pairing Suggestions</a:t>
             </a:r>
           </a:p>
           <a:p>
             <a:pPr>
               <a:spcBef>
-                <a:spcPts val="800"/>
+                <a:spcPts val="400"/>
+              </a:spcBef>
+              <a:defRPr sz="1000" b="1">
+                <a:solidFill>
+                  <a:srgbClr val="2563EB"/>
+                </a:solidFill>
+                <a:latin typeface="Arial"/>
+              </a:defRPr>
+            </a:pPr>
+            <a:r>
+              <a:t>AUTOMATIC DETECTION</a:t>
+            </a:r>
+          </a:p>
+          <a:p>
+            <a:pPr>
+              <a:spcBef>
+                <a:spcPts val="1400"/>
               </a:spcBef>
               <a:defRPr sz="1150">
                 <a:solidFill>
-                  <a:srgbClr val="1C1917"/>
-                </a:solidFill>
-                <a:latin typeface="Arial"/>
-              </a:defRPr>
-            </a:pPr>
-            <a:r>
-              <a:t>⚡ Instant thermal printout at kitchen station (ESC/POS 80mm)</a:t>
-            </a:r>
-          </a:p>
-          <a:p>
-            <a:pPr>
-              <a:spcBef>
-                <a:spcPts val="800"/>
-              </a:spcBef>
-              <a:defRPr sz="1150">
-                <a:solidFill>
-                  <a:srgbClr val="1C1917"/>
-                </a:solidFill>
-                <a:latin typeface="Arial"/>
-              </a:defRPr>
-            </a:pPr>
-            <a:r>
-              <a:t>⚡ Zero waiter bottleneck — cuts order lead time by 7-10 minutes</a:t>
-            </a:r>
-          </a:p>
-          <a:p>
-            <a:pPr>
-              <a:spcBef>
-                <a:spcPts val="800"/>
-              </a:spcBef>
-              <a:defRPr sz="1150">
-                <a:solidFill>
-                  <a:srgbClr val="1C1917"/>
-                </a:solidFill>
-                <a:latin typeface="Arial"/>
-              </a:defRPr>
-            </a:pPr>
-            <a:r>
-              <a:t>⚡ Direct bridge to Petpooja, Recaho, RanceLab, or RoyalPOS</a:t>
-            </a:r>
-          </a:p>
-          <a:p>
-            <a:pPr>
-              <a:spcBef>
-                <a:spcPts val="800"/>
-              </a:spcBef>
-              <a:defRPr sz="1150">
-                <a:solidFill>
-                  <a:srgbClr val="1C1917"/>
-                </a:solidFill>
-                <a:latin typeface="Arial"/>
-              </a:defRPr>
-            </a:pPr>
-            <a:r>
-              <a:t>⚡ Ideal for busy cafes, craft breweries, casual dining, and bistros</a:t>
+                  <a:srgbClr val="57534E"/>
+                </a:solidFill>
+                <a:latin typeface="Arial"/>
+              </a:defRPr>
+            </a:pPr>
+            <a:r>
+              <a:t>When a diner selects Awadhi Murgh Biryani, Menuz instantly surfaces the Chef's Recommended Pairing: Garlic Butter Naan + Royal Kokum Mint Cooler.</a:t>
             </a:r>
           </a:p>
         </p:txBody>
@@ -7324,8 +8392,8 @@
         </p:nvSpPr>
         <p:spPr>
           <a:xfrm>
-            <a:off x="6309360" y="1920240"/>
-            <a:ext cx="5120640" cy="4206240"/>
+            <a:off x="4389120" y="1828800"/>
+            <a:ext cx="3328416" cy="4297680"/>
           </a:xfrm>
           <a:prstGeom prst="roundRect">
             <a:avLst/>
@@ -7369,8 +8437,8 @@
         </p:nvSpPr>
         <p:spPr>
           <a:xfrm>
-            <a:off x="6583680" y="2194560"/>
-            <a:ext cx="4572000" cy="3657600"/>
+            <a:off x="4663440" y="2103120"/>
+            <a:ext cx="2779776" cy="3657600"/>
           </a:xfrm>
           <a:prstGeom prst="rect">
             <a:avLst/>
@@ -7384,79 +8452,160 @@
           <a:lstStyle/>
           <a:p>
             <a:pPr>
-              <a:defRPr sz="1800" b="1">
+              <a:defRPr sz="1700" b="1">
+                <a:solidFill>
+                  <a:srgbClr val="E85D04"/>
+                </a:solidFill>
+                <a:latin typeface="Georgia"/>
+              </a:defRPr>
+            </a:pPr>
+            <a:r>
+              <a:t>Promotional Bundle Deals</a:t>
+            </a:r>
+          </a:p>
+          <a:p>
+            <a:pPr>
+              <a:spcBef>
+                <a:spcPts val="400"/>
+              </a:spcBef>
+              <a:defRPr sz="1000" b="1">
                 <a:solidFill>
                   <a:srgbClr val="2563EB"/>
                 </a:solidFill>
-                <a:latin typeface="Georgia"/>
-              </a:defRPr>
-            </a:pPr>
-            <a:r>
-              <a:t>Mode B: Floor Captain Verification</a:t>
+                <a:latin typeface="Arial"/>
+              </a:defRPr>
+            </a:pPr>
+            <a:r>
+              <a:t>OWNER CONFIGURABLE</a:t>
             </a:r>
           </a:p>
           <a:p>
             <a:pPr>
               <a:spcBef>
-                <a:spcPts val="800"/>
+                <a:spcPts val="1400"/>
               </a:spcBef>
               <a:defRPr sz="1150">
                 <a:solidFill>
-                  <a:srgbClr val="1C1917"/>
-                </a:solidFill>
-                <a:latin typeface="Arial"/>
-              </a:defRPr>
-            </a:pPr>
-            <a:r>
-              <a:t>🛡️ Order lands on Manager / Captain Hub tablet first</a:t>
+                  <a:srgbClr val="57534E"/>
+                </a:solidFill>
+                <a:latin typeface="Arial"/>
+              </a:defRPr>
+            </a:pPr>
+            <a:r>
+              <a:t>Owners configure bundle discounts (e.g. 10% to 15% off when added as a pair). Diners get exciting value while the restaurant sells more drinks and desserts.</a:t>
+            </a:r>
+          </a:p>
+        </p:txBody>
+      </p:sp>
+      <p:sp>
+        <p:nvSpPr>
+          <p:cNvPr id="10" name="Rounded Rectangle 9"/>
+          <p:cNvSpPr/>
+          <p:nvPr/>
+        </p:nvSpPr>
+        <p:spPr>
+          <a:xfrm>
+            <a:off x="8046720" y="1828800"/>
+            <a:ext cx="3328416" cy="4297680"/>
+          </a:xfrm>
+          <a:prstGeom prst="roundRect">
+            <a:avLst/>
+          </a:prstGeom>
+          <a:solidFill>
+            <a:srgbClr val="FFFFFF"/>
+          </a:solidFill>
+          <a:ln w="12700">
+            <a:solidFill>
+              <a:srgbClr val="E7E5E4"/>
+            </a:solidFill>
+          </a:ln>
+        </p:spPr>
+        <p:style>
+          <a:lnRef idx="1">
+            <a:schemeClr val="accent1"/>
+          </a:lnRef>
+          <a:fillRef idx="3">
+            <a:schemeClr val="accent1"/>
+          </a:fillRef>
+          <a:effectRef idx="2">
+            <a:schemeClr val="accent1"/>
+          </a:effectRef>
+          <a:fontRef idx="minor">
+            <a:schemeClr val="lt1"/>
+          </a:fontRef>
+        </p:style>
+        <p:txBody>
+          <a:bodyPr rtlCol="0" anchor="ctr"/>
+          <a:lstStyle/>
+          <a:p>
+            <a:pPr algn="ctr"/>
+          </a:p>
+        </p:txBody>
+      </p:sp>
+      <p:sp>
+        <p:nvSpPr>
+          <p:cNvPr id="11" name="TextBox 10"/>
+          <p:cNvSpPr txBox="1"/>
+          <p:nvPr/>
+        </p:nvSpPr>
+        <p:spPr>
+          <a:xfrm>
+            <a:off x="8321040" y="2103120"/>
+            <a:ext cx="2779776" cy="3657600"/>
+          </a:xfrm>
+          <a:prstGeom prst="rect">
+            <a:avLst/>
+          </a:prstGeom>
+          <a:noFill/>
+        </p:spPr>
+        <p:txBody>
+          <a:bodyPr wrap="square">
+            <a:spAutoFit/>
+          </a:bodyPr>
+          <a:lstStyle/>
+          <a:p>
+            <a:pPr>
+              <a:defRPr sz="1700" b="1">
+                <a:solidFill>
+                  <a:srgbClr val="E85D04"/>
+                </a:solidFill>
+                <a:latin typeface="Georgia"/>
+              </a:defRPr>
+            </a:pPr>
+            <a:r>
+              <a:t>1-Click In-Tray Quick Add</a:t>
             </a:r>
           </a:p>
           <a:p>
             <a:pPr>
               <a:spcBef>
-                <a:spcPts val="800"/>
+                <a:spcPts val="400"/>
+              </a:spcBef>
+              <a:defRPr sz="1000" b="1">
+                <a:solidFill>
+                  <a:srgbClr val="2563EB"/>
+                </a:solidFill>
+                <a:latin typeface="Arial"/>
+              </a:defRPr>
+            </a:pPr>
+            <a:r>
+              <a:t>ZERO FRICTION</a:t>
+            </a:r>
+          </a:p>
+          <a:p>
+            <a:pPr>
+              <a:spcBef>
+                <a:spcPts val="1400"/>
               </a:spcBef>
               <a:defRPr sz="1150">
                 <a:solidFill>
-                  <a:srgbClr val="1C1917"/>
-                </a:solidFill>
-                <a:latin typeface="Arial"/>
-              </a:defRPr>
-            </a:pPr>
-            <a:r>
-              <a:t>🛡️ Captain reviews special allergies, bar inventory, or course sequencing</a:t>
-            </a:r>
-          </a:p>
-          <a:p>
-            <a:pPr>
-              <a:spcBef>
-                <a:spcPts val="800"/>
-              </a:spcBef>
-              <a:defRPr sz="1150">
-                <a:solidFill>
-                  <a:srgbClr val="1C1917"/>
-                </a:solidFill>
-                <a:latin typeface="Arial"/>
-              </a:defRPr>
-            </a:pPr>
-            <a:r>
-              <a:t>🛡️ Captain taps 'Approve &amp; Fire' to send ticket to kitchen printers</a:t>
-            </a:r>
-          </a:p>
-          <a:p>
-            <a:pPr>
-              <a:spcBef>
-                <a:spcPts val="800"/>
-              </a:spcBef>
-              <a:defRPr sz="1150">
-                <a:solidFill>
-                  <a:srgbClr val="1C1917"/>
-                </a:solidFill>
-                <a:latin typeface="Arial"/>
-              </a:defRPr>
-            </a:pPr>
-            <a:r>
-              <a:t>🛡️ Ideal for luxury fine dining, multi-course banquet service, and VIP lounges</a:t>
+                  <a:srgbClr val="57534E"/>
+                </a:solidFill>
+                <a:latin typeface="Arial"/>
+              </a:defRPr>
+            </a:pPr>
+            <a:r>
+              <a:t>No jumping between menu categories: diners add the pairing deal in 1 tap right inside their dining cart tray with instant total recalculation.</a:t>
             </a:r>
           </a:p>
         </p:txBody>
@@ -7530,8 +8679,8 @@
         </p:nvSpPr>
         <p:spPr>
           <a:xfrm>
-            <a:off x="731520" y="411480"/>
-            <a:ext cx="10515600" cy="320040"/>
+            <a:off x="731520" y="365760"/>
+            <a:ext cx="10515600" cy="292608"/>
           </a:xfrm>
           <a:prstGeom prst="rect">
             <a:avLst/>
@@ -7553,7 +8702,7 @@
               </a:defRPr>
             </a:pPr>
             <a:r>
-              <a:t>REVENUE MAXIMIZATION</a:t>
+              <a:t>OWNER-CONTROLLED GROWTH</a:t>
             </a:r>
           </a:p>
         </p:txBody>
@@ -7566,8 +8715,8 @@
         </p:nvSpPr>
         <p:spPr>
           <a:xfrm>
-            <a:off x="731520" y="731520"/>
-            <a:ext cx="10515600" cy="548640"/>
+            <a:off x="731520" y="685800"/>
+            <a:ext cx="10515600" cy="502920"/>
           </a:xfrm>
           <a:prstGeom prst="rect">
             <a:avLst/>
@@ -7581,7 +8730,7 @@
           <a:lstStyle/>
           <a:p>
             <a:pPr>
-              <a:defRPr sz="2400" b="1">
+              <a:defRPr sz="2200" b="1">
                 <a:solidFill>
                   <a:srgbClr val="1C1917"/>
                 </a:solidFill>
@@ -7589,7 +8738,7 @@
               </a:defRPr>
             </a:pPr>
             <a:r>
-              <a:t>Smart Chef Pairings &amp; Bundle Upsell Engine</a:t>
+              <a:t>Reward Gateway: Instagram Story vs. Google Review</a:t>
             </a:r>
           </a:p>
         </p:txBody>
@@ -7602,7 +8751,7 @@
         </p:nvSpPr>
         <p:spPr>
           <a:xfrm>
-            <a:off x="731520" y="1298448"/>
+            <a:off x="731520" y="1234440"/>
             <a:ext cx="10515600" cy="365760"/>
           </a:xfrm>
           <a:prstGeom prst="rect">
@@ -7617,7 +8766,7 @@
           <a:lstStyle/>
           <a:p>
             <a:pPr>
-              <a:defRPr sz="1200">
+              <a:defRPr sz="1150">
                 <a:solidFill>
                   <a:srgbClr val="57534E"/>
                 </a:solidFill>
@@ -7625,7 +8774,7 @@
               </a:defRPr>
             </a:pPr>
             <a:r>
-              <a:t>Increasing average ticket sizes with contextual AI culinary recommendations.</a:t>
+              <a:t>The restaurant owner chooses how diners unlock their free food item or table discount.</a:t>
             </a:r>
           </a:p>
         </p:txBody>
@@ -7638,8 +8787,8 @@
         </p:nvSpPr>
         <p:spPr>
           <a:xfrm>
-            <a:off x="731520" y="1920240"/>
-            <a:ext cx="3328416" cy="4114800"/>
+            <a:off x="731520" y="1828800"/>
+            <a:ext cx="5120640" cy="4297680"/>
           </a:xfrm>
           <a:prstGeom prst="roundRect">
             <a:avLst/>
@@ -7683,8 +8832,8 @@
         </p:nvSpPr>
         <p:spPr>
           <a:xfrm>
-            <a:off x="1005840" y="2194560"/>
-            <a:ext cx="2779776" cy="3474720"/>
+            <a:off x="1005840" y="2103120"/>
+            <a:ext cx="4572000" cy="3749039"/>
           </a:xfrm>
           <a:prstGeom prst="rect">
             <a:avLst/>
@@ -7706,23 +8855,71 @@
               </a:defRPr>
             </a:pPr>
             <a:r>
-              <a:t>Intelligent Pairing Logic</a:t>
+              <a:t>Option A: 5-Star Google Review Boost</a:t>
             </a:r>
           </a:p>
           <a:p>
             <a:pPr>
               <a:spcBef>
-                <a:spcPts val="1400"/>
+                <a:spcPts val="900"/>
               </a:spcBef>
-              <a:defRPr sz="1200">
-                <a:solidFill>
-                  <a:srgbClr val="57534E"/>
-                </a:solidFill>
-                <a:latin typeface="Arial"/>
-              </a:defRPr>
-            </a:pPr>
-            <a:r>
-              <a:t>When a diner adds an artisan curry or steak to their cart, Menuz automatically surfaces curated drink &amp; side pairings (e.g. Garlic Naan + Smoked Lassi or Cabernet Sauvignon).</a:t>
+              <a:defRPr sz="1100">
+                <a:solidFill>
+                  <a:srgbClr val="1C1917"/>
+                </a:solidFill>
+                <a:latin typeface="Arial"/>
+              </a:defRPr>
+            </a:pPr>
+            <a:r>
+              <a:t>⭐ Diner drafts an AI dish-specific 5-star review.</a:t>
+            </a:r>
+          </a:p>
+          <a:p>
+            <a:pPr>
+              <a:spcBef>
+                <a:spcPts val="900"/>
+              </a:spcBef>
+              <a:defRPr sz="1100">
+                <a:solidFill>
+                  <a:srgbClr val="1C1917"/>
+                </a:solidFill>
+                <a:latin typeface="Arial"/>
+              </a:defRPr>
+            </a:pPr>
+            <a:r>
+              <a:t>⭐ Unlocks the Lucky Wheel or 15% table discount voucher upon posting to Google Maps.</a:t>
+            </a:r>
+          </a:p>
+          <a:p>
+            <a:pPr>
+              <a:spcBef>
+                <a:spcPts val="900"/>
+              </a:spcBef>
+              <a:defRPr sz="1100">
+                <a:solidFill>
+                  <a:srgbClr val="1C1917"/>
+                </a:solidFill>
+                <a:latin typeface="Arial"/>
+              </a:defRPr>
+            </a:pPr>
+            <a:r>
+              <a:t>⭐ Drives maximum Google SEO rank, local search discovery, and walk-in footfall.</a:t>
+            </a:r>
+          </a:p>
+          <a:p>
+            <a:pPr>
+              <a:spcBef>
+                <a:spcPts val="900"/>
+              </a:spcBef>
+              <a:defRPr sz="1100">
+                <a:solidFill>
+                  <a:srgbClr val="1C1917"/>
+                </a:solidFill>
+                <a:latin typeface="Arial"/>
+              </a:defRPr>
+            </a:pPr>
+            <a:r>
+              <a:t>⭐ Best for: New restaurants or locations needing 500+ Google Maps reviews fast.</a:t>
             </a:r>
           </a:p>
         </p:txBody>
@@ -7735,8 +8932,8 @@
         </p:nvSpPr>
         <p:spPr>
           <a:xfrm>
-            <a:off x="4389120" y="1920240"/>
-            <a:ext cx="3328416" cy="4114800"/>
+            <a:off x="6309360" y="1828800"/>
+            <a:ext cx="5120640" cy="4297680"/>
           </a:xfrm>
           <a:prstGeom prst="roundRect">
             <a:avLst/>
@@ -7780,8 +8977,8 @@
         </p:nvSpPr>
         <p:spPr>
           <a:xfrm>
-            <a:off x="4663440" y="2194560"/>
-            <a:ext cx="2779776" cy="3474720"/>
+            <a:off x="6583680" y="2103120"/>
+            <a:ext cx="4572000" cy="3749039"/>
           </a:xfrm>
           <a:prstGeom prst="rect">
             <a:avLst/>
@@ -7797,88 +8994,91 @@
             <a:pPr>
               <a:defRPr sz="1800" b="1">
                 <a:solidFill>
-                  <a:srgbClr val="E85D04"/>
+                  <a:srgbClr val="DB2777"/>
                 </a:solidFill>
                 <a:latin typeface="Georgia"/>
               </a:defRPr>
             </a:pPr>
             <a:r>
-              <a:t>Customizable Bundle Deals</a:t>
+              <a:t>Option B: Viral Instagram Story Share</a:t>
             </a:r>
           </a:p>
           <a:p>
             <a:pPr>
               <a:spcBef>
-                <a:spcPts val="1400"/>
+                <a:spcPts val="900"/>
               </a:spcBef>
-              <a:defRPr sz="1200">
-                <a:solidFill>
-                  <a:srgbClr val="57534E"/>
-                </a:solidFill>
-                <a:latin typeface="Arial"/>
-              </a:defRPr>
-            </a:pPr>
-            <a:r>
-              <a:t>Owners can configure promotional pairing discounts (e.g. 10% or 15% off when added as a pair), giving diners irresistible value while growing net spend.</a:t>
-            </a:r>
-          </a:p>
-        </p:txBody>
-      </p:sp>
-      <p:sp>
-        <p:nvSpPr>
-          <p:cNvPr id="10" name="Rounded Rectangle 9"/>
-          <p:cNvSpPr/>
-          <p:nvPr/>
-        </p:nvSpPr>
-        <p:spPr>
-          <a:xfrm>
-            <a:off x="8046720" y="1920240"/>
-            <a:ext cx="3328416" cy="4114800"/>
-          </a:xfrm>
-          <a:prstGeom prst="roundRect">
-            <a:avLst/>
-          </a:prstGeom>
-          <a:solidFill>
-            <a:srgbClr val="FFFFFF"/>
-          </a:solidFill>
-          <a:ln w="12700">
-            <a:solidFill>
-              <a:srgbClr val="E7E5E4"/>
-            </a:solidFill>
-          </a:ln>
-        </p:spPr>
-        <p:style>
-          <a:lnRef idx="1">
-            <a:schemeClr val="accent1"/>
-          </a:lnRef>
-          <a:fillRef idx="3">
-            <a:schemeClr val="accent1"/>
-          </a:fillRef>
-          <a:effectRef idx="2">
-            <a:schemeClr val="accent1"/>
-          </a:effectRef>
-          <a:fontRef idx="minor">
-            <a:schemeClr val="lt1"/>
-          </a:fontRef>
-        </p:style>
-        <p:txBody>
-          <a:bodyPr rtlCol="0" anchor="ctr"/>
-          <a:lstStyle/>
-          <a:p>
-            <a:pPr algn="ctr"/>
-          </a:p>
-        </p:txBody>
-      </p:sp>
-      <p:sp>
-        <p:nvSpPr>
-          <p:cNvPr id="11" name="TextBox 10"/>
+              <a:defRPr sz="1100">
+                <a:solidFill>
+                  <a:srgbClr val="1C1917"/>
+                </a:solidFill>
+                <a:latin typeface="Arial"/>
+              </a:defRPr>
+            </a:pPr>
+            <a:r>
+              <a:t>📸 Diner generates a 9:16 vertical Instagram Story card featuring their table dish.</a:t>
+            </a:r>
+          </a:p>
+          <a:p>
+            <a:pPr>
+              <a:spcBef>
+                <a:spcPts val="900"/>
+              </a:spcBef>
+              <a:defRPr sz="1100">
+                <a:solidFill>
+                  <a:srgbClr val="1C1917"/>
+                </a:solidFill>
+                <a:latin typeface="Arial"/>
+              </a:defRPr>
+            </a:pPr>
+            <a:r>
+              <a:t>📸 Mentions @restaurant and location tag to unlock their free dessert or bill discount.</a:t>
+            </a:r>
+          </a:p>
+          <a:p>
+            <a:pPr>
+              <a:spcBef>
+                <a:spcPts val="900"/>
+              </a:spcBef>
+              <a:defRPr sz="1100">
+                <a:solidFill>
+                  <a:srgbClr val="1C1917"/>
+                </a:solidFill>
+                <a:latin typeface="Arial"/>
+              </a:defRPr>
+            </a:pPr>
+            <a:r>
+              <a:t>📸 Taps into diners' authentic local followers for massive peer-to-peer social reach.</a:t>
+            </a:r>
+          </a:p>
+          <a:p>
+            <a:pPr>
+              <a:spcBef>
+                <a:spcPts val="900"/>
+              </a:spcBef>
+              <a:defRPr sz="1100">
+                <a:solidFill>
+                  <a:srgbClr val="1C1917"/>
+                </a:solidFill>
+                <a:latin typeface="Arial"/>
+              </a:defRPr>
+            </a:pPr>
+            <a:r>
+              <a:t>📸 Best for: High-energy cafes, bars, rooftop lounges, and youth-centric brands.</a:t>
+            </a:r>
+          </a:p>
+        </p:txBody>
+      </p:sp>
+      <p:sp>
+        <p:nvSpPr>
+          <p:cNvPr id="10" name="TextBox 9"/>
           <p:cNvSpPr txBox="1"/>
           <p:nvPr/>
         </p:nvSpPr>
         <p:spPr>
           <a:xfrm>
-            <a:off x="8321040" y="2194560"/>
-            <a:ext cx="2779776" cy="3474720"/>
+            <a:off x="731520" y="6217920"/>
+            <a:ext cx="10728655" cy="365760"/>
           </a:xfrm>
           <a:prstGeom prst="rect">
             <a:avLst/>
@@ -7886,37 +9086,21 @@
           <a:noFill/>
         </p:spPr>
         <p:txBody>
-          <a:bodyPr wrap="square">
+          <a:bodyPr wrap="none">
             <a:spAutoFit/>
           </a:bodyPr>
           <a:lstStyle/>
           <a:p>
             <a:pPr>
-              <a:defRPr sz="1800" b="1">
+              <a:defRPr sz="1050" b="1">
                 <a:solidFill>
                   <a:srgbClr val="E85D04"/>
                 </a:solidFill>
-                <a:latin typeface="Georgia"/>
-              </a:defRPr>
-            </a:pPr>
-            <a:r>
-              <a:t>1-Click Tray Quick Add</a:t>
-            </a:r>
-          </a:p>
-          <a:p>
-            <a:pPr>
-              <a:spcBef>
-                <a:spcPts val="1400"/>
-              </a:spcBef>
-              <a:defRPr sz="1200">
-                <a:solidFill>
-                  <a:srgbClr val="57534E"/>
-                </a:solidFill>
-                <a:latin typeface="Arial"/>
-              </a:defRPr>
-            </a:pPr>
-            <a:r>
-              <a:t>No complex navigation: diners tap '+ Add' directly inside the dining cart drawer, instantly recalculating taxes, GST, and totals.</a:t>
+                <a:latin typeface="Arial"/>
+              </a:defRPr>
+            </a:pPr>
+            <a:r>
+              <a:t>💡 Owner's Choice: Set to Google Review, Instagram Story, or Dual Mode (Diner's Choice) in 1 click from Admin Settings.</a:t>
             </a:r>
           </a:p>
         </p:txBody>
@@ -7990,8 +9174,8 @@
         </p:nvSpPr>
         <p:spPr>
           <a:xfrm>
-            <a:off x="731520" y="411480"/>
-            <a:ext cx="10515600" cy="320040"/>
+            <a:off x="731520" y="365760"/>
+            <a:ext cx="10515600" cy="292608"/>
           </a:xfrm>
           <a:prstGeom prst="rect">
             <a:avLst/>
@@ -8013,7 +9197,7 @@
               </a:defRPr>
             </a:pPr>
             <a:r>
-              <a:t>INTERACTIVE AI CONCIERGE</a:t>
+              <a:t>SOCIAL GROWTH</a:t>
             </a:r>
           </a:p>
         </p:txBody>
@@ -8026,8 +9210,8 @@
         </p:nvSpPr>
         <p:spPr>
           <a:xfrm>
-            <a:off x="731520" y="731520"/>
-            <a:ext cx="10515600" cy="548640"/>
+            <a:off x="731520" y="685800"/>
+            <a:ext cx="10515600" cy="502920"/>
           </a:xfrm>
           <a:prstGeom prst="rect">
             <a:avLst/>
@@ -8041,7 +9225,7 @@
           <a:lstStyle/>
           <a:p>
             <a:pPr>
-              <a:defRPr sz="2400" b="1">
+              <a:defRPr sz="2200" b="1">
                 <a:solidFill>
                   <a:srgbClr val="FFFFFF"/>
                 </a:solidFill>
@@ -8049,7 +9233,7 @@
               </a:defRPr>
             </a:pPr>
             <a:r>
-              <a:t>Chef &amp; Owner AI Sommelier: Always Answering, Auto-Scrolling</a:t>
+              <a:t>Viral 9:16 Instagram Story Studio</a:t>
             </a:r>
           </a:p>
         </p:txBody>
@@ -8062,7 +9246,7 @@
         </p:nvSpPr>
         <p:spPr>
           <a:xfrm>
-            <a:off x="731520" y="1298448"/>
+            <a:off x="731520" y="1234440"/>
             <a:ext cx="10515600" cy="365760"/>
           </a:xfrm>
           <a:prstGeom prst="rect">
@@ -8077,7 +9261,7 @@
           <a:lstStyle/>
           <a:p>
             <a:pPr>
-              <a:defRPr sz="1200">
+              <a:defRPr sz="1150">
                 <a:solidFill>
                   <a:srgbClr val="D6D3D1"/>
                 </a:solidFill>
@@ -8085,7 +9269,7 @@
               </a:defRPr>
             </a:pPr>
             <a:r>
-              <a:t>A personalized conversational AI trained on the head chef's secrets, lore, and flavor profiles.</a:t>
+              <a:t>Turn every dish ordered into branded organic social impressions across Pune.</a:t>
             </a:r>
           </a:p>
         </p:txBody>
@@ -8098,8 +9282,8 @@
         </p:nvSpPr>
         <p:spPr>
           <a:xfrm>
-            <a:off x="731520" y="1920240"/>
-            <a:ext cx="10728655" cy="4206240"/>
+            <a:off x="731520" y="1828800"/>
+            <a:ext cx="10728655" cy="4297680"/>
           </a:xfrm>
           <a:prstGeom prst="roundRect">
             <a:avLst/>
@@ -8141,8 +9325,8 @@
         </p:nvSpPr>
         <p:spPr>
           <a:xfrm>
-            <a:off x="1097280" y="2194560"/>
-            <a:ext cx="9966960" cy="3657600"/>
+            <a:off x="1097280" y="2103120"/>
+            <a:ext cx="9966960" cy="3749039"/>
           </a:xfrm>
           <a:prstGeom prst="rect">
             <a:avLst/>
@@ -8156,7 +9340,7 @@
           <a:lstStyle/>
           <a:p>
             <a:pPr>
-              <a:defRPr sz="2000" b="1">
+              <a:defRPr sz="1900" b="1">
                 <a:solidFill>
                   <a:srgbClr val="E85D04"/>
                 </a:solidFill>
@@ -8164,7 +9348,7 @@
               </a:defRPr>
             </a:pPr>
             <a:r>
-              <a:t>Key Conversational Capabilities &amp; UX Upgrades</a:t>
+              <a:t>How the 9:16 Social Story Engine Works</a:t>
             </a:r>
           </a:p>
           <a:p>
@@ -8172,7 +9356,7 @@
               <a:spcBef>
                 <a:spcPts val="1200"/>
               </a:spcBef>
-              <a:defRPr sz="1200">
+              <a:defRPr sz="1150">
                 <a:solidFill>
                   <a:srgbClr val="FFFFFF"/>
                 </a:solidFill>
@@ -8180,7 +9364,7 @@
               </a:defRPr>
             </a:pPr>
             <a:r>
-              <a:t>✨ Auto-Scroll Response UX: When a diner taps a quick suggestion chip (e.g. 'What is the chef special?', 'Pair a cocktail with Truffle Pasta'), the chat window automatically scrolls down to the latest reply so the diner never has to scroll manually.</a:t>
+              <a:t>📱 Automated Branded Cards: Diners tap 'Share to Story' on any signature dish. Menuz automatically generates a professional 9:16 vertical card with the dish photo, restaurant logo, and diner quote.</a:t>
             </a:r>
           </a:p>
           <a:p>
@@ -8188,7 +9372,7 @@
               <a:spcBef>
                 <a:spcPts val="1200"/>
               </a:spcBef>
-              <a:defRPr sz="1200">
+              <a:defRPr sz="1150">
                 <a:solidFill>
                   <a:srgbClr val="FFFFFF"/>
                 </a:solidFill>
@@ -8196,7 +9380,7 @@
               </a:defRPr>
             </a:pPr>
             <a:r>
-              <a:t>✨ Chef &amp; Owner Persona Voice: Speaks with authentic authority on heirloom ingredients, 24-hour slow braising techniques, and dietary safety.</a:t>
+              <a:t>📱 Verified 5★ Sticker &amp; Tags: Pre-configured with @restaurant handle, location geo-tag, and 'Verified 5-Star Experience' sticker for authentic social credibility.</a:t>
             </a:r>
           </a:p>
           <a:p>
@@ -8204,7 +9388,7 @@
               <a:spcBef>
                 <a:spcPts val="1200"/>
               </a:spcBef>
-              <a:defRPr sz="1200">
+              <a:defRPr sz="1150">
                 <a:solidFill>
                   <a:srgbClr val="FFFFFF"/>
                 </a:solidFill>
@@ -8212,7 +9396,7 @@
               </a:defRPr>
             </a:pPr>
             <a:r>
-              <a:t>✨ Precise Spice Calibration (1-5): Translates subjective spiciness into clear benchmarks (1 = Mild aromatic, 3 = Authentic warmth, 5 = Fiery chili).</a:t>
+              <a:t>📱 Direct 1-Click Sharing: Direct integration with Instagram Stories and WhatsApp Status — zero manual editing or graphic design required by the guest.</a:t>
             </a:r>
           </a:p>
           <a:p>
@@ -8220,7 +9404,7 @@
               <a:spcBef>
                 <a:spcPts val="1200"/>
               </a:spcBef>
-              <a:defRPr sz="1200">
+              <a:defRPr sz="1150">
                 <a:solidFill>
                   <a:srgbClr val="FFFFFF"/>
                 </a:solidFill>
@@ -8228,7 +9412,7 @@
               </a:defRPr>
             </a:pPr>
             <a:r>
-              <a:t>✨ Allergy &amp; Dietary Protection: Instantly filters for vegan, Jain-friendly, nut-free, and gluten-free items, tagging the kitchen KOT with clear precautions.</a:t>
+              <a:t>📱 Zero Influencer Marketing Spend: Replaces expensive paid influencer campaigns with hundreds of genuine table diners sharing authentic dining moments every week.</a:t>
             </a:r>
           </a:p>
         </p:txBody>
@@ -8302,8 +9486,8 @@
         </p:nvSpPr>
         <p:spPr>
           <a:xfrm>
-            <a:off x="731520" y="411480"/>
-            <a:ext cx="10515600" cy="320040"/>
+            <a:off x="731520" y="365760"/>
+            <a:ext cx="10515600" cy="292608"/>
           </a:xfrm>
           <a:prstGeom prst="rect">
             <a:avLst/>
@@ -8325,7 +9509,7 @@
               </a:defRPr>
             </a:pPr>
             <a:r>
-              <a:t>SOCIAL GROWTH</a:t>
+              <a:t>REPUTATION MANAGEMENT</a:t>
             </a:r>
           </a:p>
         </p:txBody>
@@ -8338,8 +9522,8 @@
         </p:nvSpPr>
         <p:spPr>
           <a:xfrm>
-            <a:off x="731520" y="731520"/>
-            <a:ext cx="10515600" cy="548640"/>
+            <a:off x="731520" y="685800"/>
+            <a:ext cx="10515600" cy="502920"/>
           </a:xfrm>
           <a:prstGeom prst="rect">
             <a:avLst/>
@@ -8353,7 +9537,7 @@
           <a:lstStyle/>
           <a:p>
             <a:pPr>
-              <a:defRPr sz="2400" b="1">
+              <a:defRPr sz="2200" b="1">
                 <a:solidFill>
                   <a:srgbClr val="1C1917"/>
                 </a:solidFill>
@@ -8361,7 +9545,7 @@
               </a:defRPr>
             </a:pPr>
             <a:r>
-              <a:t>Viral Food Instagram Story Studio</a:t>
+              <a:t>Public 5★ Reviews. Private Floor Intercepts.</a:t>
             </a:r>
           </a:p>
         </p:txBody>
@@ -8374,7 +9558,7 @@
         </p:nvSpPr>
         <p:spPr>
           <a:xfrm>
-            <a:off x="731520" y="1298448"/>
+            <a:off x="731520" y="1234440"/>
             <a:ext cx="10515600" cy="365760"/>
           </a:xfrm>
           <a:prstGeom prst="rect">
@@ -8389,7 +9573,7 @@
           <a:lstStyle/>
           <a:p>
             <a:pPr>
-              <a:defRPr sz="1200">
+              <a:defRPr sz="1150">
                 <a:solidFill>
                   <a:srgbClr val="57534E"/>
                 </a:solidFill>
@@ -8397,7 +9581,7 @@
               </a:defRPr>
             </a:pPr>
             <a:r>
-              <a:t>Turn every dish ordered into organic social media footfall for the restaurant.</a:t>
+              <a:t>How Menuz channels happy diners to Google Maps while intercepting complaints silently on the floor.</a:t>
             </a:r>
           </a:p>
         </p:txBody>
@@ -8410,8 +9594,8 @@
         </p:nvSpPr>
         <p:spPr>
           <a:xfrm>
-            <a:off x="731520" y="1920240"/>
-            <a:ext cx="5486400" cy="4206240"/>
+            <a:off x="731520" y="1828800"/>
+            <a:ext cx="5120640" cy="2011680"/>
           </a:xfrm>
           <a:prstGeom prst="roundRect">
             <a:avLst/>
@@ -8455,8 +9639,8 @@
         </p:nvSpPr>
         <p:spPr>
           <a:xfrm>
-            <a:off x="1005840" y="2194560"/>
-            <a:ext cx="4937760" cy="3657600"/>
+            <a:off x="1005840" y="2057400"/>
+            <a:ext cx="4572000" cy="1554480"/>
           </a:xfrm>
           <a:prstGeom prst="rect">
             <a:avLst/>
@@ -8470,7 +9654,7 @@
           <a:lstStyle/>
           <a:p>
             <a:pPr>
-              <a:defRPr sz="1800" b="1">
+              <a:defRPr sz="1500" b="1">
                 <a:solidFill>
                   <a:srgbClr val="E85D04"/>
                 </a:solidFill>
@@ -8478,71 +9662,23 @@
               </a:defRPr>
             </a:pPr>
             <a:r>
-              <a:t>Instant 9:16 Social Story Asset</a:t>
+              <a:t>4-5★ Reviews -&gt; Public Google Maps</a:t>
             </a:r>
           </a:p>
           <a:p>
             <a:pPr>
               <a:spcBef>
-                <a:spcPts val="1000"/>
+                <a:spcPts val="600"/>
               </a:spcBef>
-              <a:defRPr sz="1200">
-                <a:solidFill>
-                  <a:srgbClr val="1C1917"/>
-                </a:solidFill>
-                <a:latin typeface="Arial"/>
-              </a:defRPr>
-            </a:pPr>
-            <a:r>
-              <a:t>📸 Diners click 'Instagram Story' on any signature dish card.</a:t>
-            </a:r>
-          </a:p>
-          <a:p>
-            <a:pPr>
-              <a:spcBef>
-                <a:spcPts val="1000"/>
-              </a:spcBef>
-              <a:defRPr sz="1200">
-                <a:solidFill>
-                  <a:srgbClr val="1C1917"/>
-                </a:solidFill>
-                <a:latin typeface="Arial"/>
-              </a:defRPr>
-            </a:pPr>
-            <a:r>
-              <a:t>📸 Generates a beautiful 9:16 vertical card with high-res dish photography, restaurant branding, and chef highlights.</a:t>
-            </a:r>
-          </a:p>
-          <a:p>
-            <a:pPr>
-              <a:spcBef>
-                <a:spcPts val="1000"/>
-              </a:spcBef>
-              <a:defRPr sz="1200">
-                <a:solidFill>
-                  <a:srgbClr val="1C1917"/>
-                </a:solidFill>
-                <a:latin typeface="Arial"/>
-              </a:defRPr>
-            </a:pPr>
-            <a:r>
-              <a:t>📸 Equipped with 1-click Download and Share to Instagram Stories / WhatsApp Status.</a:t>
-            </a:r>
-          </a:p>
-          <a:p>
-            <a:pPr>
-              <a:spcBef>
-                <a:spcPts val="1000"/>
-              </a:spcBef>
-              <a:defRPr sz="1200">
-                <a:solidFill>
-                  <a:srgbClr val="1C1917"/>
-                </a:solidFill>
-                <a:latin typeface="Arial"/>
-              </a:defRPr>
-            </a:pPr>
-            <a:r>
-              <a:t>📸 Includes restaurant location tags and hashtags to drive local organic discovery.</a:t>
+              <a:defRPr sz="1150">
+                <a:solidFill>
+                  <a:srgbClr val="57534E"/>
+                </a:solidFill>
+                <a:latin typeface="Arial"/>
+              </a:defRPr>
+            </a:pPr>
+            <a:r>
+              <a:t>Positive diners get AI-assisted dish reviews highlighting specialty recipes and ambiance, boosting your Google search rank.</a:t>
             </a:r>
           </a:p>
         </p:txBody>
@@ -8555,8 +9691,8 @@
         </p:nvSpPr>
         <p:spPr>
           <a:xfrm>
-            <a:off x="6675120" y="1920240"/>
-            <a:ext cx="4754880" cy="4206240"/>
+            <a:off x="6217920" y="1828800"/>
+            <a:ext cx="5120640" cy="2011680"/>
           </a:xfrm>
           <a:prstGeom prst="roundRect">
             <a:avLst/>
@@ -8600,8 +9736,8 @@
         </p:nvSpPr>
         <p:spPr>
           <a:xfrm>
-            <a:off x="6949440" y="2194560"/>
-            <a:ext cx="4206240" cy="3657600"/>
+            <a:off x="6492240" y="2057400"/>
+            <a:ext cx="4572000" cy="1554480"/>
           </a:xfrm>
           <a:prstGeom prst="rect">
             <a:avLst/>
@@ -8615,7 +9751,7 @@
           <a:lstStyle/>
           <a:p>
             <a:pPr>
-              <a:defRPr sz="1800" b="1">
+              <a:defRPr sz="1500" b="1">
                 <a:solidFill>
                   <a:srgbClr val="2563EB"/>
                 </a:solidFill>
@@ -8623,15 +9759,15 @@
               </a:defRPr>
             </a:pPr>
             <a:r>
-              <a:t>Restaurateur Marketing Impact</a:t>
+              <a:t>1-3★ Reviews -&gt; Silent Manager Shield</a:t>
             </a:r>
           </a:p>
           <a:p>
             <a:pPr>
               <a:spcBef>
-                <a:spcPts val="1200"/>
+                <a:spcPts val="600"/>
               </a:spcBef>
-              <a:defRPr sz="1200">
+              <a:defRPr sz="1150">
                 <a:solidFill>
                   <a:srgbClr val="57534E"/>
                 </a:solidFill>
@@ -8639,15 +9775,96 @@
               </a:defRPr>
             </a:pPr>
             <a:r>
-              <a:t>📈 Zero Influencer Costs: Authentic diner word-of-mouth reaches real friends and local foodies.</a:t>
+              <a:t>Ratings under 4 stars NEVER reach Google. A silent floor alert immediately buzzes the manager's tablet with table number.</a:t>
+            </a:r>
+          </a:p>
+        </p:txBody>
+      </p:sp>
+      <p:sp>
+        <p:nvSpPr>
+          <p:cNvPr id="10" name="Rounded Rectangle 9"/>
+          <p:cNvSpPr/>
+          <p:nvPr/>
+        </p:nvSpPr>
+        <p:spPr>
+          <a:xfrm>
+            <a:off x="731520" y="4023360"/>
+            <a:ext cx="5120640" cy="2011680"/>
+          </a:xfrm>
+          <a:prstGeom prst="roundRect">
+            <a:avLst/>
+          </a:prstGeom>
+          <a:solidFill>
+            <a:srgbClr val="FFFFFF"/>
+          </a:solidFill>
+          <a:ln w="12700">
+            <a:solidFill>
+              <a:srgbClr val="E7E5E4"/>
+            </a:solidFill>
+          </a:ln>
+        </p:spPr>
+        <p:style>
+          <a:lnRef idx="1">
+            <a:schemeClr val="accent1"/>
+          </a:lnRef>
+          <a:fillRef idx="3">
+            <a:schemeClr val="accent1"/>
+          </a:fillRef>
+          <a:effectRef idx="2">
+            <a:schemeClr val="accent1"/>
+          </a:effectRef>
+          <a:fontRef idx="minor">
+            <a:schemeClr val="lt1"/>
+          </a:fontRef>
+        </p:style>
+        <p:txBody>
+          <a:bodyPr rtlCol="0" anchor="ctr"/>
+          <a:lstStyle/>
+          <a:p>
+            <a:pPr algn="ctr"/>
+          </a:p>
+        </p:txBody>
+      </p:sp>
+      <p:sp>
+        <p:nvSpPr>
+          <p:cNvPr id="11" name="TextBox 10"/>
+          <p:cNvSpPr txBox="1"/>
+          <p:nvPr/>
+        </p:nvSpPr>
+        <p:spPr>
+          <a:xfrm>
+            <a:off x="1005840" y="4251960"/>
+            <a:ext cx="4572000" cy="1554480"/>
+          </a:xfrm>
+          <a:prstGeom prst="rect">
+            <a:avLst/>
+          </a:prstGeom>
+          <a:noFill/>
+        </p:spPr>
+        <p:txBody>
+          <a:bodyPr wrap="square">
+            <a:spAutoFit/>
+          </a:bodyPr>
+          <a:lstStyle/>
+          <a:p>
+            <a:pPr>
+              <a:defRPr sz="1500" b="1">
+                <a:solidFill>
+                  <a:srgbClr val="2563EB"/>
+                </a:solidFill>
+                <a:latin typeface="Georgia"/>
+              </a:defRPr>
+            </a:pPr>
+            <a:r>
+              <a:t>Tableside Complaint Resolution</a:t>
             </a:r>
           </a:p>
           <a:p>
             <a:pPr>
               <a:spcBef>
-                <a:spcPts val="1200"/>
+                <a:spcPts val="600"/>
               </a:spcBef>
-              <a:defRPr sz="1200">
+              <a:defRPr sz="1150">
                 <a:solidFill>
                   <a:srgbClr val="57534E"/>
                 </a:solidFill>
@@ -8655,15 +9872,96 @@
               </a:defRPr>
             </a:pPr>
             <a:r>
-              <a:t>📈 Consistent Visual Quality: Replaces unflattering flash photos with professional catalog photography.</a:t>
+              <a:t>Floor manager visits Table 4 immediately with a fresh dish or personal apology, converting an upset guest before they leave.</a:t>
+            </a:r>
+          </a:p>
+        </p:txBody>
+      </p:sp>
+      <p:sp>
+        <p:nvSpPr>
+          <p:cNvPr id="12" name="Rounded Rectangle 11"/>
+          <p:cNvSpPr/>
+          <p:nvPr/>
+        </p:nvSpPr>
+        <p:spPr>
+          <a:xfrm>
+            <a:off x="6217920" y="4023360"/>
+            <a:ext cx="5120640" cy="2011680"/>
+          </a:xfrm>
+          <a:prstGeom prst="roundRect">
+            <a:avLst/>
+          </a:prstGeom>
+          <a:solidFill>
+            <a:srgbClr val="FFFFFF"/>
+          </a:solidFill>
+          <a:ln w="12700">
+            <a:solidFill>
+              <a:srgbClr val="E7E5E4"/>
+            </a:solidFill>
+          </a:ln>
+        </p:spPr>
+        <p:style>
+          <a:lnRef idx="1">
+            <a:schemeClr val="accent1"/>
+          </a:lnRef>
+          <a:fillRef idx="3">
+            <a:schemeClr val="accent1"/>
+          </a:fillRef>
+          <a:effectRef idx="2">
+            <a:schemeClr val="accent1"/>
+          </a:effectRef>
+          <a:fontRef idx="minor">
+            <a:schemeClr val="lt1"/>
+          </a:fontRef>
+        </p:style>
+        <p:txBody>
+          <a:bodyPr rtlCol="0" anchor="ctr"/>
+          <a:lstStyle/>
+          <a:p>
+            <a:pPr algn="ctr"/>
+          </a:p>
+        </p:txBody>
+      </p:sp>
+      <p:sp>
+        <p:nvSpPr>
+          <p:cNvPr id="13" name="TextBox 12"/>
+          <p:cNvSpPr txBox="1"/>
+          <p:nvPr/>
+        </p:nvSpPr>
+        <p:spPr>
+          <a:xfrm>
+            <a:off x="6492240" y="4251960"/>
+            <a:ext cx="4572000" cy="1554480"/>
+          </a:xfrm>
+          <a:prstGeom prst="rect">
+            <a:avLst/>
+          </a:prstGeom>
+          <a:noFill/>
+        </p:spPr>
+        <p:txBody>
+          <a:bodyPr wrap="square">
+            <a:spAutoFit/>
+          </a:bodyPr>
+          <a:lstStyle/>
+          <a:p>
+            <a:pPr>
+              <a:defRPr sz="1500" b="1">
+                <a:solidFill>
+                  <a:srgbClr val="E85D04"/>
+                </a:solidFill>
+                <a:latin typeface="Georgia"/>
+              </a:defRPr>
+            </a:pPr>
+            <a:r>
+              <a:t>Zero Negative Public Footprint</a:t>
             </a:r>
           </a:p>
           <a:p>
             <a:pPr>
               <a:spcBef>
-                <a:spcPts val="1200"/>
+                <a:spcPts val="600"/>
               </a:spcBef>
-              <a:defRPr sz="1200">
+              <a:defRPr sz="1150">
                 <a:solidFill>
                   <a:srgbClr val="57534E"/>
                 </a:solidFill>
@@ -8671,7 +9969,7 @@
               </a:defRPr>
             </a:pPr>
             <a:r>
-              <a:t>📈 Measurable Discovery: Diners' friends see the exact table dish and visit the restaurant.</a:t>
+              <a:t>Protects your 4.8★ rating permanently while giving kitchen and management real feedback to improve service quality.</a:t>
             </a:r>
           </a:p>
         </p:txBody>

--- a/public/menuz_executive_pitch_deck.pptx
+++ b/public/menuz_executive_pitch_deck.pptx
@@ -21,6 +21,8 @@
     <p:sldId id="269" r:id="rId20"/>
     <p:sldId id="270" r:id="rId21"/>
     <p:sldId id="271" r:id="rId22"/>
+    <p:sldId id="272" r:id="rId23"/>
+    <p:sldId id="273" r:id="rId24"/>
   </p:sldIdLst>
   <p:sldSz cx="12191695" cy="6858000" type="screen4x3"/>
   <p:notesSz cx="6858000" cy="9144000"/>
@@ -3118,7 +3120,7 @@
             <a:avLst/>
           </a:prstGeom>
           <a:solidFill>
-            <a:srgbClr val="1C1917"/>
+            <a:srgbClr val="090D16"/>
           </a:solidFill>
           <a:ln>
             <a:noFill/>
@@ -3154,14 +3156,14 @@
         </p:nvSpPr>
         <p:spPr>
           <a:xfrm>
-            <a:off x="731520" y="1645920"/>
-            <a:ext cx="731520" cy="73152"/>
+            <a:off x="731520" y="1097280"/>
+            <a:ext cx="731520" cy="91440"/>
           </a:xfrm>
           <a:prstGeom prst="rect">
             <a:avLst/>
           </a:prstGeom>
           <a:solidFill>
-            <a:srgbClr val="E85D04"/>
+            <a:srgbClr val="F59E0B"/>
           </a:solidFill>
           <a:ln>
             <a:noFill/>
@@ -3191,14 +3193,57 @@
       </p:sp>
       <p:sp>
         <p:nvSpPr>
-          <p:cNvPr id="4" name="TextBox 3"/>
+          <p:cNvPr id="4" name="Rectangle 3"/>
+          <p:cNvSpPr/>
+          <p:nvPr/>
+        </p:nvSpPr>
+        <p:spPr>
+          <a:xfrm>
+            <a:off x="1508760" y="1097280"/>
+            <a:ext cx="731520" cy="91440"/>
+          </a:xfrm>
+          <a:prstGeom prst="rect">
+            <a:avLst/>
+          </a:prstGeom>
+          <a:solidFill>
+            <a:srgbClr val="06B6D4"/>
+          </a:solidFill>
+          <a:ln>
+            <a:noFill/>
+          </a:ln>
+        </p:spPr>
+        <p:style>
+          <a:lnRef idx="1">
+            <a:schemeClr val="accent1"/>
+          </a:lnRef>
+          <a:fillRef idx="3">
+            <a:schemeClr val="accent1"/>
+          </a:fillRef>
+          <a:effectRef idx="2">
+            <a:schemeClr val="accent1"/>
+          </a:effectRef>
+          <a:fontRef idx="minor">
+            <a:schemeClr val="lt1"/>
+          </a:fontRef>
+        </p:style>
+        <p:txBody>
+          <a:bodyPr rtlCol="0" anchor="ctr"/>
+          <a:lstStyle/>
+          <a:p>
+            <a:pPr algn="ctr"/>
+          </a:p>
+        </p:txBody>
+      </p:sp>
+      <p:sp>
+        <p:nvSpPr>
+          <p:cNvPr id="5" name="TextBox 4"/>
           <p:cNvSpPr txBox="1"/>
           <p:nvPr/>
         </p:nvSpPr>
         <p:spPr>
           <a:xfrm>
-            <a:off x="731520" y="1920240"/>
-            <a:ext cx="10515600" cy="1371600"/>
+            <a:off x="731520" y="1371600"/>
+            <a:ext cx="10698480" cy="1645920"/>
           </a:xfrm>
           <a:prstGeom prst="rect">
             <a:avLst/>
@@ -3212,9 +3257,9 @@
           <a:lstStyle/>
           <a:p>
             <a:pPr>
-              <a:defRPr sz="5600" b="1">
-                <a:solidFill>
-                  <a:srgbClr val="FFFFFF"/>
+              <a:defRPr sz="6400" b="1">
+                <a:solidFill>
+                  <a:srgbClr val="FAFAFA"/>
                 </a:solidFill>
                 <a:latin typeface="Georgia"/>
               </a:defRPr>
@@ -3226,31 +3271,31 @@
           <a:p>
             <a:pPr>
               <a:spcBef>
-                <a:spcPts val="1000"/>
-              </a:spcBef>
-              <a:defRPr sz="2600">
-                <a:solidFill>
-                  <a:srgbClr val="E85D04"/>
+                <a:spcPts val="800"/>
+              </a:spcBef>
+              <a:defRPr sz="2800" b="1">
+                <a:solidFill>
+                  <a:srgbClr val="F59E0B"/>
                 </a:solidFill>
                 <a:latin typeface="Georgia"/>
               </a:defRPr>
             </a:pPr>
             <a:r>
-              <a:t>The Complete Dine-In Operating System &amp; Growth Engine</a:t>
-            </a:r>
-          </a:p>
-        </p:txBody>
-      </p:sp>
-      <p:sp>
-        <p:nvSpPr>
-          <p:cNvPr id="5" name="TextBox 4"/>
+              <a:t>The Modern Dine-In Operating System &amp; Growth Engine</a:t>
+            </a:r>
+          </a:p>
+        </p:txBody>
+      </p:sp>
+      <p:sp>
+        <p:nvSpPr>
+          <p:cNvPr id="6" name="TextBox 5"/>
           <p:cNvSpPr txBox="1"/>
           <p:nvPr/>
         </p:nvSpPr>
         <p:spPr>
           <a:xfrm>
-            <a:off x="731520" y="3657600"/>
-            <a:ext cx="10515600" cy="1097280"/>
+            <a:off x="731520" y="3383280"/>
+            <a:ext cx="10698480" cy="2468880"/>
           </a:xfrm>
           <a:prstGeom prst="rect">
             <a:avLst/>
@@ -3262,47 +3307,99 @@
             <a:spAutoFit/>
           </a:bodyPr>
           <a:lstStyle/>
-          <a:p>
-            <a:pPr>
-              <a:defRPr sz="1600">
-                <a:solidFill>
-                  <a:srgbClr val="E7E5E4"/>
-                </a:solidFill>
-                <a:latin typeface="Arial"/>
-              </a:defRPr>
-            </a:pPr>
-            <a:r>
-              <a:t>Everything a Modern Restaurant Needs: Interactive Menus, Real-Time Table Sync, Chef AI, Direct Kitchen KOT, and Owner-Configurable Viral Growth.</a:t>
-            </a:r>
-          </a:p>
+          <a:p/>
           <a:p>
             <a:pPr>
               <a:spcBef>
                 <a:spcPts val="800"/>
               </a:spcBef>
-              <a:defRPr sz="1300">
-                <a:solidFill>
-                  <a:srgbClr val="A8A29E"/>
-                </a:solidFill>
-                <a:latin typeface="Arial"/>
-              </a:defRPr>
-            </a:pPr>
-            <a:r>
-              <a:t>What Exactly Is This Product? • Complete Feature Breakdown &amp; Architectural Overview</a:t>
-            </a:r>
-          </a:p>
-        </p:txBody>
-      </p:sp>
-      <p:sp>
-        <p:nvSpPr>
-          <p:cNvPr id="6" name="TextBox 5"/>
+              <a:defRPr sz="1400">
+                <a:solidFill>
+                  <a:srgbClr val="CBD5E1"/>
+                </a:solidFill>
+                <a:latin typeface="Arial"/>
+              </a:defRPr>
+            </a:pPr>
+            <a:r>
+              <a:t>⚡  Interactive HD Menus &amp; Live Table Sync: Diners co-order in real time (&lt;100ms sync) with zero app downloads.</a:t>
+            </a:r>
+          </a:p>
+          <a:p>
+            <a:pPr>
+              <a:spcBef>
+                <a:spcPts val="800"/>
+              </a:spcBef>
+              <a:defRPr sz="1400">
+                <a:solidFill>
+                  <a:srgbClr val="CBD5E1"/>
+                </a:solidFill>
+                <a:latin typeface="Arial"/>
+              </a:defRPr>
+            </a:pPr>
+            <a:r>
+              <a:t>⚡  Chef AI Sommelier &amp; Pairings: Contextual drink and dessert recommendations drive +22% average check sizes.</a:t>
+            </a:r>
+          </a:p>
+          <a:p>
+            <a:pPr>
+              <a:spcBef>
+                <a:spcPts val="800"/>
+              </a:spcBef>
+              <a:defRPr sz="1400">
+                <a:solidFill>
+                  <a:srgbClr val="CBD5E1"/>
+                </a:solidFill>
+                <a:latin typeface="Arial"/>
+              </a:defRPr>
+            </a:pPr>
+            <a:r>
+              <a:t>⚡  Reputation Floor Shield: Channels 5★ reviews to Google while intercepting 1-3★ table grievances in &lt;60s.</a:t>
+            </a:r>
+          </a:p>
+          <a:p>
+            <a:pPr>
+              <a:spcBef>
+                <a:spcPts val="800"/>
+              </a:spcBef>
+              <a:defRPr sz="1400">
+                <a:solidFill>
+                  <a:srgbClr val="CBD5E1"/>
+                </a:solidFill>
+                <a:latin typeface="Arial"/>
+              </a:defRPr>
+            </a:pPr>
+            <a:r>
+              <a:t>⚡  Direct Kitchen KOT &amp; POS Integration: Owner-controlled 1-sec auto-KOT or captain review; syncs with Petpooja &amp; RoyalPOS.</a:t>
+            </a:r>
+          </a:p>
+          <a:p>
+            <a:pPr>
+              <a:spcBef>
+                <a:spcPts val="800"/>
+              </a:spcBef>
+              <a:defRPr sz="1400">
+                <a:solidFill>
+                  <a:srgbClr val="CBD5E1"/>
+                </a:solidFill>
+                <a:latin typeface="Arial"/>
+              </a:defRPr>
+            </a:pPr>
+            <a:r>
+              <a:t>⚡  Commercial Model: Flat ₹1,999/mo, 0% commission, and 100% customer WhatsApp data ownership.</a:t>
+            </a:r>
+          </a:p>
+        </p:txBody>
+      </p:sp>
+      <p:sp>
+        <p:nvSpPr>
+          <p:cNvPr id="7" name="TextBox 6"/>
           <p:cNvSpPr txBox="1"/>
           <p:nvPr/>
         </p:nvSpPr>
         <p:spPr>
           <a:xfrm>
-            <a:off x="731520" y="5760720"/>
-            <a:ext cx="10515600" cy="457200"/>
+            <a:off x="731520" y="6126480"/>
+            <a:ext cx="10698480" cy="365760"/>
           </a:xfrm>
           <a:prstGeom prst="rect">
             <a:avLst/>
@@ -3316,15 +3413,15 @@
           <a:lstStyle/>
           <a:p>
             <a:pPr>
-              <a:defRPr sz="1000">
-                <a:solidFill>
-                  <a:srgbClr val="78716C"/>
-                </a:solidFill>
-                <a:latin typeface="Arial"/>
-              </a:defRPr>
-            </a:pPr>
-            <a:r>
-              <a:t>CONFIDENTIAL EXECUTIVE PRODUCT OVERVIEW • 2026 EDITION • MENUZ PLATFORM</a:t>
+              <a:defRPr sz="1100" b="1">
+                <a:solidFill>
+                  <a:srgbClr val="94A3B8"/>
+                </a:solidFill>
+                <a:latin typeface="Arial"/>
+              </a:defRPr>
+            </a:pPr>
+            <a:r>
+              <a:t>EXECUTIVE PARTNERSHIP SPECIFICATION • 15 RESTAURANT VALIDATION EDITION • MENUZ</a:t>
             </a:r>
           </a:p>
         </p:txBody>
@@ -3362,7 +3459,7 @@
             <a:avLst/>
           </a:prstGeom>
           <a:solidFill>
-            <a:srgbClr val="1C1917"/>
+            <a:srgbClr val="090D16"/>
           </a:solidFill>
           <a:ln>
             <a:noFill/>
@@ -3398,8 +3495,8 @@
         </p:nvSpPr>
         <p:spPr>
           <a:xfrm>
-            <a:off x="731520" y="365760"/>
-            <a:ext cx="10515600" cy="292608"/>
+            <a:off x="731520" y="320040"/>
+            <a:ext cx="10698480" cy="320040"/>
           </a:xfrm>
           <a:prstGeom prst="rect">
             <a:avLst/>
@@ -3413,15 +3510,15 @@
           <a:lstStyle/>
           <a:p>
             <a:pPr>
-              <a:defRPr sz="1000" b="1">
-                <a:solidFill>
-                  <a:srgbClr val="E85D04"/>
-                </a:solidFill>
-                <a:latin typeface="Arial"/>
-              </a:defRPr>
-            </a:pPr>
-            <a:r>
-              <a:t>FRAUD PROTECTION</a:t>
+              <a:defRPr sz="1300" b="1">
+                <a:solidFill>
+                  <a:srgbClr val="F43F5E"/>
+                </a:solidFill>
+                <a:latin typeface="Arial"/>
+              </a:defRPr>
+            </a:pPr>
+            <a:r>
+              <a:t>// SOCIAL VIRALITY</a:t>
             </a:r>
           </a:p>
         </p:txBody>
@@ -3434,8 +3531,8 @@
         </p:nvSpPr>
         <p:spPr>
           <a:xfrm>
-            <a:off x="731520" y="685800"/>
-            <a:ext cx="10515600" cy="502920"/>
+            <a:off x="731520" y="640080"/>
+            <a:ext cx="10698480" cy="594360"/>
           </a:xfrm>
           <a:prstGeom prst="rect">
             <a:avLst/>
@@ -3449,15 +3546,15 @@
           <a:lstStyle/>
           <a:p>
             <a:pPr>
-              <a:defRPr sz="2200" b="1">
-                <a:solidFill>
-                  <a:srgbClr val="FFFFFF"/>
+              <a:defRPr sz="2800" b="1">
+                <a:solidFill>
+                  <a:srgbClr val="FAFAFA"/>
                 </a:solidFill>
                 <a:latin typeface="Georgia"/>
               </a:defRPr>
             </a:pPr>
             <a:r>
-              <a:t>Anti-Cheat Voucher Security &amp; Gamified Lucky Wheel</a:t>
+              <a:t>Viral 9:16 Instagram Story Studio: Organic Word-of-Mouth</a:t>
             </a:r>
           </a:p>
         </p:txBody>
@@ -3470,8 +3567,8 @@
         </p:nvSpPr>
         <p:spPr>
           <a:xfrm>
-            <a:off x="731520" y="1234440"/>
-            <a:ext cx="10515600" cy="365760"/>
+            <a:off x="731520" y="1280160"/>
+            <a:ext cx="10698480" cy="457200"/>
           </a:xfrm>
           <a:prstGeom prst="rect">
             <a:avLst/>
@@ -3485,15 +3582,15 @@
           <a:lstStyle/>
           <a:p>
             <a:pPr>
-              <a:defRPr sz="1150">
-                <a:solidFill>
-                  <a:srgbClr val="D6D3D1"/>
-                </a:solidFill>
-                <a:latin typeface="Arial"/>
-              </a:defRPr>
-            </a:pPr>
-            <a:r>
-              <a:t>Diners love winning table rewards — while owners are 100% protected against screenshot fraud.</a:t>
+              <a:defRPr sz="1400">
+                <a:solidFill>
+                  <a:srgbClr val="CBD5E1"/>
+                </a:solidFill>
+                <a:latin typeface="Arial"/>
+              </a:defRPr>
+            </a:pPr>
+            <a:r>
+              <a:t>Empower diners to share gorgeous, branded dish stories to thousands of local followers.</a:t>
             </a:r>
           </a:p>
         </p:txBody>
@@ -3507,16 +3604,18 @@
         <p:spPr>
           <a:xfrm>
             <a:off x="731520" y="1828800"/>
-            <a:ext cx="5120640" cy="4297680"/>
+            <a:ext cx="10698480" cy="4572000"/>
           </a:xfrm>
           <a:prstGeom prst="roundRect">
             <a:avLst/>
           </a:prstGeom>
           <a:solidFill>
-            <a:srgbClr val="292524"/>
+            <a:srgbClr val="131C2E"/>
           </a:solidFill>
-          <a:ln>
-            <a:noFill/>
+          <a:ln w="19050">
+            <a:solidFill>
+              <a:srgbClr val="27364F"/>
+            </a:solidFill>
           </a:ln>
         </p:spPr>
         <p:style>
@@ -3549,8 +3648,8 @@
         </p:nvSpPr>
         <p:spPr>
           <a:xfrm>
-            <a:off x="1005840" y="2103120"/>
-            <a:ext cx="4572000" cy="3749039"/>
+            <a:off x="1005840" y="2057400"/>
+            <a:ext cx="10149840" cy="4114800"/>
           </a:xfrm>
           <a:prstGeom prst="rect">
             <a:avLst/>
@@ -3564,158 +3663,15 @@
           <a:lstStyle/>
           <a:p>
             <a:pPr>
-              <a:defRPr sz="1900" b="1">
-                <a:solidFill>
-                  <a:srgbClr val="E85D04"/>
+              <a:defRPr sz="2000" b="1">
+                <a:solidFill>
+                  <a:srgbClr val="F43F5E"/>
                 </a:solidFill>
                 <a:latin typeface="Georgia"/>
               </a:defRPr>
             </a:pPr>
             <a:r>
-              <a:t>Interactive Lucky Wheel</a:t>
-            </a:r>
-          </a:p>
-          <a:p>
-            <a:pPr>
-              <a:spcBef>
-                <a:spcPts val="1000"/>
-              </a:spcBef>
-              <a:defRPr sz="1100">
-                <a:solidFill>
-                  <a:srgbClr val="FFFFFF"/>
-                </a:solidFill>
-                <a:latin typeface="Arial"/>
-              </a:defRPr>
-            </a:pPr>
-            <a:r>
-              <a:t>🎉 Exciting visual wheel spin immediately on QR scan.</a:t>
-            </a:r>
-          </a:p>
-          <a:p>
-            <a:pPr>
-              <a:spcBef>
-                <a:spcPts val="1000"/>
-              </a:spcBef>
-              <a:defRPr sz="1100">
-                <a:solidFill>
-                  <a:srgbClr val="FFFFFF"/>
-                </a:solidFill>
-                <a:latin typeface="Arial"/>
-              </a:defRPr>
-            </a:pPr>
-            <a:r>
-              <a:t>🎉 Customizable prizes: 15% off food bill, free signature dessert, or mocktail upgrade.</a:t>
-            </a:r>
-          </a:p>
-          <a:p>
-            <a:pPr>
-              <a:spcBef>
-                <a:spcPts val="1000"/>
-              </a:spcBef>
-              <a:defRPr sz="1100">
-                <a:solidFill>
-                  <a:srgbClr val="FFFFFF"/>
-                </a:solidFill>
-                <a:latin typeface="Arial"/>
-              </a:defRPr>
-            </a:pPr>
-            <a:r>
-              <a:t>🎉 Creates instant excitement at table entry, guaranteeing diners stay and dine.</a:t>
-            </a:r>
-          </a:p>
-          <a:p>
-            <a:pPr>
-              <a:spcBef>
-                <a:spcPts val="1000"/>
-              </a:spcBef>
-              <a:defRPr sz="1100">
-                <a:solidFill>
-                  <a:srgbClr val="FFFFFF"/>
-                </a:solidFill>
-                <a:latin typeface="Arial"/>
-              </a:defRPr>
-            </a:pPr>
-            <a:r>
-              <a:t>🎉 Ties reward redemption directly to billing.</a:t>
-            </a:r>
-          </a:p>
-        </p:txBody>
-      </p:sp>
-      <p:sp>
-        <p:nvSpPr>
-          <p:cNvPr id="8" name="Rounded Rectangle 7"/>
-          <p:cNvSpPr/>
-          <p:nvPr/>
-        </p:nvSpPr>
-        <p:spPr>
-          <a:xfrm>
-            <a:off x="6309360" y="1828800"/>
-            <a:ext cx="5120640" cy="4297680"/>
-          </a:xfrm>
-          <a:prstGeom prst="roundRect">
-            <a:avLst/>
-          </a:prstGeom>
-          <a:solidFill>
-            <a:srgbClr val="292524"/>
-          </a:solidFill>
-          <a:ln>
-            <a:noFill/>
-          </a:ln>
-        </p:spPr>
-        <p:style>
-          <a:lnRef idx="1">
-            <a:schemeClr val="accent1"/>
-          </a:lnRef>
-          <a:fillRef idx="3">
-            <a:schemeClr val="accent1"/>
-          </a:fillRef>
-          <a:effectRef idx="2">
-            <a:schemeClr val="accent1"/>
-          </a:effectRef>
-          <a:fontRef idx="minor">
-            <a:schemeClr val="lt1"/>
-          </a:fontRef>
-        </p:style>
-        <p:txBody>
-          <a:bodyPr rtlCol="0" anchor="ctr"/>
-          <a:lstStyle/>
-          <a:p>
-            <a:pPr algn="ctr"/>
-          </a:p>
-        </p:txBody>
-      </p:sp>
-      <p:sp>
-        <p:nvSpPr>
-          <p:cNvPr id="9" name="TextBox 8"/>
-          <p:cNvSpPr txBox="1"/>
-          <p:nvPr/>
-        </p:nvSpPr>
-        <p:spPr>
-          <a:xfrm>
-            <a:off x="6583680" y="2103120"/>
-            <a:ext cx="4572000" cy="3749039"/>
-          </a:xfrm>
-          <a:prstGeom prst="rect">
-            <a:avLst/>
-          </a:prstGeom>
-          <a:noFill/>
-        </p:spPr>
-        <p:txBody>
-          <a:bodyPr wrap="square">
-            <a:spAutoFit/>
-          </a:bodyPr>
-          <a:lstStyle/>
-          <a:p>
-            <a:pPr>
-              <a:defRPr sz="1900" b="1">
-                <a:solidFill>
-                  <a:srgbClr val="059669"/>
-                </a:solidFill>
-                <a:latin typeface="Georgia"/>
-              </a:defRPr>
-            </a:pPr>
-            <a:r>
-              <a:t>Triple Anti-Cheat Security</a:t>
+              <a:t>How the 9:16 Visual Social Engine Drives Virality</a:t>
             </a:r>
           </a:p>
           <a:p>
@@ -3723,15 +3679,15 @@
               <a:spcBef>
                 <a:spcPts val="1200"/>
               </a:spcBef>
-              <a:defRPr sz="1100">
-                <a:solidFill>
-                  <a:srgbClr val="D6D3D1"/>
-                </a:solidFill>
-                <a:latin typeface="Arial"/>
-              </a:defRPr>
-            </a:pPr>
-            <a:r>
-              <a:t>🔒 Live 15-Minute Dynamic Clock: Voucher display features a live ticking seconds countdown. Reused screenshots or static forwarded images are instantly spotted and rejected.</a:t>
+              <a:defRPr sz="1350">
+                <a:solidFill>
+                  <a:srgbClr val="CBD5E1"/>
+                </a:solidFill>
+                <a:latin typeface="Arial"/>
+              </a:defRPr>
+            </a:pPr>
+            <a:r>
+              <a:t>📸 Automated 9:16 Vertical Story Cards: Diners tap 'Share to Story'. Menuz generates a studio-grade 9:16 card featuring the ordered dish, your restaurant logo, and custom styling in seconds.</a:t>
             </a:r>
           </a:p>
           <a:p>
@@ -3739,15 +3695,15 @@
               <a:spcBef>
                 <a:spcPts val="1200"/>
               </a:spcBef>
-              <a:defRPr sz="1100">
-                <a:solidFill>
-                  <a:srgbClr val="D6D3D1"/>
-                </a:solidFill>
-                <a:latin typeface="Arial"/>
-              </a:defRPr>
-            </a:pPr>
-            <a:r>
-              <a:t>🔒 Waiter PIN Verification (1234): Server physically types PIN 1234 on diner's screen to permanently void the voucher upon billing.</a:t>
+              <a:defRPr sz="1350">
+                <a:solidFill>
+                  <a:srgbClr val="CBD5E1"/>
+                </a:solidFill>
+                <a:latin typeface="Arial"/>
+              </a:defRPr>
+            </a:pPr>
+            <a:r>
+              <a:t>📸 Pre-Configured @Handle &amp; Location Tags: Includes your exact Instagram handle (@restaurantname) and geo-location tag so their followers can tap directly into your profile.</a:t>
             </a:r>
           </a:p>
           <a:p>
@@ -3755,15 +3711,31 @@
               <a:spcBef>
                 <a:spcPts val="1200"/>
               </a:spcBef>
-              <a:defRPr sz="1100">
-                <a:solidFill>
-                  <a:srgbClr val="D6D3D1"/>
-                </a:solidFill>
-                <a:latin typeface="Arial"/>
-              </a:defRPr>
-            </a:pPr>
-            <a:r>
-              <a:t>🔒 Single-Use Table Lock: Vouchers are cryptographically locked to Table X and session ID — cannot be passed around to other diners.</a:t>
+              <a:defRPr sz="1350">
+                <a:solidFill>
+                  <a:srgbClr val="CBD5E1"/>
+                </a:solidFill>
+                <a:latin typeface="Arial"/>
+              </a:defRPr>
+            </a:pPr>
+            <a:r>
+              <a:t>📸 Zero Paid Influencer Costs: Replaces expensive paid food bloggers with 200+ authentic local diners posting real dining stories every week to their friends and colleagues.</a:t>
+            </a:r>
+          </a:p>
+          <a:p>
+            <a:pPr>
+              <a:spcBef>
+                <a:spcPts val="1200"/>
+              </a:spcBef>
+              <a:defRPr sz="1350">
+                <a:solidFill>
+                  <a:srgbClr val="CBD5E1"/>
+                </a:solidFill>
+                <a:latin typeface="Arial"/>
+              </a:defRPr>
+            </a:pPr>
+            <a:r>
+              <a:t>📸 Owner Choice: Dual Mode (Google + Instagram): Owners can set their reward unlock requirement to Google Review, Instagram Story, or allow diners to choose their preferred method.</a:t>
             </a:r>
           </a:p>
         </p:txBody>
@@ -3801,7 +3773,7 @@
             <a:avLst/>
           </a:prstGeom>
           <a:solidFill>
-            <a:srgbClr val="FDFBF7"/>
+            <a:srgbClr val="090D16"/>
           </a:solidFill>
           <a:ln>
             <a:noFill/>
@@ -3837,8 +3809,8 @@
         </p:nvSpPr>
         <p:spPr>
           <a:xfrm>
-            <a:off x="731520" y="365760"/>
-            <a:ext cx="10515600" cy="292608"/>
+            <a:off x="731520" y="320040"/>
+            <a:ext cx="10698480" cy="320040"/>
           </a:xfrm>
           <a:prstGeom prst="rect">
             <a:avLst/>
@@ -3852,15 +3824,15 @@
           <a:lstStyle/>
           <a:p>
             <a:pPr>
-              <a:defRPr sz="1000" b="1">
-                <a:solidFill>
-                  <a:srgbClr val="E85D04"/>
-                </a:solidFill>
-                <a:latin typeface="Arial"/>
-              </a:defRPr>
-            </a:pPr>
-            <a:r>
-              <a:t>KITCHEN OPERATIONS</a:t>
+              <a:defRPr sz="1300" b="1">
+                <a:solidFill>
+                  <a:srgbClr val="06B6D4"/>
+                </a:solidFill>
+                <a:latin typeface="Arial"/>
+              </a:defRPr>
+            </a:pPr>
+            <a:r>
+              <a:t>// FRAUD PROTECTION</a:t>
             </a:r>
           </a:p>
         </p:txBody>
@@ -3873,8 +3845,8 @@
         </p:nvSpPr>
         <p:spPr>
           <a:xfrm>
-            <a:off x="731520" y="685800"/>
-            <a:ext cx="10515600" cy="502920"/>
+            <a:off x="731520" y="640080"/>
+            <a:ext cx="10698480" cy="594360"/>
           </a:xfrm>
           <a:prstGeom prst="rect">
             <a:avLst/>
@@ -3888,15 +3860,15 @@
           <a:lstStyle/>
           <a:p>
             <a:pPr>
-              <a:defRPr sz="2200" b="1">
-                <a:solidFill>
-                  <a:srgbClr val="1C1917"/>
+              <a:defRPr sz="2800" b="1">
+                <a:solidFill>
+                  <a:srgbClr val="FAFAFA"/>
                 </a:solidFill>
                 <a:latin typeface="Georgia"/>
               </a:defRPr>
             </a:pPr>
             <a:r>
-              <a:t>Direct Kitchen KOT &amp; Universal POS Bridge</a:t>
+              <a:t>Gamified Lucky Wheel &amp; Triple-Layer Anti-Cheat Security</a:t>
             </a:r>
           </a:p>
         </p:txBody>
@@ -3909,8 +3881,8 @@
         </p:nvSpPr>
         <p:spPr>
           <a:xfrm>
-            <a:off x="731520" y="1234440"/>
-            <a:ext cx="10515600" cy="365760"/>
+            <a:off x="731520" y="1280160"/>
+            <a:ext cx="10698480" cy="457200"/>
           </a:xfrm>
           <a:prstGeom prst="rect">
             <a:avLst/>
@@ -3924,15 +3896,15 @@
           <a:lstStyle/>
           <a:p>
             <a:pPr>
-              <a:defRPr sz="1150">
-                <a:solidFill>
-                  <a:srgbClr val="57534E"/>
-                </a:solidFill>
-                <a:latin typeface="Arial"/>
-              </a:defRPr>
-            </a:pPr>
-            <a:r>
-              <a:t>Owner-controlled order dispatching with triple-redundant thermal printing failover.</a:t>
+              <a:defRPr sz="1400">
+                <a:solidFill>
+                  <a:srgbClr val="CBD5E1"/>
+                </a:solidFill>
+                <a:latin typeface="Arial"/>
+              </a:defRPr>
+            </a:pPr>
+            <a:r>
+              <a:t>Diners love winning table rewards — while owners remain 100% protected against voucher fraud.</a:t>
             </a:r>
           </a:p>
         </p:txBody>
@@ -3946,17 +3918,17 @@
         <p:spPr>
           <a:xfrm>
             <a:off x="731520" y="1828800"/>
-            <a:ext cx="5120640" cy="4297680"/>
+            <a:ext cx="5212080" cy="4572000"/>
           </a:xfrm>
           <a:prstGeom prst="roundRect">
             <a:avLst/>
           </a:prstGeom>
           <a:solidFill>
-            <a:srgbClr val="FFFFFF"/>
+            <a:srgbClr val="131C2E"/>
           </a:solidFill>
-          <a:ln w="12700">
+          <a:ln w="19050">
             <a:solidFill>
-              <a:srgbClr val="E7E5E4"/>
+              <a:srgbClr val="D97706"/>
             </a:solidFill>
           </a:ln>
         </p:spPr>
@@ -3990,8 +3962,8 @@
         </p:nvSpPr>
         <p:spPr>
           <a:xfrm>
-            <a:off x="1005840" y="2103120"/>
-            <a:ext cx="4572000" cy="3749039"/>
+            <a:off x="1005840" y="2057400"/>
+            <a:ext cx="4663440" cy="4114800"/>
           </a:xfrm>
           <a:prstGeom prst="rect">
             <a:avLst/>
@@ -4005,79 +3977,79 @@
           <a:lstStyle/>
           <a:p>
             <a:pPr>
-              <a:defRPr sz="1800" b="1">
-                <a:solidFill>
-                  <a:srgbClr val="E85D04"/>
+              <a:defRPr sz="1900" b="1">
+                <a:solidFill>
+                  <a:srgbClr val="F59E0B"/>
                 </a:solidFill>
                 <a:latin typeface="Georgia"/>
               </a:defRPr>
             </a:pPr>
             <a:r>
-              <a:t>Mode A: Direct Auto-KOT to Kitchen</a:t>
-            </a:r>
-          </a:p>
-          <a:p>
-            <a:pPr>
-              <a:spcBef>
-                <a:spcPts val="900"/>
-              </a:spcBef>
-              <a:defRPr sz="1100">
-                <a:solidFill>
-                  <a:srgbClr val="1C1917"/>
-                </a:solidFill>
-                <a:latin typeface="Arial"/>
-              </a:defRPr>
-            </a:pPr>
-            <a:r>
-              <a:t>⚡ Fires 80mm ESC/POS thermal ticket directly in kitchen in 1 second.</a:t>
-            </a:r>
-          </a:p>
-          <a:p>
-            <a:pPr>
-              <a:spcBef>
-                <a:spcPts val="900"/>
-              </a:spcBef>
-              <a:defRPr sz="1100">
-                <a:solidFill>
-                  <a:srgbClr val="1C1917"/>
-                </a:solidFill>
-                <a:latin typeface="Arial"/>
-              </a:defRPr>
-            </a:pPr>
-            <a:r>
-              <a:t>⚡ Zero waiter re-typing — eliminates handwritten mistakes and delays.</a:t>
-            </a:r>
-          </a:p>
-          <a:p>
-            <a:pPr>
-              <a:spcBef>
-                <a:spcPts val="900"/>
-              </a:spcBef>
-              <a:defRPr sz="1100">
-                <a:solidFill>
-                  <a:srgbClr val="1C1917"/>
-                </a:solidFill>
-                <a:latin typeface="Arial"/>
-              </a:defRPr>
-            </a:pPr>
-            <a:r>
-              <a:t>⚡ Pre-configured preparation notes (spice level, allergen notes, guest tags).</a:t>
-            </a:r>
-          </a:p>
-          <a:p>
-            <a:pPr>
-              <a:spcBef>
-                <a:spcPts val="900"/>
-              </a:spcBef>
-              <a:defRPr sz="1100">
-                <a:solidFill>
-                  <a:srgbClr val="1C1917"/>
-                </a:solidFill>
-                <a:latin typeface="Arial"/>
-              </a:defRPr>
-            </a:pPr>
-            <a:r>
-              <a:t>⚡ Best for: High-turnover cafes, bistros, QSRs, and casual dining.</a:t>
+              <a:t>Interactive Lucky Wheel</a:t>
+            </a:r>
+          </a:p>
+          <a:p>
+            <a:pPr>
+              <a:spcBef>
+                <a:spcPts val="1000"/>
+              </a:spcBef>
+              <a:defRPr sz="1300">
+                <a:solidFill>
+                  <a:srgbClr val="CBD5E1"/>
+                </a:solidFill>
+                <a:latin typeface="Arial"/>
+              </a:defRPr>
+            </a:pPr>
+            <a:r>
+              <a:t>🎉 Exciting animated spin wheel unlocked after review or social post.</a:t>
+            </a:r>
+          </a:p>
+          <a:p>
+            <a:pPr>
+              <a:spcBef>
+                <a:spcPts val="1000"/>
+              </a:spcBef>
+              <a:defRPr sz="1300">
+                <a:solidFill>
+                  <a:srgbClr val="CBD5E1"/>
+                </a:solidFill>
+                <a:latin typeface="Arial"/>
+              </a:defRPr>
+            </a:pPr>
+            <a:r>
+              <a:t>🎉 Customizable prizes: 15% off food bill, free dessert, or mocktail upgrade.</a:t>
+            </a:r>
+          </a:p>
+          <a:p>
+            <a:pPr>
+              <a:spcBef>
+                <a:spcPts val="1000"/>
+              </a:spcBef>
+              <a:defRPr sz="1300">
+                <a:solidFill>
+                  <a:srgbClr val="CBD5E1"/>
+                </a:solidFill>
+                <a:latin typeface="Arial"/>
+              </a:defRPr>
+            </a:pPr>
+            <a:r>
+              <a:t>🎉 Creates playful dining excitement, guaranteeing high table engagement.</a:t>
+            </a:r>
+          </a:p>
+          <a:p>
+            <a:pPr>
+              <a:spcBef>
+                <a:spcPts val="1000"/>
+              </a:spcBef>
+              <a:defRPr sz="1300">
+                <a:solidFill>
+                  <a:srgbClr val="CBD5E1"/>
+                </a:solidFill>
+                <a:latin typeface="Arial"/>
+              </a:defRPr>
+            </a:pPr>
+            <a:r>
+              <a:t>🎉 Ties reward redemption directly to final billing.</a:t>
             </a:r>
           </a:p>
         </p:txBody>
@@ -4090,18 +4062,18 @@
         </p:nvSpPr>
         <p:spPr>
           <a:xfrm>
-            <a:off x="6309360" y="1828800"/>
-            <a:ext cx="5120640" cy="4297680"/>
+            <a:off x="6217920" y="1828800"/>
+            <a:ext cx="5212080" cy="4572000"/>
           </a:xfrm>
           <a:prstGeom prst="roundRect">
             <a:avLst/>
           </a:prstGeom>
           <a:solidFill>
-            <a:srgbClr val="FFFFFF"/>
+            <a:srgbClr val="131C2E"/>
           </a:solidFill>
-          <a:ln w="12700">
+          <a:ln w="19050">
             <a:solidFill>
-              <a:srgbClr val="E7E5E4"/>
+              <a:srgbClr val="0891B2"/>
             </a:solidFill>
           </a:ln>
         </p:spPr>
@@ -4135,8 +4107,8 @@
         </p:nvSpPr>
         <p:spPr>
           <a:xfrm>
-            <a:off x="6583680" y="2103120"/>
-            <a:ext cx="4572000" cy="3749039"/>
+            <a:off x="6492240" y="2057400"/>
+            <a:ext cx="4663440" cy="4114800"/>
           </a:xfrm>
           <a:prstGeom prst="rect">
             <a:avLst/>
@@ -4150,79 +4122,63 @@
           <a:lstStyle/>
           <a:p>
             <a:pPr>
-              <a:defRPr sz="1800" b="1">
-                <a:solidFill>
-                  <a:srgbClr val="2563EB"/>
+              <a:defRPr sz="1900" b="1">
+                <a:solidFill>
+                  <a:srgbClr val="06B6D4"/>
                 </a:solidFill>
                 <a:latin typeface="Georgia"/>
               </a:defRPr>
             </a:pPr>
             <a:r>
-              <a:t>Mode B: Floor Captain Review First</a:t>
-            </a:r>
-          </a:p>
-          <a:p>
-            <a:pPr>
-              <a:spcBef>
-                <a:spcPts val="900"/>
-              </a:spcBef>
-              <a:defRPr sz="1100">
-                <a:solidFill>
-                  <a:srgbClr val="1C1917"/>
-                </a:solidFill>
-                <a:latin typeface="Arial"/>
-              </a:defRPr>
-            </a:pPr>
-            <a:r>
-              <a:t>👨‍✈️ Order appears on Captain / Manager Floor Tablet first for quick verification.</a:t>
-            </a:r>
-          </a:p>
-          <a:p>
-            <a:pPr>
-              <a:spcBef>
-                <a:spcPts val="900"/>
-              </a:spcBef>
-              <a:defRPr sz="1100">
-                <a:solidFill>
-                  <a:srgbClr val="1C1917"/>
-                </a:solidFill>
-                <a:latin typeface="Arial"/>
-              </a:defRPr>
-            </a:pPr>
-            <a:r>
-              <a:t>👨‍✈️ Captain checks bar inventory, course pacing, and guest preferences.</a:t>
-            </a:r>
-          </a:p>
-          <a:p>
-            <a:pPr>
-              <a:spcBef>
-                <a:spcPts val="900"/>
-              </a:spcBef>
-              <a:defRPr sz="1100">
-                <a:solidFill>
-                  <a:srgbClr val="1C1917"/>
-                </a:solidFill>
-                <a:latin typeface="Arial"/>
-              </a:defRPr>
-            </a:pPr>
-            <a:r>
-              <a:t>👨‍✈️ Captain taps 'Approve &amp; Fire' to send ticket to kitchen printers.</a:t>
-            </a:r>
-          </a:p>
-          <a:p>
-            <a:pPr>
-              <a:spcBef>
-                <a:spcPts val="900"/>
-              </a:spcBef>
-              <a:defRPr sz="1100">
-                <a:solidFill>
-                  <a:srgbClr val="1C1917"/>
-                </a:solidFill>
-                <a:latin typeface="Arial"/>
-              </a:defRPr>
-            </a:pPr>
-            <a:r>
-              <a:t>👨‍✈️ Best for: Multi-course fine dining, rooftop lounges, and banquet service.</a:t>
+              <a:t>Triple Anti-Cheat Security</a:t>
+            </a:r>
+          </a:p>
+          <a:p>
+            <a:pPr>
+              <a:spcBef>
+                <a:spcPts val="1000"/>
+              </a:spcBef>
+              <a:defRPr sz="1300">
+                <a:solidFill>
+                  <a:srgbClr val="CBD5E1"/>
+                </a:solidFill>
+                <a:latin typeface="Arial"/>
+              </a:defRPr>
+            </a:pPr>
+            <a:r>
+              <a:t>🔒 Live 15-Minute Ticking Clock: Voucher display features a live dynamic seconds clock. Static screenshots or forwarded images are instantly rejected.</a:t>
+            </a:r>
+          </a:p>
+          <a:p>
+            <a:pPr>
+              <a:spcBef>
+                <a:spcPts val="1000"/>
+              </a:spcBef>
+              <a:defRPr sz="1300">
+                <a:solidFill>
+                  <a:srgbClr val="CBD5E1"/>
+                </a:solidFill>
+                <a:latin typeface="Arial"/>
+              </a:defRPr>
+            </a:pPr>
+            <a:r>
+              <a:t>🔒 Waiter PIN Verification (1234): Server physically enters secret PIN 1234 on diner's phone to permanently void the voucher upon billing.</a:t>
+            </a:r>
+          </a:p>
+          <a:p>
+            <a:pPr>
+              <a:spcBef>
+                <a:spcPts val="1000"/>
+              </a:spcBef>
+              <a:defRPr sz="1300">
+                <a:solidFill>
+                  <a:srgbClr val="CBD5E1"/>
+                </a:solidFill>
+                <a:latin typeface="Arial"/>
+              </a:defRPr>
+            </a:pPr>
+            <a:r>
+              <a:t>🔒 Single-Use Session Lock: Vouchers are cryptographically tied to Table X and session ID — cannot be transferred to other tables.</a:t>
             </a:r>
           </a:p>
         </p:txBody>
@@ -4260,7 +4216,7 @@
             <a:avLst/>
           </a:prstGeom>
           <a:solidFill>
-            <a:srgbClr val="1C1917"/>
+            <a:srgbClr val="090D16"/>
           </a:solidFill>
           <a:ln>
             <a:noFill/>
@@ -4296,8 +4252,8 @@
         </p:nvSpPr>
         <p:spPr>
           <a:xfrm>
-            <a:off x="731520" y="365760"/>
-            <a:ext cx="10515600" cy="292608"/>
+            <a:off x="731520" y="320040"/>
+            <a:ext cx="10698480" cy="320040"/>
           </a:xfrm>
           <a:prstGeom prst="rect">
             <a:avLst/>
@@ -4311,15 +4267,15 @@
           <a:lstStyle/>
           <a:p>
             <a:pPr>
-              <a:defRPr sz="1000" b="1">
-                <a:solidFill>
-                  <a:srgbClr val="E85D04"/>
-                </a:solidFill>
-                <a:latin typeface="Arial"/>
-              </a:defRPr>
-            </a:pPr>
-            <a:r>
-              <a:t>FLOOR MANAGEMENT</a:t>
+              <a:defRPr sz="1300" b="1">
+                <a:solidFill>
+                  <a:srgbClr val="06B6D4"/>
+                </a:solidFill>
+                <a:latin typeface="Arial"/>
+              </a:defRPr>
+            </a:pPr>
+            <a:r>
+              <a:t>// KITCHEN OPERATIONS</a:t>
             </a:r>
           </a:p>
         </p:txBody>
@@ -4332,8 +4288,8 @@
         </p:nvSpPr>
         <p:spPr>
           <a:xfrm>
-            <a:off x="731520" y="685800"/>
-            <a:ext cx="10515600" cy="502920"/>
+            <a:off x="731520" y="640080"/>
+            <a:ext cx="10698480" cy="594360"/>
           </a:xfrm>
           <a:prstGeom prst="rect">
             <a:avLst/>
@@ -4347,15 +4303,15 @@
           <a:lstStyle/>
           <a:p>
             <a:pPr>
-              <a:defRPr sz="2200" b="1">
-                <a:solidFill>
-                  <a:srgbClr val="FFFFFF"/>
+              <a:defRPr sz="2800" b="1">
+                <a:solidFill>
+                  <a:srgbClr val="FAFAFA"/>
                 </a:solidFill>
                 <a:latin typeface="Georgia"/>
               </a:defRPr>
             </a:pPr>
             <a:r>
-              <a:t>Live Floor Operations Hub &amp; Kitchen Display (KDS)</a:t>
+              <a:t>Direct Kitchen KOT &amp; Universal POS Bridge (Mode A vs Mode B)</a:t>
             </a:r>
           </a:p>
         </p:txBody>
@@ -4368,8 +4324,8 @@
         </p:nvSpPr>
         <p:spPr>
           <a:xfrm>
-            <a:off x="731520" y="1234440"/>
-            <a:ext cx="10515600" cy="365760"/>
+            <a:off x="731520" y="1280160"/>
+            <a:ext cx="10698480" cy="457200"/>
           </a:xfrm>
           <a:prstGeom prst="rect">
             <a:avLst/>
@@ -4383,15 +4339,15 @@
           <a:lstStyle/>
           <a:p>
             <a:pPr>
-              <a:defRPr sz="1150">
-                <a:solidFill>
-                  <a:srgbClr val="D6D3D1"/>
-                </a:solidFill>
-                <a:latin typeface="Arial"/>
-              </a:defRPr>
-            </a:pPr>
-            <a:r>
-              <a:t>Real-time tablet command center for floor managers, captains, and kitchen expeditors.</a:t>
+              <a:defRPr sz="1400">
+                <a:solidFill>
+                  <a:srgbClr val="CBD5E1"/>
+                </a:solidFill>
+                <a:latin typeface="Arial"/>
+              </a:defRPr>
+            </a:pPr>
+            <a:r>
+              <a:t>Owner-controlled dispatching with thermal printer hardware compatibility.</a:t>
             </a:r>
           </a:p>
         </p:txBody>
@@ -4405,16 +4361,18 @@
         <p:spPr>
           <a:xfrm>
             <a:off x="731520" y="1828800"/>
-            <a:ext cx="10728655" cy="4297680"/>
+            <a:ext cx="5212080" cy="4572000"/>
           </a:xfrm>
           <a:prstGeom prst="roundRect">
             <a:avLst/>
           </a:prstGeom>
           <a:solidFill>
-            <a:srgbClr val="292524"/>
+            <a:srgbClr val="131C2E"/>
           </a:solidFill>
-          <a:ln>
-            <a:noFill/>
+          <a:ln w="19050">
+            <a:solidFill>
+              <a:srgbClr val="0891B2"/>
+            </a:solidFill>
           </a:ln>
         </p:spPr>
         <p:style>
@@ -4447,8 +4405,8 @@
         </p:nvSpPr>
         <p:spPr>
           <a:xfrm>
-            <a:off x="1097280" y="2103120"/>
-            <a:ext cx="9966960" cy="3749039"/>
+            <a:off x="1005840" y="2057400"/>
+            <a:ext cx="4754880" cy="4114800"/>
           </a:xfrm>
           <a:prstGeom prst="rect">
             <a:avLst/>
@@ -4462,79 +4420,224 @@
           <a:lstStyle/>
           <a:p>
             <a:pPr>
-              <a:defRPr sz="1900" b="1">
-                <a:solidFill>
-                  <a:srgbClr val="E85D04"/>
+              <a:defRPr sz="1800" b="1">
+                <a:solidFill>
+                  <a:srgbClr val="06B6D4"/>
                 </a:solidFill>
                 <a:latin typeface="Georgia"/>
               </a:defRPr>
             </a:pPr>
             <a:r>
-              <a:t>Comprehensive Floor Operations Capabilities</a:t>
-            </a:r>
-          </a:p>
-          <a:p>
-            <a:pPr>
-              <a:spcBef>
-                <a:spcPts val="1200"/>
-              </a:spcBef>
-              <a:defRPr sz="1150">
-                <a:solidFill>
-                  <a:srgbClr val="FFFFFF"/>
-                </a:solidFill>
-                <a:latin typeface="Arial"/>
-              </a:defRPr>
-            </a:pPr>
-            <a:r>
-              <a:t>📟 Real-Time Table Map &amp; Status: Live visual grid of all tables (Green = Active Dining, Amber = Ordering, Blue = Bill Requested, Gray = Vacant).</a:t>
-            </a:r>
-          </a:p>
-          <a:p>
-            <a:pPr>
-              <a:spcBef>
-                <a:spcPts val="1200"/>
-              </a:spcBef>
-              <a:defRPr sz="1150">
-                <a:solidFill>
-                  <a:srgbClr val="FFFFFF"/>
-                </a:solidFill>
-                <a:latin typeface="Arial"/>
-              </a:defRPr>
-            </a:pPr>
-            <a:r>
-              <a:t>📟 Service Call Management: Instant push alerts for 'Waiter Summoned', 'Water Needed', or 'Bill Requested' with response time tracking.</a:t>
-            </a:r>
-          </a:p>
-          <a:p>
-            <a:pPr>
-              <a:spcBef>
-                <a:spcPts val="1200"/>
-              </a:spcBef>
-              <a:defRPr sz="1150">
-                <a:solidFill>
-                  <a:srgbClr val="FFFFFF"/>
-                </a:solidFill>
-                <a:latin typeface="Arial"/>
-              </a:defRPr>
-            </a:pPr>
-            <a:r>
-              <a:t>📟 Kitchen Expeditor Timers: Color-coded order preparation clocks (Green &lt;15m, Amber 15-25m, Red &gt;25m) prevent table food delays.</a:t>
-            </a:r>
-          </a:p>
-          <a:p>
-            <a:pPr>
-              <a:spcBef>
-                <a:spcPts val="1200"/>
-              </a:spcBef>
-              <a:defRPr sz="1150">
-                <a:solidFill>
-                  <a:srgbClr val="FFFFFF"/>
-                </a:solidFill>
-                <a:latin typeface="Arial"/>
-              </a:defRPr>
-            </a:pPr>
-            <a:r>
-              <a:t>📟 Universal POS Adapters: Native bi-directional adapters for Petpooja (50k+ Indian outlets), RoyalPOS (Pune local), Recaho (PCMC), and RanceLab Chains, plus direct ESC/POS hardware printing.</a:t>
+              <a:t>Mode A: Direct Auto-KOT to Kitchen</a:t>
+            </a:r>
+          </a:p>
+          <a:p>
+            <a:pPr>
+              <a:spcBef>
+                <a:spcPts val="1000"/>
+              </a:spcBef>
+              <a:defRPr sz="1300">
+                <a:solidFill>
+                  <a:srgbClr val="CBD5E1"/>
+                </a:solidFill>
+                <a:latin typeface="Arial"/>
+              </a:defRPr>
+            </a:pPr>
+            <a:r>
+              <a:t>⚡ Fires 80mm ESC/POS thermal ticket directly to kitchen printer in 1 second.</a:t>
+            </a:r>
+          </a:p>
+          <a:p>
+            <a:pPr>
+              <a:spcBef>
+                <a:spcPts val="1000"/>
+              </a:spcBef>
+              <a:defRPr sz="1300">
+                <a:solidFill>
+                  <a:srgbClr val="CBD5E1"/>
+                </a:solidFill>
+                <a:latin typeface="Arial"/>
+              </a:defRPr>
+            </a:pPr>
+            <a:r>
+              <a:t>⚡ Zero waiter re-typing — eliminates manual transcription errors and delays.</a:t>
+            </a:r>
+          </a:p>
+          <a:p>
+            <a:pPr>
+              <a:spcBef>
+                <a:spcPts val="1000"/>
+              </a:spcBef>
+              <a:defRPr sz="1300">
+                <a:solidFill>
+                  <a:srgbClr val="CBD5E1"/>
+                </a:solidFill>
+                <a:latin typeface="Arial"/>
+              </a:defRPr>
+            </a:pPr>
+            <a:r>
+              <a:t>⚡ Pre-formatted with special instructions (spice calibration, allergen tags).</a:t>
+            </a:r>
+          </a:p>
+          <a:p>
+            <a:pPr>
+              <a:spcBef>
+                <a:spcPts val="1000"/>
+              </a:spcBef>
+              <a:defRPr sz="1300">
+                <a:solidFill>
+                  <a:srgbClr val="CBD5E1"/>
+                </a:solidFill>
+                <a:latin typeface="Arial"/>
+              </a:defRPr>
+            </a:pPr>
+            <a:r>
+              <a:t>⚡ Best for: High-turnover cafes, bistros, QSRs, and casual dining outlets.</a:t>
+            </a:r>
+          </a:p>
+        </p:txBody>
+      </p:sp>
+      <p:sp>
+        <p:nvSpPr>
+          <p:cNvPr id="8" name="Rounded Rectangle 7"/>
+          <p:cNvSpPr/>
+          <p:nvPr/>
+        </p:nvSpPr>
+        <p:spPr>
+          <a:xfrm>
+            <a:off x="6217920" y="1828800"/>
+            <a:ext cx="5212080" cy="4572000"/>
+          </a:xfrm>
+          <a:prstGeom prst="roundRect">
+            <a:avLst/>
+          </a:prstGeom>
+          <a:solidFill>
+            <a:srgbClr val="131C2E"/>
+          </a:solidFill>
+          <a:ln w="19050">
+            <a:solidFill>
+              <a:srgbClr val="D97706"/>
+            </a:solidFill>
+          </a:ln>
+        </p:spPr>
+        <p:style>
+          <a:lnRef idx="1">
+            <a:schemeClr val="accent1"/>
+          </a:lnRef>
+          <a:fillRef idx="3">
+            <a:schemeClr val="accent1"/>
+          </a:fillRef>
+          <a:effectRef idx="2">
+            <a:schemeClr val="accent1"/>
+          </a:effectRef>
+          <a:fontRef idx="minor">
+            <a:schemeClr val="lt1"/>
+          </a:fontRef>
+        </p:style>
+        <p:txBody>
+          <a:bodyPr rtlCol="0" anchor="ctr"/>
+          <a:lstStyle/>
+          <a:p>
+            <a:pPr algn="ctr"/>
+          </a:p>
+        </p:txBody>
+      </p:sp>
+      <p:sp>
+        <p:nvSpPr>
+          <p:cNvPr id="9" name="TextBox 8"/>
+          <p:cNvSpPr txBox="1"/>
+          <p:nvPr/>
+        </p:nvSpPr>
+        <p:spPr>
+          <a:xfrm>
+            <a:off x="6492240" y="2057400"/>
+            <a:ext cx="4754880" cy="4114800"/>
+          </a:xfrm>
+          <a:prstGeom prst="rect">
+            <a:avLst/>
+          </a:prstGeom>
+          <a:noFill/>
+        </p:spPr>
+        <p:txBody>
+          <a:bodyPr wrap="square">
+            <a:spAutoFit/>
+          </a:bodyPr>
+          <a:lstStyle/>
+          <a:p>
+            <a:pPr>
+              <a:defRPr sz="1800" b="1">
+                <a:solidFill>
+                  <a:srgbClr val="F59E0B"/>
+                </a:solidFill>
+                <a:latin typeface="Georgia"/>
+              </a:defRPr>
+            </a:pPr>
+            <a:r>
+              <a:t>Mode B: Floor Captain Review First</a:t>
+            </a:r>
+          </a:p>
+          <a:p>
+            <a:pPr>
+              <a:spcBef>
+                <a:spcPts val="1000"/>
+              </a:spcBef>
+              <a:defRPr sz="1300">
+                <a:solidFill>
+                  <a:srgbClr val="CBD5E1"/>
+                </a:solidFill>
+                <a:latin typeface="Arial"/>
+              </a:defRPr>
+            </a:pPr>
+            <a:r>
+              <a:t>👨‍✈️ Order lands on Floor Captain's tablet first for review and verification.</a:t>
+            </a:r>
+          </a:p>
+          <a:p>
+            <a:pPr>
+              <a:spcBef>
+                <a:spcPts val="1000"/>
+              </a:spcBef>
+              <a:defRPr sz="1300">
+                <a:solidFill>
+                  <a:srgbClr val="CBD5E1"/>
+                </a:solidFill>
+                <a:latin typeface="Arial"/>
+              </a:defRPr>
+            </a:pPr>
+            <a:r>
+              <a:t>👨‍✈️ Captain checks bar inventory, course pacing, and custom requests.</a:t>
+            </a:r>
+          </a:p>
+          <a:p>
+            <a:pPr>
+              <a:spcBef>
+                <a:spcPts val="1000"/>
+              </a:spcBef>
+              <a:defRPr sz="1300">
+                <a:solidFill>
+                  <a:srgbClr val="CBD5E1"/>
+                </a:solidFill>
+                <a:latin typeface="Arial"/>
+              </a:defRPr>
+            </a:pPr>
+            <a:r>
+              <a:t>👨‍✈️ Captain taps 'Approve &amp; Fire' to send KOT to kitchen thermal stations.</a:t>
+            </a:r>
+          </a:p>
+          <a:p>
+            <a:pPr>
+              <a:spcBef>
+                <a:spcPts val="1000"/>
+              </a:spcBef>
+              <a:defRPr sz="1300">
+                <a:solidFill>
+                  <a:srgbClr val="CBD5E1"/>
+                </a:solidFill>
+                <a:latin typeface="Arial"/>
+              </a:defRPr>
+            </a:pPr>
+            <a:r>
+              <a:t>👨‍✈️ Best for: Fine dining, multi-course experiences, and rooftop lounges.</a:t>
             </a:r>
           </a:p>
         </p:txBody>
@@ -4572,7 +4675,7 @@
             <a:avLst/>
           </a:prstGeom>
           <a:solidFill>
-            <a:srgbClr val="FDFBF7"/>
+            <a:srgbClr val="090D16"/>
           </a:solidFill>
           <a:ln>
             <a:noFill/>
@@ -4608,8 +4711,8 @@
         </p:nvSpPr>
         <p:spPr>
           <a:xfrm>
-            <a:off x="731520" y="365760"/>
-            <a:ext cx="10515600" cy="292608"/>
+            <a:off x="731520" y="320040"/>
+            <a:ext cx="10698480" cy="320040"/>
           </a:xfrm>
           <a:prstGeom prst="rect">
             <a:avLst/>
@@ -4623,15 +4726,15 @@
           <a:lstStyle/>
           <a:p>
             <a:pPr>
-              <a:defRPr sz="1000" b="1">
-                <a:solidFill>
-                  <a:srgbClr val="E85D04"/>
-                </a:solidFill>
-                <a:latin typeface="Arial"/>
-              </a:defRPr>
-            </a:pPr>
-            <a:r>
-              <a:t>FAST DEPLOYMENT</a:t>
+              <a:defRPr sz="1300" b="1">
+                <a:solidFill>
+                  <a:srgbClr val="06B6D4"/>
+                </a:solidFill>
+                <a:latin typeface="Arial"/>
+              </a:defRPr>
+            </a:pPr>
+            <a:r>
+              <a:t>// OPERATIONS HUB</a:t>
             </a:r>
           </a:p>
         </p:txBody>
@@ -4644,8 +4747,8 @@
         </p:nvSpPr>
         <p:spPr>
           <a:xfrm>
-            <a:off x="731520" y="685800"/>
-            <a:ext cx="10515600" cy="502920"/>
+            <a:off x="731520" y="640080"/>
+            <a:ext cx="10698480" cy="594360"/>
           </a:xfrm>
           <a:prstGeom prst="rect">
             <a:avLst/>
@@ -4659,15 +4762,15 @@
           <a:lstStyle/>
           <a:p>
             <a:pPr>
-              <a:defRPr sz="2200" b="1">
-                <a:solidFill>
-                  <a:srgbClr val="1C1917"/>
+              <a:defRPr sz="2800" b="1">
+                <a:solidFill>
+                  <a:srgbClr val="FAFAFA"/>
                 </a:solidFill>
                 <a:latin typeface="Georgia"/>
               </a:defRPr>
             </a:pPr>
             <a:r>
-              <a:t>5-Minute AI Onboarding Studio &amp; Multi-Tenant Platform</a:t>
+              <a:t>Live Floor Command Center &amp; Kitchen Display System (KDS)</a:t>
             </a:r>
           </a:p>
         </p:txBody>
@@ -4680,8 +4783,8 @@
         </p:nvSpPr>
         <p:spPr>
           <a:xfrm>
-            <a:off x="731520" y="1234440"/>
-            <a:ext cx="10515600" cy="365760"/>
+            <a:off x="731520" y="1280160"/>
+            <a:ext cx="10698480" cy="457200"/>
           </a:xfrm>
           <a:prstGeom prst="rect">
             <a:avLst/>
@@ -4695,15 +4798,15 @@
           <a:lstStyle/>
           <a:p>
             <a:pPr>
-              <a:defRPr sz="1150">
-                <a:solidFill>
-                  <a:srgbClr val="57534E"/>
-                </a:solidFill>
-                <a:latin typeface="Arial"/>
-              </a:defRPr>
-            </a:pPr>
-            <a:r>
-              <a:t>Get any restaurant live in under 5 minutes with voice intake and partitioned cloud storage.</a:t>
+              <a:defRPr sz="1400">
+                <a:solidFill>
+                  <a:srgbClr val="CBD5E1"/>
+                </a:solidFill>
+                <a:latin typeface="Arial"/>
+              </a:defRPr>
+            </a:pPr>
+            <a:r>
+              <a:t>Real-time tablet management for managers, floor captains, and kitchen expeditors.</a:t>
             </a:r>
           </a:p>
         </p:txBody>
@@ -4717,17 +4820,17 @@
         <p:spPr>
           <a:xfrm>
             <a:off x="731520" y="1828800"/>
-            <a:ext cx="3328416" cy="4297680"/>
+            <a:ext cx="10698480" cy="4572000"/>
           </a:xfrm>
           <a:prstGeom prst="roundRect">
             <a:avLst/>
           </a:prstGeom>
           <a:solidFill>
-            <a:srgbClr val="FFFFFF"/>
+            <a:srgbClr val="131C2E"/>
           </a:solidFill>
-          <a:ln w="12700">
+          <a:ln w="19050">
             <a:solidFill>
-              <a:srgbClr val="E7E5E4"/>
+              <a:srgbClr val="0891B2"/>
             </a:solidFill>
           </a:ln>
         </p:spPr>
@@ -4761,8 +4864,8 @@
         </p:nvSpPr>
         <p:spPr>
           <a:xfrm>
-            <a:off x="1005840" y="2103120"/>
-            <a:ext cx="2779776" cy="3657600"/>
+            <a:off x="1005840" y="2057400"/>
+            <a:ext cx="10149840" cy="4114800"/>
           </a:xfrm>
           <a:prstGeom prst="rect">
             <a:avLst/>
@@ -4776,273 +4879,79 @@
           <a:lstStyle/>
           <a:p>
             <a:pPr>
-              <a:defRPr sz="1700" b="1">
-                <a:solidFill>
-                  <a:srgbClr val="E85D04"/>
+              <a:defRPr sz="2000" b="1">
+                <a:solidFill>
+                  <a:srgbClr val="06B6D4"/>
                 </a:solidFill>
                 <a:latin typeface="Georgia"/>
               </a:defRPr>
             </a:pPr>
             <a:r>
-              <a:t>AI Menu &amp; Recipe Intake</a:t>
-            </a:r>
-          </a:p>
-          <a:p>
-            <a:pPr>
-              <a:spcBef>
-                <a:spcPts val="400"/>
-              </a:spcBef>
-              <a:defRPr sz="1000" b="1">
-                <a:solidFill>
-                  <a:srgbClr val="2563EB"/>
-                </a:solidFill>
-                <a:latin typeface="Arial"/>
-              </a:defRPr>
-            </a:pPr>
-            <a:r>
-              <a:t>VOICE &amp; 1-CLICK AUTO-DRAFT</a:t>
-            </a:r>
-          </a:p>
-          <a:p>
-            <a:pPr>
-              <a:spcBef>
-                <a:spcPts val="1400"/>
-              </a:spcBef>
-              <a:defRPr sz="1150">
-                <a:solidFill>
-                  <a:srgbClr val="57534E"/>
-                </a:solidFill>
-                <a:latin typeface="Arial"/>
-              </a:defRPr>
-            </a:pPr>
-            <a:r>
-              <a:t>Chefs speak or upload a photo of the paper menu. AI auto-extracts dish names, categorizes courses, drafts flavor notes, and calibrates spice ratings in minutes.</a:t>
-            </a:r>
-          </a:p>
-        </p:txBody>
-      </p:sp>
-      <p:sp>
-        <p:nvSpPr>
-          <p:cNvPr id="8" name="Rounded Rectangle 7"/>
-          <p:cNvSpPr/>
-          <p:nvPr/>
-        </p:nvSpPr>
-        <p:spPr>
-          <a:xfrm>
-            <a:off x="4389120" y="1828800"/>
-            <a:ext cx="3328416" cy="4297680"/>
-          </a:xfrm>
-          <a:prstGeom prst="roundRect">
-            <a:avLst/>
-          </a:prstGeom>
-          <a:solidFill>
-            <a:srgbClr val="FFFFFF"/>
-          </a:solidFill>
-          <a:ln w="12700">
-            <a:solidFill>
-              <a:srgbClr val="E7E5E4"/>
-            </a:solidFill>
-          </a:ln>
-        </p:spPr>
-        <p:style>
-          <a:lnRef idx="1">
-            <a:schemeClr val="accent1"/>
-          </a:lnRef>
-          <a:fillRef idx="3">
-            <a:schemeClr val="accent1"/>
-          </a:fillRef>
-          <a:effectRef idx="2">
-            <a:schemeClr val="accent1"/>
-          </a:effectRef>
-          <a:fontRef idx="minor">
-            <a:schemeClr val="lt1"/>
-          </a:fontRef>
-        </p:style>
-        <p:txBody>
-          <a:bodyPr rtlCol="0" anchor="ctr"/>
-          <a:lstStyle/>
-          <a:p>
-            <a:pPr algn="ctr"/>
-          </a:p>
-        </p:txBody>
-      </p:sp>
-      <p:sp>
-        <p:nvSpPr>
-          <p:cNvPr id="9" name="TextBox 8"/>
-          <p:cNvSpPr txBox="1"/>
-          <p:nvPr/>
-        </p:nvSpPr>
-        <p:spPr>
-          <a:xfrm>
-            <a:off x="4663440" y="2103120"/>
-            <a:ext cx="2779776" cy="3657600"/>
-          </a:xfrm>
-          <a:prstGeom prst="rect">
-            <a:avLst/>
-          </a:prstGeom>
-          <a:noFill/>
-        </p:spPr>
-        <p:txBody>
-          <a:bodyPr wrap="square">
-            <a:spAutoFit/>
-          </a:bodyPr>
-          <a:lstStyle/>
-          <a:p>
-            <a:pPr>
-              <a:defRPr sz="1700" b="1">
-                <a:solidFill>
-                  <a:srgbClr val="E85D04"/>
-                </a:solidFill>
-                <a:latin typeface="Georgia"/>
-              </a:defRPr>
-            </a:pPr>
-            <a:r>
-              <a:t>Partitioned Media Library</a:t>
-            </a:r>
-          </a:p>
-          <a:p>
-            <a:pPr>
-              <a:spcBef>
-                <a:spcPts val="400"/>
-              </a:spcBef>
-              <a:defRPr sz="1000" b="1">
-                <a:solidFill>
-                  <a:srgbClr val="2563EB"/>
-                </a:solidFill>
-                <a:latin typeface="Arial"/>
-              </a:defRPr>
-            </a:pPr>
-            <a:r>
-              <a:t>ISOLATED CLOUD STORAGE</a:t>
-            </a:r>
-          </a:p>
-          <a:p>
-            <a:pPr>
-              <a:spcBef>
-                <a:spcPts val="1400"/>
-              </a:spcBef>
-              <a:defRPr sz="1150">
-                <a:solidFill>
-                  <a:srgbClr val="57534E"/>
-                </a:solidFill>
-                <a:latin typeface="Arial"/>
-              </a:defRPr>
-            </a:pPr>
-            <a:r>
-              <a:t>Every partner restaurant has an isolated cloud image bank. High-res dish photography and branding are segregated permanently with zero cross-tenant clutter.</a:t>
-            </a:r>
-          </a:p>
-        </p:txBody>
-      </p:sp>
-      <p:sp>
-        <p:nvSpPr>
-          <p:cNvPr id="10" name="Rounded Rectangle 9"/>
-          <p:cNvSpPr/>
-          <p:nvPr/>
-        </p:nvSpPr>
-        <p:spPr>
-          <a:xfrm>
-            <a:off x="8046720" y="1828800"/>
-            <a:ext cx="3328416" cy="4297680"/>
-          </a:xfrm>
-          <a:prstGeom prst="roundRect">
-            <a:avLst/>
-          </a:prstGeom>
-          <a:solidFill>
-            <a:srgbClr val="FFFFFF"/>
-          </a:solidFill>
-          <a:ln w="12700">
-            <a:solidFill>
-              <a:srgbClr val="E7E5E4"/>
-            </a:solidFill>
-          </a:ln>
-        </p:spPr>
-        <p:style>
-          <a:lnRef idx="1">
-            <a:schemeClr val="accent1"/>
-          </a:lnRef>
-          <a:fillRef idx="3">
-            <a:schemeClr val="accent1"/>
-          </a:fillRef>
-          <a:effectRef idx="2">
-            <a:schemeClr val="accent1"/>
-          </a:effectRef>
-          <a:fontRef idx="minor">
-            <a:schemeClr val="lt1"/>
-          </a:fontRef>
-        </p:style>
-        <p:txBody>
-          <a:bodyPr rtlCol="0" anchor="ctr"/>
-          <a:lstStyle/>
-          <a:p>
-            <a:pPr algn="ctr"/>
-          </a:p>
-        </p:txBody>
-      </p:sp>
-      <p:sp>
-        <p:nvSpPr>
-          <p:cNvPr id="11" name="TextBox 10"/>
-          <p:cNvSpPr txBox="1"/>
-          <p:nvPr/>
-        </p:nvSpPr>
-        <p:spPr>
-          <a:xfrm>
-            <a:off x="8321040" y="2103120"/>
-            <a:ext cx="2779776" cy="3657600"/>
-          </a:xfrm>
-          <a:prstGeom prst="rect">
-            <a:avLst/>
-          </a:prstGeom>
-          <a:noFill/>
-        </p:spPr>
-        <p:txBody>
-          <a:bodyPr wrap="square">
-            <a:spAutoFit/>
-          </a:bodyPr>
-          <a:lstStyle/>
-          <a:p>
-            <a:pPr>
-              <a:defRPr sz="1700" b="1">
-                <a:solidFill>
-                  <a:srgbClr val="E85D04"/>
-                </a:solidFill>
-                <a:latin typeface="Georgia"/>
-              </a:defRPr>
-            </a:pPr>
-            <a:r>
-              <a:t>Standalone Branded Routes</a:t>
-            </a:r>
-          </a:p>
-          <a:p>
-            <a:pPr>
-              <a:spcBef>
-                <a:spcPts val="400"/>
-              </a:spcBef>
-              <a:defRPr sz="1000" b="1">
-                <a:solidFill>
-                  <a:srgbClr val="2563EB"/>
-                </a:solidFill>
-                <a:latin typeface="Arial"/>
-              </a:defRPr>
-            </a:pPr>
-            <a:r>
-              <a:t>CUSTOM URLS &amp; DOMAINS</a:t>
-            </a:r>
-          </a:p>
-          <a:p>
-            <a:pPr>
-              <a:spcBef>
-                <a:spcPts val="1400"/>
-              </a:spcBef>
-              <a:defRPr sz="1150">
-                <a:solidFill>
-                  <a:srgbClr val="57534E"/>
-                </a:solidFill>
-                <a:latin typeface="Arial"/>
-              </a:defRPr>
-            </a:pPr>
-            <a:r>
-              <a:t>Each restaurant operates on a dedicated URL (/r/:restaurantSlug) with custom brand theme, logo, and table tokens for direct Google Maps and bio links.</a:t>
+              <a:t>Real-Time Operational Controls for Floor Staff &amp; Kitchen</a:t>
+            </a:r>
+          </a:p>
+          <a:p>
+            <a:pPr>
+              <a:spcBef>
+                <a:spcPts val="1200"/>
+              </a:spcBef>
+              <a:defRPr sz="1350">
+                <a:solidFill>
+                  <a:srgbClr val="CBD5E1"/>
+                </a:solidFill>
+                <a:latin typeface="Arial"/>
+              </a:defRPr>
+            </a:pPr>
+            <a:r>
+              <a:t>📟 Live Visual Table Map &amp; Status Grid: Color-coded table grid (🟢 Green = Dining, 🟡 Amber = Ordering, 🔵 Blue = Bill Requested, ⚪ Gray = Vacant).</a:t>
+            </a:r>
+          </a:p>
+          <a:p>
+            <a:pPr>
+              <a:spcBef>
+                <a:spcPts val="1200"/>
+              </a:spcBef>
+              <a:defRPr sz="1350">
+                <a:solidFill>
+                  <a:srgbClr val="CBD5E1"/>
+                </a:solidFill>
+                <a:latin typeface="Arial"/>
+              </a:defRPr>
+            </a:pPr>
+            <a:r>
+              <a:t>📟 Service Call Management with Timers: Instant push notifications for 'Waiter Summoned', 'Water Needed', or 'Bill Requested' with timer tracking to maintain 60-second service speed.</a:t>
+            </a:r>
+          </a:p>
+          <a:p>
+            <a:pPr>
+              <a:spcBef>
+                <a:spcPts val="1200"/>
+              </a:spcBef>
+              <a:defRPr sz="1350">
+                <a:solidFill>
+                  <a:srgbClr val="CBD5E1"/>
+                </a:solidFill>
+                <a:latin typeface="Arial"/>
+              </a:defRPr>
+            </a:pPr>
+            <a:r>
+              <a:t>📟 Kitchen Expeditor Timers (KDS): Visual countdown clocks on kitchen screens (Green &lt;15m, Amber 15-25m, Red &gt;25m) eliminate neglected orders and table delays.</a:t>
+            </a:r>
+          </a:p>
+          <a:p>
+            <a:pPr>
+              <a:spcBef>
+                <a:spcPts val="1200"/>
+              </a:spcBef>
+              <a:defRPr sz="1350">
+                <a:solidFill>
+                  <a:srgbClr val="CBD5E1"/>
+                </a:solidFill>
+                <a:latin typeface="Arial"/>
+              </a:defRPr>
+            </a:pPr>
+            <a:r>
+              <a:t>📟 Universal POS Adapters: Native bi-directional bridging with Petpooja (50,000+ Indian outlets), RoyalPOS, Recaho, and RanceLab, plus direct network ESC/POS thermal printing.</a:t>
             </a:r>
           </a:p>
         </p:txBody>
@@ -5080,7 +4989,7 @@
             <a:avLst/>
           </a:prstGeom>
           <a:solidFill>
-            <a:srgbClr val="FDFBF7"/>
+            <a:srgbClr val="090D16"/>
           </a:solidFill>
           <a:ln>
             <a:noFill/>
@@ -5116,8 +5025,8 @@
         </p:nvSpPr>
         <p:spPr>
           <a:xfrm>
-            <a:off x="731520" y="365760"/>
-            <a:ext cx="10515600" cy="292608"/>
+            <a:off x="731520" y="320040"/>
+            <a:ext cx="10698480" cy="320040"/>
           </a:xfrm>
           <a:prstGeom prst="rect">
             <a:avLst/>
@@ -5131,15 +5040,15 @@
           <a:lstStyle/>
           <a:p>
             <a:pPr>
-              <a:defRPr sz="1000" b="1">
-                <a:solidFill>
-                  <a:srgbClr val="E85D04"/>
-                </a:solidFill>
-                <a:latin typeface="Arial"/>
-              </a:defRPr>
-            </a:pPr>
-            <a:r>
-              <a:t>REGIONAL INCLUSIVITY</a:t>
+              <a:defRPr sz="1300" b="1">
+                <a:solidFill>
+                  <a:srgbClr val="F59E0B"/>
+                </a:solidFill>
+                <a:latin typeface="Arial"/>
+              </a:defRPr>
+            </a:pPr>
+            <a:r>
+              <a:t>// RAPID SETUP</a:t>
             </a:r>
           </a:p>
         </p:txBody>
@@ -5152,8 +5061,8 @@
         </p:nvSpPr>
         <p:spPr>
           <a:xfrm>
-            <a:off x="731520" y="685800"/>
-            <a:ext cx="10515600" cy="502920"/>
+            <a:off x="731520" y="640080"/>
+            <a:ext cx="10698480" cy="594360"/>
           </a:xfrm>
           <a:prstGeom prst="rect">
             <a:avLst/>
@@ -5167,15 +5076,15 @@
           <a:lstStyle/>
           <a:p>
             <a:pPr>
-              <a:defRPr sz="2200" b="1">
-                <a:solidFill>
-                  <a:srgbClr val="1C1917"/>
+              <a:defRPr sz="2800" b="1">
+                <a:solidFill>
+                  <a:srgbClr val="FAFAFA"/>
                 </a:solidFill>
                 <a:latin typeface="Georgia"/>
               </a:defRPr>
             </a:pPr>
             <a:r>
-              <a:t>Multilingual Dining: English Primary, Hindi &amp; Marathi</a:t>
+              <a:t>5-Minute AI Onboarding Studio &amp; Partitioned Multi-Tenancy</a:t>
             </a:r>
           </a:p>
         </p:txBody>
@@ -5188,8 +5097,8 @@
         </p:nvSpPr>
         <p:spPr>
           <a:xfrm>
-            <a:off x="731520" y="1234440"/>
-            <a:ext cx="10515600" cy="365760"/>
+            <a:off x="731520" y="1280160"/>
+            <a:ext cx="10698480" cy="457200"/>
           </a:xfrm>
           <a:prstGeom prst="rect">
             <a:avLst/>
@@ -5203,15 +5112,15 @@
           <a:lstStyle/>
           <a:p>
             <a:pPr>
-              <a:defRPr sz="1150">
-                <a:solidFill>
-                  <a:srgbClr val="57534E"/>
-                </a:solidFill>
-                <a:latin typeface="Arial"/>
-              </a:defRPr>
-            </a:pPr>
-            <a:r>
-              <a:t>Preserving global appeal while honoring local hospitality and regional language preference.</a:t>
+              <a:defRPr sz="1400">
+                <a:solidFill>
+                  <a:srgbClr val="CBD5E1"/>
+                </a:solidFill>
+                <a:latin typeface="Arial"/>
+              </a:defRPr>
+            </a:pPr>
+            <a:r>
+              <a:t>Get any restaurant live in under 5 minutes with voice intake and isolated cloud storage.</a:t>
             </a:r>
           </a:p>
         </p:txBody>
@@ -5225,17 +5134,17 @@
         <p:spPr>
           <a:xfrm>
             <a:off x="731520" y="1828800"/>
-            <a:ext cx="3328416" cy="4297680"/>
+            <a:ext cx="3383280" cy="4572000"/>
           </a:xfrm>
           <a:prstGeom prst="roundRect">
             <a:avLst/>
           </a:prstGeom>
           <a:solidFill>
-            <a:srgbClr val="FFFFFF"/>
+            <a:srgbClr val="131C2E"/>
           </a:solidFill>
-          <a:ln w="12700">
+          <a:ln w="19050">
             <a:solidFill>
-              <a:srgbClr val="E7E5E4"/>
+              <a:srgbClr val="27364F"/>
             </a:solidFill>
           </a:ln>
         </p:spPr>
@@ -5269,8 +5178,8 @@
         </p:nvSpPr>
         <p:spPr>
           <a:xfrm>
-            <a:off x="1005840" y="2103120"/>
-            <a:ext cx="2779776" cy="3657600"/>
+            <a:off x="960120" y="2057400"/>
+            <a:ext cx="2926080" cy="4114800"/>
           </a:xfrm>
           <a:prstGeom prst="rect">
             <a:avLst/>
@@ -5284,15 +5193,15 @@
           <a:lstStyle/>
           <a:p>
             <a:pPr>
-              <a:defRPr sz="1700" b="1">
-                <a:solidFill>
-                  <a:srgbClr val="E85D04"/>
+              <a:defRPr sz="1800" b="1">
+                <a:solidFill>
+                  <a:srgbClr val="06B6D4"/>
                 </a:solidFill>
                 <a:latin typeface="Georgia"/>
               </a:defRPr>
             </a:pPr>
             <a:r>
-              <a:t>English (Default Primary)</a:t>
+              <a:t>AI Menu &amp; Recipe Intake</a:t>
             </a:r>
           </a:p>
           <a:p>
@@ -5300,15 +5209,15 @@
               <a:spcBef>
                 <a:spcPts val="400"/>
               </a:spcBef>
-              <a:defRPr sz="1000" b="1">
-                <a:solidFill>
-                  <a:srgbClr val="2563EB"/>
-                </a:solidFill>
-                <a:latin typeface="Arial"/>
-              </a:defRPr>
-            </a:pPr>
-            <a:r>
-              <a:t>STRICT RULE: ALWAYS FIRST</a:t>
+              <a:defRPr sz="1100" b="1">
+                <a:solidFill>
+                  <a:srgbClr val="94A3B8"/>
+                </a:solidFill>
+                <a:latin typeface="Arial"/>
+              </a:defRPr>
+            </a:pPr>
+            <a:r>
+              <a:t>VOICE &amp; PHOTO AUTO-DRAFT</a:t>
             </a:r>
           </a:p>
           <a:p>
@@ -5316,15 +5225,15 @@
               <a:spcBef>
                 <a:spcPts val="1400"/>
               </a:spcBef>
-              <a:defRPr sz="1150">
-                <a:solidFill>
-                  <a:srgbClr val="57534E"/>
-                </a:solidFill>
-                <a:latin typeface="Arial"/>
-              </a:defRPr>
-            </a:pPr>
-            <a:r>
-              <a:t>English is hardcoded as the primary launch language for 100% of devices. No arbitrary IP or browser locale redirection. Global diners feel instantly at home.</a:t>
+              <a:defRPr sz="1350">
+                <a:solidFill>
+                  <a:srgbClr val="CBD5E1"/>
+                </a:solidFill>
+                <a:latin typeface="Arial"/>
+              </a:defRPr>
+            </a:pPr>
+            <a:r>
+              <a:t>Chefs speak or upload a photo of the paper menu. AI extracts dish names, categorizes courses, drafts flavor notes, and calibrates spice ratings in minutes.</a:t>
             </a:r>
           </a:p>
         </p:txBody>
@@ -5338,17 +5247,17 @@
         <p:spPr>
           <a:xfrm>
             <a:off x="4389120" y="1828800"/>
-            <a:ext cx="3328416" cy="4297680"/>
+            <a:ext cx="3383280" cy="4572000"/>
           </a:xfrm>
           <a:prstGeom prst="roundRect">
             <a:avLst/>
           </a:prstGeom>
           <a:solidFill>
-            <a:srgbClr val="FFFFFF"/>
+            <a:srgbClr val="131C2E"/>
           </a:solidFill>
-          <a:ln w="12700">
+          <a:ln w="19050">
             <a:solidFill>
-              <a:srgbClr val="E7E5E4"/>
+              <a:srgbClr val="27364F"/>
             </a:solidFill>
           </a:ln>
         </p:spPr>
@@ -5382,8 +5291,8 @@
         </p:nvSpPr>
         <p:spPr>
           <a:xfrm>
-            <a:off x="4663440" y="2103120"/>
-            <a:ext cx="2779776" cy="3657600"/>
+            <a:off x="4617720" y="2057400"/>
+            <a:ext cx="2926080" cy="4114800"/>
           </a:xfrm>
           <a:prstGeom prst="rect">
             <a:avLst/>
@@ -5397,15 +5306,15 @@
           <a:lstStyle/>
           <a:p>
             <a:pPr>
-              <a:defRPr sz="1700" b="1">
-                <a:solidFill>
-                  <a:srgbClr val="1C1917"/>
+              <a:defRPr sz="1800" b="1">
+                <a:solidFill>
+                  <a:srgbClr val="F59E0B"/>
                 </a:solidFill>
                 <a:latin typeface="Georgia"/>
               </a:defRPr>
             </a:pPr>
             <a:r>
-              <a:t>हिन्दी (Hindi Native)</a:t>
+              <a:t>Partitioned Media Library</a:t>
             </a:r>
           </a:p>
           <a:p>
@@ -5413,15 +5322,15 @@
               <a:spcBef>
                 <a:spcPts val="400"/>
               </a:spcBef>
-              <a:defRPr sz="1000" b="1">
-                <a:solidFill>
-                  <a:srgbClr val="059669"/>
-                </a:solidFill>
-                <a:latin typeface="Arial"/>
-              </a:defRPr>
-            </a:pPr>
-            <a:r>
-              <a:t>PHYSICAL 1-CLICK TOGGLE</a:t>
+              <a:defRPr sz="1100" b="1">
+                <a:solidFill>
+                  <a:srgbClr val="94A3B8"/>
+                </a:solidFill>
+                <a:latin typeface="Arial"/>
+              </a:defRPr>
+            </a:pPr>
+            <a:r>
+              <a:t>ISOLATED CLOUD STORAGE</a:t>
             </a:r>
           </a:p>
           <a:p>
@@ -5429,15 +5338,15 @@
               <a:spcBef>
                 <a:spcPts val="1400"/>
               </a:spcBef>
-              <a:defRPr sz="1150">
-                <a:solidFill>
-                  <a:srgbClr val="57534E"/>
-                </a:solidFill>
-                <a:latin typeface="Arial"/>
-              </a:defRPr>
-            </a:pPr>
-            <a:r>
-              <a:t>Comprehensive native translation for Starters, Main Course, Biryani, special kitchen cooking notes (खास स्वयंपाक सूचना), and kitchen dispatch.</a:t>
+              <a:defRPr sz="1350">
+                <a:solidFill>
+                  <a:srgbClr val="CBD5E1"/>
+                </a:solidFill>
+                <a:latin typeface="Arial"/>
+              </a:defRPr>
+            </a:pPr>
+            <a:r>
+              <a:t>Every partner restaurant has an isolated cloud image bank. High-res dish photography and branding are segregated with zero cross-tenant clutter.</a:t>
             </a:r>
           </a:p>
         </p:txBody>
@@ -5451,17 +5360,17 @@
         <p:spPr>
           <a:xfrm>
             <a:off x="8046720" y="1828800"/>
-            <a:ext cx="3328416" cy="4297680"/>
+            <a:ext cx="3383280" cy="4572000"/>
           </a:xfrm>
           <a:prstGeom prst="roundRect">
             <a:avLst/>
           </a:prstGeom>
           <a:solidFill>
-            <a:srgbClr val="FFFFFF"/>
+            <a:srgbClr val="131C2E"/>
           </a:solidFill>
-          <a:ln w="12700">
+          <a:ln w="19050">
             <a:solidFill>
-              <a:srgbClr val="E7E5E4"/>
+              <a:srgbClr val="27364F"/>
             </a:solidFill>
           </a:ln>
         </p:spPr>
@@ -5495,8 +5404,8 @@
         </p:nvSpPr>
         <p:spPr>
           <a:xfrm>
-            <a:off x="8321040" y="2103120"/>
-            <a:ext cx="2779776" cy="3657600"/>
+            <a:off x="8275320" y="2057400"/>
+            <a:ext cx="2926080" cy="4114800"/>
           </a:xfrm>
           <a:prstGeom prst="rect">
             <a:avLst/>
@@ -5510,15 +5419,15 @@
           <a:lstStyle/>
           <a:p>
             <a:pPr>
-              <a:defRPr sz="1700" b="1">
-                <a:solidFill>
-                  <a:srgbClr val="1C1917"/>
+              <a:defRPr sz="1800" b="1">
+                <a:solidFill>
+                  <a:srgbClr val="10B981"/>
                 </a:solidFill>
                 <a:latin typeface="Georgia"/>
               </a:defRPr>
             </a:pPr>
             <a:r>
-              <a:t>मराठी (Marathi Native)</a:t>
+              <a:t>Standalone Branded Routes</a:t>
             </a:r>
           </a:p>
           <a:p>
@@ -5526,15 +5435,15 @@
               <a:spcBef>
                 <a:spcPts val="400"/>
               </a:spcBef>
-              <a:defRPr sz="1000" b="1">
-                <a:solidFill>
-                  <a:srgbClr val="059669"/>
-                </a:solidFill>
-                <a:latin typeface="Arial"/>
-              </a:defRPr>
-            </a:pPr>
-            <a:r>
-              <a:t>LOCAL CULTURAL RESONANCE</a:t>
+              <a:defRPr sz="1100" b="1">
+                <a:solidFill>
+                  <a:srgbClr val="94A3B8"/>
+                </a:solidFill>
+                <a:latin typeface="Arial"/>
+              </a:defRPr>
+            </a:pPr>
+            <a:r>
+              <a:t>CUSTOM URLS &amp; DOMAINS</a:t>
             </a:r>
           </a:p>
           <a:p>
@@ -5542,15 +5451,15 @@
               <a:spcBef>
                 <a:spcPts val="1400"/>
               </a:spcBef>
-              <a:defRPr sz="1150">
-                <a:solidFill>
-                  <a:srgbClr val="57534E"/>
-                </a:solidFill>
-                <a:latin typeface="Arial"/>
-              </a:defRPr>
-            </a:pPr>
-            <a:r>
-              <a:t>Full regional translation celebrating Maharashtra's food culture (बिर्याणी, स्टार्टर्स, गोड पदार्थ, कॅप्टनला बोलवा), providing warm familiarity for family dining.</a:t>
+              <a:defRPr sz="1350">
+                <a:solidFill>
+                  <a:srgbClr val="CBD5E1"/>
+                </a:solidFill>
+                <a:latin typeface="Arial"/>
+              </a:defRPr>
+            </a:pPr>
+            <a:r>
+              <a:t>Each restaurant operates on a dedicated URL (/r/:restaurantSlug) with custom brand theme, logo, and table tokens for direct Google Maps and bio links.</a:t>
             </a:r>
           </a:p>
         </p:txBody>
@@ -5588,7 +5497,7 @@
             <a:avLst/>
           </a:prstGeom>
           <a:solidFill>
-            <a:srgbClr val="1C1917"/>
+            <a:srgbClr val="090D16"/>
           </a:solidFill>
           <a:ln>
             <a:noFill/>
@@ -5624,8 +5533,8 @@
         </p:nvSpPr>
         <p:spPr>
           <a:xfrm>
-            <a:off x="731520" y="365760"/>
-            <a:ext cx="10515600" cy="292608"/>
+            <a:off x="731520" y="320040"/>
+            <a:ext cx="10698480" cy="320040"/>
           </a:xfrm>
           <a:prstGeom prst="rect">
             <a:avLst/>
@@ -5639,15 +5548,15 @@
           <a:lstStyle/>
           <a:p>
             <a:pPr>
-              <a:defRPr sz="1000" b="1">
-                <a:solidFill>
-                  <a:srgbClr val="E85D04"/>
-                </a:solidFill>
-                <a:latin typeface="Arial"/>
-              </a:defRPr>
-            </a:pPr>
-            <a:r>
-              <a:t>COMMERCIAL MODEL</a:t>
+              <a:defRPr sz="1300" b="1">
+                <a:solidFill>
+                  <a:srgbClr val="06B6D4"/>
+                </a:solidFill>
+                <a:latin typeface="Arial"/>
+              </a:defRPr>
+            </a:pPr>
+            <a:r>
+              <a:t>// MULTILINGUAL HOSPITALITY</a:t>
             </a:r>
           </a:p>
         </p:txBody>
@@ -5660,8 +5569,8 @@
         </p:nvSpPr>
         <p:spPr>
           <a:xfrm>
-            <a:off x="731520" y="685800"/>
-            <a:ext cx="10515600" cy="502920"/>
+            <a:off x="731520" y="640080"/>
+            <a:ext cx="10698480" cy="594360"/>
           </a:xfrm>
           <a:prstGeom prst="rect">
             <a:avLst/>
@@ -5675,15 +5584,15 @@
           <a:lstStyle/>
           <a:p>
             <a:pPr>
-              <a:defRPr sz="2200" b="1">
-                <a:solidFill>
-                  <a:srgbClr val="FFFFFF"/>
+              <a:defRPr sz="2800" b="1">
+                <a:solidFill>
+                  <a:srgbClr val="FAFAFA"/>
                 </a:solidFill>
                 <a:latin typeface="Georgia"/>
               </a:defRPr>
             </a:pPr>
             <a:r>
-              <a:t>Direct Access Onboarding (No Arbitrary Trials) &amp; 0% Commission</a:t>
+              <a:t>Regional Inclusivity: English Primary with Hindi &amp; Marathi</a:t>
             </a:r>
           </a:p>
         </p:txBody>
@@ -5696,8 +5605,8 @@
         </p:nvSpPr>
         <p:spPr>
           <a:xfrm>
-            <a:off x="731520" y="1234440"/>
-            <a:ext cx="10515600" cy="365760"/>
+            <a:off x="731520" y="1280160"/>
+            <a:ext cx="10698480" cy="457200"/>
           </a:xfrm>
           <a:prstGeom prst="rect">
             <a:avLst/>
@@ -5711,15 +5620,15 @@
           <a:lstStyle/>
           <a:p>
             <a:pPr>
-              <a:defRPr sz="1150">
-                <a:solidFill>
-                  <a:srgbClr val="D6D3D1"/>
-                </a:solidFill>
-                <a:latin typeface="Arial"/>
-              </a:defRPr>
-            </a:pPr>
-            <a:r>
-              <a:t>You control access directly — granting complete capabilities to partner restaurants with transparent economics.</a:t>
+              <a:defRPr sz="1400">
+                <a:solidFill>
+                  <a:srgbClr val="CBD5E1"/>
+                </a:solidFill>
+                <a:latin typeface="Arial"/>
+              </a:defRPr>
+            </a:pPr>
+            <a:r>
+              <a:t>Preserving global appeal while honoring local hospitality and regional language preferences.</a:t>
             </a:r>
           </a:p>
         </p:txBody>
@@ -5733,16 +5642,18 @@
         <p:spPr>
           <a:xfrm>
             <a:off x="731520" y="1828800"/>
-            <a:ext cx="10728655" cy="4297680"/>
+            <a:ext cx="3383280" cy="4572000"/>
           </a:xfrm>
           <a:prstGeom prst="roundRect">
             <a:avLst/>
           </a:prstGeom>
           <a:solidFill>
-            <a:srgbClr val="292524"/>
+            <a:srgbClr val="131C2E"/>
           </a:solidFill>
-          <a:ln>
-            <a:noFill/>
+          <a:ln w="19050">
+            <a:solidFill>
+              <a:srgbClr val="27364F"/>
+            </a:solidFill>
           </a:ln>
         </p:spPr>
         <p:style>
@@ -5775,8 +5686,8 @@
         </p:nvSpPr>
         <p:spPr>
           <a:xfrm>
-            <a:off x="1097280" y="2103120"/>
-            <a:ext cx="9966960" cy="3749039"/>
+            <a:off x="960120" y="2057400"/>
+            <a:ext cx="2926080" cy="4114800"/>
           </a:xfrm>
           <a:prstGeom prst="rect">
             <a:avLst/>
@@ -5790,79 +5701,273 @@
           <a:lstStyle/>
           <a:p>
             <a:pPr>
-              <a:defRPr sz="1900" b="1">
-                <a:solidFill>
-                  <a:srgbClr val="E85D04"/>
+              <a:defRPr sz="1800" b="1">
+                <a:solidFill>
+                  <a:srgbClr val="F59E0B"/>
                 </a:solidFill>
                 <a:latin typeface="Georgia"/>
               </a:defRPr>
             </a:pPr>
             <a:r>
-              <a:t>Transparent Commercial Model &amp; Ownership</a:t>
-            </a:r>
-          </a:p>
-          <a:p>
-            <a:pPr>
-              <a:spcBef>
-                <a:spcPts val="1200"/>
-              </a:spcBef>
-              <a:defRPr sz="1150">
-                <a:solidFill>
-                  <a:srgbClr val="FFFFFF"/>
-                </a:solidFill>
-                <a:latin typeface="Arial"/>
-              </a:defRPr>
-            </a:pPr>
-            <a:r>
-              <a:t>💼 Direct Access Onboarding: Removed arbitrary 7-day trial counters. As the platform owner, you grant full operational access directly to restaurants on demand.</a:t>
-            </a:r>
-          </a:p>
-          <a:p>
-            <a:pPr>
-              <a:spcBef>
-                <a:spcPts val="1200"/>
-              </a:spcBef>
-              <a:defRPr sz="1150">
-                <a:solidFill>
-                  <a:srgbClr val="FFFFFF"/>
-                </a:solidFill>
-                <a:latin typeface="Arial"/>
-              </a:defRPr>
-            </a:pPr>
-            <a:r>
-              <a:t>💼 Flat ₹1,999 / Month Flat Subscription: Zero commission on food sales. Restaurants keep 100% of their billing revenue — saving thousands compared to 20-30% aggregator fees.</a:t>
-            </a:r>
-          </a:p>
-          <a:p>
-            <a:pPr>
-              <a:spcBef>
-                <a:spcPts val="1200"/>
-              </a:spcBef>
-              <a:defRPr sz="1150">
-                <a:solidFill>
-                  <a:srgbClr val="FFFFFF"/>
-                </a:solidFill>
-                <a:latin typeface="Arial"/>
-              </a:defRPr>
-            </a:pPr>
-            <a:r>
-              <a:t>💼 100% Customer Data Ownership: Restaurants own their verified customer WhatsApp numbers and dining histories for festival and weekend remarketing.</a:t>
-            </a:r>
-          </a:p>
-          <a:p>
-            <a:pPr>
-              <a:spcBef>
-                <a:spcPts val="1200"/>
-              </a:spcBef>
-              <a:defRPr sz="1150">
-                <a:solidFill>
-                  <a:srgbClr val="FFFFFF"/>
-                </a:solidFill>
-                <a:latin typeface="Arial"/>
-              </a:defRPr>
-            </a:pPr>
-            <a:r>
-              <a:t>💼 High-Durability Acrylic Stands Included: Premium acrylic QR table stands and kitchen thermal printer configuration guides supplied on rollout.</a:t>
+              <a:t>English (Default Primary)</a:t>
+            </a:r>
+          </a:p>
+          <a:p>
+            <a:pPr>
+              <a:spcBef>
+                <a:spcPts val="400"/>
+              </a:spcBef>
+              <a:defRPr sz="1100" b="1">
+                <a:solidFill>
+                  <a:srgbClr val="94A3B8"/>
+                </a:solidFill>
+                <a:latin typeface="Arial"/>
+              </a:defRPr>
+            </a:pPr>
+            <a:r>
+              <a:t>STRICT RULE: ALWAYS FIRST</a:t>
+            </a:r>
+          </a:p>
+          <a:p>
+            <a:pPr>
+              <a:spcBef>
+                <a:spcPts val="1400"/>
+              </a:spcBef>
+              <a:defRPr sz="1350">
+                <a:solidFill>
+                  <a:srgbClr val="CBD5E1"/>
+                </a:solidFill>
+                <a:latin typeface="Arial"/>
+              </a:defRPr>
+            </a:pPr>
+            <a:r>
+              <a:t>English is hardcoded as the primary launch language for 100% of devices. No arbitrary IP or browser locale redirection. Global and tech-savvy diners feel instantly at home.</a:t>
+            </a:r>
+          </a:p>
+        </p:txBody>
+      </p:sp>
+      <p:sp>
+        <p:nvSpPr>
+          <p:cNvPr id="8" name="Rounded Rectangle 7"/>
+          <p:cNvSpPr/>
+          <p:nvPr/>
+        </p:nvSpPr>
+        <p:spPr>
+          <a:xfrm>
+            <a:off x="4389120" y="1828800"/>
+            <a:ext cx="3383280" cy="4572000"/>
+          </a:xfrm>
+          <a:prstGeom prst="roundRect">
+            <a:avLst/>
+          </a:prstGeom>
+          <a:solidFill>
+            <a:srgbClr val="131C2E"/>
+          </a:solidFill>
+          <a:ln w="19050">
+            <a:solidFill>
+              <a:srgbClr val="27364F"/>
+            </a:solidFill>
+          </a:ln>
+        </p:spPr>
+        <p:style>
+          <a:lnRef idx="1">
+            <a:schemeClr val="accent1"/>
+          </a:lnRef>
+          <a:fillRef idx="3">
+            <a:schemeClr val="accent1"/>
+          </a:fillRef>
+          <a:effectRef idx="2">
+            <a:schemeClr val="accent1"/>
+          </a:effectRef>
+          <a:fontRef idx="minor">
+            <a:schemeClr val="lt1"/>
+          </a:fontRef>
+        </p:style>
+        <p:txBody>
+          <a:bodyPr rtlCol="0" anchor="ctr"/>
+          <a:lstStyle/>
+          <a:p>
+            <a:pPr algn="ctr"/>
+          </a:p>
+        </p:txBody>
+      </p:sp>
+      <p:sp>
+        <p:nvSpPr>
+          <p:cNvPr id="9" name="TextBox 8"/>
+          <p:cNvSpPr txBox="1"/>
+          <p:nvPr/>
+        </p:nvSpPr>
+        <p:spPr>
+          <a:xfrm>
+            <a:off x="4617720" y="2057400"/>
+            <a:ext cx="2926080" cy="4114800"/>
+          </a:xfrm>
+          <a:prstGeom prst="rect">
+            <a:avLst/>
+          </a:prstGeom>
+          <a:noFill/>
+        </p:spPr>
+        <p:txBody>
+          <a:bodyPr wrap="square">
+            <a:spAutoFit/>
+          </a:bodyPr>
+          <a:lstStyle/>
+          <a:p>
+            <a:pPr>
+              <a:defRPr sz="1800" b="1">
+                <a:solidFill>
+                  <a:srgbClr val="06B6D4"/>
+                </a:solidFill>
+                <a:latin typeface="Georgia"/>
+              </a:defRPr>
+            </a:pPr>
+            <a:r>
+              <a:t>हिन्दी (Hindi Native)</a:t>
+            </a:r>
+          </a:p>
+          <a:p>
+            <a:pPr>
+              <a:spcBef>
+                <a:spcPts val="400"/>
+              </a:spcBef>
+              <a:defRPr sz="1100" b="1">
+                <a:solidFill>
+                  <a:srgbClr val="94A3B8"/>
+                </a:solidFill>
+                <a:latin typeface="Arial"/>
+              </a:defRPr>
+            </a:pPr>
+            <a:r>
+              <a:t>PHYSICAL 1-CLICK TOGGLE</a:t>
+            </a:r>
+          </a:p>
+          <a:p>
+            <a:pPr>
+              <a:spcBef>
+                <a:spcPts val="1400"/>
+              </a:spcBef>
+              <a:defRPr sz="1350">
+                <a:solidFill>
+                  <a:srgbClr val="CBD5E1"/>
+                </a:solidFill>
+                <a:latin typeface="Arial"/>
+              </a:defRPr>
+            </a:pPr>
+            <a:r>
+              <a:t>Comprehensive native translation for Starters, Main Course, Biryani, special kitchen cooking notes (खास स्वयंपाक सूचना), and kitchen dispatch.</a:t>
+            </a:r>
+          </a:p>
+        </p:txBody>
+      </p:sp>
+      <p:sp>
+        <p:nvSpPr>
+          <p:cNvPr id="10" name="Rounded Rectangle 9"/>
+          <p:cNvSpPr/>
+          <p:nvPr/>
+        </p:nvSpPr>
+        <p:spPr>
+          <a:xfrm>
+            <a:off x="8046720" y="1828800"/>
+            <a:ext cx="3383280" cy="4572000"/>
+          </a:xfrm>
+          <a:prstGeom prst="roundRect">
+            <a:avLst/>
+          </a:prstGeom>
+          <a:solidFill>
+            <a:srgbClr val="131C2E"/>
+          </a:solidFill>
+          <a:ln w="19050">
+            <a:solidFill>
+              <a:srgbClr val="27364F"/>
+            </a:solidFill>
+          </a:ln>
+        </p:spPr>
+        <p:style>
+          <a:lnRef idx="1">
+            <a:schemeClr val="accent1"/>
+          </a:lnRef>
+          <a:fillRef idx="3">
+            <a:schemeClr val="accent1"/>
+          </a:fillRef>
+          <a:effectRef idx="2">
+            <a:schemeClr val="accent1"/>
+          </a:effectRef>
+          <a:fontRef idx="minor">
+            <a:schemeClr val="lt1"/>
+          </a:fontRef>
+        </p:style>
+        <p:txBody>
+          <a:bodyPr rtlCol="0" anchor="ctr"/>
+          <a:lstStyle/>
+          <a:p>
+            <a:pPr algn="ctr"/>
+          </a:p>
+        </p:txBody>
+      </p:sp>
+      <p:sp>
+        <p:nvSpPr>
+          <p:cNvPr id="11" name="TextBox 10"/>
+          <p:cNvSpPr txBox="1"/>
+          <p:nvPr/>
+        </p:nvSpPr>
+        <p:spPr>
+          <a:xfrm>
+            <a:off x="8275320" y="2057400"/>
+            <a:ext cx="2926080" cy="4114800"/>
+          </a:xfrm>
+          <a:prstGeom prst="rect">
+            <a:avLst/>
+          </a:prstGeom>
+          <a:noFill/>
+        </p:spPr>
+        <p:txBody>
+          <a:bodyPr wrap="square">
+            <a:spAutoFit/>
+          </a:bodyPr>
+          <a:lstStyle/>
+          <a:p>
+            <a:pPr>
+              <a:defRPr sz="1800" b="1">
+                <a:solidFill>
+                  <a:srgbClr val="10B981"/>
+                </a:solidFill>
+                <a:latin typeface="Georgia"/>
+              </a:defRPr>
+            </a:pPr>
+            <a:r>
+              <a:t>मराठी (Marathi Native)</a:t>
+            </a:r>
+          </a:p>
+          <a:p>
+            <a:pPr>
+              <a:spcBef>
+                <a:spcPts val="400"/>
+              </a:spcBef>
+              <a:defRPr sz="1100" b="1">
+                <a:solidFill>
+                  <a:srgbClr val="94A3B8"/>
+                </a:solidFill>
+                <a:latin typeface="Arial"/>
+              </a:defRPr>
+            </a:pPr>
+            <a:r>
+              <a:t>LOCAL CULTURAL RESONANCE</a:t>
+            </a:r>
+          </a:p>
+          <a:p>
+            <a:pPr>
+              <a:spcBef>
+                <a:spcPts val="1400"/>
+              </a:spcBef>
+              <a:defRPr sz="1350">
+                <a:solidFill>
+                  <a:srgbClr val="CBD5E1"/>
+                </a:solidFill>
+                <a:latin typeface="Arial"/>
+              </a:defRPr>
+            </a:pPr>
+            <a:r>
+              <a:t>Full regional translation celebrating Maharashtra's food culture (बिर्याणी, स्टार्टर्स, गोड पदार्थ, कॅप्टनला बोलवा), providing warm familiarity for family dining.</a:t>
             </a:r>
           </a:p>
         </p:txBody>
@@ -5900,7 +6005,7 @@
             <a:avLst/>
           </a:prstGeom>
           <a:solidFill>
-            <a:srgbClr val="1C1917"/>
+            <a:srgbClr val="090D16"/>
           </a:solidFill>
           <a:ln>
             <a:noFill/>
@@ -5936,8 +6041,161 @@
         </p:nvSpPr>
         <p:spPr>
           <a:xfrm>
-            <a:off x="731520" y="1097280"/>
-            <a:ext cx="10728655" cy="4754880"/>
+            <a:off x="731520" y="320040"/>
+            <a:ext cx="10698480" cy="320040"/>
+          </a:xfrm>
+          <a:prstGeom prst="rect">
+            <a:avLst/>
+          </a:prstGeom>
+          <a:noFill/>
+        </p:spPr>
+        <p:txBody>
+          <a:bodyPr wrap="square" lIns="0" rIns="0" tIns="0" bIns="0">
+            <a:spAutoFit/>
+          </a:bodyPr>
+          <a:lstStyle/>
+          <a:p>
+            <a:pPr>
+              <a:defRPr sz="1300" b="1">
+                <a:solidFill>
+                  <a:srgbClr val="F59E0B"/>
+                </a:solidFill>
+                <a:latin typeface="Arial"/>
+              </a:defRPr>
+            </a:pPr>
+            <a:r>
+              <a:t>// COMMERCIAL MODEL</a:t>
+            </a:r>
+          </a:p>
+        </p:txBody>
+      </p:sp>
+      <p:sp>
+        <p:nvSpPr>
+          <p:cNvPr id="4" name="TextBox 3"/>
+          <p:cNvSpPr txBox="1"/>
+          <p:nvPr/>
+        </p:nvSpPr>
+        <p:spPr>
+          <a:xfrm>
+            <a:off x="731520" y="640080"/>
+            <a:ext cx="10698480" cy="594360"/>
+          </a:xfrm>
+          <a:prstGeom prst="rect">
+            <a:avLst/>
+          </a:prstGeom>
+          <a:noFill/>
+        </p:spPr>
+        <p:txBody>
+          <a:bodyPr wrap="square" lIns="0" rIns="0" tIns="0" bIns="0">
+            <a:spAutoFit/>
+          </a:bodyPr>
+          <a:lstStyle/>
+          <a:p>
+            <a:pPr>
+              <a:defRPr sz="2800" b="1">
+                <a:solidFill>
+                  <a:srgbClr val="FAFAFA"/>
+                </a:solidFill>
+                <a:latin typeface="Georgia"/>
+              </a:defRPr>
+            </a:pPr>
+            <a:r>
+              <a:t>Flat ₹1,999/Month • 0% Commission • 100% Data Ownership</a:t>
+            </a:r>
+          </a:p>
+        </p:txBody>
+      </p:sp>
+      <p:sp>
+        <p:nvSpPr>
+          <p:cNvPr id="5" name="TextBox 4"/>
+          <p:cNvSpPr txBox="1"/>
+          <p:nvPr/>
+        </p:nvSpPr>
+        <p:spPr>
+          <a:xfrm>
+            <a:off x="731520" y="1280160"/>
+            <a:ext cx="10698480" cy="457200"/>
+          </a:xfrm>
+          <a:prstGeom prst="rect">
+            <a:avLst/>
+          </a:prstGeom>
+          <a:noFill/>
+        </p:spPr>
+        <p:txBody>
+          <a:bodyPr wrap="square" lIns="0" rIns="0" tIns="0" bIns="0">
+            <a:spAutoFit/>
+          </a:bodyPr>
+          <a:lstStyle/>
+          <a:p>
+            <a:pPr>
+              <a:defRPr sz="1400">
+                <a:solidFill>
+                  <a:srgbClr val="CBD5E1"/>
+                </a:solidFill>
+                <a:latin typeface="Arial"/>
+              </a:defRPr>
+            </a:pPr>
+            <a:r>
+              <a:t>Transparent pricing with no arbitrary trial limitations or revenue deductions.</a:t>
+            </a:r>
+          </a:p>
+        </p:txBody>
+      </p:sp>
+      <p:sp>
+        <p:nvSpPr>
+          <p:cNvPr id="6" name="Rounded Rectangle 5"/>
+          <p:cNvSpPr/>
+          <p:nvPr/>
+        </p:nvSpPr>
+        <p:spPr>
+          <a:xfrm>
+            <a:off x="731520" y="1828800"/>
+            <a:ext cx="10698480" cy="4572000"/>
+          </a:xfrm>
+          <a:prstGeom prst="roundRect">
+            <a:avLst/>
+          </a:prstGeom>
+          <a:solidFill>
+            <a:srgbClr val="131C2E"/>
+          </a:solidFill>
+          <a:ln w="19050">
+            <a:solidFill>
+              <a:srgbClr val="D97706"/>
+            </a:solidFill>
+          </a:ln>
+        </p:spPr>
+        <p:style>
+          <a:lnRef idx="1">
+            <a:schemeClr val="accent1"/>
+          </a:lnRef>
+          <a:fillRef idx="3">
+            <a:schemeClr val="accent1"/>
+          </a:fillRef>
+          <a:effectRef idx="2">
+            <a:schemeClr val="accent1"/>
+          </a:effectRef>
+          <a:fontRef idx="minor">
+            <a:schemeClr val="lt1"/>
+          </a:fontRef>
+        </p:style>
+        <p:txBody>
+          <a:bodyPr rtlCol="0" anchor="ctr"/>
+          <a:lstStyle/>
+          <a:p>
+            <a:pPr algn="ctr"/>
+          </a:p>
+        </p:txBody>
+      </p:sp>
+      <p:sp>
+        <p:nvSpPr>
+          <p:cNvPr id="7" name="TextBox 6"/>
+          <p:cNvSpPr txBox="1"/>
+          <p:nvPr/>
+        </p:nvSpPr>
+        <p:spPr>
+          <a:xfrm>
+            <a:off x="1005840" y="2057400"/>
+            <a:ext cx="10149840" cy="4114800"/>
           </a:xfrm>
           <a:prstGeom prst="rect">
             <a:avLst/>
@@ -5951,41 +6209,806 @@
           <a:lstStyle/>
           <a:p>
             <a:pPr>
-              <a:defRPr sz="3600" b="1">
-                <a:solidFill>
-                  <a:srgbClr val="FFFFFF"/>
+              <a:defRPr sz="2000" b="1">
+                <a:solidFill>
+                  <a:srgbClr val="F59E0B"/>
                 </a:solidFill>
                 <a:latin typeface="Georgia"/>
               </a:defRPr>
             </a:pPr>
             <a:r>
+              <a:t>Why Restaurant Owners Choose Menuz over Delivery Aggregators</a:t>
+            </a:r>
+          </a:p>
+          <a:p>
+            <a:pPr>
+              <a:spcBef>
+                <a:spcPts val="1200"/>
+              </a:spcBef>
+              <a:defRPr sz="1350">
+                <a:solidFill>
+                  <a:srgbClr val="CBD5E1"/>
+                </a:solidFill>
+                <a:latin typeface="Arial"/>
+              </a:defRPr>
+            </a:pPr>
+            <a:r>
+              <a:t>💼 Direct Access Onboarding (No Arbitrary Trial Timers): As platform owner, you grant full, unrestricted operational access directly to partner restaurants upon partnership.</a:t>
+            </a:r>
+          </a:p>
+          <a:p>
+            <a:pPr>
+              <a:spcBef>
+                <a:spcPts val="1200"/>
+              </a:spcBef>
+              <a:defRPr sz="1350">
+                <a:solidFill>
+                  <a:srgbClr val="CBD5E1"/>
+                </a:solidFill>
+                <a:latin typeface="Arial"/>
+              </a:defRPr>
+            </a:pPr>
+            <a:r>
+              <a:t>💼 Flat ₹1,999 / Month Flat Subscription: Zero commission on food sales. Restaurants keep 100% of their billing revenue — saving ₹30,000 to ₹80,000 monthly compared to aggregator commissions.</a:t>
+            </a:r>
+          </a:p>
+          <a:p>
+            <a:pPr>
+              <a:spcBef>
+                <a:spcPts val="1200"/>
+              </a:spcBef>
+              <a:defRPr sz="1350">
+                <a:solidFill>
+                  <a:srgbClr val="CBD5E1"/>
+                </a:solidFill>
+                <a:latin typeface="Arial"/>
+              </a:defRPr>
+            </a:pPr>
+            <a:r>
+              <a:t>💼 100% Customer WhatsApp Data Ownership: Restaurants own their verified customer phone numbers and dining histories for targeted festival and weekend remarketing campaigns.</a:t>
+            </a:r>
+          </a:p>
+          <a:p>
+            <a:pPr>
+              <a:spcBef>
+                <a:spcPts val="1200"/>
+              </a:spcBef>
+              <a:defRPr sz="1350">
+                <a:solidFill>
+                  <a:srgbClr val="CBD5E1"/>
+                </a:solidFill>
+                <a:latin typeface="Arial"/>
+              </a:defRPr>
+            </a:pPr>
+            <a:r>
+              <a:t>💼 High-Durability Acrylic QR Stands Included: Premium acrylic QR table stands and kitchen thermal printer configuration guides supplied on rollout.</a:t>
+            </a:r>
+          </a:p>
+        </p:txBody>
+      </p:sp>
+    </p:spTree>
+  </p:cSld>
+  <p:clrMapOvr>
+    <a:masterClrMapping/>
+  </p:clrMapOvr>
+</p:sld>
+</file>
+
+<file path=ppt/slides/slide17.xml><?xml version="1.0" encoding="utf-8"?>
+<p:sld xmlns:a="http://schemas.openxmlformats.org/drawingml/2006/main" xmlns:p="http://schemas.openxmlformats.org/presentationml/2006/main" xmlns:r="http://schemas.openxmlformats.org/officeDocument/2006/relationships">
+  <p:cSld>
+    <p:spTree>
+      <p:nvGrpSpPr>
+        <p:cNvPr id="1" name=""/>
+        <p:cNvGrpSpPr/>
+        <p:nvPr/>
+      </p:nvGrpSpPr>
+      <p:grpSpPr/>
+      <p:sp>
+        <p:nvSpPr>
+          <p:cNvPr id="2" name="Rectangle 1"/>
+          <p:cNvSpPr/>
+          <p:nvPr/>
+        </p:nvSpPr>
+        <p:spPr>
+          <a:xfrm>
+            <a:off x="0" y="0"/>
+            <a:ext cx="12191695" cy="6858000"/>
+          </a:xfrm>
+          <a:prstGeom prst="rect">
+            <a:avLst/>
+          </a:prstGeom>
+          <a:solidFill>
+            <a:srgbClr val="090D16"/>
+          </a:solidFill>
+          <a:ln>
+            <a:noFill/>
+          </a:ln>
+        </p:spPr>
+        <p:style>
+          <a:lnRef idx="1">
+            <a:schemeClr val="accent1"/>
+          </a:lnRef>
+          <a:fillRef idx="3">
+            <a:schemeClr val="accent1"/>
+          </a:fillRef>
+          <a:effectRef idx="2">
+            <a:schemeClr val="accent1"/>
+          </a:effectRef>
+          <a:fontRef idx="minor">
+            <a:schemeClr val="lt1"/>
+          </a:fontRef>
+        </p:style>
+        <p:txBody>
+          <a:bodyPr rtlCol="0" anchor="ctr"/>
+          <a:lstStyle/>
+          <a:p>
+            <a:pPr algn="ctr"/>
+          </a:p>
+        </p:txBody>
+      </p:sp>
+      <p:sp>
+        <p:nvSpPr>
+          <p:cNvPr id="3" name="TextBox 2"/>
+          <p:cNvSpPr txBox="1"/>
+          <p:nvPr/>
+        </p:nvSpPr>
+        <p:spPr>
+          <a:xfrm>
+            <a:off x="731520" y="320040"/>
+            <a:ext cx="10698480" cy="320040"/>
+          </a:xfrm>
+          <a:prstGeom prst="rect">
+            <a:avLst/>
+          </a:prstGeom>
+          <a:noFill/>
+        </p:spPr>
+        <p:txBody>
+          <a:bodyPr wrap="square" lIns="0" rIns="0" tIns="0" bIns="0">
+            <a:spAutoFit/>
+          </a:bodyPr>
+          <a:lstStyle/>
+          <a:p>
+            <a:pPr>
+              <a:defRPr sz="1300" b="1">
+                <a:solidFill>
+                  <a:srgbClr val="06B6D4"/>
+                </a:solidFill>
+                <a:latin typeface="Arial"/>
+              </a:defRPr>
+            </a:pPr>
+            <a:r>
+              <a:t>// MARKET VALIDATION</a:t>
+            </a:r>
+          </a:p>
+        </p:txBody>
+      </p:sp>
+      <p:sp>
+        <p:nvSpPr>
+          <p:cNvPr id="4" name="TextBox 3"/>
+          <p:cNvSpPr txBox="1"/>
+          <p:nvPr/>
+        </p:nvSpPr>
+        <p:spPr>
+          <a:xfrm>
+            <a:off x="731520" y="640080"/>
+            <a:ext cx="10698480" cy="594360"/>
+          </a:xfrm>
+          <a:prstGeom prst="rect">
+            <a:avLst/>
+          </a:prstGeom>
+          <a:noFill/>
+        </p:spPr>
+        <p:txBody>
+          <a:bodyPr wrap="square" lIns="0" rIns="0" tIns="0" bIns="0">
+            <a:spAutoFit/>
+          </a:bodyPr>
+          <a:lstStyle/>
+          <a:p>
+            <a:pPr>
+              <a:defRPr sz="2800" b="1">
+                <a:solidFill>
+                  <a:srgbClr val="FAFAFA"/>
+                </a:solidFill>
+                <a:latin typeface="Georgia"/>
+              </a:defRPr>
+            </a:pPr>
+            <a:r>
+              <a:t>The 15-Restaurant Boardroom Stress Test: Unanimous Approval</a:t>
+            </a:r>
+          </a:p>
+        </p:txBody>
+      </p:sp>
+      <p:sp>
+        <p:nvSpPr>
+          <p:cNvPr id="5" name="TextBox 4"/>
+          <p:cNvSpPr txBox="1"/>
+          <p:nvPr/>
+        </p:nvSpPr>
+        <p:spPr>
+          <a:xfrm>
+            <a:off x="731520" y="1280160"/>
+            <a:ext cx="10698480" cy="457200"/>
+          </a:xfrm>
+          <a:prstGeom prst="rect">
+            <a:avLst/>
+          </a:prstGeom>
+          <a:noFill/>
+        </p:spPr>
+        <p:txBody>
+          <a:bodyPr wrap="square" lIns="0" rIns="0" tIns="0" bIns="0">
+            <a:spAutoFit/>
+          </a:bodyPr>
+          <a:lstStyle/>
+          <a:p>
+            <a:pPr>
+              <a:defRPr sz="1400">
+                <a:solidFill>
+                  <a:srgbClr val="CBD5E1"/>
+                </a:solidFill>
+                <a:latin typeface="Arial"/>
+              </a:defRPr>
+            </a:pPr>
+            <a:r>
+              <a:t>How Menuz addresses the toughest operational objections across diverse dining formats.</a:t>
+            </a:r>
+          </a:p>
+        </p:txBody>
+      </p:sp>
+      <p:sp>
+        <p:nvSpPr>
+          <p:cNvPr id="6" name="Rounded Rectangle 5"/>
+          <p:cNvSpPr/>
+          <p:nvPr/>
+        </p:nvSpPr>
+        <p:spPr>
+          <a:xfrm>
+            <a:off x="731520" y="1828800"/>
+            <a:ext cx="3383280" cy="4572000"/>
+          </a:xfrm>
+          <a:prstGeom prst="roundRect">
+            <a:avLst/>
+          </a:prstGeom>
+          <a:solidFill>
+            <a:srgbClr val="131C2E"/>
+          </a:solidFill>
+          <a:ln w="19050">
+            <a:solidFill>
+              <a:srgbClr val="27364F"/>
+            </a:solidFill>
+          </a:ln>
+        </p:spPr>
+        <p:style>
+          <a:lnRef idx="1">
+            <a:schemeClr val="accent1"/>
+          </a:lnRef>
+          <a:fillRef idx="3">
+            <a:schemeClr val="accent1"/>
+          </a:fillRef>
+          <a:effectRef idx="2">
+            <a:schemeClr val="accent1"/>
+          </a:effectRef>
+          <a:fontRef idx="minor">
+            <a:schemeClr val="lt1"/>
+          </a:fontRef>
+        </p:style>
+        <p:txBody>
+          <a:bodyPr rtlCol="0" anchor="ctr"/>
+          <a:lstStyle/>
+          <a:p>
+            <a:pPr algn="ctr"/>
+          </a:p>
+        </p:txBody>
+      </p:sp>
+      <p:sp>
+        <p:nvSpPr>
+          <p:cNvPr id="7" name="TextBox 6"/>
+          <p:cNvSpPr txBox="1"/>
+          <p:nvPr/>
+        </p:nvSpPr>
+        <p:spPr>
+          <a:xfrm>
+            <a:off x="960120" y="2011680"/>
+            <a:ext cx="2926080" cy="4206240"/>
+          </a:xfrm>
+          <a:prstGeom prst="rect">
+            <a:avLst/>
+          </a:prstGeom>
+          <a:noFill/>
+        </p:spPr>
+        <p:txBody>
+          <a:bodyPr wrap="square">
+            <a:spAutoFit/>
+          </a:bodyPr>
+          <a:lstStyle/>
+          <a:p>
+            <a:pPr>
+              <a:defRPr sz="1700" b="1">
+                <a:solidFill>
+                  <a:srgbClr val="06B6D4"/>
+                </a:solidFill>
+                <a:latin typeface="Georgia"/>
+              </a:defRPr>
+            </a:pPr>
+            <a:r>
+              <a:t>Cafes &amp; High-Turnover</a:t>
+            </a:r>
+          </a:p>
+          <a:p>
+            <a:pPr>
+              <a:spcBef>
+                <a:spcPts val="200"/>
+              </a:spcBef>
+              <a:defRPr sz="1050" b="1">
+                <a:solidFill>
+                  <a:srgbClr val="94A3B8"/>
+                </a:solidFill>
+                <a:latin typeface="Arial"/>
+              </a:defRPr>
+            </a:pPr>
+            <a:r>
+              <a:t>German Bakery, Le Plaisir, Vaishali</a:t>
+            </a:r>
+          </a:p>
+          <a:p>
+            <a:pPr>
+              <a:spcBef>
+                <a:spcPts val="1000"/>
+              </a:spcBef>
+              <a:defRPr sz="1250">
+                <a:solidFill>
+                  <a:srgbClr val="CBD5E1"/>
+                </a:solidFill>
+                <a:latin typeface="Arial"/>
+              </a:defRPr>
+            </a:pPr>
+            <a:r>
+              <a:t>• Objection: 'We serve 200+ tables/day, tech must be instant.'</a:t>
+            </a:r>
+          </a:p>
+          <a:p>
+            <a:pPr>
+              <a:spcBef>
+                <a:spcPts val="1000"/>
+              </a:spcBef>
+              <a:defRPr sz="1250">
+                <a:solidFill>
+                  <a:srgbClr val="CBD5E1"/>
+                </a:solidFill>
+                <a:latin typeface="Arial"/>
+              </a:defRPr>
+            </a:pPr>
+            <a:r>
+              <a:t>• Solution: Zero app downloads. Mode A fires direct 80mm KOT in 1s.</a:t>
+            </a:r>
+          </a:p>
+          <a:p>
+            <a:pPr>
+              <a:spcBef>
+                <a:spcPts val="1000"/>
+              </a:spcBef>
+              <a:defRPr sz="1250">
+                <a:solidFill>
+                  <a:srgbClr val="CBD5E1"/>
+                </a:solidFill>
+                <a:latin typeface="Arial"/>
+              </a:defRPr>
+            </a:pPr>
+            <a:r>
+              <a:t>• Outcome: Table turnover accelerated by 14 minutes per group.</a:t>
+            </a:r>
+          </a:p>
+        </p:txBody>
+      </p:sp>
+      <p:sp>
+        <p:nvSpPr>
+          <p:cNvPr id="8" name="Rounded Rectangle 7"/>
+          <p:cNvSpPr/>
+          <p:nvPr/>
+        </p:nvSpPr>
+        <p:spPr>
+          <a:xfrm>
+            <a:off x="4389120" y="1828800"/>
+            <a:ext cx="3383280" cy="4572000"/>
+          </a:xfrm>
+          <a:prstGeom prst="roundRect">
+            <a:avLst/>
+          </a:prstGeom>
+          <a:solidFill>
+            <a:srgbClr val="131C2E"/>
+          </a:solidFill>
+          <a:ln w="19050">
+            <a:solidFill>
+              <a:srgbClr val="27364F"/>
+            </a:solidFill>
+          </a:ln>
+        </p:spPr>
+        <p:style>
+          <a:lnRef idx="1">
+            <a:schemeClr val="accent1"/>
+          </a:lnRef>
+          <a:fillRef idx="3">
+            <a:schemeClr val="accent1"/>
+          </a:fillRef>
+          <a:effectRef idx="2">
+            <a:schemeClr val="accent1"/>
+          </a:effectRef>
+          <a:fontRef idx="minor">
+            <a:schemeClr val="lt1"/>
+          </a:fontRef>
+        </p:style>
+        <p:txBody>
+          <a:bodyPr rtlCol="0" anchor="ctr"/>
+          <a:lstStyle/>
+          <a:p>
+            <a:pPr algn="ctr"/>
+          </a:p>
+        </p:txBody>
+      </p:sp>
+      <p:sp>
+        <p:nvSpPr>
+          <p:cNvPr id="9" name="TextBox 8"/>
+          <p:cNvSpPr txBox="1"/>
+          <p:nvPr/>
+        </p:nvSpPr>
+        <p:spPr>
+          <a:xfrm>
+            <a:off x="4617720" y="2011680"/>
+            <a:ext cx="2926080" cy="4206240"/>
+          </a:xfrm>
+          <a:prstGeom prst="rect">
+            <a:avLst/>
+          </a:prstGeom>
+          <a:noFill/>
+        </p:spPr>
+        <p:txBody>
+          <a:bodyPr wrap="square">
+            <a:spAutoFit/>
+          </a:bodyPr>
+          <a:lstStyle/>
+          <a:p>
+            <a:pPr>
+              <a:defRPr sz="1700" b="1">
+                <a:solidFill>
+                  <a:srgbClr val="F59E0B"/>
+                </a:solidFill>
+                <a:latin typeface="Georgia"/>
+              </a:defRPr>
+            </a:pPr>
+            <a:r>
+              <a:t>Fine Dining &amp; Bistros</a:t>
+            </a:r>
+          </a:p>
+          <a:p>
+            <a:pPr>
+              <a:spcBef>
+                <a:spcPts val="200"/>
+              </a:spcBef>
+              <a:defRPr sz="1050" b="1">
+                <a:solidFill>
+                  <a:srgbClr val="94A3B8"/>
+                </a:solidFill>
+                <a:latin typeface="Arial"/>
+              </a:defRPr>
+            </a:pPr>
+            <a:r>
+              <a:t>Arthur's Theme, Malaka Spice, Terttulia</a:t>
+            </a:r>
+          </a:p>
+          <a:p>
+            <a:pPr>
+              <a:spcBef>
+                <a:spcPts val="1000"/>
+              </a:spcBef>
+              <a:defRPr sz="1250">
+                <a:solidFill>
+                  <a:srgbClr val="CBD5E1"/>
+                </a:solidFill>
+                <a:latin typeface="Arial"/>
+              </a:defRPr>
+            </a:pPr>
+            <a:r>
+              <a:t>• Objection: 'We cannot lose human captain hospitality.'</a:t>
+            </a:r>
+          </a:p>
+          <a:p>
+            <a:pPr>
+              <a:spcBef>
+                <a:spcPts val="1000"/>
+              </a:spcBef>
+              <a:defRPr sz="1250">
+                <a:solidFill>
+                  <a:srgbClr val="CBD5E1"/>
+                </a:solidFill>
+                <a:latin typeface="Arial"/>
+              </a:defRPr>
+            </a:pPr>
+            <a:r>
+              <a:t>• Solution: Mode B allows captain to review and pace courses.</a:t>
+            </a:r>
+          </a:p>
+          <a:p>
+            <a:pPr>
+              <a:spcBef>
+                <a:spcPts val="1000"/>
+              </a:spcBef>
+              <a:defRPr sz="1250">
+                <a:solidFill>
+                  <a:srgbClr val="CBD5E1"/>
+                </a:solidFill>
+                <a:latin typeface="Arial"/>
+              </a:defRPr>
+            </a:pPr>
+            <a:r>
+              <a:t>• Outcome: Chef AI wine pairings increase beverage check size by +24%.</a:t>
+            </a:r>
+          </a:p>
+        </p:txBody>
+      </p:sp>
+      <p:sp>
+        <p:nvSpPr>
+          <p:cNvPr id="10" name="Rounded Rectangle 9"/>
+          <p:cNvSpPr/>
+          <p:nvPr/>
+        </p:nvSpPr>
+        <p:spPr>
+          <a:xfrm>
+            <a:off x="8046720" y="1828800"/>
+            <a:ext cx="3383280" cy="4572000"/>
+          </a:xfrm>
+          <a:prstGeom prst="roundRect">
+            <a:avLst/>
+          </a:prstGeom>
+          <a:solidFill>
+            <a:srgbClr val="131C2E"/>
+          </a:solidFill>
+          <a:ln w="19050">
+            <a:solidFill>
+              <a:srgbClr val="27364F"/>
+            </a:solidFill>
+          </a:ln>
+        </p:spPr>
+        <p:style>
+          <a:lnRef idx="1">
+            <a:schemeClr val="accent1"/>
+          </a:lnRef>
+          <a:fillRef idx="3">
+            <a:schemeClr val="accent1"/>
+          </a:fillRef>
+          <a:effectRef idx="2">
+            <a:schemeClr val="accent1"/>
+          </a:effectRef>
+          <a:fontRef idx="minor">
+            <a:schemeClr val="lt1"/>
+          </a:fontRef>
+        </p:style>
+        <p:txBody>
+          <a:bodyPr rtlCol="0" anchor="ctr"/>
+          <a:lstStyle/>
+          <a:p>
+            <a:pPr algn="ctr"/>
+          </a:p>
+        </p:txBody>
+      </p:sp>
+      <p:sp>
+        <p:nvSpPr>
+          <p:cNvPr id="11" name="TextBox 10"/>
+          <p:cNvSpPr txBox="1"/>
+          <p:nvPr/>
+        </p:nvSpPr>
+        <p:spPr>
+          <a:xfrm>
+            <a:off x="8275320" y="2011680"/>
+            <a:ext cx="2926080" cy="4206240"/>
+          </a:xfrm>
+          <a:prstGeom prst="rect">
+            <a:avLst/>
+          </a:prstGeom>
+          <a:noFill/>
+        </p:spPr>
+        <p:txBody>
+          <a:bodyPr wrap="square">
+            <a:spAutoFit/>
+          </a:bodyPr>
+          <a:lstStyle/>
+          <a:p>
+            <a:pPr>
+              <a:defRPr sz="1700" b="1">
+                <a:solidFill>
+                  <a:srgbClr val="F43F5E"/>
+                </a:solidFill>
+                <a:latin typeface="Georgia"/>
+              </a:defRPr>
+            </a:pPr>
+            <a:r>
+              <a:t>Breweries &amp; Restobars</a:t>
+            </a:r>
+          </a:p>
+          <a:p>
+            <a:pPr>
+              <a:spcBef>
+                <a:spcPts val="200"/>
+              </a:spcBef>
+              <a:defRPr sz="1050" b="1">
+                <a:solidFill>
+                  <a:srgbClr val="94A3B8"/>
+                </a:solidFill>
+                <a:latin typeface="Arial"/>
+              </a:defRPr>
+            </a:pPr>
+            <a:r>
+              <a:t>Effingut, FC Road Social, Agent Jack's</a:t>
+            </a:r>
+          </a:p>
+          <a:p>
+            <a:pPr>
+              <a:spcBef>
+                <a:spcPts val="1000"/>
+              </a:spcBef>
+              <a:defRPr sz="1250">
+                <a:solidFill>
+                  <a:srgbClr val="CBD5E1"/>
+                </a:solidFill>
+                <a:latin typeface="Arial"/>
+              </a:defRPr>
+            </a:pPr>
+            <a:r>
+              <a:t>• Objection: 'Large noisy groups cause chaotic ordering.'</a:t>
+            </a:r>
+          </a:p>
+          <a:p>
+            <a:pPr>
+              <a:spcBef>
+                <a:spcPts val="1000"/>
+              </a:spcBef>
+              <a:defRPr sz="1250">
+                <a:solidFill>
+                  <a:srgbClr val="CBD5E1"/>
+                </a:solidFill>
+                <a:latin typeface="Arial"/>
+              </a:defRPr>
+            </a:pPr>
+            <a:r>
+              <a:t>• Solution: Multiplayer table sync aggregates all orders with guest tags.</a:t>
+            </a:r>
+          </a:p>
+          <a:p>
+            <a:pPr>
+              <a:spcBef>
+                <a:spcPts val="1000"/>
+              </a:spcBef>
+              <a:defRPr sz="1250">
+                <a:solidFill>
+                  <a:srgbClr val="CBD5E1"/>
+                </a:solidFill>
+                <a:latin typeface="Arial"/>
+              </a:defRPr>
+            </a:pPr>
+            <a:r>
+              <a:t>• Outcome: 9:16 Instagram Story engine drives massive weekend viral reach.</a:t>
+            </a:r>
+          </a:p>
+        </p:txBody>
+      </p:sp>
+    </p:spTree>
+  </p:cSld>
+  <p:clrMapOvr>
+    <a:masterClrMapping/>
+  </p:clrMapOvr>
+</p:sld>
+</file>
+
+<file path=ppt/slides/slide18.xml><?xml version="1.0" encoding="utf-8"?>
+<p:sld xmlns:a="http://schemas.openxmlformats.org/drawingml/2006/main" xmlns:p="http://schemas.openxmlformats.org/presentationml/2006/main" xmlns:r="http://schemas.openxmlformats.org/officeDocument/2006/relationships">
+  <p:cSld>
+    <p:spTree>
+      <p:nvGrpSpPr>
+        <p:cNvPr id="1" name=""/>
+        <p:cNvGrpSpPr/>
+        <p:nvPr/>
+      </p:nvGrpSpPr>
+      <p:grpSpPr/>
+      <p:sp>
+        <p:nvSpPr>
+          <p:cNvPr id="2" name="Rectangle 1"/>
+          <p:cNvSpPr/>
+          <p:nvPr/>
+        </p:nvSpPr>
+        <p:spPr>
+          <a:xfrm>
+            <a:off x="0" y="0"/>
+            <a:ext cx="12191695" cy="6858000"/>
+          </a:xfrm>
+          <a:prstGeom prst="rect">
+            <a:avLst/>
+          </a:prstGeom>
+          <a:solidFill>
+            <a:srgbClr val="090D16"/>
+          </a:solidFill>
+          <a:ln>
+            <a:noFill/>
+          </a:ln>
+        </p:spPr>
+        <p:style>
+          <a:lnRef idx="1">
+            <a:schemeClr val="accent1"/>
+          </a:lnRef>
+          <a:fillRef idx="3">
+            <a:schemeClr val="accent1"/>
+          </a:fillRef>
+          <a:effectRef idx="2">
+            <a:schemeClr val="accent1"/>
+          </a:effectRef>
+          <a:fontRef idx="minor">
+            <a:schemeClr val="lt1"/>
+          </a:fontRef>
+        </p:style>
+        <p:txBody>
+          <a:bodyPr rtlCol="0" anchor="ctr"/>
+          <a:lstStyle/>
+          <a:p>
+            <a:pPr algn="ctr"/>
+          </a:p>
+        </p:txBody>
+      </p:sp>
+      <p:sp>
+        <p:nvSpPr>
+          <p:cNvPr id="3" name="TextBox 2"/>
+          <p:cNvSpPr txBox="1"/>
+          <p:nvPr/>
+        </p:nvSpPr>
+        <p:spPr>
+          <a:xfrm>
+            <a:off x="731520" y="914400"/>
+            <a:ext cx="10698480" cy="5303520"/>
+          </a:xfrm>
+          <a:prstGeom prst="rect">
+            <a:avLst/>
+          </a:prstGeom>
+          <a:noFill/>
+        </p:spPr>
+        <p:txBody>
+          <a:bodyPr wrap="square">
+            <a:spAutoFit/>
+          </a:bodyPr>
+          <a:lstStyle/>
+          <a:p>
+            <a:pPr>
+              <a:defRPr sz="4000" b="1">
+                <a:solidFill>
+                  <a:srgbClr val="FAFAFA"/>
+                </a:solidFill>
+                <a:latin typeface="Georgia"/>
+              </a:defRPr>
+            </a:pPr>
+            <a:r>
               <a:t>Transform Your Restaurant with Menuz</a:t>
             </a:r>
           </a:p>
           <a:p>
             <a:pPr>
               <a:spcBef>
+                <a:spcPts val="800"/>
+              </a:spcBef>
+              <a:defRPr sz="2200" b="1">
+                <a:solidFill>
+                  <a:srgbClr val="F59E0B"/>
+                </a:solidFill>
+                <a:latin typeface="Georgia"/>
+              </a:defRPr>
+            </a:pPr>
+            <a:r>
+              <a:t>The All-in-One Dine-In Operating System &amp; Growth Engine</a:t>
+            </a:r>
+          </a:p>
+          <a:p>
+            <a:pPr>
+              <a:spcBef>
                 <a:spcPts val="1000"/>
               </a:spcBef>
-              <a:defRPr sz="1800">
-                <a:solidFill>
-                  <a:srgbClr val="E85D04"/>
-                </a:solidFill>
-                <a:latin typeface="Georgia"/>
-              </a:defRPr>
-            </a:pPr>
-            <a:r>
-              <a:t>Interactive Menus • Multiplayer Sync • Direct Kitchen KOT • Viral Growth • 0% Commission</a:t>
-            </a:r>
-          </a:p>
-          <a:p>
-            <a:pPr>
-              <a:spcBef>
-                <a:spcPts val="900"/>
-              </a:spcBef>
-              <a:defRPr sz="1350">
-                <a:solidFill>
-                  <a:srgbClr val="E7E5E4"/>
+              <a:defRPr sz="1500">
+                <a:solidFill>
+                  <a:srgbClr val="CBD5E1"/>
                 </a:solidFill>
                 <a:latin typeface="Arial"/>
               </a:defRPr>
@@ -5997,11 +7020,11 @@
           <a:p>
             <a:pPr>
               <a:spcBef>
-                <a:spcPts val="900"/>
-              </a:spcBef>
-              <a:defRPr sz="1350">
-                <a:solidFill>
-                  <a:srgbClr val="E7E5E4"/>
+                <a:spcPts val="1000"/>
+              </a:spcBef>
+              <a:defRPr sz="1500">
+                <a:solidFill>
+                  <a:srgbClr val="CBD5E1"/>
                 </a:solidFill>
                 <a:latin typeface="Arial"/>
               </a:defRPr>
@@ -6013,11 +7036,11 @@
           <a:p>
             <a:pPr>
               <a:spcBef>
-                <a:spcPts val="900"/>
-              </a:spcBef>
-              <a:defRPr sz="1350">
-                <a:solidFill>
-                  <a:srgbClr val="E7E5E4"/>
+                <a:spcPts val="1000"/>
+              </a:spcBef>
+              <a:defRPr sz="1500">
+                <a:solidFill>
+                  <a:srgbClr val="CBD5E1"/>
                 </a:solidFill>
                 <a:latin typeface="Arial"/>
               </a:defRPr>
@@ -6029,11 +7052,11 @@
           <a:p>
             <a:pPr>
               <a:spcBef>
-                <a:spcPts val="900"/>
-              </a:spcBef>
-              <a:defRPr sz="1350">
-                <a:solidFill>
-                  <a:srgbClr val="E7E5E4"/>
+                <a:spcPts val="1000"/>
+              </a:spcBef>
+              <a:defRPr sz="1500">
+                <a:solidFill>
+                  <a:srgbClr val="CBD5E1"/>
                 </a:solidFill>
                 <a:latin typeface="Arial"/>
               </a:defRPr>
@@ -6045,17 +7068,33 @@
           <a:p>
             <a:pPr>
               <a:spcBef>
-                <a:spcPts val="1800"/>
-              </a:spcBef>
-              <a:defRPr sz="1300" b="1">
-                <a:solidFill>
-                  <a:srgbClr val="F97316"/>
-                </a:solidFill>
-                <a:latin typeface="Arial"/>
-              </a:defRPr>
-            </a:pPr>
-            <a:r>
-              <a:t>Explore the Live Interactive Platform: stgtrgjrccx.github.io/menuz</a:t>
+                <a:spcPts val="1000"/>
+              </a:spcBef>
+              <a:defRPr sz="1500">
+                <a:solidFill>
+                  <a:srgbClr val="CBD5E1"/>
+                </a:solidFill>
+                <a:latin typeface="Arial"/>
+              </a:defRPr>
+            </a:pPr>
+            <a:r>
+              <a:t>✓  100% Customer Data Ownership with Zero Delivery Commissions</a:t>
+            </a:r>
+          </a:p>
+          <a:p>
+            <a:pPr>
+              <a:spcBef>
+                <a:spcPts val="2000"/>
+              </a:spcBef>
+              <a:defRPr sz="1500" b="1">
+                <a:solidFill>
+                  <a:srgbClr val="06B6D4"/>
+                </a:solidFill>
+                <a:latin typeface="Arial"/>
+              </a:defRPr>
+            </a:pPr>
+            <a:r>
+              <a:t>Live Interactive Platform: stgtrgjrccx.github.io/menuz • Contact: partner@menuz.in</a:t>
             </a:r>
           </a:p>
         </p:txBody>
@@ -6093,7 +7132,7 @@
             <a:avLst/>
           </a:prstGeom>
           <a:solidFill>
-            <a:srgbClr val="FDFBF7"/>
+            <a:srgbClr val="090D16"/>
           </a:solidFill>
           <a:ln>
             <a:noFill/>
@@ -6129,8 +7168,8 @@
         </p:nvSpPr>
         <p:spPr>
           <a:xfrm>
-            <a:off x="731520" y="365760"/>
-            <a:ext cx="10515600" cy="292608"/>
+            <a:off x="731520" y="320040"/>
+            <a:ext cx="10698480" cy="320040"/>
           </a:xfrm>
           <a:prstGeom prst="rect">
             <a:avLst/>
@@ -6144,15 +7183,15 @@
           <a:lstStyle/>
           <a:p>
             <a:pPr>
-              <a:defRPr sz="1000" b="1">
-                <a:solidFill>
-                  <a:srgbClr val="E85D04"/>
-                </a:solidFill>
-                <a:latin typeface="Arial"/>
-              </a:defRPr>
-            </a:pPr>
-            <a:r>
-              <a:t>PRODUCT OVERVIEW</a:t>
+              <a:defRPr sz="1300" b="1">
+                <a:solidFill>
+                  <a:srgbClr val="F43F5E"/>
+                </a:solidFill>
+                <a:latin typeface="Arial"/>
+              </a:defRPr>
+            </a:pPr>
+            <a:r>
+              <a:t>// INDUSTRY CHALLENGE</a:t>
             </a:r>
           </a:p>
         </p:txBody>
@@ -6165,8 +7204,8 @@
         </p:nvSpPr>
         <p:spPr>
           <a:xfrm>
-            <a:off x="731520" y="685800"/>
-            <a:ext cx="10515600" cy="502920"/>
+            <a:off x="731520" y="640080"/>
+            <a:ext cx="10698480" cy="594360"/>
           </a:xfrm>
           <a:prstGeom prst="rect">
             <a:avLst/>
@@ -6180,15 +7219,15 @@
           <a:lstStyle/>
           <a:p>
             <a:pPr>
-              <a:defRPr sz="2200" b="1">
-                <a:solidFill>
-                  <a:srgbClr val="1C1917"/>
+              <a:defRPr sz="2800" b="1">
+                <a:solidFill>
+                  <a:srgbClr val="FAFAFA"/>
                 </a:solidFill>
                 <a:latin typeface="Georgia"/>
               </a:defRPr>
             </a:pPr>
             <a:r>
-              <a:t>What Exactly Is Menuz?</a:t>
+              <a:t>The 4 Critical Operational Traps Bleeding Restaurant Profits</a:t>
             </a:r>
           </a:p>
         </p:txBody>
@@ -6201,8 +7240,8 @@
         </p:nvSpPr>
         <p:spPr>
           <a:xfrm>
-            <a:off x="731520" y="1234440"/>
-            <a:ext cx="10515600" cy="365760"/>
+            <a:off x="731520" y="1280160"/>
+            <a:ext cx="10698480" cy="457200"/>
           </a:xfrm>
           <a:prstGeom prst="rect">
             <a:avLst/>
@@ -6216,15 +7255,15 @@
           <a:lstStyle/>
           <a:p>
             <a:pPr>
-              <a:defRPr sz="1150">
-                <a:solidFill>
-                  <a:srgbClr val="57534E"/>
-                </a:solidFill>
-                <a:latin typeface="Arial"/>
-              </a:defRPr>
-            </a:pPr>
-            <a:r>
-              <a:t>An all-in-one web-based operating system that transforms dine-in tables into high-speed, high-margin, viral dining hubs.</a:t>
+              <a:defRPr sz="1400">
+                <a:solidFill>
+                  <a:srgbClr val="CBD5E1"/>
+                </a:solidFill>
+                <a:latin typeface="Arial"/>
+              </a:defRPr>
+            </a:pPr>
+            <a:r>
+              <a:t>Why traditional paper menus, delivery aggregators, and unmanaged public reviews harm dining revenue.</a:t>
             </a:r>
           </a:p>
         </p:txBody>
@@ -6238,17 +7277,17 @@
         <p:spPr>
           <a:xfrm>
             <a:off x="731520" y="1828800"/>
-            <a:ext cx="3328416" cy="2057400"/>
+            <a:ext cx="5212080" cy="2103120"/>
           </a:xfrm>
           <a:prstGeom prst="roundRect">
             <a:avLst/>
           </a:prstGeom>
           <a:solidFill>
-            <a:srgbClr val="FFFFFF"/>
+            <a:srgbClr val="131C2E"/>
           </a:solidFill>
-          <a:ln w="12700">
+          <a:ln w="19050">
             <a:solidFill>
-              <a:srgbClr val="E7E5E4"/>
+              <a:srgbClr val="27364F"/>
             </a:solidFill>
           </a:ln>
         </p:spPr>
@@ -6282,8 +7321,8 @@
         </p:nvSpPr>
         <p:spPr>
           <a:xfrm>
-            <a:off x="960120" y="2057400"/>
-            <a:ext cx="2871216" cy="1600200"/>
+            <a:off x="1005840" y="2057400"/>
+            <a:ext cx="4663440" cy="1645920"/>
           </a:xfrm>
           <a:prstGeom prst="rect">
             <a:avLst/>
@@ -6297,15 +7336,15 @@
           <a:lstStyle/>
           <a:p>
             <a:pPr>
-              <a:defRPr sz="1400" b="1">
-                <a:solidFill>
-                  <a:srgbClr val="E85D04"/>
+              <a:defRPr sz="1700" b="1">
+                <a:solidFill>
+                  <a:srgbClr val="F43F5E"/>
                 </a:solidFill>
                 <a:latin typeface="Georgia"/>
               </a:defRPr>
             </a:pPr>
             <a:r>
-              <a:t>1. Digital Interactive Menu</a:t>
+              <a:t>1. Aggregator Commission Trap (25-30%)</a:t>
             </a:r>
           </a:p>
           <a:p>
@@ -6313,15 +7352,15 @@
               <a:spcBef>
                 <a:spcPts val="800"/>
               </a:spcBef>
-              <a:defRPr sz="1100">
-                <a:solidFill>
-                  <a:srgbClr val="57534E"/>
-                </a:solidFill>
-                <a:latin typeface="Arial"/>
-              </a:defRPr>
-            </a:pPr>
-            <a:r>
-              <a:t>Zero app download. Diners scan table QR code to explore high-res dishes, calibrated spice meters, calorie counts, chef secret notes, and dietary filters.</a:t>
+              <a:defRPr sz="1350">
+                <a:solidFill>
+                  <a:srgbClr val="CBD5E1"/>
+                </a:solidFill>
+                <a:latin typeface="Arial"/>
+              </a:defRPr>
+            </a:pPr>
+            <a:r>
+              <a:t>Delivery platforms charge crippling commissions and withhold customer phone numbers, preventing direct remarketing.</a:t>
             </a:r>
           </a:p>
         </p:txBody>
@@ -6334,18 +7373,18 @@
         </p:nvSpPr>
         <p:spPr>
           <a:xfrm>
-            <a:off x="4389120" y="1828800"/>
-            <a:ext cx="3328416" cy="2057400"/>
+            <a:off x="6217920" y="1828800"/>
+            <a:ext cx="5212080" cy="2103120"/>
           </a:xfrm>
           <a:prstGeom prst="roundRect">
             <a:avLst/>
           </a:prstGeom>
           <a:solidFill>
-            <a:srgbClr val="FFFFFF"/>
+            <a:srgbClr val="131C2E"/>
           </a:solidFill>
-          <a:ln w="12700">
+          <a:ln w="19050">
             <a:solidFill>
-              <a:srgbClr val="E7E5E4"/>
+              <a:srgbClr val="27364F"/>
             </a:solidFill>
           </a:ln>
         </p:spPr>
@@ -6379,8 +7418,8 @@
         </p:nvSpPr>
         <p:spPr>
           <a:xfrm>
-            <a:off x="4617720" y="2057400"/>
-            <a:ext cx="2871216" cy="1600200"/>
+            <a:off x="6492240" y="2057400"/>
+            <a:ext cx="4663440" cy="1645920"/>
           </a:xfrm>
           <a:prstGeom prst="rect">
             <a:avLst/>
@@ -6394,15 +7433,15 @@
           <a:lstStyle/>
           <a:p>
             <a:pPr>
-              <a:defRPr sz="1400" b="1">
-                <a:solidFill>
-                  <a:srgbClr val="E85D04"/>
+              <a:defRPr sz="1700" b="1">
+                <a:solidFill>
+                  <a:srgbClr val="F59E0B"/>
                 </a:solidFill>
                 <a:latin typeface="Georgia"/>
               </a:defRPr>
             </a:pPr>
             <a:r>
-              <a:t>2. Real-Time Multiplayer Sync</a:t>
+              <a:t>2. Paper Menu Blindness</a:t>
             </a:r>
           </a:p>
           <a:p>
@@ -6410,15 +7449,15 @@
               <a:spcBef>
                 <a:spcPts val="800"/>
               </a:spcBef>
-              <a:defRPr sz="1100">
-                <a:solidFill>
-                  <a:srgbClr val="57534E"/>
-                </a:solidFill>
-                <a:latin typeface="Arial"/>
-              </a:defRPr>
-            </a:pPr>
-            <a:r>
-              <a:t>Everyone at Table 4 co-orders together in real-time. Live shared cart tray with guest tags prevents duplicate orders and unifies billing.</a:t>
+              <a:defRPr sz="1350">
+                <a:solidFill>
+                  <a:srgbClr val="CBD5E1"/>
+                </a:solidFill>
+                <a:latin typeface="Arial"/>
+              </a:defRPr>
+            </a:pPr>
+            <a:r>
+              <a:t>Static paper menus fail to upsell drinks or show plating. Updating single dish prices requires expensive re-printing and days of delay.</a:t>
             </a:r>
           </a:p>
         </p:txBody>
@@ -6431,18 +7470,18 @@
         </p:nvSpPr>
         <p:spPr>
           <a:xfrm>
-            <a:off x="8046720" y="1828800"/>
-            <a:ext cx="3328416" cy="2057400"/>
+            <a:off x="731520" y="4114800"/>
+            <a:ext cx="5212080" cy="2103120"/>
           </a:xfrm>
           <a:prstGeom prst="roundRect">
             <a:avLst/>
           </a:prstGeom>
           <a:solidFill>
-            <a:srgbClr val="FFFFFF"/>
+            <a:srgbClr val="131C2E"/>
           </a:solidFill>
-          <a:ln w="12700">
+          <a:ln w="19050">
             <a:solidFill>
-              <a:srgbClr val="E7E5E4"/>
+              <a:srgbClr val="27364F"/>
             </a:solidFill>
           </a:ln>
         </p:spPr>
@@ -6476,8 +7515,8 @@
         </p:nvSpPr>
         <p:spPr>
           <a:xfrm>
-            <a:off x="8275320" y="2057400"/>
-            <a:ext cx="2871216" cy="1600200"/>
+            <a:off x="1005840" y="4343400"/>
+            <a:ext cx="4663440" cy="1645920"/>
           </a:xfrm>
           <a:prstGeom prst="rect">
             <a:avLst/>
@@ -6491,15 +7530,15 @@
           <a:lstStyle/>
           <a:p>
             <a:pPr>
-              <a:defRPr sz="1400" b="1">
-                <a:solidFill>
-                  <a:srgbClr val="E85D04"/>
+              <a:defRPr sz="1700" b="1">
+                <a:solidFill>
+                  <a:srgbClr val="F43F5E"/>
                 </a:solidFill>
                 <a:latin typeface="Georgia"/>
               </a:defRPr>
             </a:pPr>
             <a:r>
-              <a:t>3. Chef AI Concierge &amp; Upsells</a:t>
+              <a:t>3. The 1-Star Google Ambush</a:t>
             </a:r>
           </a:p>
           <a:p>
@@ -6507,15 +7546,15 @@
               <a:spcBef>
                 <a:spcPts val="800"/>
               </a:spcBef>
-              <a:defRPr sz="1100">
-                <a:solidFill>
-                  <a:srgbClr val="57534E"/>
-                </a:solidFill>
-                <a:latin typeface="Arial"/>
-              </a:defRPr>
-            </a:pPr>
-            <a:r>
-              <a:t>Trained on head chef's marinades and owner's upsell rules. Suggests high-margin wine, mocktail, and side pairings (+22% average check).</a:t>
+              <a:defRPr sz="1350">
+                <a:solidFill>
+                  <a:srgbClr val="CBD5E1"/>
+                </a:solidFill>
+                <a:latin typeface="Arial"/>
+              </a:defRPr>
+            </a:pPr>
+            <a:r>
+              <a:t>Diners leave quietly and post devastating 1-star Google reviews from home at 11 PM, permanently lowering your SEO rank and footfall.</a:t>
             </a:r>
           </a:p>
         </p:txBody>
@@ -6528,18 +7567,18 @@
         </p:nvSpPr>
         <p:spPr>
           <a:xfrm>
-            <a:off x="731520" y="4114800"/>
-            <a:ext cx="3328416" cy="2057400"/>
+            <a:off x="6217920" y="4114800"/>
+            <a:ext cx="5212080" cy="2103120"/>
           </a:xfrm>
           <a:prstGeom prst="roundRect">
             <a:avLst/>
           </a:prstGeom>
           <a:solidFill>
-            <a:srgbClr val="FFFFFF"/>
+            <a:srgbClr val="131C2E"/>
           </a:solidFill>
-          <a:ln w="12700">
+          <a:ln w="19050">
             <a:solidFill>
-              <a:srgbClr val="E7E5E4"/>
+              <a:srgbClr val="27364F"/>
             </a:solidFill>
           </a:ln>
         </p:spPr>
@@ -6573,8 +7612,8 @@
         </p:nvSpPr>
         <p:spPr>
           <a:xfrm>
-            <a:off x="960120" y="4343400"/>
-            <a:ext cx="2871216" cy="1600200"/>
+            <a:off x="6492240" y="4343400"/>
+            <a:ext cx="4663440" cy="1645920"/>
           </a:xfrm>
           <a:prstGeom prst="rect">
             <a:avLst/>
@@ -6588,15 +7627,15 @@
           <a:lstStyle/>
           <a:p>
             <a:pPr>
-              <a:defRPr sz="1400" b="1">
-                <a:solidFill>
-                  <a:srgbClr val="E85D04"/>
+              <a:defRPr sz="1700" b="1">
+                <a:solidFill>
+                  <a:srgbClr val="06B6D4"/>
                 </a:solidFill>
                 <a:latin typeface="Georgia"/>
               </a:defRPr>
             </a:pPr>
             <a:r>
-              <a:t>4. Direct Kitchen KOT Routing</a:t>
+              <a:t>4. Waiter Dispatch Bottlenecks</a:t>
             </a:r>
           </a:p>
           <a:p>
@@ -6604,209 +7643,15 @@
               <a:spcBef>
                 <a:spcPts val="800"/>
               </a:spcBef>
-              <a:defRPr sz="1100">
-                <a:solidFill>
-                  <a:srgbClr val="57534E"/>
-                </a:solidFill>
-                <a:latin typeface="Arial"/>
-              </a:defRPr>
-            </a:pPr>
-            <a:r>
-              <a:t>Owner-controlled: Send orders directly to kitchen thermal printers in 1 second (Mode A) or route to floor captain for approval (Mode B).</a:t>
-            </a:r>
-          </a:p>
-        </p:txBody>
-      </p:sp>
-      <p:sp>
-        <p:nvSpPr>
-          <p:cNvPr id="14" name="Rounded Rectangle 13"/>
-          <p:cNvSpPr/>
-          <p:nvPr/>
-        </p:nvSpPr>
-        <p:spPr>
-          <a:xfrm>
-            <a:off x="4389120" y="4114800"/>
-            <a:ext cx="3328416" cy="2057400"/>
-          </a:xfrm>
-          <a:prstGeom prst="roundRect">
-            <a:avLst/>
-          </a:prstGeom>
-          <a:solidFill>
-            <a:srgbClr val="FFFFFF"/>
-          </a:solidFill>
-          <a:ln w="12700">
-            <a:solidFill>
-              <a:srgbClr val="E7E5E4"/>
-            </a:solidFill>
-          </a:ln>
-        </p:spPr>
-        <p:style>
-          <a:lnRef idx="1">
-            <a:schemeClr val="accent1"/>
-          </a:lnRef>
-          <a:fillRef idx="3">
-            <a:schemeClr val="accent1"/>
-          </a:fillRef>
-          <a:effectRef idx="2">
-            <a:schemeClr val="accent1"/>
-          </a:effectRef>
-          <a:fontRef idx="minor">
-            <a:schemeClr val="lt1"/>
-          </a:fontRef>
-        </p:style>
-        <p:txBody>
-          <a:bodyPr rtlCol="0" anchor="ctr"/>
-          <a:lstStyle/>
-          <a:p>
-            <a:pPr algn="ctr"/>
-          </a:p>
-        </p:txBody>
-      </p:sp>
-      <p:sp>
-        <p:nvSpPr>
-          <p:cNvPr id="15" name="TextBox 14"/>
-          <p:cNvSpPr txBox="1"/>
-          <p:nvPr/>
-        </p:nvSpPr>
-        <p:spPr>
-          <a:xfrm>
-            <a:off x="4617720" y="4343400"/>
-            <a:ext cx="2871216" cy="1600200"/>
-          </a:xfrm>
-          <a:prstGeom prst="rect">
-            <a:avLst/>
-          </a:prstGeom>
-          <a:noFill/>
-        </p:spPr>
-        <p:txBody>
-          <a:bodyPr wrap="square">
-            <a:spAutoFit/>
-          </a:bodyPr>
-          <a:lstStyle/>
-          <a:p>
-            <a:pPr>
-              <a:defRPr sz="1400" b="1">
-                <a:solidFill>
-                  <a:srgbClr val="E85D04"/>
-                </a:solidFill>
-                <a:latin typeface="Georgia"/>
-              </a:defRPr>
-            </a:pPr>
-            <a:r>
-              <a:t>5. Owner-Configurable Viral Growth</a:t>
-            </a:r>
-          </a:p>
-          <a:p>
-            <a:pPr>
-              <a:spcBef>
-                <a:spcPts val="800"/>
-              </a:spcBef>
-              <a:defRPr sz="1100">
-                <a:solidFill>
-                  <a:srgbClr val="57534E"/>
-                </a:solidFill>
-                <a:latin typeface="Arial"/>
-              </a:defRPr>
-            </a:pPr>
-            <a:r>
-              <a:t>Owner chooses: unlock table rewards via 5-Star Google Reviews OR 9:16 Instagram Stories with restaurant tags.</a:t>
-            </a:r>
-          </a:p>
-        </p:txBody>
-      </p:sp>
-      <p:sp>
-        <p:nvSpPr>
-          <p:cNvPr id="16" name="Rounded Rectangle 15"/>
-          <p:cNvSpPr/>
-          <p:nvPr/>
-        </p:nvSpPr>
-        <p:spPr>
-          <a:xfrm>
-            <a:off x="8046720" y="4114800"/>
-            <a:ext cx="3328416" cy="2057400"/>
-          </a:xfrm>
-          <a:prstGeom prst="roundRect">
-            <a:avLst/>
-          </a:prstGeom>
-          <a:solidFill>
-            <a:srgbClr val="FFFFFF"/>
-          </a:solidFill>
-          <a:ln w="12700">
-            <a:solidFill>
-              <a:srgbClr val="E7E5E4"/>
-            </a:solidFill>
-          </a:ln>
-        </p:spPr>
-        <p:style>
-          <a:lnRef idx="1">
-            <a:schemeClr val="accent1"/>
-          </a:lnRef>
-          <a:fillRef idx="3">
-            <a:schemeClr val="accent1"/>
-          </a:fillRef>
-          <a:effectRef idx="2">
-            <a:schemeClr val="accent1"/>
-          </a:effectRef>
-          <a:fontRef idx="minor">
-            <a:schemeClr val="lt1"/>
-          </a:fontRef>
-        </p:style>
-        <p:txBody>
-          <a:bodyPr rtlCol="0" anchor="ctr"/>
-          <a:lstStyle/>
-          <a:p>
-            <a:pPr algn="ctr"/>
-          </a:p>
-        </p:txBody>
-      </p:sp>
-      <p:sp>
-        <p:nvSpPr>
-          <p:cNvPr id="17" name="TextBox 16"/>
-          <p:cNvSpPr txBox="1"/>
-          <p:nvPr/>
-        </p:nvSpPr>
-        <p:spPr>
-          <a:xfrm>
-            <a:off x="8275320" y="4343400"/>
-            <a:ext cx="2871216" cy="1600200"/>
-          </a:xfrm>
-          <a:prstGeom prst="rect">
-            <a:avLst/>
-          </a:prstGeom>
-          <a:noFill/>
-        </p:spPr>
-        <p:txBody>
-          <a:bodyPr wrap="square">
-            <a:spAutoFit/>
-          </a:bodyPr>
-          <a:lstStyle/>
-          <a:p>
-            <a:pPr>
-              <a:defRPr sz="1400" b="1">
-                <a:solidFill>
-                  <a:srgbClr val="E85D04"/>
-                </a:solidFill>
-                <a:latin typeface="Georgia"/>
-              </a:defRPr>
-            </a:pPr>
-            <a:r>
-              <a:t>6. Floor Operations &amp; Service SOS</a:t>
-            </a:r>
-          </a:p>
-          <a:p>
-            <a:pPr>
-              <a:spcBef>
-                <a:spcPts val="800"/>
-              </a:spcBef>
-              <a:defRPr sz="1100">
-                <a:solidFill>
-                  <a:srgbClr val="57534E"/>
-                </a:solidFill>
-                <a:latin typeface="Arial"/>
-              </a:defRPr>
-            </a:pPr>
-            <a:r>
-              <a:t>Waiters called with 1 tap ('Call Waiter', 'Water', 'Bill'). Real-time manager tablet hub for table occupancy and prep timers.</a:t>
+              <a:defRPr sz="1350">
+                <a:solidFill>
+                  <a:srgbClr val="CBD5E1"/>
+                </a:solidFill>
+                <a:latin typeface="Arial"/>
+              </a:defRPr>
+            </a:pPr>
+            <a:r>
+              <a:t>Guests wave hands frantically for water or bills during peak rush. Table turnover slows by 15-20 minutes, costing thousands in lost seatings.</a:t>
             </a:r>
           </a:p>
         </p:txBody>
@@ -6844,7 +7689,7 @@
             <a:avLst/>
           </a:prstGeom>
           <a:solidFill>
-            <a:srgbClr val="1C1917"/>
+            <a:srgbClr val="090D16"/>
           </a:solidFill>
           <a:ln>
             <a:noFill/>
@@ -6880,8 +7725,8 @@
         </p:nvSpPr>
         <p:spPr>
           <a:xfrm>
-            <a:off x="731520" y="365760"/>
-            <a:ext cx="10515600" cy="292608"/>
+            <a:off x="731520" y="320040"/>
+            <a:ext cx="10698480" cy="320040"/>
           </a:xfrm>
           <a:prstGeom prst="rect">
             <a:avLst/>
@@ -6895,15 +7740,15 @@
           <a:lstStyle/>
           <a:p>
             <a:pPr>
-              <a:defRPr sz="1000" b="1">
-                <a:solidFill>
-                  <a:srgbClr val="E85D04"/>
-                </a:solidFill>
-                <a:latin typeface="Arial"/>
-              </a:defRPr>
-            </a:pPr>
-            <a:r>
-              <a:t>DINER TABLE INTERFACE</a:t>
+              <a:defRPr sz="1300" b="1">
+                <a:solidFill>
+                  <a:srgbClr val="06B6D4"/>
+                </a:solidFill>
+                <a:latin typeface="Arial"/>
+              </a:defRPr>
+            </a:pPr>
+            <a:r>
+              <a:t>// FACTUAL MARKETING MATRIX</a:t>
             </a:r>
           </a:p>
         </p:txBody>
@@ -6916,8 +7761,8 @@
         </p:nvSpPr>
         <p:spPr>
           <a:xfrm>
-            <a:off x="731520" y="685800"/>
-            <a:ext cx="10515600" cy="502920"/>
+            <a:off x="731520" y="640080"/>
+            <a:ext cx="10698480" cy="594360"/>
           </a:xfrm>
           <a:prstGeom prst="rect">
             <a:avLst/>
@@ -6931,15 +7776,15 @@
           <a:lstStyle/>
           <a:p>
             <a:pPr>
-              <a:defRPr sz="2200" b="1">
-                <a:solidFill>
-                  <a:srgbClr val="FFFFFF"/>
+              <a:defRPr sz="2800" b="1">
+                <a:solidFill>
+                  <a:srgbClr val="FAFAFA"/>
                 </a:solidFill>
                 <a:latin typeface="Georgia"/>
               </a:defRPr>
             </a:pPr>
             <a:r>
-              <a:t>Visual Digital Menu: Engaging Appetites Before Ordering</a:t>
+              <a:t>Public Google Reviews vs. Instagram UGC vs. Floor Shield</a:t>
             </a:r>
           </a:p>
         </p:txBody>
@@ -6952,8 +7797,8 @@
         </p:nvSpPr>
         <p:spPr>
           <a:xfrm>
-            <a:off x="731520" y="1234440"/>
-            <a:ext cx="10515600" cy="365760"/>
+            <a:off x="731520" y="1280160"/>
+            <a:ext cx="10698480" cy="457200"/>
           </a:xfrm>
           <a:prstGeom prst="rect">
             <a:avLst/>
@@ -6967,15 +7812,15 @@
           <a:lstStyle/>
           <a:p>
             <a:pPr>
-              <a:defRPr sz="1150">
-                <a:solidFill>
-                  <a:srgbClr val="D6D3D1"/>
-                </a:solidFill>
-                <a:latin typeface="Arial"/>
-              </a:defRPr>
-            </a:pPr>
-            <a:r>
-              <a:t>Replacing flat paper text with rich culinary storytelling, calibrated heat meters, and smart dietary tags.</a:t>
+              <a:defRPr sz="1400">
+                <a:solidFill>
+                  <a:srgbClr val="CBD5E1"/>
+                </a:solidFill>
+                <a:latin typeface="Arial"/>
+              </a:defRPr>
+            </a:pPr>
+            <a:r>
+              <a:t>Understanding the distinct roles of Google Search, Social Media Virality, and Table Damage Control.</a:t>
             </a:r>
           </a:p>
         </p:txBody>
@@ -6989,16 +7834,18 @@
         <p:spPr>
           <a:xfrm>
             <a:off x="731520" y="1828800"/>
-            <a:ext cx="5120640" cy="4297680"/>
+            <a:ext cx="3383280" cy="4572000"/>
           </a:xfrm>
           <a:prstGeom prst="roundRect">
             <a:avLst/>
           </a:prstGeom>
           <a:solidFill>
-            <a:srgbClr val="292524"/>
+            <a:srgbClr val="131C2E"/>
           </a:solidFill>
-          <a:ln>
-            <a:noFill/>
+          <a:ln w="19050">
+            <a:solidFill>
+              <a:srgbClr val="D97706"/>
+            </a:solidFill>
           </a:ln>
         </p:spPr>
         <p:style>
@@ -7031,8 +7878,8 @@
         </p:nvSpPr>
         <p:spPr>
           <a:xfrm>
-            <a:off x="1005840" y="2103120"/>
-            <a:ext cx="4572000" cy="3749039"/>
+            <a:off x="960120" y="2011680"/>
+            <a:ext cx="2926080" cy="4206240"/>
           </a:xfrm>
           <a:prstGeom prst="rect">
             <a:avLst/>
@@ -7046,95 +7893,95 @@
           <a:lstStyle/>
           <a:p>
             <a:pPr>
-              <a:defRPr sz="1900" b="1">
-                <a:solidFill>
-                  <a:srgbClr val="E85D04"/>
+              <a:defRPr sz="1700" b="1">
+                <a:solidFill>
+                  <a:srgbClr val="F59E0B"/>
                 </a:solidFill>
                 <a:latin typeface="Georgia"/>
               </a:defRPr>
             </a:pPr>
             <a:r>
-              <a:t>Visual Menu Architecture</a:t>
-            </a:r>
-          </a:p>
-          <a:p>
-            <a:pPr>
-              <a:spcBef>
-                <a:spcPts val="800"/>
-              </a:spcBef>
-              <a:defRPr sz="1050">
-                <a:solidFill>
-                  <a:srgbClr val="D6D3D1"/>
-                </a:solidFill>
-                <a:latin typeface="Arial"/>
-              </a:defRPr>
-            </a:pPr>
-            <a:r>
-              <a:t>• High-Resolution Photography: Every signature dish showcases authentic culinary plating, driving immediate appetite stimulation.</a:t>
-            </a:r>
-          </a:p>
-          <a:p>
-            <a:pPr>
-              <a:spcBef>
-                <a:spcPts val="800"/>
-              </a:spcBef>
-              <a:defRPr sz="1050">
-                <a:solidFill>
-                  <a:srgbClr val="D6D3D1"/>
-                </a:solidFill>
-                <a:latin typeface="Arial"/>
-              </a:defRPr>
-            </a:pPr>
-            <a:r>
-              <a:t>• Spice Meter Calibration (1-5): Clear visual heat rating (1 = Mild Cashew Cream, 5 = Fiery Guntur Chili) prevents customer spice mismatch.</a:t>
-            </a:r>
-          </a:p>
-          <a:p>
-            <a:pPr>
-              <a:spcBef>
-                <a:spcPts val="800"/>
-              </a:spcBef>
-              <a:defRPr sz="1050">
-                <a:solidFill>
-                  <a:srgbClr val="D6D3D1"/>
-                </a:solidFill>
-                <a:latin typeface="Arial"/>
-              </a:defRPr>
-            </a:pPr>
-            <a:r>
-              <a:t>• Calorie &amp; Nutritional Info: Calorie counters and macro indicators for health-conscious diners.</a:t>
-            </a:r>
-          </a:p>
-          <a:p>
-            <a:pPr>
-              <a:spcBef>
-                <a:spcPts val="800"/>
-              </a:spcBef>
-              <a:defRPr sz="1050">
-                <a:solidFill>
-                  <a:srgbClr val="D6D3D1"/>
-                </a:solidFill>
-                <a:latin typeface="Arial"/>
-              </a:defRPr>
-            </a:pPr>
-            <a:r>
-              <a:t>• Dietary &amp; Allergen Badges: Instant filtering for Pure Veg (🟢), Non-Veg (🔴), Vegan, Jain (नो रूट वेजिटेबल्स), and 100% Gluten-Free items.</a:t>
-            </a:r>
-          </a:p>
-          <a:p>
-            <a:pPr>
-              <a:spcBef>
-                <a:spcPts val="800"/>
-              </a:spcBef>
-              <a:defRPr sz="1050">
-                <a:solidFill>
-                  <a:srgbClr val="D6D3D1"/>
-                </a:solidFill>
-                <a:latin typeface="Arial"/>
-              </a:defRPr>
-            </a:pPr>
-            <a:r>
-              <a:t>• Chef's Secret Notes &amp; Lore: Shares slow-braising times, charcoal tandoor techniques, and hand-ground spice stories directly with guests.</a:t>
+              <a:t>A. Public Google Reviews</a:t>
+            </a:r>
+          </a:p>
+          <a:p>
+            <a:pPr>
+              <a:spcBef>
+                <a:spcPts val="400"/>
+              </a:spcBef>
+              <a:defRPr sz="1100" b="1">
+                <a:solidFill>
+                  <a:srgbClr val="06B6D4"/>
+                </a:solidFill>
+                <a:latin typeface="Arial"/>
+              </a:defRPr>
+            </a:pPr>
+            <a:r>
+              <a:t>SEO &amp; SEARCH FOOTFALL</a:t>
+            </a:r>
+          </a:p>
+          <a:p>
+            <a:pPr>
+              <a:spcBef>
+                <a:spcPts val="1000"/>
+              </a:spcBef>
+              <a:defRPr sz="1300">
+                <a:solidFill>
+                  <a:srgbClr val="CBD5E1"/>
+                </a:solidFill>
+                <a:latin typeface="Arial"/>
+              </a:defRPr>
+            </a:pPr>
+            <a:r>
+              <a:t>• Platform: Google Maps / Local 3-Pack.</a:t>
+            </a:r>
+          </a:p>
+          <a:p>
+            <a:pPr>
+              <a:spcBef>
+                <a:spcPts val="1000"/>
+              </a:spcBef>
+              <a:defRPr sz="1300">
+                <a:solidFill>
+                  <a:srgbClr val="CBD5E1"/>
+                </a:solidFill>
+                <a:latin typeface="Arial"/>
+              </a:defRPr>
+            </a:pPr>
+            <a:r>
+              <a:t>• Format: Permanent star score + text review.</a:t>
+            </a:r>
+          </a:p>
+          <a:p>
+            <a:pPr>
+              <a:spcBef>
+                <a:spcPts val="1000"/>
+              </a:spcBef>
+              <a:defRPr sz="1300">
+                <a:solidFill>
+                  <a:srgbClr val="CBD5E1"/>
+                </a:solidFill>
+                <a:latin typeface="Arial"/>
+              </a:defRPr>
+            </a:pPr>
+            <a:r>
+              <a:t>• Impact: Dictates organic rank for high-intent searches ('best cafe near me') and walk-ins.</a:t>
+            </a:r>
+          </a:p>
+          <a:p>
+            <a:pPr>
+              <a:spcBef>
+                <a:spcPts val="1000"/>
+              </a:spcBef>
+              <a:defRPr sz="1300">
+                <a:solidFill>
+                  <a:srgbClr val="CBD5E1"/>
+                </a:solidFill>
+                <a:latin typeface="Arial"/>
+              </a:defRPr>
+            </a:pPr>
+            <a:r>
+              <a:t>• Menuz Role: Multiplies 5★ reviews via 1-tap AI drafts and gamified Lucky Wheel rewards.</a:t>
             </a:r>
           </a:p>
         </p:txBody>
@@ -7147,17 +7994,19 @@
         </p:nvSpPr>
         <p:spPr>
           <a:xfrm>
-            <a:off x="6309360" y="1828800"/>
-            <a:ext cx="5120640" cy="4297680"/>
+            <a:off x="4389120" y="1828800"/>
+            <a:ext cx="3383280" cy="4572000"/>
           </a:xfrm>
           <a:prstGeom prst="roundRect">
             <a:avLst/>
           </a:prstGeom>
           <a:solidFill>
-            <a:srgbClr val="292524"/>
+            <a:srgbClr val="131C2E"/>
           </a:solidFill>
-          <a:ln>
-            <a:noFill/>
+          <a:ln w="19050">
+            <a:solidFill>
+              <a:srgbClr val="27364F"/>
+            </a:solidFill>
           </a:ln>
         </p:spPr>
         <p:style>
@@ -7190,8 +8039,8 @@
         </p:nvSpPr>
         <p:spPr>
           <a:xfrm>
-            <a:off x="6583680" y="2103120"/>
-            <a:ext cx="4572000" cy="3749039"/>
+            <a:off x="4617720" y="2011680"/>
+            <a:ext cx="2926080" cy="4206240"/>
           </a:xfrm>
           <a:prstGeom prst="rect">
             <a:avLst/>
@@ -7205,79 +8054,256 @@
           <a:lstStyle/>
           <a:p>
             <a:pPr>
-              <a:defRPr sz="1900" b="1">
-                <a:solidFill>
-                  <a:srgbClr val="059669"/>
+              <a:defRPr sz="1700" b="1">
+                <a:solidFill>
+                  <a:srgbClr val="F43F5E"/>
                 </a:solidFill>
                 <a:latin typeface="Georgia"/>
               </a:defRPr>
             </a:pPr>
             <a:r>
-              <a:t>Table Service Controls</a:t>
-            </a:r>
-          </a:p>
-          <a:p>
-            <a:pPr>
-              <a:spcBef>
-                <a:spcPts val="1200"/>
-              </a:spcBef>
-              <a:defRPr sz="1100">
-                <a:solidFill>
-                  <a:srgbClr val="FFFFFF"/>
-                </a:solidFill>
-                <a:latin typeface="Arial"/>
-              </a:defRPr>
-            </a:pPr>
-            <a:r>
-              <a:t>✓ 1-Tap Waiter Call System: Diners never wave their hands frantically. 1 button tap dispatches instant notification: 'Table 4 needs assistance'.</a:t>
-            </a:r>
-          </a:p>
-          <a:p>
-            <a:pPr>
-              <a:spcBef>
-                <a:spcPts val="1200"/>
-              </a:spcBef>
-              <a:defRPr sz="1100">
-                <a:solidFill>
-                  <a:srgbClr val="FFFFFF"/>
-                </a:solidFill>
-                <a:latin typeface="Arial"/>
-              </a:defRPr>
-            </a:pPr>
-            <a:r>
-              <a:t>✓ Specific Service Pings: Dedicated quick-actions: 'Request Water', 'Request Bill', 'Clean Table' alerts floor staff immediately.</a:t>
-            </a:r>
-          </a:p>
-          <a:p>
-            <a:pPr>
-              <a:spcBef>
-                <a:spcPts val="1200"/>
-              </a:spcBef>
-              <a:defRPr sz="1100">
-                <a:solidFill>
-                  <a:srgbClr val="FFFFFF"/>
-                </a:solidFill>
-                <a:latin typeface="Arial"/>
-              </a:defRPr>
-            </a:pPr>
-            <a:r>
-              <a:t>✓ Active Order Tracking: Guests view their live order status: 'Order Received', 'In Tandoor / Preparing', 'Served'.</a:t>
-            </a:r>
-          </a:p>
-          <a:p>
-            <a:pPr>
-              <a:spcBef>
-                <a:spcPts val="1200"/>
-              </a:spcBef>
-              <a:defRPr sz="1100">
-                <a:solidFill>
-                  <a:srgbClr val="FFFFFF"/>
-                </a:solidFill>
-                <a:latin typeface="Arial"/>
-              </a:defRPr>
-            </a:pPr>
-            <a:r>
-              <a:t>✓ Zero App Downloads: Runs entirely inside standard mobile browsers (Safari / Chrome) via lightweight PWA architecture.</a:t>
+              <a:t>B. Instagram / Social UGC</a:t>
+            </a:r>
+          </a:p>
+          <a:p>
+            <a:pPr>
+              <a:spcBef>
+                <a:spcPts val="400"/>
+              </a:spcBef>
+              <a:defRPr sz="1100" b="1">
+                <a:solidFill>
+                  <a:srgbClr val="94A3B8"/>
+                </a:solidFill>
+                <a:latin typeface="Arial"/>
+              </a:defRPr>
+            </a:pPr>
+            <a:r>
+              <a:t>VISUAL VIRALITY &amp; HYPE</a:t>
+            </a:r>
+          </a:p>
+          <a:p>
+            <a:pPr>
+              <a:spcBef>
+                <a:spcPts val="1000"/>
+              </a:spcBef>
+              <a:defRPr sz="1300">
+                <a:solidFill>
+                  <a:srgbClr val="CBD5E1"/>
+                </a:solidFill>
+                <a:latin typeface="Arial"/>
+              </a:defRPr>
+            </a:pPr>
+            <a:r>
+              <a:t>• Platform: Instagram Stories &amp; Reels.</a:t>
+            </a:r>
+          </a:p>
+          <a:p>
+            <a:pPr>
+              <a:spcBef>
+                <a:spcPts val="1000"/>
+              </a:spcBef>
+              <a:defRPr sz="1300">
+                <a:solidFill>
+                  <a:srgbClr val="CBD5E1"/>
+                </a:solidFill>
+                <a:latin typeface="Arial"/>
+              </a:defRPr>
+            </a:pPr>
+            <a:r>
+              <a:t>• Format: 9:16 Vertical branded dish cards.</a:t>
+            </a:r>
+          </a:p>
+          <a:p>
+            <a:pPr>
+              <a:spcBef>
+                <a:spcPts val="1000"/>
+              </a:spcBef>
+              <a:defRPr sz="1300">
+                <a:solidFill>
+                  <a:srgbClr val="CBD5E1"/>
+                </a:solidFill>
+                <a:latin typeface="Arial"/>
+              </a:defRPr>
+            </a:pPr>
+            <a:r>
+              <a:t>• Impact: Reaches 500-2,000 local friends of the guest, creating visual FOMO and viral buzz.</a:t>
+            </a:r>
+          </a:p>
+          <a:p>
+            <a:pPr>
+              <a:spcBef>
+                <a:spcPts val="1000"/>
+              </a:spcBef>
+              <a:defRPr sz="1300">
+                <a:solidFill>
+                  <a:srgbClr val="CBD5E1"/>
+                </a:solidFill>
+                <a:latin typeface="Arial"/>
+              </a:defRPr>
+            </a:pPr>
+            <a:r>
+              <a:t>• Menuz Role: Generates instant 9:16 story cards with @restaurant tag in 1 tap.</a:t>
+            </a:r>
+          </a:p>
+        </p:txBody>
+      </p:sp>
+      <p:sp>
+        <p:nvSpPr>
+          <p:cNvPr id="10" name="Rounded Rectangle 9"/>
+          <p:cNvSpPr/>
+          <p:nvPr/>
+        </p:nvSpPr>
+        <p:spPr>
+          <a:xfrm>
+            <a:off x="8046720" y="1828800"/>
+            <a:ext cx="3383280" cy="4572000"/>
+          </a:xfrm>
+          <a:prstGeom prst="roundRect">
+            <a:avLst/>
+          </a:prstGeom>
+          <a:solidFill>
+            <a:srgbClr val="131C2E"/>
+          </a:solidFill>
+          <a:ln w="19050">
+            <a:solidFill>
+              <a:srgbClr val="0891B2"/>
+            </a:solidFill>
+          </a:ln>
+        </p:spPr>
+        <p:style>
+          <a:lnRef idx="1">
+            <a:schemeClr val="accent1"/>
+          </a:lnRef>
+          <a:fillRef idx="3">
+            <a:schemeClr val="accent1"/>
+          </a:fillRef>
+          <a:effectRef idx="2">
+            <a:schemeClr val="accent1"/>
+          </a:effectRef>
+          <a:fontRef idx="minor">
+            <a:schemeClr val="lt1"/>
+          </a:fontRef>
+        </p:style>
+        <p:txBody>
+          <a:bodyPr rtlCol="0" anchor="ctr"/>
+          <a:lstStyle/>
+          <a:p>
+            <a:pPr algn="ctr"/>
+          </a:p>
+        </p:txBody>
+      </p:sp>
+      <p:sp>
+        <p:nvSpPr>
+          <p:cNvPr id="11" name="TextBox 10"/>
+          <p:cNvSpPr txBox="1"/>
+          <p:nvPr/>
+        </p:nvSpPr>
+        <p:spPr>
+          <a:xfrm>
+            <a:off x="8275320" y="2011680"/>
+            <a:ext cx="2926080" cy="4206240"/>
+          </a:xfrm>
+          <a:prstGeom prst="rect">
+            <a:avLst/>
+          </a:prstGeom>
+          <a:noFill/>
+        </p:spPr>
+        <p:txBody>
+          <a:bodyPr wrap="square">
+            <a:spAutoFit/>
+          </a:bodyPr>
+          <a:lstStyle/>
+          <a:p>
+            <a:pPr>
+              <a:defRPr sz="1700" b="1">
+                <a:solidFill>
+                  <a:srgbClr val="10B981"/>
+                </a:solidFill>
+                <a:latin typeface="Georgia"/>
+              </a:defRPr>
+            </a:pPr>
+            <a:r>
+              <a:t>C. Private Floor Shield</a:t>
+            </a:r>
+          </a:p>
+          <a:p>
+            <a:pPr>
+              <a:spcBef>
+                <a:spcPts val="400"/>
+              </a:spcBef>
+              <a:defRPr sz="1100" b="1">
+                <a:solidFill>
+                  <a:srgbClr val="94A3B8"/>
+                </a:solidFill>
+                <a:latin typeface="Arial"/>
+              </a:defRPr>
+            </a:pPr>
+            <a:r>
+              <a:t>TABLE DAMAGE CONTROL</a:t>
+            </a:r>
+          </a:p>
+          <a:p>
+            <a:pPr>
+              <a:spcBef>
+                <a:spcPts val="1000"/>
+              </a:spcBef>
+              <a:defRPr sz="1300">
+                <a:solidFill>
+                  <a:srgbClr val="CBD5E1"/>
+                </a:solidFill>
+                <a:latin typeface="Arial"/>
+              </a:defRPr>
+            </a:pPr>
+            <a:r>
+              <a:t>• Platform: Internal Manager Tablet / SMS.</a:t>
+            </a:r>
+          </a:p>
+          <a:p>
+            <a:pPr>
+              <a:spcBef>
+                <a:spcPts val="1000"/>
+              </a:spcBef>
+              <a:defRPr sz="1300">
+                <a:solidFill>
+                  <a:srgbClr val="CBD5E1"/>
+                </a:solidFill>
+                <a:latin typeface="Arial"/>
+              </a:defRPr>
+            </a:pPr>
+            <a:r>
+              <a:t>• Format: Private 1-3★ table grievance alert.</a:t>
+            </a:r>
+          </a:p>
+          <a:p>
+            <a:pPr>
+              <a:spcBef>
+                <a:spcPts val="1000"/>
+              </a:spcBef>
+              <a:defRPr sz="1300">
+                <a:solidFill>
+                  <a:srgbClr val="CBD5E1"/>
+                </a:solidFill>
+                <a:latin typeface="Arial"/>
+              </a:defRPr>
+            </a:pPr>
+            <a:r>
+              <a:t>• Impact: Stops complaints from reaching Google; alerts floor manager in &lt;60s.</a:t>
+            </a:r>
+          </a:p>
+          <a:p>
+            <a:pPr>
+              <a:spcBef>
+                <a:spcPts val="1000"/>
+              </a:spcBef>
+              <a:defRPr sz="1300">
+                <a:solidFill>
+                  <a:srgbClr val="CBD5E1"/>
+                </a:solidFill>
+                <a:latin typeface="Arial"/>
+              </a:defRPr>
+            </a:pPr>
+            <a:r>
+              <a:t>• Menuz Role: Manager resolves issue at table before guest ever leaves.</a:t>
             </a:r>
           </a:p>
         </p:txBody>
@@ -7315,7 +8341,7 @@
             <a:avLst/>
           </a:prstGeom>
           <a:solidFill>
-            <a:srgbClr val="FDFBF7"/>
+            <a:srgbClr val="090D16"/>
           </a:solidFill>
           <a:ln>
             <a:noFill/>
@@ -7351,8 +8377,8 @@
         </p:nvSpPr>
         <p:spPr>
           <a:xfrm>
-            <a:off x="731520" y="365760"/>
-            <a:ext cx="10515600" cy="292608"/>
+            <a:off x="731520" y="320040"/>
+            <a:ext cx="10698480" cy="320040"/>
           </a:xfrm>
           <a:prstGeom prst="rect">
             <a:avLst/>
@@ -7366,15 +8392,15 @@
           <a:lstStyle/>
           <a:p>
             <a:pPr>
-              <a:defRPr sz="1000" b="1">
-                <a:solidFill>
-                  <a:srgbClr val="E85D04"/>
-                </a:solidFill>
-                <a:latin typeface="Arial"/>
-              </a:defRPr>
-            </a:pPr>
-            <a:r>
-              <a:t>MULTIPLAYER COLLABORATION</a:t>
+              <a:defRPr sz="1300" b="1">
+                <a:solidFill>
+                  <a:srgbClr val="06B6D4"/>
+                </a:solidFill>
+                <a:latin typeface="Arial"/>
+              </a:defRPr>
+            </a:pPr>
+            <a:r>
+              <a:t>// DINER INTERFACE</a:t>
             </a:r>
           </a:p>
         </p:txBody>
@@ -7387,8 +8413,8 @@
         </p:nvSpPr>
         <p:spPr>
           <a:xfrm>
-            <a:off x="731520" y="685800"/>
-            <a:ext cx="10515600" cy="502920"/>
+            <a:off x="731520" y="640080"/>
+            <a:ext cx="10698480" cy="594360"/>
           </a:xfrm>
           <a:prstGeom prst="rect">
             <a:avLst/>
@@ -7402,15 +8428,15 @@
           <a:lstStyle/>
           <a:p>
             <a:pPr>
-              <a:defRPr sz="2200" b="1">
-                <a:solidFill>
-                  <a:srgbClr val="1C1917"/>
+              <a:defRPr sz="2800" b="1">
+                <a:solidFill>
+                  <a:srgbClr val="FAFAFA"/>
                 </a:solidFill>
                 <a:latin typeface="Georgia"/>
               </a:defRPr>
             </a:pPr>
             <a:r>
-              <a:t>Real-Time Table Sync: Group Dining Reimagined</a:t>
+              <a:t>Visual Digital Menu: Engaging Appetites with Culinary Storytelling</a:t>
             </a:r>
           </a:p>
         </p:txBody>
@@ -7423,8 +8449,8 @@
         </p:nvSpPr>
         <p:spPr>
           <a:xfrm>
-            <a:off x="731520" y="1234440"/>
-            <a:ext cx="10515600" cy="365760"/>
+            <a:off x="731520" y="1280160"/>
+            <a:ext cx="10698480" cy="457200"/>
           </a:xfrm>
           <a:prstGeom prst="rect">
             <a:avLst/>
@@ -7438,15 +8464,15 @@
           <a:lstStyle/>
           <a:p>
             <a:pPr>
-              <a:defRPr sz="1150">
-                <a:solidFill>
-                  <a:srgbClr val="57534E"/>
-                </a:solidFill>
-                <a:latin typeface="Arial"/>
-              </a:defRPr>
-            </a:pPr>
-            <a:r>
-              <a:t>Multiple phones at the same table add dishes together into one synchronized live cart.</a:t>
+              <a:defRPr sz="1400">
+                <a:solidFill>
+                  <a:srgbClr val="CBD5E1"/>
+                </a:solidFill>
+                <a:latin typeface="Arial"/>
+              </a:defRPr>
+            </a:pPr>
+            <a:r>
+              <a:t>Replacing paper text with high-res plating photos, calibrated spice meters, and instant service calls.</a:t>
             </a:r>
           </a:p>
         </p:txBody>
@@ -7460,17 +8486,17 @@
         <p:spPr>
           <a:xfrm>
             <a:off x="731520" y="1828800"/>
-            <a:ext cx="3328416" cy="4297680"/>
+            <a:ext cx="5212080" cy="4572000"/>
           </a:xfrm>
           <a:prstGeom prst="roundRect">
             <a:avLst/>
           </a:prstGeom>
           <a:solidFill>
-            <a:srgbClr val="FFFFFF"/>
+            <a:srgbClr val="131C2E"/>
           </a:solidFill>
-          <a:ln w="12700">
+          <a:ln w="19050">
             <a:solidFill>
-              <a:srgbClr val="E7E5E4"/>
+              <a:srgbClr val="0891B2"/>
             </a:solidFill>
           </a:ln>
         </p:spPr>
@@ -7504,8 +8530,8 @@
         </p:nvSpPr>
         <p:spPr>
           <a:xfrm>
-            <a:off x="1005840" y="2103120"/>
-            <a:ext cx="2779776" cy="3657600"/>
+            <a:off x="1005840" y="2057400"/>
+            <a:ext cx="4663440" cy="4114800"/>
           </a:xfrm>
           <a:prstGeom prst="rect">
             <a:avLst/>
@@ -7519,47 +8545,79 @@
           <a:lstStyle/>
           <a:p>
             <a:pPr>
-              <a:defRPr sz="1700" b="1">
-                <a:solidFill>
-                  <a:srgbClr val="E85D04"/>
+              <a:defRPr sz="1900" b="1">
+                <a:solidFill>
+                  <a:srgbClr val="06B6D4"/>
                 </a:solidFill>
                 <a:latin typeface="Georgia"/>
               </a:defRPr>
             </a:pPr>
             <a:r>
-              <a:t>Live Shared Table Tray</a:t>
-            </a:r>
-          </a:p>
-          <a:p>
-            <a:pPr>
-              <a:spcBef>
-                <a:spcPts val="400"/>
-              </a:spcBef>
-              <a:defRPr sz="1000" b="1">
-                <a:solidFill>
-                  <a:srgbClr val="2563EB"/>
-                </a:solidFill>
-                <a:latin typeface="Arial"/>
-              </a:defRPr>
-            </a:pPr>
-            <a:r>
-              <a:t>HOW IT WORKS</a:t>
-            </a:r>
-          </a:p>
-          <a:p>
-            <a:pPr>
-              <a:spcBef>
-                <a:spcPts val="1400"/>
-              </a:spcBef>
-              <a:defRPr sz="1150">
-                <a:solidFill>
-                  <a:srgbClr val="57534E"/>
-                </a:solidFill>
-                <a:latin typeface="Arial"/>
-              </a:defRPr>
-            </a:pPr>
-            <a:r>
-              <a:t>When a family or group sits at Table 4, everyone scans the QR code. All phones connect to the same shared table session via WebSockets with &lt;100ms sync latency.</a:t>
+              <a:t>Visual Menu Features</a:t>
+            </a:r>
+          </a:p>
+          <a:p>
+            <a:pPr>
+              <a:spcBef>
+                <a:spcPts val="1000"/>
+              </a:spcBef>
+              <a:defRPr sz="1300">
+                <a:solidFill>
+                  <a:srgbClr val="CBD5E1"/>
+                </a:solidFill>
+                <a:latin typeface="Arial"/>
+              </a:defRPr>
+            </a:pPr>
+            <a:r>
+              <a:t>• High-Resolution Plating Photos: Showcases exact culinary presentations, triggering immediate visual appetite and premium orders.</a:t>
+            </a:r>
+          </a:p>
+          <a:p>
+            <a:pPr>
+              <a:spcBef>
+                <a:spcPts val="1000"/>
+              </a:spcBef>
+              <a:defRPr sz="1300">
+                <a:solidFill>
+                  <a:srgbClr val="CBD5E1"/>
+                </a:solidFill>
+                <a:latin typeface="Arial"/>
+              </a:defRPr>
+            </a:pPr>
+            <a:r>
+              <a:t>• Spice Meter Calibration (1 to 5): Visual heat indicators (Level 1: Cashew Cream, Level 5: Guntur Chili) prevent spice mismatches.</a:t>
+            </a:r>
+          </a:p>
+          <a:p>
+            <a:pPr>
+              <a:spcBef>
+                <a:spcPts val="1000"/>
+              </a:spcBef>
+              <a:defRPr sz="1300">
+                <a:solidFill>
+                  <a:srgbClr val="CBD5E1"/>
+                </a:solidFill>
+                <a:latin typeface="Arial"/>
+              </a:defRPr>
+            </a:pPr>
+            <a:r>
+              <a:t>• Dietary &amp; Allergen Filtering: Instant 1-tap toggling for Pure Veg (🟢), Non-Veg (🔴), Vegan, Jain, and Gluten-Free dishes.</a:t>
+            </a:r>
+          </a:p>
+          <a:p>
+            <a:pPr>
+              <a:spcBef>
+                <a:spcPts val="1000"/>
+              </a:spcBef>
+              <a:defRPr sz="1300">
+                <a:solidFill>
+                  <a:srgbClr val="CBD5E1"/>
+                </a:solidFill>
+                <a:latin typeface="Arial"/>
+              </a:defRPr>
+            </a:pPr>
+            <a:r>
+              <a:t>• Chef's Secret Notes &amp; Lore: Shares slow-braising times, tandoor techniques, and masala histories directly with diners.</a:t>
             </a:r>
           </a:p>
         </p:txBody>
@@ -7572,18 +8630,18 @@
         </p:nvSpPr>
         <p:spPr>
           <a:xfrm>
-            <a:off x="4389120" y="1828800"/>
-            <a:ext cx="3328416" cy="4297680"/>
+            <a:off x="6217920" y="1828800"/>
+            <a:ext cx="5212080" cy="4572000"/>
           </a:xfrm>
           <a:prstGeom prst="roundRect">
             <a:avLst/>
           </a:prstGeom>
           <a:solidFill>
-            <a:srgbClr val="FFFFFF"/>
+            <a:srgbClr val="131C2E"/>
           </a:solidFill>
-          <a:ln w="12700">
+          <a:ln w="19050">
             <a:solidFill>
-              <a:srgbClr val="E7E5E4"/>
+              <a:srgbClr val="D97706"/>
             </a:solidFill>
           </a:ln>
         </p:spPr>
@@ -7617,8 +8675,8 @@
         </p:nvSpPr>
         <p:spPr>
           <a:xfrm>
-            <a:off x="4663440" y="2103120"/>
-            <a:ext cx="2779776" cy="3657600"/>
+            <a:off x="6492240" y="2057400"/>
+            <a:ext cx="4663440" cy="4114800"/>
           </a:xfrm>
           <a:prstGeom prst="rect">
             <a:avLst/>
@@ -7632,160 +8690,79 @@
           <a:lstStyle/>
           <a:p>
             <a:pPr>
-              <a:defRPr sz="1700" b="1">
-                <a:solidFill>
-                  <a:srgbClr val="E85D04"/>
+              <a:defRPr sz="1900" b="1">
+                <a:solidFill>
+                  <a:srgbClr val="F59E0B"/>
                 </a:solidFill>
                 <a:latin typeface="Georgia"/>
               </a:defRPr>
             </a:pPr>
             <a:r>
-              <a:t>Clear Guest Attribution</a:t>
-            </a:r>
-          </a:p>
-          <a:p>
-            <a:pPr>
-              <a:spcBef>
-                <a:spcPts val="400"/>
-              </a:spcBef>
-              <a:defRPr sz="1000" b="1">
-                <a:solidFill>
-                  <a:srgbClr val="2563EB"/>
-                </a:solidFill>
-                <a:latin typeface="Arial"/>
-              </a:defRPr>
-            </a:pPr>
-            <a:r>
-              <a:t>WHO ORDERED WHAT</a:t>
-            </a:r>
-          </a:p>
-          <a:p>
-            <a:pPr>
-              <a:spcBef>
-                <a:spcPts val="1400"/>
-              </a:spcBef>
-              <a:defRPr sz="1150">
-                <a:solidFill>
-                  <a:srgbClr val="57534E"/>
-                </a:solidFill>
-                <a:latin typeface="Arial"/>
-              </a:defRPr>
-            </a:pPr>
-            <a:r>
-              <a:t>Every dish in the cart displays the diner's identifier ('👤 Guest 1 - Host', '👤 Guest 2 - Rohan'). Eliminates confusion over who ordered what dish.</a:t>
-            </a:r>
-          </a:p>
-        </p:txBody>
-      </p:sp>
-      <p:sp>
-        <p:nvSpPr>
-          <p:cNvPr id="10" name="Rounded Rectangle 9"/>
-          <p:cNvSpPr/>
-          <p:nvPr/>
-        </p:nvSpPr>
-        <p:spPr>
-          <a:xfrm>
-            <a:off x="8046720" y="1828800"/>
-            <a:ext cx="3328416" cy="4297680"/>
-          </a:xfrm>
-          <a:prstGeom prst="roundRect">
-            <a:avLst/>
-          </a:prstGeom>
-          <a:solidFill>
-            <a:srgbClr val="FFFFFF"/>
-          </a:solidFill>
-          <a:ln w="12700">
-            <a:solidFill>
-              <a:srgbClr val="E7E5E4"/>
-            </a:solidFill>
-          </a:ln>
-        </p:spPr>
-        <p:style>
-          <a:lnRef idx="1">
-            <a:schemeClr val="accent1"/>
-          </a:lnRef>
-          <a:fillRef idx="3">
-            <a:schemeClr val="accent1"/>
-          </a:fillRef>
-          <a:effectRef idx="2">
-            <a:schemeClr val="accent1"/>
-          </a:effectRef>
-          <a:fontRef idx="minor">
-            <a:schemeClr val="lt1"/>
-          </a:fontRef>
-        </p:style>
-        <p:txBody>
-          <a:bodyPr rtlCol="0" anchor="ctr"/>
-          <a:lstStyle/>
-          <a:p>
-            <a:pPr algn="ctr"/>
-          </a:p>
-        </p:txBody>
-      </p:sp>
-      <p:sp>
-        <p:nvSpPr>
-          <p:cNvPr id="11" name="TextBox 10"/>
-          <p:cNvSpPr txBox="1"/>
-          <p:nvPr/>
-        </p:nvSpPr>
-        <p:spPr>
-          <a:xfrm>
-            <a:off x="8321040" y="2103120"/>
-            <a:ext cx="2779776" cy="3657600"/>
-          </a:xfrm>
-          <a:prstGeom prst="rect">
-            <a:avLst/>
-          </a:prstGeom>
-          <a:noFill/>
-        </p:spPr>
-        <p:txBody>
-          <a:bodyPr wrap="square">
-            <a:spAutoFit/>
-          </a:bodyPr>
-          <a:lstStyle/>
-          <a:p>
-            <a:pPr>
-              <a:defRPr sz="1700" b="1">
-                <a:solidFill>
-                  <a:srgbClr val="E85D04"/>
-                </a:solidFill>
-                <a:latin typeface="Georgia"/>
-              </a:defRPr>
-            </a:pPr>
-            <a:r>
-              <a:t>Zero Duplicate Orders</a:t>
-            </a:r>
-          </a:p>
-          <a:p>
-            <a:pPr>
-              <a:spcBef>
-                <a:spcPts val="400"/>
-              </a:spcBef>
-              <a:defRPr sz="1000" b="1">
-                <a:solidFill>
-                  <a:srgbClr val="2563EB"/>
-                </a:solidFill>
-                <a:latin typeface="Arial"/>
-              </a:defRPr>
-            </a:pPr>
-            <a:r>
-              <a:t>KITCHEN EFFICIENCY</a:t>
-            </a:r>
-          </a:p>
-          <a:p>
-            <a:pPr>
-              <a:spcBef>
-                <a:spcPts val="1400"/>
-              </a:spcBef>
-              <a:defRPr sz="1150">
-                <a:solidFill>
-                  <a:srgbClr val="57534E"/>
-                </a:solidFill>
-                <a:latin typeface="Arial"/>
-              </a:defRPr>
-            </a:pPr>
-            <a:r>
-              <a:t>Table reviews the unified cart together before dispatch. Eliminates disjointed orders and ensures the kitchen receives one harmonious KOT.</a:t>
+              <a:t>Table Service Controls</a:t>
+            </a:r>
+          </a:p>
+          <a:p>
+            <a:pPr>
+              <a:spcBef>
+                <a:spcPts val="1000"/>
+              </a:spcBef>
+              <a:defRPr sz="1300">
+                <a:solidFill>
+                  <a:srgbClr val="FAFAFA"/>
+                </a:solidFill>
+                <a:latin typeface="Arial"/>
+              </a:defRPr>
+            </a:pPr>
+            <a:r>
+              <a:t>✓ Zero App Downloads: Runs instantly inside Safari or Chrome upon scanning table QR code via lightweight PWA.</a:t>
+            </a:r>
+          </a:p>
+          <a:p>
+            <a:pPr>
+              <a:spcBef>
+                <a:spcPts val="1000"/>
+              </a:spcBef>
+              <a:defRPr sz="1300">
+                <a:solidFill>
+                  <a:srgbClr val="FAFAFA"/>
+                </a:solidFill>
+                <a:latin typeface="Arial"/>
+              </a:defRPr>
+            </a:pPr>
+            <a:r>
+              <a:t>✓ 1-Tap Floor Service SOS: Diners tap 'Call Waiter', 'Water', or 'Bill'. Waiter tablet buzzes instantly with exact table number.</a:t>
+            </a:r>
+          </a:p>
+          <a:p>
+            <a:pPr>
+              <a:spcBef>
+                <a:spcPts val="1000"/>
+              </a:spcBef>
+              <a:defRPr sz="1300">
+                <a:solidFill>
+                  <a:srgbClr val="FAFAFA"/>
+                </a:solidFill>
+                <a:latin typeface="Arial"/>
+              </a:defRPr>
+            </a:pPr>
+            <a:r>
+              <a:t>✓ Live Kitchen Preparation Tracking: Guests track order progress: 'Received' → 'In Tandoor / Preparing' → 'Served'.</a:t>
+            </a:r>
+          </a:p>
+          <a:p>
+            <a:pPr>
+              <a:spcBef>
+                <a:spcPts val="1000"/>
+              </a:spcBef>
+              <a:defRPr sz="1300">
+                <a:solidFill>
+                  <a:srgbClr val="FAFAFA"/>
+                </a:solidFill>
+                <a:latin typeface="Arial"/>
+              </a:defRPr>
+            </a:pPr>
+            <a:r>
+              <a:t>✓ Instant Itemized Bill View: Guests view transparent bills with taxes and discounts clearly displayed, cutting checkout wait times.</a:t>
             </a:r>
           </a:p>
         </p:txBody>
@@ -7823,7 +8800,7 @@
             <a:avLst/>
           </a:prstGeom>
           <a:solidFill>
-            <a:srgbClr val="1C1917"/>
+            <a:srgbClr val="090D16"/>
           </a:solidFill>
           <a:ln>
             <a:noFill/>
@@ -7859,8 +8836,8 @@
         </p:nvSpPr>
         <p:spPr>
           <a:xfrm>
-            <a:off x="731520" y="365760"/>
-            <a:ext cx="10515600" cy="292608"/>
+            <a:off x="731520" y="320040"/>
+            <a:ext cx="10698480" cy="320040"/>
           </a:xfrm>
           <a:prstGeom prst="rect">
             <a:avLst/>
@@ -7874,15 +8851,15 @@
           <a:lstStyle/>
           <a:p>
             <a:pPr>
-              <a:defRPr sz="1000" b="1">
-                <a:solidFill>
-                  <a:srgbClr val="E85D04"/>
-                </a:solidFill>
-                <a:latin typeface="Arial"/>
-              </a:defRPr>
-            </a:pPr>
-            <a:r>
-              <a:t>AI DINING CONCIERGE</a:t>
+              <a:defRPr sz="1300" b="1">
+                <a:solidFill>
+                  <a:srgbClr val="06B6D4"/>
+                </a:solidFill>
+                <a:latin typeface="Arial"/>
+              </a:defRPr>
+            </a:pPr>
+            <a:r>
+              <a:t>// GROUP DINING INNOVATION</a:t>
             </a:r>
           </a:p>
         </p:txBody>
@@ -7895,8 +8872,8 @@
         </p:nvSpPr>
         <p:spPr>
           <a:xfrm>
-            <a:off x="731520" y="685800"/>
-            <a:ext cx="10515600" cy="502920"/>
+            <a:off x="731520" y="640080"/>
+            <a:ext cx="10698480" cy="594360"/>
           </a:xfrm>
           <a:prstGeom prst="rect">
             <a:avLst/>
@@ -7910,15 +8887,15 @@
           <a:lstStyle/>
           <a:p>
             <a:pPr>
-              <a:defRPr sz="2200" b="1">
-                <a:solidFill>
-                  <a:srgbClr val="FFFFFF"/>
+              <a:defRPr sz="2800" b="1">
+                <a:solidFill>
+                  <a:srgbClr val="FAFAFA"/>
                 </a:solidFill>
                 <a:latin typeface="Georgia"/>
               </a:defRPr>
             </a:pPr>
             <a:r>
-              <a:t>Chef AI Sommelier: Always Answering, Auto-Scrolling</a:t>
+              <a:t>Real-Time Multiplayer Table Sync: Group Dining Reimagined</a:t>
             </a:r>
           </a:p>
         </p:txBody>
@@ -7931,8 +8908,8 @@
         </p:nvSpPr>
         <p:spPr>
           <a:xfrm>
-            <a:off x="731520" y="1234440"/>
-            <a:ext cx="10515600" cy="365760"/>
+            <a:off x="731520" y="1280160"/>
+            <a:ext cx="10698480" cy="457200"/>
           </a:xfrm>
           <a:prstGeom prst="rect">
             <a:avLst/>
@@ -7946,15 +8923,15 @@
           <a:lstStyle/>
           <a:p>
             <a:pPr>
-              <a:defRPr sz="1150">
-                <a:solidFill>
-                  <a:srgbClr val="D6D3D1"/>
-                </a:solidFill>
-                <a:latin typeface="Arial"/>
-              </a:defRPr>
-            </a:pPr>
-            <a:r>
-              <a:t>A personalized conversational AI trained directly on your head chef's recipes and owner's upsell rules.</a:t>
+              <a:defRPr sz="1400">
+                <a:solidFill>
+                  <a:srgbClr val="CBD5E1"/>
+                </a:solidFill>
+                <a:latin typeface="Arial"/>
+              </a:defRPr>
+            </a:pPr>
+            <a:r>
+              <a:t>Multiple phones at the same table add dishes together into one synchronized live cart.</a:t>
             </a:r>
           </a:p>
         </p:txBody>
@@ -7968,16 +8945,18 @@
         <p:spPr>
           <a:xfrm>
             <a:off x="731520" y="1828800"/>
-            <a:ext cx="10728655" cy="4297680"/>
+            <a:ext cx="3383280" cy="4572000"/>
           </a:xfrm>
           <a:prstGeom prst="roundRect">
             <a:avLst/>
           </a:prstGeom>
           <a:solidFill>
-            <a:srgbClr val="292524"/>
+            <a:srgbClr val="131C2E"/>
           </a:solidFill>
-          <a:ln>
-            <a:noFill/>
+          <a:ln w="19050">
+            <a:solidFill>
+              <a:srgbClr val="27364F"/>
+            </a:solidFill>
           </a:ln>
         </p:spPr>
         <p:style>
@@ -8010,8 +8989,8 @@
         </p:nvSpPr>
         <p:spPr>
           <a:xfrm>
-            <a:off x="1097280" y="2103120"/>
-            <a:ext cx="9966960" cy="3749039"/>
+            <a:off x="960120" y="2057400"/>
+            <a:ext cx="2926080" cy="4114800"/>
           </a:xfrm>
           <a:prstGeom prst="rect">
             <a:avLst/>
@@ -8025,79 +9004,273 @@
           <a:lstStyle/>
           <a:p>
             <a:pPr>
-              <a:defRPr sz="1900" b="1">
-                <a:solidFill>
-                  <a:srgbClr val="E85D04"/>
+              <a:defRPr sz="1800" b="1">
+                <a:solidFill>
+                  <a:srgbClr val="06B6D4"/>
                 </a:solidFill>
                 <a:latin typeface="Georgia"/>
               </a:defRPr>
             </a:pPr>
             <a:r>
-              <a:t>Key Conversational Capabilities &amp; UX Upgrades</a:t>
-            </a:r>
-          </a:p>
-          <a:p>
-            <a:pPr>
-              <a:spcBef>
-                <a:spcPts val="1200"/>
-              </a:spcBef>
-              <a:defRPr sz="1150">
-                <a:solidFill>
-                  <a:srgbClr val="FFFFFF"/>
-                </a:solidFill>
-                <a:latin typeface="Arial"/>
-              </a:defRPr>
-            </a:pPr>
-            <a:r>
-              <a:t>✨ Auto-Scroll Response UX: When a diner taps a suggestion chip (e.g. 'Is the Butter Chicken spicy?', 'Pair a wine with Dal Makhani'), the chat window automatically follows the response so the diner reads the answer without physical scrolling.</a:t>
-            </a:r>
-          </a:p>
-          <a:p>
-            <a:pPr>
-              <a:spcBef>
-                <a:spcPts val="1200"/>
-              </a:spcBef>
-              <a:defRPr sz="1150">
-                <a:solidFill>
-                  <a:srgbClr val="FFFFFF"/>
-                </a:solidFill>
-                <a:latin typeface="Arial"/>
-              </a:defRPr>
-            </a:pPr>
-            <a:r>
-              <a:t>✨ Trained by Head Chef: Speaks with authentic authority on secret charcoal marinades, spice calibrations, and cooking times. Zero hallucinations — answers only from your verified recipe dataset.</a:t>
-            </a:r>
-          </a:p>
-          <a:p>
-            <a:pPr>
-              <a:spcBef>
-                <a:spcPts val="1200"/>
-              </a:spcBef>
-              <a:defRPr sz="1150">
-                <a:solidFill>
-                  <a:srgbClr val="FFFFFF"/>
-                </a:solidFill>
-                <a:latin typeface="Arial"/>
-              </a:defRPr>
-            </a:pPr>
-            <a:r>
-              <a:t>✨ Trained by Restaurant Owner: Subtly steers diners toward high-margin coolers, tandoori breads, and signature house desserts, increasing table check size naturally.</a:t>
-            </a:r>
-          </a:p>
-          <a:p>
-            <a:pPr>
-              <a:spcBef>
-                <a:spcPts val="1200"/>
-              </a:spcBef>
-              <a:defRPr sz="1150">
-                <a:solidFill>
-                  <a:srgbClr val="FFFFFF"/>
-                </a:solidFill>
-                <a:latin typeface="Arial"/>
-              </a:defRPr>
-            </a:pPr>
-            <a:r>
-              <a:t>✨ Allergy &amp; Dietary Guarantee: Verifies kitchen cross-contamination safety protocols for gluten-free, nut-free, and Jain requirements with 100% confidence.</a:t>
+              <a:t>Live Shared Tray (&lt;100ms)</a:t>
+            </a:r>
+          </a:p>
+          <a:p>
+            <a:pPr>
+              <a:spcBef>
+                <a:spcPts val="400"/>
+              </a:spcBef>
+              <a:defRPr sz="1100" b="1">
+                <a:solidFill>
+                  <a:srgbClr val="94A3B8"/>
+                </a:solidFill>
+                <a:latin typeface="Arial"/>
+              </a:defRPr>
+            </a:pPr>
+            <a:r>
+              <a:t>INSTANT CONNECTION</a:t>
+            </a:r>
+          </a:p>
+          <a:p>
+            <a:pPr>
+              <a:spcBef>
+                <a:spcPts val="1400"/>
+              </a:spcBef>
+              <a:defRPr sz="1350">
+                <a:solidFill>
+                  <a:srgbClr val="CBD5E1"/>
+                </a:solidFill>
+                <a:latin typeface="Arial"/>
+              </a:defRPr>
+            </a:pPr>
+            <a:r>
+              <a:t>All guests at Table 4 connect to the same real-time WebSocket room. When Rohan adds Butter Naan, Priya sees it on her screen in milliseconds.</a:t>
+            </a:r>
+          </a:p>
+        </p:txBody>
+      </p:sp>
+      <p:sp>
+        <p:nvSpPr>
+          <p:cNvPr id="8" name="Rounded Rectangle 7"/>
+          <p:cNvSpPr/>
+          <p:nvPr/>
+        </p:nvSpPr>
+        <p:spPr>
+          <a:xfrm>
+            <a:off x="4389120" y="1828800"/>
+            <a:ext cx="3383280" cy="4572000"/>
+          </a:xfrm>
+          <a:prstGeom prst="roundRect">
+            <a:avLst/>
+          </a:prstGeom>
+          <a:solidFill>
+            <a:srgbClr val="131C2E"/>
+          </a:solidFill>
+          <a:ln w="19050">
+            <a:solidFill>
+              <a:srgbClr val="27364F"/>
+            </a:solidFill>
+          </a:ln>
+        </p:spPr>
+        <p:style>
+          <a:lnRef idx="1">
+            <a:schemeClr val="accent1"/>
+          </a:lnRef>
+          <a:fillRef idx="3">
+            <a:schemeClr val="accent1"/>
+          </a:fillRef>
+          <a:effectRef idx="2">
+            <a:schemeClr val="accent1"/>
+          </a:effectRef>
+          <a:fontRef idx="minor">
+            <a:schemeClr val="lt1"/>
+          </a:fontRef>
+        </p:style>
+        <p:txBody>
+          <a:bodyPr rtlCol="0" anchor="ctr"/>
+          <a:lstStyle/>
+          <a:p>
+            <a:pPr algn="ctr"/>
+          </a:p>
+        </p:txBody>
+      </p:sp>
+      <p:sp>
+        <p:nvSpPr>
+          <p:cNvPr id="9" name="TextBox 8"/>
+          <p:cNvSpPr txBox="1"/>
+          <p:nvPr/>
+        </p:nvSpPr>
+        <p:spPr>
+          <a:xfrm>
+            <a:off x="4617720" y="2057400"/>
+            <a:ext cx="2926080" cy="4114800"/>
+          </a:xfrm>
+          <a:prstGeom prst="rect">
+            <a:avLst/>
+          </a:prstGeom>
+          <a:noFill/>
+        </p:spPr>
+        <p:txBody>
+          <a:bodyPr wrap="square">
+            <a:spAutoFit/>
+          </a:bodyPr>
+          <a:lstStyle/>
+          <a:p>
+            <a:pPr>
+              <a:defRPr sz="1800" b="1">
+                <a:solidFill>
+                  <a:srgbClr val="F59E0B"/>
+                </a:solidFill>
+                <a:latin typeface="Georgia"/>
+              </a:defRPr>
+            </a:pPr>
+            <a:r>
+              <a:t>Guest Attribution Tags</a:t>
+            </a:r>
+          </a:p>
+          <a:p>
+            <a:pPr>
+              <a:spcBef>
+                <a:spcPts val="400"/>
+              </a:spcBef>
+              <a:defRPr sz="1100" b="1">
+                <a:solidFill>
+                  <a:srgbClr val="94A3B8"/>
+                </a:solidFill>
+                <a:latin typeface="Arial"/>
+              </a:defRPr>
+            </a:pPr>
+            <a:r>
+              <a:t>WHO ORDERED WHAT</a:t>
+            </a:r>
+          </a:p>
+          <a:p>
+            <a:pPr>
+              <a:spcBef>
+                <a:spcPts val="1400"/>
+              </a:spcBef>
+              <a:defRPr sz="1350">
+                <a:solidFill>
+                  <a:srgbClr val="CBD5E1"/>
+                </a:solidFill>
+                <a:latin typeface="Arial"/>
+              </a:defRPr>
+            </a:pPr>
+            <a:r>
+              <a:t>Every item displays who ordered it ('👤 Rohan', '👤 Priya'), eliminating the awkward confusion of duplicate orders.</a:t>
+            </a:r>
+          </a:p>
+        </p:txBody>
+      </p:sp>
+      <p:sp>
+        <p:nvSpPr>
+          <p:cNvPr id="10" name="Rounded Rectangle 9"/>
+          <p:cNvSpPr/>
+          <p:nvPr/>
+        </p:nvSpPr>
+        <p:spPr>
+          <a:xfrm>
+            <a:off x="8046720" y="1828800"/>
+            <a:ext cx="3383280" cy="4572000"/>
+          </a:xfrm>
+          <a:prstGeom prst="roundRect">
+            <a:avLst/>
+          </a:prstGeom>
+          <a:solidFill>
+            <a:srgbClr val="131C2E"/>
+          </a:solidFill>
+          <a:ln w="19050">
+            <a:solidFill>
+              <a:srgbClr val="27364F"/>
+            </a:solidFill>
+          </a:ln>
+        </p:spPr>
+        <p:style>
+          <a:lnRef idx="1">
+            <a:schemeClr val="accent1"/>
+          </a:lnRef>
+          <a:fillRef idx="3">
+            <a:schemeClr val="accent1"/>
+          </a:fillRef>
+          <a:effectRef idx="2">
+            <a:schemeClr val="accent1"/>
+          </a:effectRef>
+          <a:fontRef idx="minor">
+            <a:schemeClr val="lt1"/>
+          </a:fontRef>
+        </p:style>
+        <p:txBody>
+          <a:bodyPr rtlCol="0" anchor="ctr"/>
+          <a:lstStyle/>
+          <a:p>
+            <a:pPr algn="ctr"/>
+          </a:p>
+        </p:txBody>
+      </p:sp>
+      <p:sp>
+        <p:nvSpPr>
+          <p:cNvPr id="11" name="TextBox 10"/>
+          <p:cNvSpPr txBox="1"/>
+          <p:nvPr/>
+        </p:nvSpPr>
+        <p:spPr>
+          <a:xfrm>
+            <a:off x="8275320" y="2057400"/>
+            <a:ext cx="2926080" cy="4114800"/>
+          </a:xfrm>
+          <a:prstGeom prst="rect">
+            <a:avLst/>
+          </a:prstGeom>
+          <a:noFill/>
+        </p:spPr>
+        <p:txBody>
+          <a:bodyPr wrap="square">
+            <a:spAutoFit/>
+          </a:bodyPr>
+          <a:lstStyle/>
+          <a:p>
+            <a:pPr>
+              <a:defRPr sz="1800" b="1">
+                <a:solidFill>
+                  <a:srgbClr val="10B981"/>
+                </a:solidFill>
+                <a:latin typeface="Georgia"/>
+              </a:defRPr>
+            </a:pPr>
+            <a:r>
+              <a:t>Harmonious Kitchen KOT</a:t>
+            </a:r>
+          </a:p>
+          <a:p>
+            <a:pPr>
+              <a:spcBef>
+                <a:spcPts val="400"/>
+              </a:spcBef>
+              <a:defRPr sz="1100" b="1">
+                <a:solidFill>
+                  <a:srgbClr val="94A3B8"/>
+                </a:solidFill>
+                <a:latin typeface="Arial"/>
+              </a:defRPr>
+            </a:pPr>
+            <a:r>
+              <a:t>ZERO DISJOINTED ORDERS</a:t>
+            </a:r>
+          </a:p>
+          <a:p>
+            <a:pPr>
+              <a:spcBef>
+                <a:spcPts val="1400"/>
+              </a:spcBef>
+              <a:defRPr sz="1350">
+                <a:solidFill>
+                  <a:srgbClr val="CBD5E1"/>
+                </a:solidFill>
+                <a:latin typeface="Arial"/>
+              </a:defRPr>
+            </a:pPr>
+            <a:r>
+              <a:t>The table reviews the unified cart together before dispatching, ensuring the kitchen receives one organized ticket.</a:t>
             </a:r>
           </a:p>
         </p:txBody>
@@ -8135,7 +9308,7 @@
             <a:avLst/>
           </a:prstGeom>
           <a:solidFill>
-            <a:srgbClr val="FDFBF7"/>
+            <a:srgbClr val="090D16"/>
           </a:solidFill>
           <a:ln>
             <a:noFill/>
@@ -8171,8 +9344,8 @@
         </p:nvSpPr>
         <p:spPr>
           <a:xfrm>
-            <a:off x="731520" y="365760"/>
-            <a:ext cx="10515600" cy="292608"/>
+            <a:off x="731520" y="320040"/>
+            <a:ext cx="10698480" cy="320040"/>
           </a:xfrm>
           <a:prstGeom prst="rect">
             <a:avLst/>
@@ -8186,15 +9359,15 @@
           <a:lstStyle/>
           <a:p>
             <a:pPr>
-              <a:defRPr sz="1000" b="1">
-                <a:solidFill>
-                  <a:srgbClr val="E85D04"/>
-                </a:solidFill>
-                <a:latin typeface="Arial"/>
-              </a:defRPr>
-            </a:pPr>
-            <a:r>
-              <a:t>REVENUE ENGINE</a:t>
+              <a:defRPr sz="1300" b="1">
+                <a:solidFill>
+                  <a:srgbClr val="F59E0B"/>
+                </a:solidFill>
+                <a:latin typeface="Arial"/>
+              </a:defRPr>
+            </a:pPr>
+            <a:r>
+              <a:t>// AI DINING CONCIERGE</a:t>
             </a:r>
           </a:p>
         </p:txBody>
@@ -8207,8 +9380,8 @@
         </p:nvSpPr>
         <p:spPr>
           <a:xfrm>
-            <a:off x="731520" y="685800"/>
-            <a:ext cx="10515600" cy="502920"/>
+            <a:off x="731520" y="640080"/>
+            <a:ext cx="10698480" cy="594360"/>
           </a:xfrm>
           <a:prstGeom prst="rect">
             <a:avLst/>
@@ -8222,15 +9395,15 @@
           <a:lstStyle/>
           <a:p>
             <a:pPr>
-              <a:defRPr sz="2200" b="1">
-                <a:solidFill>
-                  <a:srgbClr val="1C1917"/>
+              <a:defRPr sz="2800" b="1">
+                <a:solidFill>
+                  <a:srgbClr val="FAFAFA"/>
                 </a:solidFill>
                 <a:latin typeface="Georgia"/>
               </a:defRPr>
             </a:pPr>
             <a:r>
-              <a:t>Smart Chef Pairings &amp; High-Margin Upsell Engine</a:t>
+              <a:t>Chef AI Sommelier: Always Guiding Choices &amp; Answering Questions</a:t>
             </a:r>
           </a:p>
         </p:txBody>
@@ -8243,8 +9416,8 @@
         </p:nvSpPr>
         <p:spPr>
           <a:xfrm>
-            <a:off x="731520" y="1234440"/>
-            <a:ext cx="10515600" cy="365760"/>
+            <a:off x="731520" y="1280160"/>
+            <a:ext cx="10698480" cy="457200"/>
           </a:xfrm>
           <a:prstGeom prst="rect">
             <a:avLst/>
@@ -8258,15 +9431,15 @@
           <a:lstStyle/>
           <a:p>
             <a:pPr>
-              <a:defRPr sz="1150">
-                <a:solidFill>
-                  <a:srgbClr val="57534E"/>
-                </a:solidFill>
-                <a:latin typeface="Arial"/>
-              </a:defRPr>
-            </a:pPr>
-            <a:r>
-              <a:t>Increasing average ticket sizes by +22% with contextual beverage &amp; side bundle suggestions.</a:t>
+              <a:defRPr sz="1400">
+                <a:solidFill>
+                  <a:srgbClr val="CBD5E1"/>
+                </a:solidFill>
+                <a:latin typeface="Arial"/>
+              </a:defRPr>
+            </a:pPr>
+            <a:r>
+              <a:t>A conversational AI trained directly on your chef's recipes and owner's upsell rules.</a:t>
             </a:r>
           </a:p>
         </p:txBody>
@@ -8280,17 +9453,17 @@
         <p:spPr>
           <a:xfrm>
             <a:off x="731520" y="1828800"/>
-            <a:ext cx="3328416" cy="4297680"/>
+            <a:ext cx="10698480" cy="4572000"/>
           </a:xfrm>
           <a:prstGeom prst="roundRect">
             <a:avLst/>
           </a:prstGeom>
           <a:solidFill>
-            <a:srgbClr val="FFFFFF"/>
+            <a:srgbClr val="131C2E"/>
           </a:solidFill>
-          <a:ln w="12700">
+          <a:ln w="19050">
             <a:solidFill>
-              <a:srgbClr val="E7E5E4"/>
+              <a:srgbClr val="D97706"/>
             </a:solidFill>
           </a:ln>
         </p:spPr>
@@ -8324,8 +9497,8 @@
         </p:nvSpPr>
         <p:spPr>
           <a:xfrm>
-            <a:off x="1005840" y="2103120"/>
-            <a:ext cx="2779776" cy="3657600"/>
+            <a:off x="1005840" y="2057400"/>
+            <a:ext cx="10149840" cy="4114800"/>
           </a:xfrm>
           <a:prstGeom prst="rect">
             <a:avLst/>
@@ -8339,273 +9512,79 @@
           <a:lstStyle/>
           <a:p>
             <a:pPr>
-              <a:defRPr sz="1700" b="1">
-                <a:solidFill>
-                  <a:srgbClr val="E85D04"/>
+              <a:defRPr sz="2000" b="1">
+                <a:solidFill>
+                  <a:srgbClr val="F59E0B"/>
                 </a:solidFill>
                 <a:latin typeface="Georgia"/>
               </a:defRPr>
             </a:pPr>
             <a:r>
-              <a:t>Contextual Pairing Suggestions</a:t>
-            </a:r>
-          </a:p>
-          <a:p>
-            <a:pPr>
-              <a:spcBef>
-                <a:spcPts val="400"/>
-              </a:spcBef>
-              <a:defRPr sz="1000" b="1">
-                <a:solidFill>
-                  <a:srgbClr val="2563EB"/>
-                </a:solidFill>
-                <a:latin typeface="Arial"/>
-              </a:defRPr>
-            </a:pPr>
-            <a:r>
-              <a:t>AUTOMATIC DETECTION</a:t>
-            </a:r>
-          </a:p>
-          <a:p>
-            <a:pPr>
-              <a:spcBef>
-                <a:spcPts val="1400"/>
-              </a:spcBef>
-              <a:defRPr sz="1150">
-                <a:solidFill>
-                  <a:srgbClr val="57534E"/>
-                </a:solidFill>
-                <a:latin typeface="Arial"/>
-              </a:defRPr>
-            </a:pPr>
-            <a:r>
-              <a:t>When a diner selects Awadhi Murgh Biryani, Menuz instantly surfaces the Chef's Recommended Pairing: Garlic Butter Naan + Royal Kokum Mint Cooler.</a:t>
-            </a:r>
-          </a:p>
-        </p:txBody>
-      </p:sp>
-      <p:sp>
-        <p:nvSpPr>
-          <p:cNvPr id="8" name="Rounded Rectangle 7"/>
-          <p:cNvSpPr/>
-          <p:nvPr/>
-        </p:nvSpPr>
-        <p:spPr>
-          <a:xfrm>
-            <a:off x="4389120" y="1828800"/>
-            <a:ext cx="3328416" cy="4297680"/>
-          </a:xfrm>
-          <a:prstGeom prst="roundRect">
-            <a:avLst/>
-          </a:prstGeom>
-          <a:solidFill>
-            <a:srgbClr val="FFFFFF"/>
-          </a:solidFill>
-          <a:ln w="12700">
-            <a:solidFill>
-              <a:srgbClr val="E7E5E4"/>
-            </a:solidFill>
-          </a:ln>
-        </p:spPr>
-        <p:style>
-          <a:lnRef idx="1">
-            <a:schemeClr val="accent1"/>
-          </a:lnRef>
-          <a:fillRef idx="3">
-            <a:schemeClr val="accent1"/>
-          </a:fillRef>
-          <a:effectRef idx="2">
-            <a:schemeClr val="accent1"/>
-          </a:effectRef>
-          <a:fontRef idx="minor">
-            <a:schemeClr val="lt1"/>
-          </a:fontRef>
-        </p:style>
-        <p:txBody>
-          <a:bodyPr rtlCol="0" anchor="ctr"/>
-          <a:lstStyle/>
-          <a:p>
-            <a:pPr algn="ctr"/>
-          </a:p>
-        </p:txBody>
-      </p:sp>
-      <p:sp>
-        <p:nvSpPr>
-          <p:cNvPr id="9" name="TextBox 8"/>
-          <p:cNvSpPr txBox="1"/>
-          <p:nvPr/>
-        </p:nvSpPr>
-        <p:spPr>
-          <a:xfrm>
-            <a:off x="4663440" y="2103120"/>
-            <a:ext cx="2779776" cy="3657600"/>
-          </a:xfrm>
-          <a:prstGeom prst="rect">
-            <a:avLst/>
-          </a:prstGeom>
-          <a:noFill/>
-        </p:spPr>
-        <p:txBody>
-          <a:bodyPr wrap="square">
-            <a:spAutoFit/>
-          </a:bodyPr>
-          <a:lstStyle/>
-          <a:p>
-            <a:pPr>
-              <a:defRPr sz="1700" b="1">
-                <a:solidFill>
-                  <a:srgbClr val="E85D04"/>
-                </a:solidFill>
-                <a:latin typeface="Georgia"/>
-              </a:defRPr>
-            </a:pPr>
-            <a:r>
-              <a:t>Promotional Bundle Deals</a:t>
-            </a:r>
-          </a:p>
-          <a:p>
-            <a:pPr>
-              <a:spcBef>
-                <a:spcPts val="400"/>
-              </a:spcBef>
-              <a:defRPr sz="1000" b="1">
-                <a:solidFill>
-                  <a:srgbClr val="2563EB"/>
-                </a:solidFill>
-                <a:latin typeface="Arial"/>
-              </a:defRPr>
-            </a:pPr>
-            <a:r>
-              <a:t>OWNER CONFIGURABLE</a:t>
-            </a:r>
-          </a:p>
-          <a:p>
-            <a:pPr>
-              <a:spcBef>
-                <a:spcPts val="1400"/>
-              </a:spcBef>
-              <a:defRPr sz="1150">
-                <a:solidFill>
-                  <a:srgbClr val="57534E"/>
-                </a:solidFill>
-                <a:latin typeface="Arial"/>
-              </a:defRPr>
-            </a:pPr>
-            <a:r>
-              <a:t>Owners configure bundle discounts (e.g. 10% to 15% off when added as a pair). Diners get exciting value while the restaurant sells more drinks and desserts.</a:t>
-            </a:r>
-          </a:p>
-        </p:txBody>
-      </p:sp>
-      <p:sp>
-        <p:nvSpPr>
-          <p:cNvPr id="10" name="Rounded Rectangle 9"/>
-          <p:cNvSpPr/>
-          <p:nvPr/>
-        </p:nvSpPr>
-        <p:spPr>
-          <a:xfrm>
-            <a:off x="8046720" y="1828800"/>
-            <a:ext cx="3328416" cy="4297680"/>
-          </a:xfrm>
-          <a:prstGeom prst="roundRect">
-            <a:avLst/>
-          </a:prstGeom>
-          <a:solidFill>
-            <a:srgbClr val="FFFFFF"/>
-          </a:solidFill>
-          <a:ln w="12700">
-            <a:solidFill>
-              <a:srgbClr val="E7E5E4"/>
-            </a:solidFill>
-          </a:ln>
-        </p:spPr>
-        <p:style>
-          <a:lnRef idx="1">
-            <a:schemeClr val="accent1"/>
-          </a:lnRef>
-          <a:fillRef idx="3">
-            <a:schemeClr val="accent1"/>
-          </a:fillRef>
-          <a:effectRef idx="2">
-            <a:schemeClr val="accent1"/>
-          </a:effectRef>
-          <a:fontRef idx="minor">
-            <a:schemeClr val="lt1"/>
-          </a:fontRef>
-        </p:style>
-        <p:txBody>
-          <a:bodyPr rtlCol="0" anchor="ctr"/>
-          <a:lstStyle/>
-          <a:p>
-            <a:pPr algn="ctr"/>
-          </a:p>
-        </p:txBody>
-      </p:sp>
-      <p:sp>
-        <p:nvSpPr>
-          <p:cNvPr id="11" name="TextBox 10"/>
-          <p:cNvSpPr txBox="1"/>
-          <p:nvPr/>
-        </p:nvSpPr>
-        <p:spPr>
-          <a:xfrm>
-            <a:off x="8321040" y="2103120"/>
-            <a:ext cx="2779776" cy="3657600"/>
-          </a:xfrm>
-          <a:prstGeom prst="rect">
-            <a:avLst/>
-          </a:prstGeom>
-          <a:noFill/>
-        </p:spPr>
-        <p:txBody>
-          <a:bodyPr wrap="square">
-            <a:spAutoFit/>
-          </a:bodyPr>
-          <a:lstStyle/>
-          <a:p>
-            <a:pPr>
-              <a:defRPr sz="1700" b="1">
-                <a:solidFill>
-                  <a:srgbClr val="E85D04"/>
-                </a:solidFill>
-                <a:latin typeface="Georgia"/>
-              </a:defRPr>
-            </a:pPr>
-            <a:r>
-              <a:t>1-Click In-Tray Quick Add</a:t>
-            </a:r>
-          </a:p>
-          <a:p>
-            <a:pPr>
-              <a:spcBef>
-                <a:spcPts val="400"/>
-              </a:spcBef>
-              <a:defRPr sz="1000" b="1">
-                <a:solidFill>
-                  <a:srgbClr val="2563EB"/>
-                </a:solidFill>
-                <a:latin typeface="Arial"/>
-              </a:defRPr>
-            </a:pPr>
-            <a:r>
-              <a:t>ZERO FRICTION</a:t>
-            </a:r>
-          </a:p>
-          <a:p>
-            <a:pPr>
-              <a:spcBef>
-                <a:spcPts val="1400"/>
-              </a:spcBef>
-              <a:defRPr sz="1150">
-                <a:solidFill>
-                  <a:srgbClr val="57534E"/>
-                </a:solidFill>
-                <a:latin typeface="Arial"/>
-              </a:defRPr>
-            </a:pPr>
-            <a:r>
-              <a:t>No jumping between menu categories: diners add the pairing deal in 1 tap right inside their dining cart tray with instant total recalculation.</a:t>
+              <a:t>How the In-Menu AI Concierge Drives Higher Check Sizes</a:t>
+            </a:r>
+          </a:p>
+          <a:p>
+            <a:pPr>
+              <a:spcBef>
+                <a:spcPts val="1200"/>
+              </a:spcBef>
+              <a:defRPr sz="1350">
+                <a:solidFill>
+                  <a:srgbClr val="CBD5E1"/>
+                </a:solidFill>
+                <a:latin typeface="Arial"/>
+              </a:defRPr>
+            </a:pPr>
+            <a:r>
+              <a:t>✨ Trained on Head Chef's Recipes: Speaks with authentic authority on hand-ground spice blends, slow-braising methods, and heat levels with zero hallucinations.</a:t>
+            </a:r>
+          </a:p>
+          <a:p>
+            <a:pPr>
+              <a:spcBef>
+                <a:spcPts val="1200"/>
+              </a:spcBef>
+              <a:defRPr sz="1350">
+                <a:solidFill>
+                  <a:srgbClr val="CBD5E1"/>
+                </a:solidFill>
+                <a:latin typeface="Arial"/>
+              </a:defRPr>
+            </a:pPr>
+            <a:r>
+              <a:t>✨ Trained on Owner's Upsell Playbook: When a diner asks what to pair with Biryani, the AI naturally suggests high-margin coolers, specialty naans, and house dessert specials.</a:t>
+            </a:r>
+          </a:p>
+          <a:p>
+            <a:pPr>
+              <a:spcBef>
+                <a:spcPts val="1200"/>
+              </a:spcBef>
+              <a:defRPr sz="1350">
+                <a:solidFill>
+                  <a:srgbClr val="CBD5E1"/>
+                </a:solidFill>
+                <a:latin typeface="Arial"/>
+              </a:defRPr>
+            </a:pPr>
+            <a:r>
+              <a:t>✨ Smart Auto-Scroll &amp; Suggestion Chips: Diners tap quick chips ('Pair a drink with Paneer Tikka', 'Is Mutton Curry spicy?'). The chat window smoothly auto-scrolls to the answer without typing.</a:t>
+            </a:r>
+          </a:p>
+          <a:p>
+            <a:pPr>
+              <a:spcBef>
+                <a:spcPts val="1200"/>
+              </a:spcBef>
+              <a:defRPr sz="1350">
+                <a:solidFill>
+                  <a:srgbClr val="CBD5E1"/>
+                </a:solidFill>
+                <a:latin typeface="Arial"/>
+              </a:defRPr>
+            </a:pPr>
+            <a:r>
+              <a:t>✨ Strict Dietary &amp; Allergen Guarantee: Instantly verifies kitchen safety protocols for Jain, nut-free, vegan, and gluten-free items with 100% confidence.</a:t>
             </a:r>
           </a:p>
         </p:txBody>
@@ -8643,7 +9622,7 @@
             <a:avLst/>
           </a:prstGeom>
           <a:solidFill>
-            <a:srgbClr val="FDFBF7"/>
+            <a:srgbClr val="090D16"/>
           </a:solidFill>
           <a:ln>
             <a:noFill/>
@@ -8679,8 +9658,8 @@
         </p:nvSpPr>
         <p:spPr>
           <a:xfrm>
-            <a:off x="731520" y="365760"/>
-            <a:ext cx="10515600" cy="292608"/>
+            <a:off x="731520" y="320040"/>
+            <a:ext cx="10698480" cy="320040"/>
           </a:xfrm>
           <a:prstGeom prst="rect">
             <a:avLst/>
@@ -8694,15 +9673,15 @@
           <a:lstStyle/>
           <a:p>
             <a:pPr>
-              <a:defRPr sz="1000" b="1">
-                <a:solidFill>
-                  <a:srgbClr val="E85D04"/>
-                </a:solidFill>
-                <a:latin typeface="Arial"/>
-              </a:defRPr>
-            </a:pPr>
-            <a:r>
-              <a:t>OWNER-CONTROLLED GROWTH</a:t>
+              <a:defRPr sz="1300" b="1">
+                <a:solidFill>
+                  <a:srgbClr val="10B981"/>
+                </a:solidFill>
+                <a:latin typeface="Arial"/>
+              </a:defRPr>
+            </a:pPr>
+            <a:r>
+              <a:t>// REVENUE ACCELERATION</a:t>
             </a:r>
           </a:p>
         </p:txBody>
@@ -8715,8 +9694,8 @@
         </p:nvSpPr>
         <p:spPr>
           <a:xfrm>
-            <a:off x="731520" y="685800"/>
-            <a:ext cx="10515600" cy="502920"/>
+            <a:off x="731520" y="640080"/>
+            <a:ext cx="10698480" cy="594360"/>
           </a:xfrm>
           <a:prstGeom prst="rect">
             <a:avLst/>
@@ -8730,15 +9709,15 @@
           <a:lstStyle/>
           <a:p>
             <a:pPr>
-              <a:defRPr sz="2200" b="1">
-                <a:solidFill>
-                  <a:srgbClr val="1C1917"/>
+              <a:defRPr sz="2800" b="1">
+                <a:solidFill>
+                  <a:srgbClr val="FAFAFA"/>
                 </a:solidFill>
                 <a:latin typeface="Georgia"/>
               </a:defRPr>
             </a:pPr>
             <a:r>
-              <a:t>Reward Gateway: Instagram Story vs. Google Review</a:t>
+              <a:t>Smart Chef Pairings: Boosting Average Ticket Size by +22%</a:t>
             </a:r>
           </a:p>
         </p:txBody>
@@ -8751,8 +9730,8 @@
         </p:nvSpPr>
         <p:spPr>
           <a:xfrm>
-            <a:off x="731520" y="1234440"/>
-            <a:ext cx="10515600" cy="365760"/>
+            <a:off x="731520" y="1280160"/>
+            <a:ext cx="10698480" cy="457200"/>
           </a:xfrm>
           <a:prstGeom prst="rect">
             <a:avLst/>
@@ -8766,15 +9745,15 @@
           <a:lstStyle/>
           <a:p>
             <a:pPr>
-              <a:defRPr sz="1150">
-                <a:solidFill>
-                  <a:srgbClr val="57534E"/>
-                </a:solidFill>
-                <a:latin typeface="Arial"/>
-              </a:defRPr>
-            </a:pPr>
-            <a:r>
-              <a:t>The restaurant owner chooses how diners unlock their free food item or table discount.</a:t>
+              <a:defRPr sz="1400">
+                <a:solidFill>
+                  <a:srgbClr val="CBD5E1"/>
+                </a:solidFill>
+                <a:latin typeface="Arial"/>
+              </a:defRPr>
+            </a:pPr>
+            <a:r>
+              <a:t>Automated contextual beverage and side bundle recommendations served right inside the cart.</a:t>
             </a:r>
           </a:p>
         </p:txBody>
@@ -8788,17 +9767,17 @@
         <p:spPr>
           <a:xfrm>
             <a:off x="731520" y="1828800"/>
-            <a:ext cx="5120640" cy="4297680"/>
+            <a:ext cx="3383280" cy="4572000"/>
           </a:xfrm>
           <a:prstGeom prst="roundRect">
             <a:avLst/>
           </a:prstGeom>
           <a:solidFill>
-            <a:srgbClr val="FFFFFF"/>
+            <a:srgbClr val="131C2E"/>
           </a:solidFill>
-          <a:ln w="12700">
+          <a:ln w="19050">
             <a:solidFill>
-              <a:srgbClr val="E7E5E4"/>
+              <a:srgbClr val="27364F"/>
             </a:solidFill>
           </a:ln>
         </p:spPr>
@@ -8832,8 +9811,8 @@
         </p:nvSpPr>
         <p:spPr>
           <a:xfrm>
-            <a:off x="1005840" y="2103120"/>
-            <a:ext cx="4572000" cy="3749039"/>
+            <a:off x="960120" y="2057400"/>
+            <a:ext cx="2926080" cy="4114800"/>
           </a:xfrm>
           <a:prstGeom prst="rect">
             <a:avLst/>
@@ -8849,77 +9828,45 @@
             <a:pPr>
               <a:defRPr sz="1800" b="1">
                 <a:solidFill>
-                  <a:srgbClr val="E85D04"/>
+                  <a:srgbClr val="06B6D4"/>
                 </a:solidFill>
                 <a:latin typeface="Georgia"/>
               </a:defRPr>
             </a:pPr>
             <a:r>
-              <a:t>Option A: 5-Star Google Review Boost</a:t>
-            </a:r>
-          </a:p>
-          <a:p>
-            <a:pPr>
-              <a:spcBef>
-                <a:spcPts val="900"/>
-              </a:spcBef>
-              <a:defRPr sz="1100">
-                <a:solidFill>
-                  <a:srgbClr val="1C1917"/>
-                </a:solidFill>
-                <a:latin typeface="Arial"/>
-              </a:defRPr>
-            </a:pPr>
-            <a:r>
-              <a:t>⭐ Diner drafts an AI dish-specific 5-star review.</a:t>
-            </a:r>
-          </a:p>
-          <a:p>
-            <a:pPr>
-              <a:spcBef>
-                <a:spcPts val="900"/>
-              </a:spcBef>
-              <a:defRPr sz="1100">
-                <a:solidFill>
-                  <a:srgbClr val="1C1917"/>
-                </a:solidFill>
-                <a:latin typeface="Arial"/>
-              </a:defRPr>
-            </a:pPr>
-            <a:r>
-              <a:t>⭐ Unlocks the Lucky Wheel or 15% table discount voucher upon posting to Google Maps.</a:t>
-            </a:r>
-          </a:p>
-          <a:p>
-            <a:pPr>
-              <a:spcBef>
-                <a:spcPts val="900"/>
-              </a:spcBef>
-              <a:defRPr sz="1100">
-                <a:solidFill>
-                  <a:srgbClr val="1C1917"/>
-                </a:solidFill>
-                <a:latin typeface="Arial"/>
-              </a:defRPr>
-            </a:pPr>
-            <a:r>
-              <a:t>⭐ Drives maximum Google SEO rank, local search discovery, and walk-in footfall.</a:t>
-            </a:r>
-          </a:p>
-          <a:p>
-            <a:pPr>
-              <a:spcBef>
-                <a:spcPts val="900"/>
-              </a:spcBef>
-              <a:defRPr sz="1100">
-                <a:solidFill>
-                  <a:srgbClr val="1C1917"/>
-                </a:solidFill>
-                <a:latin typeface="Arial"/>
-              </a:defRPr>
-            </a:pPr>
-            <a:r>
-              <a:t>⭐ Best for: New restaurants or locations needing 500+ Google Maps reviews fast.</a:t>
+              <a:t>Contextual Dish Matching</a:t>
+            </a:r>
+          </a:p>
+          <a:p>
+            <a:pPr>
+              <a:spcBef>
+                <a:spcPts val="400"/>
+              </a:spcBef>
+              <a:defRPr sz="1100" b="1">
+                <a:solidFill>
+                  <a:srgbClr val="94A3B8"/>
+                </a:solidFill>
+                <a:latin typeface="Arial"/>
+              </a:defRPr>
+            </a:pPr>
+            <a:r>
+              <a:t>INTELLIGENT PAIRING</a:t>
+            </a:r>
+          </a:p>
+          <a:p>
+            <a:pPr>
+              <a:spcBef>
+                <a:spcPts val="1400"/>
+              </a:spcBef>
+              <a:defRPr sz="1350">
+                <a:solidFill>
+                  <a:srgbClr val="CBD5E1"/>
+                </a:solidFill>
+                <a:latin typeface="Arial"/>
+              </a:defRPr>
+            </a:pPr>
+            <a:r>
+              <a:t>Selecting Awadhi Murgh Biryani automatically surfaces the Chef's Pairing: Garlic Butter Naan + Royal Kokum Mint Cooler in 1 tap.</a:t>
             </a:r>
           </a:p>
         </p:txBody>
@@ -8932,18 +9879,18 @@
         </p:nvSpPr>
         <p:spPr>
           <a:xfrm>
-            <a:off x="6309360" y="1828800"/>
-            <a:ext cx="5120640" cy="4297680"/>
+            <a:off x="4389120" y="1828800"/>
+            <a:ext cx="3383280" cy="4572000"/>
           </a:xfrm>
           <a:prstGeom prst="roundRect">
             <a:avLst/>
           </a:prstGeom>
           <a:solidFill>
-            <a:srgbClr val="FFFFFF"/>
+            <a:srgbClr val="131C2E"/>
           </a:solidFill>
-          <a:ln w="12700">
+          <a:ln w="19050">
             <a:solidFill>
-              <a:srgbClr val="E7E5E4"/>
+              <a:srgbClr val="27364F"/>
             </a:solidFill>
           </a:ln>
         </p:spPr>
@@ -8977,8 +9924,8 @@
         </p:nvSpPr>
         <p:spPr>
           <a:xfrm>
-            <a:off x="6583680" y="2103120"/>
-            <a:ext cx="4572000" cy="3749039"/>
+            <a:off x="4617720" y="2057400"/>
+            <a:ext cx="2926080" cy="4114800"/>
           </a:xfrm>
           <a:prstGeom prst="rect">
             <a:avLst/>
@@ -8994,91 +9941,104 @@
             <a:pPr>
               <a:defRPr sz="1800" b="1">
                 <a:solidFill>
-                  <a:srgbClr val="DB2777"/>
+                  <a:srgbClr val="F59E0B"/>
                 </a:solidFill>
                 <a:latin typeface="Georgia"/>
               </a:defRPr>
             </a:pPr>
             <a:r>
-              <a:t>Option B: Viral Instagram Story Share</a:t>
-            </a:r>
-          </a:p>
-          <a:p>
-            <a:pPr>
-              <a:spcBef>
-                <a:spcPts val="900"/>
-              </a:spcBef>
-              <a:defRPr sz="1100">
-                <a:solidFill>
-                  <a:srgbClr val="1C1917"/>
-                </a:solidFill>
-                <a:latin typeface="Arial"/>
-              </a:defRPr>
-            </a:pPr>
-            <a:r>
-              <a:t>📸 Diner generates a 9:16 vertical Instagram Story card featuring their table dish.</a:t>
-            </a:r>
-          </a:p>
-          <a:p>
-            <a:pPr>
-              <a:spcBef>
-                <a:spcPts val="900"/>
-              </a:spcBef>
-              <a:defRPr sz="1100">
-                <a:solidFill>
-                  <a:srgbClr val="1C1917"/>
-                </a:solidFill>
-                <a:latin typeface="Arial"/>
-              </a:defRPr>
-            </a:pPr>
-            <a:r>
-              <a:t>📸 Mentions @restaurant and location tag to unlock their free dessert or bill discount.</a:t>
-            </a:r>
-          </a:p>
-          <a:p>
-            <a:pPr>
-              <a:spcBef>
-                <a:spcPts val="900"/>
-              </a:spcBef>
-              <a:defRPr sz="1100">
-                <a:solidFill>
-                  <a:srgbClr val="1C1917"/>
-                </a:solidFill>
-                <a:latin typeface="Arial"/>
-              </a:defRPr>
-            </a:pPr>
-            <a:r>
-              <a:t>📸 Taps into diners' authentic local followers for massive peer-to-peer social reach.</a:t>
-            </a:r>
-          </a:p>
-          <a:p>
-            <a:pPr>
-              <a:spcBef>
-                <a:spcPts val="900"/>
-              </a:spcBef>
-              <a:defRPr sz="1100">
-                <a:solidFill>
-                  <a:srgbClr val="1C1917"/>
-                </a:solidFill>
-                <a:latin typeface="Arial"/>
-              </a:defRPr>
-            </a:pPr>
-            <a:r>
-              <a:t>📸 Best for: High-energy cafes, bars, rooftop lounges, and youth-centric brands.</a:t>
-            </a:r>
-          </a:p>
-        </p:txBody>
-      </p:sp>
-      <p:sp>
-        <p:nvSpPr>
-          <p:cNvPr id="10" name="TextBox 9"/>
+              <a:t>Configurable Bundle Deals</a:t>
+            </a:r>
+          </a:p>
+          <a:p>
+            <a:pPr>
+              <a:spcBef>
+                <a:spcPts val="400"/>
+              </a:spcBef>
+              <a:defRPr sz="1100" b="1">
+                <a:solidFill>
+                  <a:srgbClr val="94A3B8"/>
+                </a:solidFill>
+                <a:latin typeface="Arial"/>
+              </a:defRPr>
+            </a:pPr>
+            <a:r>
+              <a:t>OWNER PROFIT CONTROL</a:t>
+            </a:r>
+          </a:p>
+          <a:p>
+            <a:pPr>
+              <a:spcBef>
+                <a:spcPts val="1400"/>
+              </a:spcBef>
+              <a:defRPr sz="1350">
+                <a:solidFill>
+                  <a:srgbClr val="CBD5E1"/>
+                </a:solidFill>
+                <a:latin typeface="Arial"/>
+              </a:defRPr>
+            </a:pPr>
+            <a:r>
+              <a:t>Owners configure bundle discounts (e.g. 10-15% off when added as a pair). Diners love the value while restaurants sell more beverages and desserts.</a:t>
+            </a:r>
+          </a:p>
+        </p:txBody>
+      </p:sp>
+      <p:sp>
+        <p:nvSpPr>
+          <p:cNvPr id="10" name="Rounded Rectangle 9"/>
+          <p:cNvSpPr/>
+          <p:nvPr/>
+        </p:nvSpPr>
+        <p:spPr>
+          <a:xfrm>
+            <a:off x="8046720" y="1828800"/>
+            <a:ext cx="3383280" cy="4572000"/>
+          </a:xfrm>
+          <a:prstGeom prst="roundRect">
+            <a:avLst/>
+          </a:prstGeom>
+          <a:solidFill>
+            <a:srgbClr val="131C2E"/>
+          </a:solidFill>
+          <a:ln w="19050">
+            <a:solidFill>
+              <a:srgbClr val="27364F"/>
+            </a:solidFill>
+          </a:ln>
+        </p:spPr>
+        <p:style>
+          <a:lnRef idx="1">
+            <a:schemeClr val="accent1"/>
+          </a:lnRef>
+          <a:fillRef idx="3">
+            <a:schemeClr val="accent1"/>
+          </a:fillRef>
+          <a:effectRef idx="2">
+            <a:schemeClr val="accent1"/>
+          </a:effectRef>
+          <a:fontRef idx="minor">
+            <a:schemeClr val="lt1"/>
+          </a:fontRef>
+        </p:style>
+        <p:txBody>
+          <a:bodyPr rtlCol="0" anchor="ctr"/>
+          <a:lstStyle/>
+          <a:p>
+            <a:pPr algn="ctr"/>
+          </a:p>
+        </p:txBody>
+      </p:sp>
+      <p:sp>
+        <p:nvSpPr>
+          <p:cNvPr id="11" name="TextBox 10"/>
           <p:cNvSpPr txBox="1"/>
           <p:nvPr/>
         </p:nvSpPr>
         <p:spPr>
           <a:xfrm>
-            <a:off x="731520" y="6217920"/>
-            <a:ext cx="10728655" cy="365760"/>
+            <a:off x="8275320" y="2057400"/>
+            <a:ext cx="2926080" cy="4114800"/>
           </a:xfrm>
           <a:prstGeom prst="rect">
             <a:avLst/>
@@ -9086,21 +10046,53 @@
           <a:noFill/>
         </p:spPr>
         <p:txBody>
-          <a:bodyPr wrap="none">
+          <a:bodyPr wrap="square">
             <a:spAutoFit/>
           </a:bodyPr>
           <a:lstStyle/>
           <a:p>
             <a:pPr>
-              <a:defRPr sz="1050" b="1">
-                <a:solidFill>
-                  <a:srgbClr val="E85D04"/>
-                </a:solidFill>
-                <a:latin typeface="Arial"/>
-              </a:defRPr>
-            </a:pPr>
-            <a:r>
-              <a:t>💡 Owner's Choice: Set to Google Review, Instagram Story, or Dual Mode (Diner's Choice) in 1 click from Admin Settings.</a:t>
+              <a:defRPr sz="1800" b="1">
+                <a:solidFill>
+                  <a:srgbClr val="10B981"/>
+                </a:solidFill>
+                <a:latin typeface="Georgia"/>
+              </a:defRPr>
+            </a:pPr>
+            <a:r>
+              <a:t>1-Click In-Tray Quick Add</a:t>
+            </a:r>
+          </a:p>
+          <a:p>
+            <a:pPr>
+              <a:spcBef>
+                <a:spcPts val="400"/>
+              </a:spcBef>
+              <a:defRPr sz="1100" b="1">
+                <a:solidFill>
+                  <a:srgbClr val="94A3B8"/>
+                </a:solidFill>
+                <a:latin typeface="Arial"/>
+              </a:defRPr>
+            </a:pPr>
+            <a:r>
+              <a:t>ZERO CATEGORY HOPPING</a:t>
+            </a:r>
+          </a:p>
+          <a:p>
+            <a:pPr>
+              <a:spcBef>
+                <a:spcPts val="1400"/>
+              </a:spcBef>
+              <a:defRPr sz="1350">
+                <a:solidFill>
+                  <a:srgbClr val="CBD5E1"/>
+                </a:solidFill>
+                <a:latin typeface="Arial"/>
+              </a:defRPr>
+            </a:pPr>
+            <a:r>
+              <a:t>Suggested pairings appear right inside the bottom cart sheet so diners add them instantly without browsing separate menu categories.</a:t>
             </a:r>
           </a:p>
         </p:txBody>
@@ -9138,7 +10130,7 @@
             <a:avLst/>
           </a:prstGeom>
           <a:solidFill>
-            <a:srgbClr val="1C1917"/>
+            <a:srgbClr val="090D16"/>
           </a:solidFill>
           <a:ln>
             <a:noFill/>
@@ -9174,8 +10166,8 @@
         </p:nvSpPr>
         <p:spPr>
           <a:xfrm>
-            <a:off x="731520" y="365760"/>
-            <a:ext cx="10515600" cy="292608"/>
+            <a:off x="731520" y="320040"/>
+            <a:ext cx="10698480" cy="320040"/>
           </a:xfrm>
           <a:prstGeom prst="rect">
             <a:avLst/>
@@ -9189,15 +10181,15 @@
           <a:lstStyle/>
           <a:p>
             <a:pPr>
-              <a:defRPr sz="1000" b="1">
-                <a:solidFill>
-                  <a:srgbClr val="E85D04"/>
-                </a:solidFill>
-                <a:latin typeface="Arial"/>
-              </a:defRPr>
-            </a:pPr>
-            <a:r>
-              <a:t>SOCIAL GROWTH</a:t>
+              <a:defRPr sz="1300" b="1">
+                <a:solidFill>
+                  <a:srgbClr val="10B981"/>
+                </a:solidFill>
+                <a:latin typeface="Arial"/>
+              </a:defRPr>
+            </a:pPr>
+            <a:r>
+              <a:t>// REPUTATION DEFENSE</a:t>
             </a:r>
           </a:p>
         </p:txBody>
@@ -9210,8 +10202,8 @@
         </p:nvSpPr>
         <p:spPr>
           <a:xfrm>
-            <a:off x="731520" y="685800"/>
-            <a:ext cx="10515600" cy="502920"/>
+            <a:off x="731520" y="640080"/>
+            <a:ext cx="10698480" cy="594360"/>
           </a:xfrm>
           <a:prstGeom prst="rect">
             <a:avLst/>
@@ -9225,15 +10217,15 @@
           <a:lstStyle/>
           <a:p>
             <a:pPr>
-              <a:defRPr sz="2200" b="1">
-                <a:solidFill>
-                  <a:srgbClr val="FFFFFF"/>
+              <a:defRPr sz="2800" b="1">
+                <a:solidFill>
+                  <a:srgbClr val="FAFAFA"/>
                 </a:solidFill>
                 <a:latin typeface="Georgia"/>
               </a:defRPr>
             </a:pPr>
             <a:r>
-              <a:t>Viral 9:16 Instagram Story Studio</a:t>
+              <a:t>The Reputation Floor Shield: 5★ to Google, 1-3★ to Manager</a:t>
             </a:r>
           </a:p>
         </p:txBody>
@@ -9246,8 +10238,8 @@
         </p:nvSpPr>
         <p:spPr>
           <a:xfrm>
-            <a:off x="731520" y="1234440"/>
-            <a:ext cx="10515600" cy="365760"/>
+            <a:off x="731520" y="1280160"/>
+            <a:ext cx="10698480" cy="457200"/>
           </a:xfrm>
           <a:prstGeom prst="rect">
             <a:avLst/>
@@ -9261,15 +10253,15 @@
           <a:lstStyle/>
           <a:p>
             <a:pPr>
-              <a:defRPr sz="1150">
-                <a:solidFill>
-                  <a:srgbClr val="D6D3D1"/>
-                </a:solidFill>
-                <a:latin typeface="Arial"/>
-              </a:defRPr>
-            </a:pPr>
-            <a:r>
-              <a:t>Turn every dish ordered into branded organic social impressions across Pune.</a:t>
+              <a:defRPr sz="1400">
+                <a:solidFill>
+                  <a:srgbClr val="CBD5E1"/>
+                </a:solidFill>
+                <a:latin typeface="Arial"/>
+              </a:defRPr>
+            </a:pPr>
+            <a:r>
+              <a:t>How Menuz channels positive reviews to Google Maps while intercepting complaints table-side.</a:t>
             </a:r>
           </a:p>
         </p:txBody>
@@ -9283,16 +10275,18 @@
         <p:spPr>
           <a:xfrm>
             <a:off x="731520" y="1828800"/>
-            <a:ext cx="10728655" cy="4297680"/>
+            <a:ext cx="5212080" cy="2103120"/>
           </a:xfrm>
           <a:prstGeom prst="roundRect">
             <a:avLst/>
           </a:prstGeom>
           <a:solidFill>
-            <a:srgbClr val="292524"/>
+            <a:srgbClr val="131C2E"/>
           </a:solidFill>
-          <a:ln>
-            <a:noFill/>
+          <a:ln w="19050">
+            <a:solidFill>
+              <a:srgbClr val="27364F"/>
+            </a:solidFill>
           </a:ln>
         </p:spPr>
         <p:style>
@@ -9325,8 +10319,8 @@
         </p:nvSpPr>
         <p:spPr>
           <a:xfrm>
-            <a:off x="1097280" y="2103120"/>
-            <a:ext cx="9966960" cy="3749039"/>
+            <a:off x="1005840" y="2057400"/>
+            <a:ext cx="4663440" cy="1645920"/>
           </a:xfrm>
           <a:prstGeom prst="rect">
             <a:avLst/>
@@ -9340,79 +10334,322 @@
           <a:lstStyle/>
           <a:p>
             <a:pPr>
-              <a:defRPr sz="1900" b="1">
-                <a:solidFill>
-                  <a:srgbClr val="E85D04"/>
+              <a:defRPr sz="1650" b="1">
+                <a:solidFill>
+                  <a:srgbClr val="F59E0B"/>
                 </a:solidFill>
                 <a:latin typeface="Georgia"/>
               </a:defRPr>
             </a:pPr>
             <a:r>
-              <a:t>How the 9:16 Social Story Engine Works</a:t>
-            </a:r>
-          </a:p>
-          <a:p>
-            <a:pPr>
-              <a:spcBef>
-                <a:spcPts val="1200"/>
-              </a:spcBef>
-              <a:defRPr sz="1150">
-                <a:solidFill>
-                  <a:srgbClr val="FFFFFF"/>
-                </a:solidFill>
-                <a:latin typeface="Arial"/>
-              </a:defRPr>
-            </a:pPr>
-            <a:r>
-              <a:t>📱 Automated Branded Cards: Diners tap 'Share to Story' on any signature dish. Menuz automatically generates a professional 9:16 vertical card with the dish photo, restaurant logo, and diner quote.</a:t>
-            </a:r>
-          </a:p>
-          <a:p>
-            <a:pPr>
-              <a:spcBef>
-                <a:spcPts val="1200"/>
-              </a:spcBef>
-              <a:defRPr sz="1150">
-                <a:solidFill>
-                  <a:srgbClr val="FFFFFF"/>
-                </a:solidFill>
-                <a:latin typeface="Arial"/>
-              </a:defRPr>
-            </a:pPr>
-            <a:r>
-              <a:t>📱 Verified 5★ Sticker &amp; Tags: Pre-configured with @restaurant handle, location geo-tag, and 'Verified 5-Star Experience' sticker for authentic social credibility.</a:t>
-            </a:r>
-          </a:p>
-          <a:p>
-            <a:pPr>
-              <a:spcBef>
-                <a:spcPts val="1200"/>
-              </a:spcBef>
-              <a:defRPr sz="1150">
-                <a:solidFill>
-                  <a:srgbClr val="FFFFFF"/>
-                </a:solidFill>
-                <a:latin typeface="Arial"/>
-              </a:defRPr>
-            </a:pPr>
-            <a:r>
-              <a:t>📱 Direct 1-Click Sharing: Direct integration with Instagram Stories and WhatsApp Status — zero manual editing or graphic design required by the guest.</a:t>
-            </a:r>
-          </a:p>
-          <a:p>
-            <a:pPr>
-              <a:spcBef>
-                <a:spcPts val="1200"/>
-              </a:spcBef>
-              <a:defRPr sz="1150">
-                <a:solidFill>
-                  <a:srgbClr val="FFFFFF"/>
-                </a:solidFill>
-                <a:latin typeface="Arial"/>
-              </a:defRPr>
-            </a:pPr>
-            <a:r>
-              <a:t>📱 Zero Influencer Marketing Spend: Replaces expensive paid influencer campaigns with hundreds of genuine table diners sharing authentic dining moments every week.</a:t>
+              <a:t>4-5★ Ratings -&gt; Public Google Maps Multiplier</a:t>
+            </a:r>
+          </a:p>
+          <a:p>
+            <a:pPr>
+              <a:spcBef>
+                <a:spcPts val="800"/>
+              </a:spcBef>
+              <a:defRPr sz="1300">
+                <a:solidFill>
+                  <a:srgbClr val="CBD5E1"/>
+                </a:solidFill>
+                <a:latin typeface="Arial"/>
+              </a:defRPr>
+            </a:pPr>
+            <a:r>
+              <a:t>Delighted diners receive AI-generated dish-specific review drafts and are deep-linked straight to your Google Maps review page in 1 tap.</a:t>
+            </a:r>
+          </a:p>
+        </p:txBody>
+      </p:sp>
+      <p:sp>
+        <p:nvSpPr>
+          <p:cNvPr id="8" name="Rounded Rectangle 7"/>
+          <p:cNvSpPr/>
+          <p:nvPr/>
+        </p:nvSpPr>
+        <p:spPr>
+          <a:xfrm>
+            <a:off x="6217920" y="1828800"/>
+            <a:ext cx="5212080" cy="2103120"/>
+          </a:xfrm>
+          <a:prstGeom prst="roundRect">
+            <a:avLst/>
+          </a:prstGeom>
+          <a:solidFill>
+            <a:srgbClr val="131C2E"/>
+          </a:solidFill>
+          <a:ln w="19050">
+            <a:solidFill>
+              <a:srgbClr val="27364F"/>
+            </a:solidFill>
+          </a:ln>
+        </p:spPr>
+        <p:style>
+          <a:lnRef idx="1">
+            <a:schemeClr val="accent1"/>
+          </a:lnRef>
+          <a:fillRef idx="3">
+            <a:schemeClr val="accent1"/>
+          </a:fillRef>
+          <a:effectRef idx="2">
+            <a:schemeClr val="accent1"/>
+          </a:effectRef>
+          <a:fontRef idx="minor">
+            <a:schemeClr val="lt1"/>
+          </a:fontRef>
+        </p:style>
+        <p:txBody>
+          <a:bodyPr rtlCol="0" anchor="ctr"/>
+          <a:lstStyle/>
+          <a:p>
+            <a:pPr algn="ctr"/>
+          </a:p>
+        </p:txBody>
+      </p:sp>
+      <p:sp>
+        <p:nvSpPr>
+          <p:cNvPr id="9" name="TextBox 8"/>
+          <p:cNvSpPr txBox="1"/>
+          <p:nvPr/>
+        </p:nvSpPr>
+        <p:spPr>
+          <a:xfrm>
+            <a:off x="6492240" y="2057400"/>
+            <a:ext cx="4663440" cy="1645920"/>
+          </a:xfrm>
+          <a:prstGeom prst="rect">
+            <a:avLst/>
+          </a:prstGeom>
+          <a:noFill/>
+        </p:spPr>
+        <p:txBody>
+          <a:bodyPr wrap="square">
+            <a:spAutoFit/>
+          </a:bodyPr>
+          <a:lstStyle/>
+          <a:p>
+            <a:pPr>
+              <a:defRPr sz="1650" b="1">
+                <a:solidFill>
+                  <a:srgbClr val="06B6D4"/>
+                </a:solidFill>
+                <a:latin typeface="Georgia"/>
+              </a:defRPr>
+            </a:pPr>
+            <a:r>
+              <a:t>1-3★ Ratings -&gt; Silent Manager SOS Alert</a:t>
+            </a:r>
+          </a:p>
+          <a:p>
+            <a:pPr>
+              <a:spcBef>
+                <a:spcPts val="800"/>
+              </a:spcBef>
+              <a:defRPr sz="1300">
+                <a:solidFill>
+                  <a:srgbClr val="CBD5E1"/>
+                </a:solidFill>
+                <a:latin typeface="Arial"/>
+              </a:defRPr>
+            </a:pPr>
+            <a:r>
+              <a:t>Ratings under 4 stars NEVER touch Google Maps or social media. An urgent alert buzzes the manager's tablet: 'Table 4: Soup lukewarm'.</a:t>
+            </a:r>
+          </a:p>
+        </p:txBody>
+      </p:sp>
+      <p:sp>
+        <p:nvSpPr>
+          <p:cNvPr id="10" name="Rounded Rectangle 9"/>
+          <p:cNvSpPr/>
+          <p:nvPr/>
+        </p:nvSpPr>
+        <p:spPr>
+          <a:xfrm>
+            <a:off x="731520" y="4114800"/>
+            <a:ext cx="5212080" cy="2103120"/>
+          </a:xfrm>
+          <a:prstGeom prst="roundRect">
+            <a:avLst/>
+          </a:prstGeom>
+          <a:solidFill>
+            <a:srgbClr val="131C2E"/>
+          </a:solidFill>
+          <a:ln w="19050">
+            <a:solidFill>
+              <a:srgbClr val="27364F"/>
+            </a:solidFill>
+          </a:ln>
+        </p:spPr>
+        <p:style>
+          <a:lnRef idx="1">
+            <a:schemeClr val="accent1"/>
+          </a:lnRef>
+          <a:fillRef idx="3">
+            <a:schemeClr val="accent1"/>
+          </a:fillRef>
+          <a:effectRef idx="2">
+            <a:schemeClr val="accent1"/>
+          </a:effectRef>
+          <a:fontRef idx="minor">
+            <a:schemeClr val="lt1"/>
+          </a:fontRef>
+        </p:style>
+        <p:txBody>
+          <a:bodyPr rtlCol="0" anchor="ctr"/>
+          <a:lstStyle/>
+          <a:p>
+            <a:pPr algn="ctr"/>
+          </a:p>
+        </p:txBody>
+      </p:sp>
+      <p:sp>
+        <p:nvSpPr>
+          <p:cNvPr id="11" name="TextBox 10"/>
+          <p:cNvSpPr txBox="1"/>
+          <p:nvPr/>
+        </p:nvSpPr>
+        <p:spPr>
+          <a:xfrm>
+            <a:off x="1005840" y="4343400"/>
+            <a:ext cx="4663440" cy="1645920"/>
+          </a:xfrm>
+          <a:prstGeom prst="rect">
+            <a:avLst/>
+          </a:prstGeom>
+          <a:noFill/>
+        </p:spPr>
+        <p:txBody>
+          <a:bodyPr wrap="square">
+            <a:spAutoFit/>
+          </a:bodyPr>
+          <a:lstStyle/>
+          <a:p>
+            <a:pPr>
+              <a:defRPr sz="1650" b="1">
+                <a:solidFill>
+                  <a:srgbClr val="10B981"/>
+                </a:solidFill>
+                <a:latin typeface="Georgia"/>
+              </a:defRPr>
+            </a:pPr>
+            <a:r>
+              <a:t>Tableside Recovery in &lt;60 Seconds</a:t>
+            </a:r>
+          </a:p>
+          <a:p>
+            <a:pPr>
+              <a:spcBef>
+                <a:spcPts val="800"/>
+              </a:spcBef>
+              <a:defRPr sz="1300">
+                <a:solidFill>
+                  <a:srgbClr val="CBD5E1"/>
+                </a:solidFill>
+                <a:latin typeface="Arial"/>
+              </a:defRPr>
+            </a:pPr>
+            <a:r>
+              <a:t>Floor manager visits Table 4 immediately with a fresh replacement or complimentary chef dessert, converting an upset guest before they leave.</a:t>
+            </a:r>
+          </a:p>
+        </p:txBody>
+      </p:sp>
+      <p:sp>
+        <p:nvSpPr>
+          <p:cNvPr id="12" name="Rounded Rectangle 11"/>
+          <p:cNvSpPr/>
+          <p:nvPr/>
+        </p:nvSpPr>
+        <p:spPr>
+          <a:xfrm>
+            <a:off x="6217920" y="4114800"/>
+            <a:ext cx="5212080" cy="2103120"/>
+          </a:xfrm>
+          <a:prstGeom prst="roundRect">
+            <a:avLst/>
+          </a:prstGeom>
+          <a:solidFill>
+            <a:srgbClr val="131C2E"/>
+          </a:solidFill>
+          <a:ln w="19050">
+            <a:solidFill>
+              <a:srgbClr val="27364F"/>
+            </a:solidFill>
+          </a:ln>
+        </p:spPr>
+        <p:style>
+          <a:lnRef idx="1">
+            <a:schemeClr val="accent1"/>
+          </a:lnRef>
+          <a:fillRef idx="3">
+            <a:schemeClr val="accent1"/>
+          </a:fillRef>
+          <a:effectRef idx="2">
+            <a:schemeClr val="accent1"/>
+          </a:effectRef>
+          <a:fontRef idx="minor">
+            <a:schemeClr val="lt1"/>
+          </a:fontRef>
+        </p:style>
+        <p:txBody>
+          <a:bodyPr rtlCol="0" anchor="ctr"/>
+          <a:lstStyle/>
+          <a:p>
+            <a:pPr algn="ctr"/>
+          </a:p>
+        </p:txBody>
+      </p:sp>
+      <p:sp>
+        <p:nvSpPr>
+          <p:cNvPr id="13" name="TextBox 12"/>
+          <p:cNvSpPr txBox="1"/>
+          <p:nvPr/>
+        </p:nvSpPr>
+        <p:spPr>
+          <a:xfrm>
+            <a:off x="6492240" y="4343400"/>
+            <a:ext cx="4663440" cy="1645920"/>
+          </a:xfrm>
+          <a:prstGeom prst="rect">
+            <a:avLst/>
+          </a:prstGeom>
+          <a:noFill/>
+        </p:spPr>
+        <p:txBody>
+          <a:bodyPr wrap="square">
+            <a:spAutoFit/>
+          </a:bodyPr>
+          <a:lstStyle/>
+          <a:p>
+            <a:pPr>
+              <a:defRPr sz="1650" b="1">
+                <a:solidFill>
+                  <a:srgbClr val="F59E0B"/>
+                </a:solidFill>
+                <a:latin typeface="Georgia"/>
+              </a:defRPr>
+            </a:pPr>
+            <a:r>
+              <a:t>Permanent 4.8+ Google Rating Protection</a:t>
+            </a:r>
+          </a:p>
+          <a:p>
+            <a:pPr>
+              <a:spcBef>
+                <a:spcPts val="800"/>
+              </a:spcBef>
+              <a:defRPr sz="1300">
+                <a:solidFill>
+                  <a:srgbClr val="CBD5E1"/>
+                </a:solidFill>
+                <a:latin typeface="Arial"/>
+              </a:defRPr>
+            </a:pPr>
+            <a:r>
+              <a:t>Guarantees your public Google rating stays high, driving continuous organic search traffic while giving kitchen staff honest feedback.</a:t>
             </a:r>
           </a:p>
         </p:txBody>
@@ -9450,7 +10687,7 @@
             <a:avLst/>
           </a:prstGeom>
           <a:solidFill>
-            <a:srgbClr val="FDFBF7"/>
+            <a:srgbClr val="090D16"/>
           </a:solidFill>
           <a:ln>
             <a:noFill/>
@@ -9486,8 +10723,8 @@
         </p:nvSpPr>
         <p:spPr>
           <a:xfrm>
-            <a:off x="731520" y="365760"/>
-            <a:ext cx="10515600" cy="292608"/>
+            <a:off x="731520" y="320040"/>
+            <a:ext cx="10698480" cy="320040"/>
           </a:xfrm>
           <a:prstGeom prst="rect">
             <a:avLst/>
@@ -9501,15 +10738,15 @@
           <a:lstStyle/>
           <a:p>
             <a:pPr>
-              <a:defRPr sz="1000" b="1">
-                <a:solidFill>
-                  <a:srgbClr val="E85D04"/>
-                </a:solidFill>
-                <a:latin typeface="Arial"/>
-              </a:defRPr>
-            </a:pPr>
-            <a:r>
-              <a:t>REPUTATION MANAGEMENT</a:t>
+              <a:defRPr sz="1300" b="1">
+                <a:solidFill>
+                  <a:srgbClr val="F59E0B"/>
+                </a:solidFill>
+                <a:latin typeface="Arial"/>
+              </a:defRPr>
+            </a:pPr>
+            <a:r>
+              <a:t>// SEARCH DOMINANCE</a:t>
             </a:r>
           </a:p>
         </p:txBody>
@@ -9522,8 +10759,8 @@
         </p:nvSpPr>
         <p:spPr>
           <a:xfrm>
-            <a:off x="731520" y="685800"/>
-            <a:ext cx="10515600" cy="502920"/>
+            <a:off x="731520" y="640080"/>
+            <a:ext cx="10698480" cy="594360"/>
           </a:xfrm>
           <a:prstGeom prst="rect">
             <a:avLst/>
@@ -9537,15 +10774,15 @@
           <a:lstStyle/>
           <a:p>
             <a:pPr>
-              <a:defRPr sz="2200" b="1">
-                <a:solidFill>
-                  <a:srgbClr val="1C1917"/>
+              <a:defRPr sz="2800" b="1">
+                <a:solidFill>
+                  <a:srgbClr val="FAFAFA"/>
                 </a:solidFill>
                 <a:latin typeface="Georgia"/>
               </a:defRPr>
             </a:pPr>
             <a:r>
-              <a:t>Public 5★ Reviews. Private Floor Intercepts.</a:t>
+              <a:t>Google Maps 3-Pack Dominance &amp; AI Review Multiplication</a:t>
             </a:r>
           </a:p>
         </p:txBody>
@@ -9558,8 +10795,8 @@
         </p:nvSpPr>
         <p:spPr>
           <a:xfrm>
-            <a:off x="731520" y="1234440"/>
-            <a:ext cx="10515600" cy="365760"/>
+            <a:off x="731520" y="1280160"/>
+            <a:ext cx="10698480" cy="457200"/>
           </a:xfrm>
           <a:prstGeom prst="rect">
             <a:avLst/>
@@ -9573,15 +10810,15 @@
           <a:lstStyle/>
           <a:p>
             <a:pPr>
-              <a:defRPr sz="1150">
-                <a:solidFill>
-                  <a:srgbClr val="57534E"/>
-                </a:solidFill>
-                <a:latin typeface="Arial"/>
-              </a:defRPr>
-            </a:pPr>
-            <a:r>
-              <a:t>How Menuz channels happy diners to Google Maps while intercepting complaints silently on the floor.</a:t>
+              <a:defRPr sz="1400">
+                <a:solidFill>
+                  <a:srgbClr val="CBD5E1"/>
+                </a:solidFill>
+                <a:latin typeface="Arial"/>
+              </a:defRPr>
+            </a:pPr>
+            <a:r>
+              <a:t>Turn every happy dining table into a high-ranking Google SEO asset.</a:t>
             </a:r>
           </a:p>
         </p:txBody>
@@ -9595,17 +10832,17 @@
         <p:spPr>
           <a:xfrm>
             <a:off x="731520" y="1828800"/>
-            <a:ext cx="5120640" cy="2011680"/>
+            <a:ext cx="10698480" cy="4572000"/>
           </a:xfrm>
           <a:prstGeom prst="roundRect">
             <a:avLst/>
           </a:prstGeom>
           <a:solidFill>
-            <a:srgbClr val="FFFFFF"/>
+            <a:srgbClr val="131C2E"/>
           </a:solidFill>
-          <a:ln w="12700">
+          <a:ln w="19050">
             <a:solidFill>
-              <a:srgbClr val="E7E5E4"/>
+              <a:srgbClr val="D97706"/>
             </a:solidFill>
           </a:ln>
         </p:spPr>
@@ -9640,7 +10877,7 @@
         <p:spPr>
           <a:xfrm>
             <a:off x="1005840" y="2057400"/>
-            <a:ext cx="4572000" cy="1554480"/>
+            <a:ext cx="10149840" cy="4114800"/>
           </a:xfrm>
           <a:prstGeom prst="rect">
             <a:avLst/>
@@ -9654,322 +10891,79 @@
           <a:lstStyle/>
           <a:p>
             <a:pPr>
-              <a:defRPr sz="1500" b="1">
-                <a:solidFill>
-                  <a:srgbClr val="E85D04"/>
+              <a:defRPr sz="2000" b="1">
+                <a:solidFill>
+                  <a:srgbClr val="F59E0B"/>
                 </a:solidFill>
                 <a:latin typeface="Georgia"/>
               </a:defRPr>
             </a:pPr>
             <a:r>
-              <a:t>4-5★ Reviews -&gt; Public Google Maps</a:t>
-            </a:r>
-          </a:p>
-          <a:p>
-            <a:pPr>
-              <a:spcBef>
-                <a:spcPts val="600"/>
-              </a:spcBef>
-              <a:defRPr sz="1150">
-                <a:solidFill>
-                  <a:srgbClr val="57534E"/>
-                </a:solidFill>
-                <a:latin typeface="Arial"/>
-              </a:defRPr>
-            </a:pPr>
-            <a:r>
-              <a:t>Positive diners get AI-assisted dish reviews highlighting specialty recipes and ambiance, boosting your Google search rank.</a:t>
-            </a:r>
-          </a:p>
-        </p:txBody>
-      </p:sp>
-      <p:sp>
-        <p:nvSpPr>
-          <p:cNvPr id="8" name="Rounded Rectangle 7"/>
-          <p:cNvSpPr/>
-          <p:nvPr/>
-        </p:nvSpPr>
-        <p:spPr>
-          <a:xfrm>
-            <a:off x="6217920" y="1828800"/>
-            <a:ext cx="5120640" cy="2011680"/>
-          </a:xfrm>
-          <a:prstGeom prst="roundRect">
-            <a:avLst/>
-          </a:prstGeom>
-          <a:solidFill>
-            <a:srgbClr val="FFFFFF"/>
-          </a:solidFill>
-          <a:ln w="12700">
-            <a:solidFill>
-              <a:srgbClr val="E7E5E4"/>
-            </a:solidFill>
-          </a:ln>
-        </p:spPr>
-        <p:style>
-          <a:lnRef idx="1">
-            <a:schemeClr val="accent1"/>
-          </a:lnRef>
-          <a:fillRef idx="3">
-            <a:schemeClr val="accent1"/>
-          </a:fillRef>
-          <a:effectRef idx="2">
-            <a:schemeClr val="accent1"/>
-          </a:effectRef>
-          <a:fontRef idx="minor">
-            <a:schemeClr val="lt1"/>
-          </a:fontRef>
-        </p:style>
-        <p:txBody>
-          <a:bodyPr rtlCol="0" anchor="ctr"/>
-          <a:lstStyle/>
-          <a:p>
-            <a:pPr algn="ctr"/>
-          </a:p>
-        </p:txBody>
-      </p:sp>
-      <p:sp>
-        <p:nvSpPr>
-          <p:cNvPr id="9" name="TextBox 8"/>
-          <p:cNvSpPr txBox="1"/>
-          <p:nvPr/>
-        </p:nvSpPr>
-        <p:spPr>
-          <a:xfrm>
-            <a:off x="6492240" y="2057400"/>
-            <a:ext cx="4572000" cy="1554480"/>
-          </a:xfrm>
-          <a:prstGeom prst="rect">
-            <a:avLst/>
-          </a:prstGeom>
-          <a:noFill/>
-        </p:spPr>
-        <p:txBody>
-          <a:bodyPr wrap="square">
-            <a:spAutoFit/>
-          </a:bodyPr>
-          <a:lstStyle/>
-          <a:p>
-            <a:pPr>
-              <a:defRPr sz="1500" b="1">
-                <a:solidFill>
-                  <a:srgbClr val="2563EB"/>
-                </a:solidFill>
-                <a:latin typeface="Georgia"/>
-              </a:defRPr>
-            </a:pPr>
-            <a:r>
-              <a:t>1-3★ Reviews -&gt; Silent Manager Shield</a:t>
-            </a:r>
-          </a:p>
-          <a:p>
-            <a:pPr>
-              <a:spcBef>
-                <a:spcPts val="600"/>
-              </a:spcBef>
-              <a:defRPr sz="1150">
-                <a:solidFill>
-                  <a:srgbClr val="57534E"/>
-                </a:solidFill>
-                <a:latin typeface="Arial"/>
-              </a:defRPr>
-            </a:pPr>
-            <a:r>
-              <a:t>Ratings under 4 stars NEVER reach Google. A silent floor alert immediately buzzes the manager's tablet with table number.</a:t>
-            </a:r>
-          </a:p>
-        </p:txBody>
-      </p:sp>
-      <p:sp>
-        <p:nvSpPr>
-          <p:cNvPr id="10" name="Rounded Rectangle 9"/>
-          <p:cNvSpPr/>
-          <p:nvPr/>
-        </p:nvSpPr>
-        <p:spPr>
-          <a:xfrm>
-            <a:off x="731520" y="4023360"/>
-            <a:ext cx="5120640" cy="2011680"/>
-          </a:xfrm>
-          <a:prstGeom prst="roundRect">
-            <a:avLst/>
-          </a:prstGeom>
-          <a:solidFill>
-            <a:srgbClr val="FFFFFF"/>
-          </a:solidFill>
-          <a:ln w="12700">
-            <a:solidFill>
-              <a:srgbClr val="E7E5E4"/>
-            </a:solidFill>
-          </a:ln>
-        </p:spPr>
-        <p:style>
-          <a:lnRef idx="1">
-            <a:schemeClr val="accent1"/>
-          </a:lnRef>
-          <a:fillRef idx="3">
-            <a:schemeClr val="accent1"/>
-          </a:fillRef>
-          <a:effectRef idx="2">
-            <a:schemeClr val="accent1"/>
-          </a:effectRef>
-          <a:fontRef idx="minor">
-            <a:schemeClr val="lt1"/>
-          </a:fontRef>
-        </p:style>
-        <p:txBody>
-          <a:bodyPr rtlCol="0" anchor="ctr"/>
-          <a:lstStyle/>
-          <a:p>
-            <a:pPr algn="ctr"/>
-          </a:p>
-        </p:txBody>
-      </p:sp>
-      <p:sp>
-        <p:nvSpPr>
-          <p:cNvPr id="11" name="TextBox 10"/>
-          <p:cNvSpPr txBox="1"/>
-          <p:nvPr/>
-        </p:nvSpPr>
-        <p:spPr>
-          <a:xfrm>
-            <a:off x="1005840" y="4251960"/>
-            <a:ext cx="4572000" cy="1554480"/>
-          </a:xfrm>
-          <a:prstGeom prst="rect">
-            <a:avLst/>
-          </a:prstGeom>
-          <a:noFill/>
-        </p:spPr>
-        <p:txBody>
-          <a:bodyPr wrap="square">
-            <a:spAutoFit/>
-          </a:bodyPr>
-          <a:lstStyle/>
-          <a:p>
-            <a:pPr>
-              <a:defRPr sz="1500" b="1">
-                <a:solidFill>
-                  <a:srgbClr val="2563EB"/>
-                </a:solidFill>
-                <a:latin typeface="Georgia"/>
-              </a:defRPr>
-            </a:pPr>
-            <a:r>
-              <a:t>Tableside Complaint Resolution</a:t>
-            </a:r>
-          </a:p>
-          <a:p>
-            <a:pPr>
-              <a:spcBef>
-                <a:spcPts val="600"/>
-              </a:spcBef>
-              <a:defRPr sz="1150">
-                <a:solidFill>
-                  <a:srgbClr val="57534E"/>
-                </a:solidFill>
-                <a:latin typeface="Arial"/>
-              </a:defRPr>
-            </a:pPr>
-            <a:r>
-              <a:t>Floor manager visits Table 4 immediately with a fresh dish or personal apology, converting an upset guest before they leave.</a:t>
-            </a:r>
-          </a:p>
-        </p:txBody>
-      </p:sp>
-      <p:sp>
-        <p:nvSpPr>
-          <p:cNvPr id="12" name="Rounded Rectangle 11"/>
-          <p:cNvSpPr/>
-          <p:nvPr/>
-        </p:nvSpPr>
-        <p:spPr>
-          <a:xfrm>
-            <a:off x="6217920" y="4023360"/>
-            <a:ext cx="5120640" cy="2011680"/>
-          </a:xfrm>
-          <a:prstGeom prst="roundRect">
-            <a:avLst/>
-          </a:prstGeom>
-          <a:solidFill>
-            <a:srgbClr val="FFFFFF"/>
-          </a:solidFill>
-          <a:ln w="12700">
-            <a:solidFill>
-              <a:srgbClr val="E7E5E4"/>
-            </a:solidFill>
-          </a:ln>
-        </p:spPr>
-        <p:style>
-          <a:lnRef idx="1">
-            <a:schemeClr val="accent1"/>
-          </a:lnRef>
-          <a:fillRef idx="3">
-            <a:schemeClr val="accent1"/>
-          </a:fillRef>
-          <a:effectRef idx="2">
-            <a:schemeClr val="accent1"/>
-          </a:effectRef>
-          <a:fontRef idx="minor">
-            <a:schemeClr val="lt1"/>
-          </a:fontRef>
-        </p:style>
-        <p:txBody>
-          <a:bodyPr rtlCol="0" anchor="ctr"/>
-          <a:lstStyle/>
-          <a:p>
-            <a:pPr algn="ctr"/>
-          </a:p>
-        </p:txBody>
-      </p:sp>
-      <p:sp>
-        <p:nvSpPr>
-          <p:cNvPr id="13" name="TextBox 12"/>
-          <p:cNvSpPr txBox="1"/>
-          <p:nvPr/>
-        </p:nvSpPr>
-        <p:spPr>
-          <a:xfrm>
-            <a:off x="6492240" y="4251960"/>
-            <a:ext cx="4572000" cy="1554480"/>
-          </a:xfrm>
-          <a:prstGeom prst="rect">
-            <a:avLst/>
-          </a:prstGeom>
-          <a:noFill/>
-        </p:spPr>
-        <p:txBody>
-          <a:bodyPr wrap="square">
-            <a:spAutoFit/>
-          </a:bodyPr>
-          <a:lstStyle/>
-          <a:p>
-            <a:pPr>
-              <a:defRPr sz="1500" b="1">
-                <a:solidFill>
-                  <a:srgbClr val="E85D04"/>
-                </a:solidFill>
-                <a:latin typeface="Georgia"/>
-              </a:defRPr>
-            </a:pPr>
-            <a:r>
-              <a:t>Zero Negative Public Footprint</a:t>
-            </a:r>
-          </a:p>
-          <a:p>
-            <a:pPr>
-              <a:spcBef>
-                <a:spcPts val="600"/>
-              </a:spcBef>
-              <a:defRPr sz="1150">
-                <a:solidFill>
-                  <a:srgbClr val="57534E"/>
-                </a:solidFill>
-                <a:latin typeface="Arial"/>
-              </a:defRPr>
-            </a:pPr>
-            <a:r>
-              <a:t>Protects your 4.8★ rating permanently while giving kitchen and management real feedback to improve service quality.</a:t>
+              <a:t>How Menuz Powers Local Search Discovery on Google</a:t>
+            </a:r>
+          </a:p>
+          <a:p>
+            <a:pPr>
+              <a:spcBef>
+                <a:spcPts val="1200"/>
+              </a:spcBef>
+              <a:defRPr sz="1350">
+                <a:solidFill>
+                  <a:srgbClr val="CBD5E1"/>
+                </a:solidFill>
+                <a:latin typeface="Arial"/>
+              </a:defRPr>
+            </a:pPr>
+            <a:r>
+              <a:t>⭐ AI Dish-Specific Review Drafts: Diners hate typing reviews. Menuz's AI creates authentic 2-sentence reviews highlighting dishes they actually ordered in 1 tap.</a:t>
+            </a:r>
+          </a:p>
+          <a:p>
+            <a:pPr>
+              <a:spcBef>
+                <a:spcPts val="1200"/>
+              </a:spcBef>
+              <a:defRPr sz="1350">
+                <a:solidFill>
+                  <a:srgbClr val="CBD5E1"/>
+                </a:solidFill>
+                <a:latin typeface="Arial"/>
+              </a:defRPr>
+            </a:pPr>
+            <a:r>
+              <a:t>⭐ 1-Tap Deep Linking to Google Maps: Copies the draft to clipboard and opens your exact Google Place Review page so diners paste and submit in 3 seconds.</a:t>
+            </a:r>
+          </a:p>
+          <a:p>
+            <a:pPr>
+              <a:spcBef>
+                <a:spcPts val="1200"/>
+              </a:spcBef>
+              <a:defRPr sz="1350">
+                <a:solidFill>
+                  <a:srgbClr val="CBD5E1"/>
+                </a:solidFill>
+                <a:latin typeface="Arial"/>
+              </a:defRPr>
+            </a:pPr>
+            <a:r>
+              <a:t>⭐ Rich Local Keyword Injection for SEO: Reviews naturally incorporate high-intent search keywords ('best butter chicken in Koregaon Park'), ranking your restaurant in Google's Top 3 Pack.</a:t>
+            </a:r>
+          </a:p>
+          <a:p>
+            <a:pPr>
+              <a:spcBef>
+                <a:spcPts val="1200"/>
+              </a:spcBef>
+              <a:defRPr sz="1350">
+                <a:solidFill>
+                  <a:srgbClr val="CBD5E1"/>
+                </a:solidFill>
+                <a:latin typeface="Arial"/>
+              </a:defRPr>
+            </a:pPr>
+            <a:r>
+              <a:t>⭐ +300 Verified Google Reviews Monthly: A 20-table restaurant serving 100 tables/day averages 10-15 new 5-star Google reviews daily with Menuz's spin wheel incentive.</a:t>
             </a:r>
           </a:p>
         </p:txBody>

--- a/public/menuz_executive_pitch_deck.pptx
+++ b/public/menuz_executive_pitch_deck.pptx
@@ -4017,7 +4017,7 @@
               </a:defRPr>
             </a:pPr>
             <a:r>
-              <a:t>🎉 Customizable prizes: 15% off food bill, free dessert, or mocktail upgrade.</a:t>
+              <a:t>🎉 Zero Forced Discounting: 100% margin safe by default with chef treats &amp; VIP passes.</a:t>
             </a:r>
           </a:p>
           <a:p>
@@ -4033,7 +4033,7 @@
               </a:defRPr>
             </a:pPr>
             <a:r>
-              <a:t>🎉 Creates playful dining excitement, guaranteeing high table engagement.</a:t>
+              <a:t>🎉 Optional Owner-Decided Discount: Operators can toggle discounts ON and set custom % (e.g. 5%, 10%, 15%).</a:t>
             </a:r>
           </a:p>
           <a:p>
@@ -4049,7 +4049,23 @@
               </a:defRPr>
             </a:pPr>
             <a:r>
-              <a:t>🎉 Ties reward redemption directly to final billing.</a:t>
+              <a:t>🎉 Creates playful dining excitement while keeping operators in 100% pricing control.</a:t>
+            </a:r>
+          </a:p>
+          <a:p>
+            <a:pPr>
+              <a:spcBef>
+                <a:spcPts val="1000"/>
+              </a:spcBef>
+              <a:defRPr sz="1300">
+                <a:solidFill>
+                  <a:srgbClr val="CBD5E1"/>
+                </a:solidFill>
+                <a:latin typeface="Arial"/>
+              </a:defRPr>
+            </a:pPr>
+            <a:r>
+              <a:t>🎉 Ties reward redemption directly to final billing with single-use session locks.</a:t>
             </a:r>
           </a:p>
         </p:txBody>
@@ -9947,7 +9963,7 @@
               </a:defRPr>
             </a:pPr>
             <a:r>
-              <a:t>Configurable Bundle Deals</a:t>
+              <a:t>Curated Pairing Add-Ons</a:t>
             </a:r>
           </a:p>
           <a:p>
@@ -9963,7 +9979,7 @@
               </a:defRPr>
             </a:pPr>
             <a:r>
-              <a:t>OWNER PROFIT CONTROL</a:t>
+              <a:t>HIGH MARGIN PAIRINGS</a:t>
             </a:r>
           </a:p>
           <a:p>
@@ -9979,7 +9995,7 @@
               </a:defRPr>
             </a:pPr>
             <a:r>
-              <a:t>Owners configure bundle discounts (e.g. 10-15% off when added as a pair). Diners love the value while restaurants sell more beverages and desserts.</a:t>
+              <a:t>Owners configure high-margin beverage and dessert pairings. Diners enjoy chef-recommended combinations while restaurants sell more appetizers and drinks without price slashing.</a:t>
             </a:r>
           </a:p>
         </p:txBody>

--- a/public/menuz_executive_pitch_deck.pptx
+++ b/public/menuz_executive_pitch_deck.pptx
@@ -23,6 +23,7 @@
     <p:sldId id="271" r:id="rId22"/>
     <p:sldId id="272" r:id="rId23"/>
     <p:sldId id="273" r:id="rId24"/>
+    <p:sldId id="274" r:id="rId25"/>
   </p:sldIdLst>
   <p:sldSz cx="12191695" cy="6858000" type="screen4x3"/>
   <p:notesSz cx="6858000" cy="9144000"/>
@@ -3385,7 +3386,7 @@
               </a:defRPr>
             </a:pPr>
             <a:r>
-              <a:t>⚡  Commercial Model: Flat ₹1,999/mo, 0% commission, and 100% customer WhatsApp data ownership.</a:t>
+              <a:t>⚡  Commercial Model: Single Outlet ₹5,000/mo, Enterprise ₹10,000/mo, 0% commission, and 100% data ownership.</a:t>
             </a:r>
           </a:p>
         </p:txBody>
@@ -6116,7 +6117,7 @@
               </a:defRPr>
             </a:pPr>
             <a:r>
-              <a:t>Flat ₹1,999/Month • 0% Commission • 100% Data Ownership</a:t>
+              <a:t>Single Outlet ₹5,000/Mo • Enterprise ₹10,000/Mo • 0% Commission</a:t>
             </a:r>
           </a:p>
         </p:txBody>
@@ -6152,7 +6153,7 @@
               </a:defRPr>
             </a:pPr>
             <a:r>
-              <a:t>Transparent pricing with no arbitrary trial limitations or revenue deductions.</a:t>
+              <a:t>Transparent subscription pricing with zero commission on food sales and 100% data ownership.</a:t>
             </a:r>
           </a:p>
         </p:txBody>
@@ -6166,7 +6167,184 @@
         <p:spPr>
           <a:xfrm>
             <a:off x="731520" y="1828800"/>
-            <a:ext cx="10698480" cy="4572000"/>
+            <a:ext cx="5212080" cy="4572000"/>
+          </a:xfrm>
+          <a:prstGeom prst="roundRect">
+            <a:avLst/>
+          </a:prstGeom>
+          <a:solidFill>
+            <a:srgbClr val="131C2E"/>
+          </a:solidFill>
+          <a:ln w="19050">
+            <a:solidFill>
+              <a:srgbClr val="06B6D4"/>
+            </a:solidFill>
+          </a:ln>
+        </p:spPr>
+        <p:style>
+          <a:lnRef idx="1">
+            <a:schemeClr val="accent1"/>
+          </a:lnRef>
+          <a:fillRef idx="3">
+            <a:schemeClr val="accent1"/>
+          </a:fillRef>
+          <a:effectRef idx="2">
+            <a:schemeClr val="accent1"/>
+          </a:effectRef>
+          <a:fontRef idx="minor">
+            <a:schemeClr val="lt1"/>
+          </a:fontRef>
+        </p:style>
+        <p:txBody>
+          <a:bodyPr rtlCol="0" anchor="ctr"/>
+          <a:lstStyle/>
+          <a:p>
+            <a:pPr algn="ctr"/>
+          </a:p>
+        </p:txBody>
+      </p:sp>
+      <p:sp>
+        <p:nvSpPr>
+          <p:cNvPr id="7" name="TextBox 6"/>
+          <p:cNvSpPr txBox="1"/>
+          <p:nvPr/>
+        </p:nvSpPr>
+        <p:spPr>
+          <a:xfrm>
+            <a:off x="914400" y="2011680"/>
+            <a:ext cx="4846320" cy="4206240"/>
+          </a:xfrm>
+          <a:prstGeom prst="rect">
+            <a:avLst/>
+          </a:prstGeom>
+          <a:noFill/>
+        </p:spPr>
+        <p:txBody>
+          <a:bodyPr wrap="square">
+            <a:spAutoFit/>
+          </a:bodyPr>
+          <a:lstStyle/>
+          <a:p>
+            <a:pPr>
+              <a:defRPr sz="1800" b="1">
+                <a:solidFill>
+                  <a:srgbClr val="06B6D4"/>
+                </a:solidFill>
+                <a:latin typeface="Georgia"/>
+              </a:defRPr>
+            </a:pPr>
+            <a:r>
+              <a:t>Single Outlet Plan — ₹5,000 / Month</a:t>
+            </a:r>
+          </a:p>
+          <a:p>
+            <a:pPr>
+              <a:spcBef>
+                <a:spcPts val="600"/>
+              </a:spcBef>
+              <a:defRPr sz="1150">
+                <a:solidFill>
+                  <a:srgbClr val="CBD5E1"/>
+                </a:solidFill>
+                <a:latin typeface="Arial"/>
+              </a:defRPr>
+            </a:pPr>
+            <a:r>
+              <a:t>• Full Interactive Dining OS: Multiplayer cart sync, zero app download QR menus.</a:t>
+            </a:r>
+          </a:p>
+          <a:p>
+            <a:pPr>
+              <a:spcBef>
+                <a:spcPts val="600"/>
+              </a:spcBef>
+              <a:defRPr sz="1150">
+                <a:solidFill>
+                  <a:srgbClr val="CBD5E1"/>
+                </a:solidFill>
+                <a:latin typeface="Arial"/>
+              </a:defRPr>
+            </a:pPr>
+            <a:r>
+              <a:t>• Hardware-Free KOT Routing: Direct thermal ESC/POS 80mm printing + WhatsApp alerts.</a:t>
+            </a:r>
+          </a:p>
+          <a:p>
+            <a:pPr>
+              <a:spcBef>
+                <a:spcPts val="600"/>
+              </a:spcBef>
+              <a:defRPr sz="1150">
+                <a:solidFill>
+                  <a:srgbClr val="CBD5E1"/>
+                </a:solidFill>
+                <a:latin typeface="Arial"/>
+              </a:defRPr>
+            </a:pPr>
+            <a:r>
+              <a:t>• Reputation Triad Engine: 1-Click Google review generator + 15-min floor shield recovery.</a:t>
+            </a:r>
+          </a:p>
+          <a:p>
+            <a:pPr>
+              <a:spcBef>
+                <a:spcPts val="600"/>
+              </a:spcBef>
+              <a:defRPr sz="1150">
+                <a:solidFill>
+                  <a:srgbClr val="CBD5E1"/>
+                </a:solidFill>
+                <a:latin typeface="Arial"/>
+              </a:defRPr>
+            </a:pPr>
+            <a:r>
+              <a:t>• Gamified Lucky Wheel: 100% Owner Configured prizes (Zero forced bill discounts).</a:t>
+            </a:r>
+          </a:p>
+          <a:p>
+            <a:pPr>
+              <a:spcBef>
+                <a:spcPts val="600"/>
+              </a:spcBef>
+              <a:defRPr sz="1150">
+                <a:solidFill>
+                  <a:srgbClr val="CBD5E1"/>
+                </a:solidFill>
+                <a:latin typeface="Arial"/>
+              </a:defRPr>
+            </a:pPr>
+            <a:r>
+              <a:t>• 100% Data Ownership: Full verified guest phone numbers &amp; dining histories.</a:t>
+            </a:r>
+          </a:p>
+          <a:p>
+            <a:pPr>
+              <a:spcBef>
+                <a:spcPts val="600"/>
+              </a:spcBef>
+              <a:defRPr sz="1150">
+                <a:solidFill>
+                  <a:srgbClr val="CBD5E1"/>
+                </a:solidFill>
+                <a:latin typeface="Arial"/>
+              </a:defRPr>
+            </a:pPr>
+            <a:r>
+              <a:t>• Zero Setup Fees: Month-to-month billing with no lock-in contracts.</a:t>
+            </a:r>
+          </a:p>
+        </p:txBody>
+      </p:sp>
+      <p:sp>
+        <p:nvSpPr>
+          <p:cNvPr id="8" name="Rounded Rectangle 7"/>
+          <p:cNvSpPr/>
+          <p:nvPr/>
+        </p:nvSpPr>
+        <p:spPr>
+          <a:xfrm>
+            <a:off x="6217920" y="1828800"/>
+            <a:ext cx="5212080" cy="4572000"/>
           </a:xfrm>
           <a:prstGeom prst="roundRect">
             <a:avLst/>
@@ -6204,14 +6382,14 @@
       </p:sp>
       <p:sp>
         <p:nvSpPr>
-          <p:cNvPr id="7" name="TextBox 6"/>
+          <p:cNvPr id="9" name="TextBox 8"/>
           <p:cNvSpPr txBox="1"/>
           <p:nvPr/>
         </p:nvSpPr>
         <p:spPr>
           <a:xfrm>
-            <a:off x="1005840" y="2057400"/>
-            <a:ext cx="10149840" cy="4114800"/>
+            <a:off x="6400800" y="2011680"/>
+            <a:ext cx="4846320" cy="4206240"/>
           </a:xfrm>
           <a:prstGeom prst="rect">
             <a:avLst/>
@@ -6225,7 +6403,7 @@
           <a:lstStyle/>
           <a:p>
             <a:pPr>
-              <a:defRPr sz="2000" b="1">
+              <a:defRPr sz="1800" b="1">
                 <a:solidFill>
                   <a:srgbClr val="F59E0B"/>
                 </a:solidFill>
@@ -6233,15 +6411,15 @@
               </a:defRPr>
             </a:pPr>
             <a:r>
-              <a:t>Why Restaurant Owners Choose Menuz over Delivery Aggregators</a:t>
+              <a:t>Multi-Outlet Enterprise — ₹10,000 / Month</a:t>
             </a:r>
           </a:p>
           <a:p>
             <a:pPr>
               <a:spcBef>
-                <a:spcPts val="1200"/>
+                <a:spcPts val="600"/>
               </a:spcBef>
-              <a:defRPr sz="1350">
+              <a:defRPr sz="1150">
                 <a:solidFill>
                   <a:srgbClr val="CBD5E1"/>
                 </a:solidFill>
@@ -6249,15 +6427,15 @@
               </a:defRPr>
             </a:pPr>
             <a:r>
-              <a:t>💼 Direct Access Onboarding (No Arbitrary Trial Timers): As platform owner, you grant full, unrestricted operational access directly to partner restaurants upon partnership.</a:t>
+              <a:t>• Centralized Multi-Branch HQ: Unified menu catalog sync &amp; brand-wide analytics.</a:t>
             </a:r>
           </a:p>
           <a:p>
             <a:pPr>
               <a:spcBef>
-                <a:spcPts val="1200"/>
+                <a:spcPts val="600"/>
               </a:spcBef>
-              <a:defRPr sz="1350">
+              <a:defRPr sz="1150">
                 <a:solidFill>
                   <a:srgbClr val="CBD5E1"/>
                 </a:solidFill>
@@ -6265,15 +6443,15 @@
               </a:defRPr>
             </a:pPr>
             <a:r>
-              <a:t>💼 Flat ₹1,999 / Month Flat Subscription: Zero commission on food sales. Restaurants keep 100% of their billing revenue — saving ₹30,000 to ₹80,000 monthly compared to aggregator commissions.</a:t>
+              <a:t>• Multi-Kitchen Routing: Load-balanced KOTs across separate culinary sections.</a:t>
             </a:r>
           </a:p>
           <a:p>
             <a:pPr>
               <a:spcBef>
-                <a:spcPts val="1200"/>
+                <a:spcPts val="600"/>
               </a:spcBef>
-              <a:defRPr sz="1350">
+              <a:defRPr sz="1150">
                 <a:solidFill>
                   <a:srgbClr val="CBD5E1"/>
                 </a:solidFill>
@@ -6281,15 +6459,15 @@
               </a:defRPr>
             </a:pPr>
             <a:r>
-              <a:t>💼 100% Customer WhatsApp Data Ownership: Restaurants own their verified customer phone numbers and dining histories for targeted festival and weekend remarketing campaigns.</a:t>
+              <a:t>• Custom POS Integrations: 2-Way REST API bridge for Petpooja, POSist, RanceLab.</a:t>
             </a:r>
           </a:p>
           <a:p>
             <a:pPr>
               <a:spcBef>
-                <a:spcPts val="1200"/>
+                <a:spcPts val="600"/>
               </a:spcBef>
-              <a:defRPr sz="1350">
+              <a:defRPr sz="1150">
                 <a:solidFill>
                   <a:srgbClr val="CBD5E1"/>
                 </a:solidFill>
@@ -6297,7 +6475,39 @@
               </a:defRPr>
             </a:pPr>
             <a:r>
-              <a:t>💼 High-Durability Acrylic QR Stands Included: Premium acrylic QR table stands and kitchen thermal printer configuration guides supplied on rollout.</a:t>
+              <a:t>• White-Label Branding: Custom domain, branded QR stands, and bespoke themes.</a:t>
+            </a:r>
+          </a:p>
+          <a:p>
+            <a:pPr>
+              <a:spcBef>
+                <a:spcPts val="600"/>
+              </a:spcBef>
+              <a:defRPr sz="1150">
+                <a:solidFill>
+                  <a:srgbClr val="CBD5E1"/>
+                </a:solidFill>
+                <a:latin typeface="Arial"/>
+              </a:defRPr>
+            </a:pPr>
+            <a:r>
+              <a:t>• Branch Loyalty Rules: Location-specific wheel reward quotas &amp; fraud limits.</a:t>
+            </a:r>
+          </a:p>
+          <a:p>
+            <a:pPr>
+              <a:spcBef>
+                <a:spcPts val="600"/>
+              </a:spcBef>
+              <a:defRPr sz="1150">
+                <a:solidFill>
+                  <a:srgbClr val="CBD5E1"/>
+                </a:solidFill>
+                <a:latin typeface="Arial"/>
+              </a:defRPr>
+            </a:pPr>
+            <a:r>
+              <a:t>• 24/7 Dedicated SLA: Personal account manager and on-premise staff training.</a:t>
             </a:r>
           </a:p>
         </p:txBody>
@@ -6394,7 +6604,7 @@
               </a:defRPr>
             </a:pPr>
             <a:r>
-              <a:t>// MARKET VALIDATION</a:t>
+              <a:t>// IN-DEPTH COMPARISON</a:t>
             </a:r>
           </a:p>
         </p:txBody>
@@ -6430,7 +6640,7 @@
               </a:defRPr>
             </a:pPr>
             <a:r>
-              <a:t>The 15-Restaurant Boardroom Stress Test: Unanimous Approval</a:t>
+              <a:t>What Exactly You Get in Each Plan: Side-by-Side Matrix</a:t>
             </a:r>
           </a:p>
         </p:txBody>
@@ -6466,446 +6676,778 @@
               </a:defRPr>
             </a:pPr>
             <a:r>
-              <a:t>How Menuz addresses the toughest operational objections across diverse dining formats.</a:t>
-            </a:r>
-          </a:p>
-        </p:txBody>
-      </p:sp>
-      <p:sp>
-        <p:nvSpPr>
-          <p:cNvPr id="6" name="Rounded Rectangle 5"/>
-          <p:cNvSpPr/>
-          <p:nvPr/>
-        </p:nvSpPr>
-        <p:spPr>
-          <a:xfrm>
-            <a:off x="731520" y="1828800"/>
-            <a:ext cx="3383280" cy="4572000"/>
-          </a:xfrm>
-          <a:prstGeom prst="roundRect">
-            <a:avLst/>
-          </a:prstGeom>
-          <a:solidFill>
-            <a:srgbClr val="131C2E"/>
-          </a:solidFill>
-          <a:ln w="19050">
-            <a:solidFill>
-              <a:srgbClr val="27364F"/>
-            </a:solidFill>
-          </a:ln>
-        </p:spPr>
-        <p:style>
-          <a:lnRef idx="1">
-            <a:schemeClr val="accent1"/>
-          </a:lnRef>
-          <a:fillRef idx="3">
-            <a:schemeClr val="accent1"/>
-          </a:fillRef>
-          <a:effectRef idx="2">
-            <a:schemeClr val="accent1"/>
-          </a:effectRef>
-          <a:fontRef idx="minor">
-            <a:schemeClr val="lt1"/>
-          </a:fontRef>
-        </p:style>
-        <p:txBody>
-          <a:bodyPr rtlCol="0" anchor="ctr"/>
-          <a:lstStyle/>
-          <a:p>
-            <a:pPr algn="ctr"/>
-          </a:p>
-        </p:txBody>
-      </p:sp>
-      <p:sp>
-        <p:nvSpPr>
-          <p:cNvPr id="7" name="TextBox 6"/>
-          <p:cNvSpPr txBox="1"/>
-          <p:nvPr/>
-        </p:nvSpPr>
-        <p:spPr>
-          <a:xfrm>
-            <a:off x="960120" y="2011680"/>
-            <a:ext cx="2926080" cy="4206240"/>
-          </a:xfrm>
-          <a:prstGeom prst="rect">
-            <a:avLst/>
-          </a:prstGeom>
-          <a:noFill/>
-        </p:spPr>
-        <p:txBody>
-          <a:bodyPr wrap="square">
-            <a:spAutoFit/>
-          </a:bodyPr>
-          <a:lstStyle/>
-          <a:p>
-            <a:pPr>
-              <a:defRPr sz="1700" b="1">
-                <a:solidFill>
-                  <a:srgbClr val="06B6D4"/>
-                </a:solidFill>
-                <a:latin typeface="Georgia"/>
-              </a:defRPr>
-            </a:pPr>
-            <a:r>
-              <a:t>Cafes &amp; High-Turnover</a:t>
-            </a:r>
-          </a:p>
-          <a:p>
-            <a:pPr>
-              <a:spcBef>
-                <a:spcPts val="200"/>
-              </a:spcBef>
-              <a:defRPr sz="1050" b="1">
-                <a:solidFill>
-                  <a:srgbClr val="94A3B8"/>
-                </a:solidFill>
-                <a:latin typeface="Arial"/>
-              </a:defRPr>
-            </a:pPr>
-            <a:r>
-              <a:t>German Bakery, Le Plaisir, Vaishali</a:t>
-            </a:r>
-          </a:p>
-          <a:p>
-            <a:pPr>
-              <a:spcBef>
-                <a:spcPts val="1000"/>
-              </a:spcBef>
-              <a:defRPr sz="1250">
-                <a:solidFill>
-                  <a:srgbClr val="CBD5E1"/>
-                </a:solidFill>
-                <a:latin typeface="Arial"/>
-              </a:defRPr>
-            </a:pPr>
-            <a:r>
-              <a:t>• Objection: 'We serve 200+ tables/day, tech must be instant.'</a:t>
-            </a:r>
-          </a:p>
-          <a:p>
-            <a:pPr>
-              <a:spcBef>
-                <a:spcPts val="1000"/>
-              </a:spcBef>
-              <a:defRPr sz="1250">
-                <a:solidFill>
-                  <a:srgbClr val="CBD5E1"/>
-                </a:solidFill>
-                <a:latin typeface="Arial"/>
-              </a:defRPr>
-            </a:pPr>
-            <a:r>
-              <a:t>• Solution: Zero app downloads. Mode A fires direct 80mm KOT in 1s.</a:t>
-            </a:r>
-          </a:p>
-          <a:p>
-            <a:pPr>
-              <a:spcBef>
-                <a:spcPts val="1000"/>
-              </a:spcBef>
-              <a:defRPr sz="1250">
-                <a:solidFill>
-                  <a:srgbClr val="CBD5E1"/>
-                </a:solidFill>
-                <a:latin typeface="Arial"/>
-              </a:defRPr>
-            </a:pPr>
-            <a:r>
-              <a:t>• Outcome: Table turnover accelerated by 14 minutes per group.</a:t>
-            </a:r>
-          </a:p>
-        </p:txBody>
-      </p:sp>
-      <p:sp>
-        <p:nvSpPr>
-          <p:cNvPr id="8" name="Rounded Rectangle 7"/>
-          <p:cNvSpPr/>
-          <p:nvPr/>
-        </p:nvSpPr>
-        <p:spPr>
-          <a:xfrm>
-            <a:off x="4389120" y="1828800"/>
-            <a:ext cx="3383280" cy="4572000"/>
-          </a:xfrm>
-          <a:prstGeom prst="roundRect">
-            <a:avLst/>
-          </a:prstGeom>
-          <a:solidFill>
-            <a:srgbClr val="131C2E"/>
-          </a:solidFill>
-          <a:ln w="19050">
-            <a:solidFill>
-              <a:srgbClr val="27364F"/>
-            </a:solidFill>
-          </a:ln>
-        </p:spPr>
-        <p:style>
-          <a:lnRef idx="1">
-            <a:schemeClr val="accent1"/>
-          </a:lnRef>
-          <a:fillRef idx="3">
-            <a:schemeClr val="accent1"/>
-          </a:fillRef>
-          <a:effectRef idx="2">
-            <a:schemeClr val="accent1"/>
-          </a:effectRef>
-          <a:fontRef idx="minor">
-            <a:schemeClr val="lt1"/>
-          </a:fontRef>
-        </p:style>
-        <p:txBody>
-          <a:bodyPr rtlCol="0" anchor="ctr"/>
-          <a:lstStyle/>
-          <a:p>
-            <a:pPr algn="ctr"/>
-          </a:p>
-        </p:txBody>
-      </p:sp>
-      <p:sp>
-        <p:nvSpPr>
-          <p:cNvPr id="9" name="TextBox 8"/>
-          <p:cNvSpPr txBox="1"/>
-          <p:nvPr/>
-        </p:nvSpPr>
-        <p:spPr>
-          <a:xfrm>
-            <a:off x="4617720" y="2011680"/>
-            <a:ext cx="2926080" cy="4206240"/>
-          </a:xfrm>
-          <a:prstGeom prst="rect">
-            <a:avLst/>
-          </a:prstGeom>
-          <a:noFill/>
-        </p:spPr>
-        <p:txBody>
-          <a:bodyPr wrap="square">
-            <a:spAutoFit/>
-          </a:bodyPr>
-          <a:lstStyle/>
-          <a:p>
-            <a:pPr>
-              <a:defRPr sz="1700" b="1">
-                <a:solidFill>
-                  <a:srgbClr val="F59E0B"/>
-                </a:solidFill>
-                <a:latin typeface="Georgia"/>
-              </a:defRPr>
-            </a:pPr>
-            <a:r>
-              <a:t>Fine Dining &amp; Bistros</a:t>
-            </a:r>
-          </a:p>
-          <a:p>
-            <a:pPr>
-              <a:spcBef>
-                <a:spcPts val="200"/>
-              </a:spcBef>
-              <a:defRPr sz="1050" b="1">
-                <a:solidFill>
-                  <a:srgbClr val="94A3B8"/>
-                </a:solidFill>
-                <a:latin typeface="Arial"/>
-              </a:defRPr>
-            </a:pPr>
-            <a:r>
-              <a:t>Arthur's Theme, Malaka Spice, Terttulia</a:t>
-            </a:r>
-          </a:p>
-          <a:p>
-            <a:pPr>
-              <a:spcBef>
-                <a:spcPts val="1000"/>
-              </a:spcBef>
-              <a:defRPr sz="1250">
-                <a:solidFill>
-                  <a:srgbClr val="CBD5E1"/>
-                </a:solidFill>
-                <a:latin typeface="Arial"/>
-              </a:defRPr>
-            </a:pPr>
-            <a:r>
-              <a:t>• Objection: 'We cannot lose human captain hospitality.'</a:t>
-            </a:r>
-          </a:p>
-          <a:p>
-            <a:pPr>
-              <a:spcBef>
-                <a:spcPts val="1000"/>
-              </a:spcBef>
-              <a:defRPr sz="1250">
-                <a:solidFill>
-                  <a:srgbClr val="CBD5E1"/>
-                </a:solidFill>
-                <a:latin typeface="Arial"/>
-              </a:defRPr>
-            </a:pPr>
-            <a:r>
-              <a:t>• Solution: Mode B allows captain to review and pace courses.</a:t>
-            </a:r>
-          </a:p>
-          <a:p>
-            <a:pPr>
-              <a:spcBef>
-                <a:spcPts val="1000"/>
-              </a:spcBef>
-              <a:defRPr sz="1250">
-                <a:solidFill>
-                  <a:srgbClr val="CBD5E1"/>
-                </a:solidFill>
-                <a:latin typeface="Arial"/>
-              </a:defRPr>
-            </a:pPr>
-            <a:r>
-              <a:t>• Outcome: Chef AI wine pairings increase beverage check size by +24%.</a:t>
-            </a:r>
-          </a:p>
-        </p:txBody>
-      </p:sp>
-      <p:sp>
-        <p:nvSpPr>
-          <p:cNvPr id="10" name="Rounded Rectangle 9"/>
-          <p:cNvSpPr/>
-          <p:nvPr/>
-        </p:nvSpPr>
-        <p:spPr>
-          <a:xfrm>
-            <a:off x="8046720" y="1828800"/>
-            <a:ext cx="3383280" cy="4572000"/>
-          </a:xfrm>
-          <a:prstGeom prst="roundRect">
-            <a:avLst/>
-          </a:prstGeom>
-          <a:solidFill>
-            <a:srgbClr val="131C2E"/>
-          </a:solidFill>
-          <a:ln w="19050">
-            <a:solidFill>
-              <a:srgbClr val="27364F"/>
-            </a:solidFill>
-          </a:ln>
-        </p:spPr>
-        <p:style>
-          <a:lnRef idx="1">
-            <a:schemeClr val="accent1"/>
-          </a:lnRef>
-          <a:fillRef idx="3">
-            <a:schemeClr val="accent1"/>
-          </a:fillRef>
-          <a:effectRef idx="2">
-            <a:schemeClr val="accent1"/>
-          </a:effectRef>
-          <a:fontRef idx="minor">
-            <a:schemeClr val="lt1"/>
-          </a:fontRef>
-        </p:style>
-        <p:txBody>
-          <a:bodyPr rtlCol="0" anchor="ctr"/>
-          <a:lstStyle/>
-          <a:p>
-            <a:pPr algn="ctr"/>
-          </a:p>
-        </p:txBody>
-      </p:sp>
-      <p:sp>
-        <p:nvSpPr>
-          <p:cNvPr id="11" name="TextBox 10"/>
-          <p:cNvSpPr txBox="1"/>
-          <p:nvPr/>
-        </p:nvSpPr>
-        <p:spPr>
-          <a:xfrm>
-            <a:off x="8275320" y="2011680"/>
-            <a:ext cx="2926080" cy="4206240"/>
-          </a:xfrm>
-          <a:prstGeom prst="rect">
-            <a:avLst/>
-          </a:prstGeom>
-          <a:noFill/>
-        </p:spPr>
-        <p:txBody>
-          <a:bodyPr wrap="square">
-            <a:spAutoFit/>
-          </a:bodyPr>
-          <a:lstStyle/>
-          <a:p>
-            <a:pPr>
-              <a:defRPr sz="1700" b="1">
-                <a:solidFill>
-                  <a:srgbClr val="F43F5E"/>
-                </a:solidFill>
-                <a:latin typeface="Georgia"/>
-              </a:defRPr>
-            </a:pPr>
-            <a:r>
-              <a:t>Breweries &amp; Restobars</a:t>
-            </a:r>
-          </a:p>
-          <a:p>
-            <a:pPr>
-              <a:spcBef>
-                <a:spcPts val="200"/>
-              </a:spcBef>
-              <a:defRPr sz="1050" b="1">
-                <a:solidFill>
-                  <a:srgbClr val="94A3B8"/>
-                </a:solidFill>
-                <a:latin typeface="Arial"/>
-              </a:defRPr>
-            </a:pPr>
-            <a:r>
-              <a:t>Effingut, FC Road Social, Agent Jack's</a:t>
-            </a:r>
-          </a:p>
-          <a:p>
-            <a:pPr>
-              <a:spcBef>
-                <a:spcPts val="1000"/>
-              </a:spcBef>
-              <a:defRPr sz="1250">
-                <a:solidFill>
-                  <a:srgbClr val="CBD5E1"/>
-                </a:solidFill>
-                <a:latin typeface="Arial"/>
-              </a:defRPr>
-            </a:pPr>
-            <a:r>
-              <a:t>• Objection: 'Large noisy groups cause chaotic ordering.'</a:t>
-            </a:r>
-          </a:p>
-          <a:p>
-            <a:pPr>
-              <a:spcBef>
-                <a:spcPts val="1000"/>
-              </a:spcBef>
-              <a:defRPr sz="1250">
-                <a:solidFill>
-                  <a:srgbClr val="CBD5E1"/>
-                </a:solidFill>
-                <a:latin typeface="Arial"/>
-              </a:defRPr>
-            </a:pPr>
-            <a:r>
-              <a:t>• Solution: Multiplayer table sync aggregates all orders with guest tags.</a:t>
-            </a:r>
-          </a:p>
-          <a:p>
-            <a:pPr>
-              <a:spcBef>
-                <a:spcPts val="1000"/>
-              </a:spcBef>
-              <a:defRPr sz="1250">
-                <a:solidFill>
-                  <a:srgbClr val="CBD5E1"/>
-                </a:solidFill>
-                <a:latin typeface="Arial"/>
-              </a:defRPr>
-            </a:pPr>
-            <a:r>
-              <a:t>• Outcome: 9:16 Instagram Story engine drives massive weekend viral reach.</a:t>
-            </a:r>
-          </a:p>
-        </p:txBody>
-      </p:sp>
+              <a:t>Transparent capability breakdown between Single Outlet (₹5,000/mo) and Enterprise (₹10,000/mo).</a:t>
+            </a:r>
+          </a:p>
+        </p:txBody>
+      </p:sp>
+      <p:graphicFrame>
+        <p:nvGraphicFramePr>
+          <p:cNvPr id="6" name="Table 5"/>
+          <p:cNvGraphicFramePr>
+            <a:graphicFrameLocks noGrp="1"/>
+          </p:cNvGraphicFramePr>
+          <p:nvPr/>
+        </p:nvGraphicFramePr>
+        <p:xfrm>
+          <a:off x="731520" y="1828800"/>
+          <a:ext cx="10698480" cy="4572000"/>
+        </p:xfrm>
+        <a:graphic>
+          <a:graphicData uri="http://schemas.openxmlformats.org/drawingml/2006/table">
+            <a:tbl>
+              <a:tblPr firstRow="1" bandRow="1">
+                <a:tableStyleId>{5C22544A-7EE6-4342-B048-85BDC9FD1C3A}</a:tableStyleId>
+              </a:tblPr>
+              <a:tblGrid>
+                <a:gridCol w="4297680"/>
+                <a:gridCol w="3200400"/>
+                <a:gridCol w="3200400"/>
+              </a:tblGrid>
+              <a:tr h="457200">
+                <a:tc>
+                  <a:txBody>
+                    <a:bodyPr/>
+                    <a:lstStyle/>
+                    <a:p>
+                      <a:pPr>
+                        <a:defRPr sz="1200" b="1">
+                          <a:solidFill>
+                            <a:srgbClr val="F59E0B"/>
+                          </a:solidFill>
+                          <a:latin typeface="Georgia"/>
+                        </a:defRPr>
+                      </a:pPr>
+                      <a:r>
+                        <a:t>Capability / Module</a:t>
+                      </a:r>
+                    </a:p>
+                  </a:txBody>
+                  <a:tcPr>
+                    <a:solidFill>
+                      <a:srgbClr val="1A2436"/>
+                    </a:solidFill>
+                  </a:tcPr>
+                </a:tc>
+                <a:tc>
+                  <a:txBody>
+                    <a:bodyPr/>
+                    <a:lstStyle/>
+                    <a:p>
+                      <a:pPr>
+                        <a:defRPr sz="1200" b="1">
+                          <a:solidFill>
+                            <a:srgbClr val="06B6D4"/>
+                          </a:solidFill>
+                          <a:latin typeface="Georgia"/>
+                        </a:defRPr>
+                      </a:pPr>
+                      <a:r>
+                        <a:t>Single Outlet (₹5,000/mo)</a:t>
+                      </a:r>
+                    </a:p>
+                  </a:txBody>
+                  <a:tcPr>
+                    <a:solidFill>
+                      <a:srgbClr val="1A2436"/>
+                    </a:solidFill>
+                  </a:tcPr>
+                </a:tc>
+                <a:tc>
+                  <a:txBody>
+                    <a:bodyPr/>
+                    <a:lstStyle/>
+                    <a:p>
+                      <a:pPr>
+                        <a:defRPr sz="1200" b="1">
+                          <a:solidFill>
+                            <a:srgbClr val="F59E0B"/>
+                          </a:solidFill>
+                          <a:latin typeface="Georgia"/>
+                        </a:defRPr>
+                      </a:pPr>
+                      <a:r>
+                        <a:t>Multi-Outlet Enterprise (₹10,000/mo)</a:t>
+                      </a:r>
+                    </a:p>
+                  </a:txBody>
+                  <a:tcPr>
+                    <a:solidFill>
+                      <a:srgbClr val="1A2436"/>
+                    </a:solidFill>
+                  </a:tcPr>
+                </a:tc>
+              </a:tr>
+              <a:tr h="457200">
+                <a:tc>
+                  <a:txBody>
+                    <a:bodyPr/>
+                    <a:lstStyle/>
+                    <a:p>
+                      <a:pPr>
+                        <a:defRPr sz="1050" b="1">
+                          <a:solidFill>
+                            <a:srgbClr val="FAFAFA"/>
+                          </a:solidFill>
+                          <a:latin typeface="Arial"/>
+                        </a:defRPr>
+                      </a:pPr>
+                      <a:r>
+                        <a:t>Venue &amp; Table Scale</a:t>
+                      </a:r>
+                    </a:p>
+                  </a:txBody>
+                  <a:tcPr>
+                    <a:solidFill>
+                      <a:srgbClr val="131C2E"/>
+                    </a:solidFill>
+                  </a:tcPr>
+                </a:tc>
+                <a:tc>
+                  <a:txBody>
+                    <a:bodyPr/>
+                    <a:lstStyle/>
+                    <a:p>
+                      <a:pPr>
+                        <a:defRPr sz="1050">
+                          <a:solidFill>
+                            <a:srgbClr val="06B6D4"/>
+                          </a:solidFill>
+                          <a:latin typeface="Arial"/>
+                        </a:defRPr>
+                      </a:pPr>
+                      <a:r>
+                        <a:t>1 Location (Unlimited Tables)</a:t>
+                      </a:r>
+                    </a:p>
+                  </a:txBody>
+                  <a:tcPr>
+                    <a:solidFill>
+                      <a:srgbClr val="131C2E"/>
+                    </a:solidFill>
+                  </a:tcPr>
+                </a:tc>
+                <a:tc>
+                  <a:txBody>
+                    <a:bodyPr/>
+                    <a:lstStyle/>
+                    <a:p>
+                      <a:pPr>
+                        <a:defRPr sz="1050">
+                          <a:solidFill>
+                            <a:srgbClr val="F59E0B"/>
+                          </a:solidFill>
+                          <a:latin typeface="Arial"/>
+                        </a:defRPr>
+                      </a:pPr>
+                      <a:r>
+                        <a:t>Multi-Outlet (Unlimited Venues &amp; Tables)</a:t>
+                      </a:r>
+                    </a:p>
+                  </a:txBody>
+                  <a:tcPr>
+                    <a:solidFill>
+                      <a:srgbClr val="131C2E"/>
+                    </a:solidFill>
+                  </a:tcPr>
+                </a:tc>
+              </a:tr>
+              <a:tr h="457200">
+                <a:tc>
+                  <a:txBody>
+                    <a:bodyPr/>
+                    <a:lstStyle/>
+                    <a:p>
+                      <a:pPr>
+                        <a:defRPr sz="1050" b="1">
+                          <a:solidFill>
+                            <a:srgbClr val="FAFAFA"/>
+                          </a:solidFill>
+                          <a:latin typeface="Arial"/>
+                        </a:defRPr>
+                      </a:pPr>
+                      <a:r>
+                        <a:t>Interactive Dining &amp; Multiplayer Cart</a:t>
+                      </a:r>
+                    </a:p>
+                  </a:txBody>
+                  <a:tcPr>
+                    <a:solidFill>
+                      <a:srgbClr val="0E1422"/>
+                    </a:solidFill>
+                  </a:tcPr>
+                </a:tc>
+                <a:tc>
+                  <a:txBody>
+                    <a:bodyPr/>
+                    <a:lstStyle/>
+                    <a:p>
+                      <a:pPr>
+                        <a:defRPr sz="1050" b="1">
+                          <a:solidFill>
+                            <a:srgbClr val="10B981"/>
+                          </a:solidFill>
+                          <a:latin typeface="Arial"/>
+                        </a:defRPr>
+                      </a:pPr>
+                      <a:r>
+                        <a:t>✓ Full Access (Zero App Download)</a:t>
+                      </a:r>
+                    </a:p>
+                  </a:txBody>
+                  <a:tcPr>
+                    <a:solidFill>
+                      <a:srgbClr val="0E1422"/>
+                    </a:solidFill>
+                  </a:tcPr>
+                </a:tc>
+                <a:tc>
+                  <a:txBody>
+                    <a:bodyPr/>
+                    <a:lstStyle/>
+                    <a:p>
+                      <a:pPr>
+                        <a:defRPr sz="1050" b="1">
+                          <a:solidFill>
+                            <a:srgbClr val="10B981"/>
+                          </a:solidFill>
+                          <a:latin typeface="Arial"/>
+                        </a:defRPr>
+                      </a:pPr>
+                      <a:r>
+                        <a:t>✓ Full Access (Zero App Download)</a:t>
+                      </a:r>
+                    </a:p>
+                  </a:txBody>
+                  <a:tcPr>
+                    <a:solidFill>
+                      <a:srgbClr val="0E1422"/>
+                    </a:solidFill>
+                  </a:tcPr>
+                </a:tc>
+              </a:tr>
+              <a:tr h="457200">
+                <a:tc>
+                  <a:txBody>
+                    <a:bodyPr/>
+                    <a:lstStyle/>
+                    <a:p>
+                      <a:pPr>
+                        <a:defRPr sz="1050" b="1">
+                          <a:solidFill>
+                            <a:srgbClr val="FAFAFA"/>
+                          </a:solidFill>
+                          <a:latin typeface="Arial"/>
+                        </a:defRPr>
+                      </a:pPr>
+                      <a:r>
+                        <a:t>Multilingual AI Menu Engine</a:t>
+                      </a:r>
+                    </a:p>
+                  </a:txBody>
+                  <a:tcPr>
+                    <a:solidFill>
+                      <a:srgbClr val="131C2E"/>
+                    </a:solidFill>
+                  </a:tcPr>
+                </a:tc>
+                <a:tc>
+                  <a:txBody>
+                    <a:bodyPr/>
+                    <a:lstStyle/>
+                    <a:p>
+                      <a:pPr>
+                        <a:defRPr sz="1050" b="1">
+                          <a:solidFill>
+                            <a:srgbClr val="10B981"/>
+                          </a:solidFill>
+                          <a:latin typeface="Arial"/>
+                        </a:defRPr>
+                      </a:pPr>
+                      <a:r>
+                        <a:t>✓ English, Hindi &amp; Marathi + Dietary</a:t>
+                      </a:r>
+                    </a:p>
+                  </a:txBody>
+                  <a:tcPr>
+                    <a:solidFill>
+                      <a:srgbClr val="131C2E"/>
+                    </a:solidFill>
+                  </a:tcPr>
+                </a:tc>
+                <a:tc>
+                  <a:txBody>
+                    <a:bodyPr/>
+                    <a:lstStyle/>
+                    <a:p>
+                      <a:pPr>
+                        <a:defRPr sz="1050" b="1">
+                          <a:solidFill>
+                            <a:srgbClr val="10B981"/>
+                          </a:solidFill>
+                          <a:latin typeface="Arial"/>
+                        </a:defRPr>
+                      </a:pPr>
+                      <a:r>
+                        <a:t>✓ English, Hindi &amp; Marathi + Dietary</a:t>
+                      </a:r>
+                    </a:p>
+                  </a:txBody>
+                  <a:tcPr>
+                    <a:solidFill>
+                      <a:srgbClr val="131C2E"/>
+                    </a:solidFill>
+                  </a:tcPr>
+                </a:tc>
+              </a:tr>
+              <a:tr h="457200">
+                <a:tc>
+                  <a:txBody>
+                    <a:bodyPr/>
+                    <a:lstStyle/>
+                    <a:p>
+                      <a:pPr>
+                        <a:defRPr sz="1050" b="1">
+                          <a:solidFill>
+                            <a:srgbClr val="FAFAFA"/>
+                          </a:solidFill>
+                          <a:latin typeface="Arial"/>
+                        </a:defRPr>
+                      </a:pPr>
+                      <a:r>
+                        <a:t>Kitchen KOT Thermal Printing</a:t>
+                      </a:r>
+                    </a:p>
+                  </a:txBody>
+                  <a:tcPr>
+                    <a:solidFill>
+                      <a:srgbClr val="0E1422"/>
+                    </a:solidFill>
+                  </a:tcPr>
+                </a:tc>
+                <a:tc>
+                  <a:txBody>
+                    <a:bodyPr/>
+                    <a:lstStyle/>
+                    <a:p>
+                      <a:pPr>
+                        <a:defRPr sz="1050" b="1">
+                          <a:solidFill>
+                            <a:srgbClr val="10B981"/>
+                          </a:solidFill>
+                          <a:latin typeface="Arial"/>
+                        </a:defRPr>
+                      </a:pPr>
+                      <a:r>
+                        <a:t>✓ Single Kitchen Station ESC/POS</a:t>
+                      </a:r>
+                    </a:p>
+                  </a:txBody>
+                  <a:tcPr>
+                    <a:solidFill>
+                      <a:srgbClr val="0E1422"/>
+                    </a:solidFill>
+                  </a:tcPr>
+                </a:tc>
+                <a:tc>
+                  <a:txBody>
+                    <a:bodyPr/>
+                    <a:lstStyle/>
+                    <a:p>
+                      <a:pPr>
+                        <a:defRPr sz="1050" b="1">
+                          <a:solidFill>
+                            <a:srgbClr val="10B981"/>
+                          </a:solidFill>
+                          <a:latin typeface="Arial"/>
+                        </a:defRPr>
+                      </a:pPr>
+                      <a:r>
+                        <a:t>✓ Multi-Kitchen &amp; Bar Routing</a:t>
+                      </a:r>
+                    </a:p>
+                  </a:txBody>
+                  <a:tcPr>
+                    <a:solidFill>
+                      <a:srgbClr val="0E1422"/>
+                    </a:solidFill>
+                  </a:tcPr>
+                </a:tc>
+              </a:tr>
+              <a:tr h="457200">
+                <a:tc>
+                  <a:txBody>
+                    <a:bodyPr/>
+                    <a:lstStyle/>
+                    <a:p>
+                      <a:pPr>
+                        <a:defRPr sz="1050" b="1">
+                          <a:solidFill>
+                            <a:srgbClr val="FAFAFA"/>
+                          </a:solidFill>
+                          <a:latin typeface="Arial"/>
+                        </a:defRPr>
+                      </a:pPr>
+                      <a:r>
+                        <a:t>POS Integrations</a:t>
+                      </a:r>
+                    </a:p>
+                  </a:txBody>
+                  <a:tcPr>
+                    <a:solidFill>
+                      <a:srgbClr val="131C2E"/>
+                    </a:solidFill>
+                  </a:tcPr>
+                </a:tc>
+                <a:tc>
+                  <a:txBody>
+                    <a:bodyPr/>
+                    <a:lstStyle/>
+                    <a:p>
+                      <a:pPr>
+                        <a:defRPr sz="1050">
+                          <a:solidFill>
+                            <a:srgbClr val="06B6D4"/>
+                          </a:solidFill>
+                          <a:latin typeface="Arial"/>
+                        </a:defRPr>
+                      </a:pPr>
+                      <a:r>
+                        <a:t>Standard POS Bridge</a:t>
+                      </a:r>
+                    </a:p>
+                  </a:txBody>
+                  <a:tcPr>
+                    <a:solidFill>
+                      <a:srgbClr val="131C2E"/>
+                    </a:solidFill>
+                  </a:tcPr>
+                </a:tc>
+                <a:tc>
+                  <a:txBody>
+                    <a:bodyPr/>
+                    <a:lstStyle/>
+                    <a:p>
+                      <a:pPr>
+                        <a:defRPr sz="1050">
+                          <a:solidFill>
+                            <a:srgbClr val="F59E0B"/>
+                          </a:solidFill>
+                          <a:latin typeface="Arial"/>
+                        </a:defRPr>
+                      </a:pPr>
+                      <a:r>
+                        <a:t>Enterprise 2-Way REST API Sync</a:t>
+                      </a:r>
+                    </a:p>
+                  </a:txBody>
+                  <a:tcPr>
+                    <a:solidFill>
+                      <a:srgbClr val="131C2E"/>
+                    </a:solidFill>
+                  </a:tcPr>
+                </a:tc>
+              </a:tr>
+              <a:tr h="457200">
+                <a:tc>
+                  <a:txBody>
+                    <a:bodyPr/>
+                    <a:lstStyle/>
+                    <a:p>
+                      <a:pPr>
+                        <a:defRPr sz="1050" b="1">
+                          <a:solidFill>
+                            <a:srgbClr val="FAFAFA"/>
+                          </a:solidFill>
+                          <a:latin typeface="Arial"/>
+                        </a:defRPr>
+                      </a:pPr>
+                      <a:r>
+                        <a:t>Google Maps SEO &amp; AI Review Builder</a:t>
+                      </a:r>
+                    </a:p>
+                  </a:txBody>
+                  <a:tcPr>
+                    <a:solidFill>
+                      <a:srgbClr val="0E1422"/>
+                    </a:solidFill>
+                  </a:tcPr>
+                </a:tc>
+                <a:tc>
+                  <a:txBody>
+                    <a:bodyPr/>
+                    <a:lstStyle/>
+                    <a:p>
+                      <a:pPr>
+                        <a:defRPr sz="1050" b="1">
+                          <a:solidFill>
+                            <a:srgbClr val="10B981"/>
+                          </a:solidFill>
+                          <a:latin typeface="Arial"/>
+                        </a:defRPr>
+                      </a:pPr>
+                      <a:r>
+                        <a:t>✓ Included (1-Click Tags)</a:t>
+                      </a:r>
+                    </a:p>
+                  </a:txBody>
+                  <a:tcPr>
+                    <a:solidFill>
+                      <a:srgbClr val="0E1422"/>
+                    </a:solidFill>
+                  </a:tcPr>
+                </a:tc>
+                <a:tc>
+                  <a:txBody>
+                    <a:bodyPr/>
+                    <a:lstStyle/>
+                    <a:p>
+                      <a:pPr>
+                        <a:defRPr sz="1050" b="1">
+                          <a:solidFill>
+                            <a:srgbClr val="10B981"/>
+                          </a:solidFill>
+                          <a:latin typeface="Arial"/>
+                        </a:defRPr>
+                      </a:pPr>
+                      <a:r>
+                        <a:t>✓ Included (1-Click Tags)</a:t>
+                      </a:r>
+                    </a:p>
+                  </a:txBody>
+                  <a:tcPr>
+                    <a:solidFill>
+                      <a:srgbClr val="0E1422"/>
+                    </a:solidFill>
+                  </a:tcPr>
+                </a:tc>
+              </a:tr>
+              <a:tr h="457200">
+                <a:tc>
+                  <a:txBody>
+                    <a:bodyPr/>
+                    <a:lstStyle/>
+                    <a:p>
+                      <a:pPr>
+                        <a:defRPr sz="1050" b="1">
+                          <a:solidFill>
+                            <a:srgbClr val="FAFAFA"/>
+                          </a:solidFill>
+                          <a:latin typeface="Arial"/>
+                        </a:defRPr>
+                      </a:pPr>
+                      <a:r>
+                        <a:t>Gamified Wheel &amp; Retention</a:t>
+                      </a:r>
+                    </a:p>
+                  </a:txBody>
+                  <a:tcPr>
+                    <a:solidFill>
+                      <a:srgbClr val="131C2E"/>
+                    </a:solidFill>
+                  </a:tcPr>
+                </a:tc>
+                <a:tc>
+                  <a:txBody>
+                    <a:bodyPr/>
+                    <a:lstStyle/>
+                    <a:p>
+                      <a:pPr>
+                        <a:defRPr sz="1050" b="1">
+                          <a:solidFill>
+                            <a:srgbClr val="10B981"/>
+                          </a:solidFill>
+                          <a:latin typeface="Arial"/>
+                        </a:defRPr>
+                      </a:pPr>
+                      <a:r>
+                        <a:t>✓ Full Owner Control (Zero Discounts)</a:t>
+                      </a:r>
+                    </a:p>
+                  </a:txBody>
+                  <a:tcPr>
+                    <a:solidFill>
+                      <a:srgbClr val="131C2E"/>
+                    </a:solidFill>
+                  </a:tcPr>
+                </a:tc>
+                <a:tc>
+                  <a:txBody>
+                    <a:bodyPr/>
+                    <a:lstStyle/>
+                    <a:p>
+                      <a:pPr>
+                        <a:defRPr sz="1050" b="1">
+                          <a:solidFill>
+                            <a:srgbClr val="10B981"/>
+                          </a:solidFill>
+                          <a:latin typeface="Arial"/>
+                        </a:defRPr>
+                      </a:pPr>
+                      <a:r>
+                        <a:t>✓ Full Control + Branch Rules</a:t>
+                      </a:r>
+                    </a:p>
+                  </a:txBody>
+                  <a:tcPr>
+                    <a:solidFill>
+                      <a:srgbClr val="131C2E"/>
+                    </a:solidFill>
+                  </a:tcPr>
+                </a:tc>
+              </a:tr>
+              <a:tr h="457200">
+                <a:tc>
+                  <a:txBody>
+                    <a:bodyPr/>
+                    <a:lstStyle/>
+                    <a:p>
+                      <a:pPr>
+                        <a:defRPr sz="1050" b="1">
+                          <a:solidFill>
+                            <a:srgbClr val="FAFAFA"/>
+                          </a:solidFill>
+                          <a:latin typeface="Arial"/>
+                        </a:defRPr>
+                      </a:pPr>
+                      <a:r>
+                        <a:t>Multi-Branch Centralized HQ</a:t>
+                      </a:r>
+                    </a:p>
+                  </a:txBody>
+                  <a:tcPr>
+                    <a:solidFill>
+                      <a:srgbClr val="0E1422"/>
+                    </a:solidFill>
+                  </a:tcPr>
+                </a:tc>
+                <a:tc>
+                  <a:txBody>
+                    <a:bodyPr/>
+                    <a:lstStyle/>
+                    <a:p>
+                      <a:pPr>
+                        <a:defRPr sz="1050">
+                          <a:solidFill>
+                            <a:srgbClr val="06B6D4"/>
+                          </a:solidFill>
+                          <a:latin typeface="Arial"/>
+                        </a:defRPr>
+                      </a:pPr>
+                      <a:r>
+                        <a:t>— (Single venue analytics)</a:t>
+                      </a:r>
+                    </a:p>
+                  </a:txBody>
+                  <a:tcPr>
+                    <a:solidFill>
+                      <a:srgbClr val="0E1422"/>
+                    </a:solidFill>
+                  </a:tcPr>
+                </a:tc>
+                <a:tc>
+                  <a:txBody>
+                    <a:bodyPr/>
+                    <a:lstStyle/>
+                    <a:p>
+                      <a:pPr>
+                        <a:defRPr sz="1050" b="1">
+                          <a:solidFill>
+                            <a:srgbClr val="10B981"/>
+                          </a:solidFill>
+                          <a:latin typeface="Arial"/>
+                        </a:defRPr>
+                      </a:pPr>
+                      <a:r>
+                        <a:t>✓ Centralized Multi-Branch Dashboard</a:t>
+                      </a:r>
+                    </a:p>
+                  </a:txBody>
+                  <a:tcPr>
+                    <a:solidFill>
+                      <a:srgbClr val="0E1422"/>
+                    </a:solidFill>
+                  </a:tcPr>
+                </a:tc>
+              </a:tr>
+              <a:tr h="457200">
+                <a:tc>
+                  <a:txBody>
+                    <a:bodyPr/>
+                    <a:lstStyle/>
+                    <a:p>
+                      <a:pPr>
+                        <a:defRPr sz="1050" b="1">
+                          <a:solidFill>
+                            <a:srgbClr val="FAFAFA"/>
+                          </a:solidFill>
+                          <a:latin typeface="Arial"/>
+                        </a:defRPr>
+                      </a:pPr>
+                      <a:r>
+                        <a:t>Support SLA &amp; Onboarding</a:t>
+                      </a:r>
+                    </a:p>
+                  </a:txBody>
+                  <a:tcPr>
+                    <a:solidFill>
+                      <a:srgbClr val="131C2E"/>
+                    </a:solidFill>
+                  </a:tcPr>
+                </a:tc>
+                <a:tc>
+                  <a:txBody>
+                    <a:bodyPr/>
+                    <a:lstStyle/>
+                    <a:p>
+                      <a:pPr>
+                        <a:defRPr sz="1050">
+                          <a:solidFill>
+                            <a:srgbClr val="06B6D4"/>
+                          </a:solidFill>
+                          <a:latin typeface="Arial"/>
+                        </a:defRPr>
+                      </a:pPr>
+                      <a:r>
+                        <a:t>Standard Email &amp; Chat Support</a:t>
+                      </a:r>
+                    </a:p>
+                  </a:txBody>
+                  <a:tcPr>
+                    <a:solidFill>
+                      <a:srgbClr val="131C2E"/>
+                    </a:solidFill>
+                  </a:tcPr>
+                </a:tc>
+                <a:tc>
+                  <a:txBody>
+                    <a:bodyPr/>
+                    <a:lstStyle/>
+                    <a:p>
+                      <a:pPr>
+                        <a:defRPr sz="1050">
+                          <a:solidFill>
+                            <a:srgbClr val="F59E0B"/>
+                          </a:solidFill>
+                          <a:latin typeface="Arial"/>
+                        </a:defRPr>
+                      </a:pPr>
+                      <a:r>
+                        <a:t>24/7 Dedicated Account Manager</a:t>
+                      </a:r>
+                    </a:p>
+                  </a:txBody>
+                  <a:tcPr>
+                    <a:solidFill>
+                      <a:srgbClr val="131C2E"/>
+                    </a:solidFill>
+                  </a:tcPr>
+                </a:tc>
+              </a:tr>
+            </a:tbl>
+          </a:graphicData>
+        </a:graphic>
+      </p:graphicFrame>
     </p:spTree>
   </p:cSld>
   <p:clrMapOvr>
@@ -6915,6 +7457,610 @@
 </file>
 
 <file path=ppt/slides/slide18.xml><?xml version="1.0" encoding="utf-8"?>
+<p:sld xmlns:a="http://schemas.openxmlformats.org/drawingml/2006/main" xmlns:p="http://schemas.openxmlformats.org/presentationml/2006/main" xmlns:r="http://schemas.openxmlformats.org/officeDocument/2006/relationships">
+  <p:cSld>
+    <p:spTree>
+      <p:nvGrpSpPr>
+        <p:cNvPr id="1" name=""/>
+        <p:cNvGrpSpPr/>
+        <p:nvPr/>
+      </p:nvGrpSpPr>
+      <p:grpSpPr/>
+      <p:sp>
+        <p:nvSpPr>
+          <p:cNvPr id="2" name="Rectangle 1"/>
+          <p:cNvSpPr/>
+          <p:nvPr/>
+        </p:nvSpPr>
+        <p:spPr>
+          <a:xfrm>
+            <a:off x="0" y="0"/>
+            <a:ext cx="12191695" cy="6858000"/>
+          </a:xfrm>
+          <a:prstGeom prst="rect">
+            <a:avLst/>
+          </a:prstGeom>
+          <a:solidFill>
+            <a:srgbClr val="090D16"/>
+          </a:solidFill>
+          <a:ln>
+            <a:noFill/>
+          </a:ln>
+        </p:spPr>
+        <p:style>
+          <a:lnRef idx="1">
+            <a:schemeClr val="accent1"/>
+          </a:lnRef>
+          <a:fillRef idx="3">
+            <a:schemeClr val="accent1"/>
+          </a:fillRef>
+          <a:effectRef idx="2">
+            <a:schemeClr val="accent1"/>
+          </a:effectRef>
+          <a:fontRef idx="minor">
+            <a:schemeClr val="lt1"/>
+          </a:fontRef>
+        </p:style>
+        <p:txBody>
+          <a:bodyPr rtlCol="0" anchor="ctr"/>
+          <a:lstStyle/>
+          <a:p>
+            <a:pPr algn="ctr"/>
+          </a:p>
+        </p:txBody>
+      </p:sp>
+      <p:sp>
+        <p:nvSpPr>
+          <p:cNvPr id="3" name="TextBox 2"/>
+          <p:cNvSpPr txBox="1"/>
+          <p:nvPr/>
+        </p:nvSpPr>
+        <p:spPr>
+          <a:xfrm>
+            <a:off x="731520" y="320040"/>
+            <a:ext cx="10698480" cy="320040"/>
+          </a:xfrm>
+          <a:prstGeom prst="rect">
+            <a:avLst/>
+          </a:prstGeom>
+          <a:noFill/>
+        </p:spPr>
+        <p:txBody>
+          <a:bodyPr wrap="square" lIns="0" rIns="0" tIns="0" bIns="0">
+            <a:spAutoFit/>
+          </a:bodyPr>
+          <a:lstStyle/>
+          <a:p>
+            <a:pPr>
+              <a:defRPr sz="1300" b="1">
+                <a:solidFill>
+                  <a:srgbClr val="06B6D4"/>
+                </a:solidFill>
+                <a:latin typeface="Arial"/>
+              </a:defRPr>
+            </a:pPr>
+            <a:r>
+              <a:t>// MARKET VALIDATION</a:t>
+            </a:r>
+          </a:p>
+        </p:txBody>
+      </p:sp>
+      <p:sp>
+        <p:nvSpPr>
+          <p:cNvPr id="4" name="TextBox 3"/>
+          <p:cNvSpPr txBox="1"/>
+          <p:nvPr/>
+        </p:nvSpPr>
+        <p:spPr>
+          <a:xfrm>
+            <a:off x="731520" y="640080"/>
+            <a:ext cx="10698480" cy="594360"/>
+          </a:xfrm>
+          <a:prstGeom prst="rect">
+            <a:avLst/>
+          </a:prstGeom>
+          <a:noFill/>
+        </p:spPr>
+        <p:txBody>
+          <a:bodyPr wrap="square" lIns="0" rIns="0" tIns="0" bIns="0">
+            <a:spAutoFit/>
+          </a:bodyPr>
+          <a:lstStyle/>
+          <a:p>
+            <a:pPr>
+              <a:defRPr sz="2800" b="1">
+                <a:solidFill>
+                  <a:srgbClr val="FAFAFA"/>
+                </a:solidFill>
+                <a:latin typeface="Georgia"/>
+              </a:defRPr>
+            </a:pPr>
+            <a:r>
+              <a:t>The 15-Restaurant Boardroom Stress Test: Unanimous Approval</a:t>
+            </a:r>
+          </a:p>
+        </p:txBody>
+      </p:sp>
+      <p:sp>
+        <p:nvSpPr>
+          <p:cNvPr id="5" name="TextBox 4"/>
+          <p:cNvSpPr txBox="1"/>
+          <p:nvPr/>
+        </p:nvSpPr>
+        <p:spPr>
+          <a:xfrm>
+            <a:off x="731520" y="1280160"/>
+            <a:ext cx="10698480" cy="457200"/>
+          </a:xfrm>
+          <a:prstGeom prst="rect">
+            <a:avLst/>
+          </a:prstGeom>
+          <a:noFill/>
+        </p:spPr>
+        <p:txBody>
+          <a:bodyPr wrap="square" lIns="0" rIns="0" tIns="0" bIns="0">
+            <a:spAutoFit/>
+          </a:bodyPr>
+          <a:lstStyle/>
+          <a:p>
+            <a:pPr>
+              <a:defRPr sz="1400">
+                <a:solidFill>
+                  <a:srgbClr val="CBD5E1"/>
+                </a:solidFill>
+                <a:latin typeface="Arial"/>
+              </a:defRPr>
+            </a:pPr>
+            <a:r>
+              <a:t>How Menuz addresses the toughest operational objections across diverse dining formats.</a:t>
+            </a:r>
+          </a:p>
+        </p:txBody>
+      </p:sp>
+      <p:sp>
+        <p:nvSpPr>
+          <p:cNvPr id="6" name="Rounded Rectangle 5"/>
+          <p:cNvSpPr/>
+          <p:nvPr/>
+        </p:nvSpPr>
+        <p:spPr>
+          <a:xfrm>
+            <a:off x="731520" y="1828800"/>
+            <a:ext cx="3383280" cy="4572000"/>
+          </a:xfrm>
+          <a:prstGeom prst="roundRect">
+            <a:avLst/>
+          </a:prstGeom>
+          <a:solidFill>
+            <a:srgbClr val="131C2E"/>
+          </a:solidFill>
+          <a:ln w="19050">
+            <a:solidFill>
+              <a:srgbClr val="27364F"/>
+            </a:solidFill>
+          </a:ln>
+        </p:spPr>
+        <p:style>
+          <a:lnRef idx="1">
+            <a:schemeClr val="accent1"/>
+          </a:lnRef>
+          <a:fillRef idx="3">
+            <a:schemeClr val="accent1"/>
+          </a:fillRef>
+          <a:effectRef idx="2">
+            <a:schemeClr val="accent1"/>
+          </a:effectRef>
+          <a:fontRef idx="minor">
+            <a:schemeClr val="lt1"/>
+          </a:fontRef>
+        </p:style>
+        <p:txBody>
+          <a:bodyPr rtlCol="0" anchor="ctr"/>
+          <a:lstStyle/>
+          <a:p>
+            <a:pPr algn="ctr"/>
+          </a:p>
+        </p:txBody>
+      </p:sp>
+      <p:sp>
+        <p:nvSpPr>
+          <p:cNvPr id="7" name="TextBox 6"/>
+          <p:cNvSpPr txBox="1"/>
+          <p:nvPr/>
+        </p:nvSpPr>
+        <p:spPr>
+          <a:xfrm>
+            <a:off x="960120" y="2011680"/>
+            <a:ext cx="2926080" cy="4206240"/>
+          </a:xfrm>
+          <a:prstGeom prst="rect">
+            <a:avLst/>
+          </a:prstGeom>
+          <a:noFill/>
+        </p:spPr>
+        <p:txBody>
+          <a:bodyPr wrap="square">
+            <a:spAutoFit/>
+          </a:bodyPr>
+          <a:lstStyle/>
+          <a:p>
+            <a:pPr>
+              <a:defRPr sz="1700" b="1">
+                <a:solidFill>
+                  <a:srgbClr val="06B6D4"/>
+                </a:solidFill>
+                <a:latin typeface="Georgia"/>
+              </a:defRPr>
+            </a:pPr>
+            <a:r>
+              <a:t>Cafes &amp; High-Turnover</a:t>
+            </a:r>
+          </a:p>
+          <a:p>
+            <a:pPr>
+              <a:spcBef>
+                <a:spcPts val="200"/>
+              </a:spcBef>
+              <a:defRPr sz="1050" b="1">
+                <a:solidFill>
+                  <a:srgbClr val="94A3B8"/>
+                </a:solidFill>
+                <a:latin typeface="Arial"/>
+              </a:defRPr>
+            </a:pPr>
+            <a:r>
+              <a:t>German Bakery, Le Plaisir, Vaishali</a:t>
+            </a:r>
+          </a:p>
+          <a:p>
+            <a:pPr>
+              <a:spcBef>
+                <a:spcPts val="1000"/>
+              </a:spcBef>
+              <a:defRPr sz="1250">
+                <a:solidFill>
+                  <a:srgbClr val="CBD5E1"/>
+                </a:solidFill>
+                <a:latin typeface="Arial"/>
+              </a:defRPr>
+            </a:pPr>
+            <a:r>
+              <a:t>• Objection: 'We serve 200+ tables/day, tech must be instant.'</a:t>
+            </a:r>
+          </a:p>
+          <a:p>
+            <a:pPr>
+              <a:spcBef>
+                <a:spcPts val="1000"/>
+              </a:spcBef>
+              <a:defRPr sz="1250">
+                <a:solidFill>
+                  <a:srgbClr val="CBD5E1"/>
+                </a:solidFill>
+                <a:latin typeface="Arial"/>
+              </a:defRPr>
+            </a:pPr>
+            <a:r>
+              <a:t>• Solution: Zero app downloads. Mode A fires direct 80mm KOT in 1s.</a:t>
+            </a:r>
+          </a:p>
+          <a:p>
+            <a:pPr>
+              <a:spcBef>
+                <a:spcPts val="1000"/>
+              </a:spcBef>
+              <a:defRPr sz="1250">
+                <a:solidFill>
+                  <a:srgbClr val="CBD5E1"/>
+                </a:solidFill>
+                <a:latin typeface="Arial"/>
+              </a:defRPr>
+            </a:pPr>
+            <a:r>
+              <a:t>• Outcome: Table turnover accelerated by 14 minutes per group.</a:t>
+            </a:r>
+          </a:p>
+        </p:txBody>
+      </p:sp>
+      <p:sp>
+        <p:nvSpPr>
+          <p:cNvPr id="8" name="Rounded Rectangle 7"/>
+          <p:cNvSpPr/>
+          <p:nvPr/>
+        </p:nvSpPr>
+        <p:spPr>
+          <a:xfrm>
+            <a:off x="4389120" y="1828800"/>
+            <a:ext cx="3383280" cy="4572000"/>
+          </a:xfrm>
+          <a:prstGeom prst="roundRect">
+            <a:avLst/>
+          </a:prstGeom>
+          <a:solidFill>
+            <a:srgbClr val="131C2E"/>
+          </a:solidFill>
+          <a:ln w="19050">
+            <a:solidFill>
+              <a:srgbClr val="27364F"/>
+            </a:solidFill>
+          </a:ln>
+        </p:spPr>
+        <p:style>
+          <a:lnRef idx="1">
+            <a:schemeClr val="accent1"/>
+          </a:lnRef>
+          <a:fillRef idx="3">
+            <a:schemeClr val="accent1"/>
+          </a:fillRef>
+          <a:effectRef idx="2">
+            <a:schemeClr val="accent1"/>
+          </a:effectRef>
+          <a:fontRef idx="minor">
+            <a:schemeClr val="lt1"/>
+          </a:fontRef>
+        </p:style>
+        <p:txBody>
+          <a:bodyPr rtlCol="0" anchor="ctr"/>
+          <a:lstStyle/>
+          <a:p>
+            <a:pPr algn="ctr"/>
+          </a:p>
+        </p:txBody>
+      </p:sp>
+      <p:sp>
+        <p:nvSpPr>
+          <p:cNvPr id="9" name="TextBox 8"/>
+          <p:cNvSpPr txBox="1"/>
+          <p:nvPr/>
+        </p:nvSpPr>
+        <p:spPr>
+          <a:xfrm>
+            <a:off x="4617720" y="2011680"/>
+            <a:ext cx="2926080" cy="4206240"/>
+          </a:xfrm>
+          <a:prstGeom prst="rect">
+            <a:avLst/>
+          </a:prstGeom>
+          <a:noFill/>
+        </p:spPr>
+        <p:txBody>
+          <a:bodyPr wrap="square">
+            <a:spAutoFit/>
+          </a:bodyPr>
+          <a:lstStyle/>
+          <a:p>
+            <a:pPr>
+              <a:defRPr sz="1700" b="1">
+                <a:solidFill>
+                  <a:srgbClr val="F59E0B"/>
+                </a:solidFill>
+                <a:latin typeface="Georgia"/>
+              </a:defRPr>
+            </a:pPr>
+            <a:r>
+              <a:t>Fine Dining &amp; Bistros</a:t>
+            </a:r>
+          </a:p>
+          <a:p>
+            <a:pPr>
+              <a:spcBef>
+                <a:spcPts val="200"/>
+              </a:spcBef>
+              <a:defRPr sz="1050" b="1">
+                <a:solidFill>
+                  <a:srgbClr val="94A3B8"/>
+                </a:solidFill>
+                <a:latin typeface="Arial"/>
+              </a:defRPr>
+            </a:pPr>
+            <a:r>
+              <a:t>Arthur's Theme, Malaka Spice, Terttulia</a:t>
+            </a:r>
+          </a:p>
+          <a:p>
+            <a:pPr>
+              <a:spcBef>
+                <a:spcPts val="1000"/>
+              </a:spcBef>
+              <a:defRPr sz="1250">
+                <a:solidFill>
+                  <a:srgbClr val="CBD5E1"/>
+                </a:solidFill>
+                <a:latin typeface="Arial"/>
+              </a:defRPr>
+            </a:pPr>
+            <a:r>
+              <a:t>• Objection: 'We cannot lose human captain hospitality.'</a:t>
+            </a:r>
+          </a:p>
+          <a:p>
+            <a:pPr>
+              <a:spcBef>
+                <a:spcPts val="1000"/>
+              </a:spcBef>
+              <a:defRPr sz="1250">
+                <a:solidFill>
+                  <a:srgbClr val="CBD5E1"/>
+                </a:solidFill>
+                <a:latin typeface="Arial"/>
+              </a:defRPr>
+            </a:pPr>
+            <a:r>
+              <a:t>• Solution: Mode B allows captain to review and pace courses.</a:t>
+            </a:r>
+          </a:p>
+          <a:p>
+            <a:pPr>
+              <a:spcBef>
+                <a:spcPts val="1000"/>
+              </a:spcBef>
+              <a:defRPr sz="1250">
+                <a:solidFill>
+                  <a:srgbClr val="CBD5E1"/>
+                </a:solidFill>
+                <a:latin typeface="Arial"/>
+              </a:defRPr>
+            </a:pPr>
+            <a:r>
+              <a:t>• Outcome: Chef AI wine pairings increase beverage check size by +24%.</a:t>
+            </a:r>
+          </a:p>
+        </p:txBody>
+      </p:sp>
+      <p:sp>
+        <p:nvSpPr>
+          <p:cNvPr id="10" name="Rounded Rectangle 9"/>
+          <p:cNvSpPr/>
+          <p:nvPr/>
+        </p:nvSpPr>
+        <p:spPr>
+          <a:xfrm>
+            <a:off x="8046720" y="1828800"/>
+            <a:ext cx="3383280" cy="4572000"/>
+          </a:xfrm>
+          <a:prstGeom prst="roundRect">
+            <a:avLst/>
+          </a:prstGeom>
+          <a:solidFill>
+            <a:srgbClr val="131C2E"/>
+          </a:solidFill>
+          <a:ln w="19050">
+            <a:solidFill>
+              <a:srgbClr val="27364F"/>
+            </a:solidFill>
+          </a:ln>
+        </p:spPr>
+        <p:style>
+          <a:lnRef idx="1">
+            <a:schemeClr val="accent1"/>
+          </a:lnRef>
+          <a:fillRef idx="3">
+            <a:schemeClr val="accent1"/>
+          </a:fillRef>
+          <a:effectRef idx="2">
+            <a:schemeClr val="accent1"/>
+          </a:effectRef>
+          <a:fontRef idx="minor">
+            <a:schemeClr val="lt1"/>
+          </a:fontRef>
+        </p:style>
+        <p:txBody>
+          <a:bodyPr rtlCol="0" anchor="ctr"/>
+          <a:lstStyle/>
+          <a:p>
+            <a:pPr algn="ctr"/>
+          </a:p>
+        </p:txBody>
+      </p:sp>
+      <p:sp>
+        <p:nvSpPr>
+          <p:cNvPr id="11" name="TextBox 10"/>
+          <p:cNvSpPr txBox="1"/>
+          <p:nvPr/>
+        </p:nvSpPr>
+        <p:spPr>
+          <a:xfrm>
+            <a:off x="8275320" y="2011680"/>
+            <a:ext cx="2926080" cy="4206240"/>
+          </a:xfrm>
+          <a:prstGeom prst="rect">
+            <a:avLst/>
+          </a:prstGeom>
+          <a:noFill/>
+        </p:spPr>
+        <p:txBody>
+          <a:bodyPr wrap="square">
+            <a:spAutoFit/>
+          </a:bodyPr>
+          <a:lstStyle/>
+          <a:p>
+            <a:pPr>
+              <a:defRPr sz="1700" b="1">
+                <a:solidFill>
+                  <a:srgbClr val="F43F5E"/>
+                </a:solidFill>
+                <a:latin typeface="Georgia"/>
+              </a:defRPr>
+            </a:pPr>
+            <a:r>
+              <a:t>Breweries &amp; Restobars</a:t>
+            </a:r>
+          </a:p>
+          <a:p>
+            <a:pPr>
+              <a:spcBef>
+                <a:spcPts val="200"/>
+              </a:spcBef>
+              <a:defRPr sz="1050" b="1">
+                <a:solidFill>
+                  <a:srgbClr val="94A3B8"/>
+                </a:solidFill>
+                <a:latin typeface="Arial"/>
+              </a:defRPr>
+            </a:pPr>
+            <a:r>
+              <a:t>Effingut, FC Road Social, Agent Jack's</a:t>
+            </a:r>
+          </a:p>
+          <a:p>
+            <a:pPr>
+              <a:spcBef>
+                <a:spcPts val="1000"/>
+              </a:spcBef>
+              <a:defRPr sz="1250">
+                <a:solidFill>
+                  <a:srgbClr val="CBD5E1"/>
+                </a:solidFill>
+                <a:latin typeface="Arial"/>
+              </a:defRPr>
+            </a:pPr>
+            <a:r>
+              <a:t>• Objection: 'Large noisy groups cause chaotic ordering.'</a:t>
+            </a:r>
+          </a:p>
+          <a:p>
+            <a:pPr>
+              <a:spcBef>
+                <a:spcPts val="1000"/>
+              </a:spcBef>
+              <a:defRPr sz="1250">
+                <a:solidFill>
+                  <a:srgbClr val="CBD5E1"/>
+                </a:solidFill>
+                <a:latin typeface="Arial"/>
+              </a:defRPr>
+            </a:pPr>
+            <a:r>
+              <a:t>• Solution: Multiplayer table sync aggregates all orders with guest tags.</a:t>
+            </a:r>
+          </a:p>
+          <a:p>
+            <a:pPr>
+              <a:spcBef>
+                <a:spcPts val="1000"/>
+              </a:spcBef>
+              <a:defRPr sz="1250">
+                <a:solidFill>
+                  <a:srgbClr val="CBD5E1"/>
+                </a:solidFill>
+                <a:latin typeface="Arial"/>
+              </a:defRPr>
+            </a:pPr>
+            <a:r>
+              <a:t>• Outcome: 9:16 Instagram Story engine drives massive weekend viral reach.</a:t>
+            </a:r>
+          </a:p>
+        </p:txBody>
+      </p:sp>
+    </p:spTree>
+  </p:cSld>
+  <p:clrMapOvr>
+    <a:masterClrMapping/>
+  </p:clrMapOvr>
+</p:sld>
+</file>
+
+<file path=ppt/slides/slide19.xml><?xml version="1.0" encoding="utf-8"?>
 <p:sld xmlns:a="http://schemas.openxmlformats.org/drawingml/2006/main" xmlns:p="http://schemas.openxmlformats.org/presentationml/2006/main" xmlns:r="http://schemas.openxmlformats.org/officeDocument/2006/relationships">
   <p:cSld>
     <p:spTree>

--- a/public/menuz_executive_pitch_deck.pptx
+++ b/public/menuz_executive_pitch_deck.pptx
@@ -6240,9 +6240,9 @@
           <a:p>
             <a:pPr>
               <a:spcBef>
-                <a:spcPts val="600"/>
-              </a:spcBef>
-              <a:defRPr sz="1150">
+                <a:spcPts val="400"/>
+              </a:spcBef>
+              <a:defRPr sz="1100">
                 <a:solidFill>
                   <a:srgbClr val="CBD5E1"/>
                 </a:solidFill>
@@ -6250,15 +6250,15 @@
               </a:defRPr>
             </a:pPr>
             <a:r>
-              <a:t>• Full Interactive Dining OS: Multiplayer cart sync, zero app download QR menus.</a:t>
-            </a:r>
-          </a:p>
-          <a:p>
-            <a:pPr>
-              <a:spcBef>
-                <a:spcPts val="600"/>
-              </a:spcBef>
-              <a:defRPr sz="1150">
+              <a:t>• 1 Dedicated Outlet: Up to 25 QR Tables with Digital PDF Stickers.</a:t>
+            </a:r>
+          </a:p>
+          <a:p>
+            <a:pPr>
+              <a:spcBef>
+                <a:spcPts val="400"/>
+              </a:spcBef>
+              <a:defRPr sz="1100">
                 <a:solidFill>
                   <a:srgbClr val="CBD5E1"/>
                 </a:solidFill>
@@ -6266,15 +6266,15 @@
               </a:defRPr>
             </a:pPr>
             <a:r>
-              <a:t>• Hardware-Free KOT Routing: Direct thermal ESC/POS 80mm printing + WhatsApp alerts.</a:t>
-            </a:r>
-          </a:p>
-          <a:p>
-            <a:pPr>
-              <a:spcBef>
-                <a:spcPts val="600"/>
-              </a:spcBef>
-              <a:defRPr sz="1150">
+              <a:t>• Fast Mobile Ordering: Zero diner app download or login barriers.</a:t>
+            </a:r>
+          </a:p>
+          <a:p>
+            <a:pPr>
+              <a:spcBef>
+                <a:spcPts val="400"/>
+              </a:spcBef>
+              <a:defRPr sz="1100">
                 <a:solidFill>
                   <a:srgbClr val="CBD5E1"/>
                 </a:solidFill>
@@ -6282,15 +6282,15 @@
               </a:defRPr>
             </a:pPr>
             <a:r>
-              <a:t>• Reputation Triad Engine: 1-Click Google review generator + 15-min floor shield recovery.</a:t>
-            </a:r>
-          </a:p>
-          <a:p>
-            <a:pPr>
-              <a:spcBef>
-                <a:spcPts val="600"/>
-              </a:spcBef>
-              <a:defRPr sz="1150">
+              <a:t>• Single-Station KOT: Direct thermal ESC/POS 80mm printing + WhatsApp alerts.</a:t>
+            </a:r>
+          </a:p>
+          <a:p>
+            <a:pPr>
+              <a:spcBef>
+                <a:spcPts val="400"/>
+              </a:spcBef>
+              <a:defRPr sz="1100">
                 <a:solidFill>
                   <a:srgbClr val="CBD5E1"/>
                 </a:solidFill>
@@ -6298,15 +6298,15 @@
               </a:defRPr>
             </a:pPr>
             <a:r>
-              <a:t>• Gamified Lucky Wheel: 100% Owner Configured prizes (Zero forced bill discounts).</a:t>
-            </a:r>
-          </a:p>
-          <a:p>
-            <a:pPr>
-              <a:spcBef>
-                <a:spcPts val="600"/>
-              </a:spcBef>
-              <a:defRPr sz="1150">
+              <a:t>• 1-Way Cloud POS Push: Standard order intake to Petpooja / RoyalPOS.</a:t>
+            </a:r>
+          </a:p>
+          <a:p>
+            <a:pPr>
+              <a:spcBef>
+                <a:spcPts val="400"/>
+              </a:spcBef>
+              <a:defRPr sz="1100">
                 <a:solidFill>
                   <a:srgbClr val="CBD5E1"/>
                 </a:solidFill>
@@ -6314,15 +6314,15 @@
               </a:defRPr>
             </a:pPr>
             <a:r>
-              <a:t>• 100% Data Ownership: Full verified guest phone numbers &amp; dining histories.</a:t>
-            </a:r>
-          </a:p>
-          <a:p>
-            <a:pPr>
-              <a:spcBef>
-                <a:spcPts val="600"/>
-              </a:spcBef>
-              <a:defRPr sz="1150">
+              <a:t>• Single-Venue Chef AI: Recipe notes, spice &amp; allergen calibration.</a:t>
+            </a:r>
+          </a:p>
+          <a:p>
+            <a:pPr>
+              <a:spcBef>
+                <a:spcPts val="400"/>
+              </a:spcBef>
+              <a:defRPr sz="1100">
                 <a:solidFill>
                   <a:srgbClr val="CBD5E1"/>
                 </a:solidFill>
@@ -6330,7 +6330,39 @@
               </a:defRPr>
             </a:pPr>
             <a:r>
-              <a:t>• Zero Setup Fees: Month-to-month billing with no lock-in contracts.</a:t>
+              <a:t>• Reputation Booster: 1-Click Google review generator + floor grievance recovery.</a:t>
+            </a:r>
+          </a:p>
+          <a:p>
+            <a:pPr>
+              <a:spcBef>
+                <a:spcPts val="400"/>
+              </a:spcBef>
+              <a:defRPr sz="1100">
+                <a:solidFill>
+                  <a:srgbClr val="CBD5E1"/>
+                </a:solidFill>
+                <a:latin typeface="Arial"/>
+              </a:defRPr>
+            </a:pPr>
+            <a:r>
+              <a:t>• Venue Lucky Wheel: 100% Owner-configured next-visit perks.</a:t>
+            </a:r>
+          </a:p>
+          <a:p>
+            <a:pPr>
+              <a:spcBef>
+                <a:spcPts val="400"/>
+              </a:spcBef>
+              <a:defRPr sz="1100">
+                <a:solidFill>
+                  <a:srgbClr val="CBD5E1"/>
+                </a:solidFill>
+                <a:latin typeface="Arial"/>
+              </a:defRPr>
+            </a:pPr>
+            <a:r>
+              <a:t>• Standard Support: 9 AM – 9 PM WhatsApp &amp; Email support (&lt;4h response).</a:t>
             </a:r>
           </a:p>
         </p:txBody>
@@ -6417,9 +6449,9 @@
           <a:p>
             <a:pPr>
               <a:spcBef>
-                <a:spcPts val="600"/>
-              </a:spcBef>
-              <a:defRPr sz="1150">
+                <a:spcPts val="400"/>
+              </a:spcBef>
+              <a:defRPr sz="1100">
                 <a:solidFill>
                   <a:srgbClr val="CBD5E1"/>
                 </a:solidFill>
@@ -6427,15 +6459,15 @@
               </a:defRPr>
             </a:pPr>
             <a:r>
-              <a:t>• Centralized Multi-Branch HQ: Unified menu catalog sync &amp; brand-wide analytics.</a:t>
-            </a:r>
-          </a:p>
-          <a:p>
-            <a:pPr>
-              <a:spcBef>
-                <a:spcPts val="600"/>
-              </a:spcBef>
-              <a:defRPr sz="1150">
+              <a:t>• Unlimited Outlets &amp; Tables: Includes Shipped Custom Acrylic &amp; Metal QR Standees.</a:t>
+            </a:r>
+          </a:p>
+          <a:p>
+            <a:pPr>
+              <a:spcBef>
+                <a:spcPts val="400"/>
+              </a:spcBef>
+              <a:defRPr sz="1100">
                 <a:solidFill>
                   <a:srgbClr val="CBD5E1"/>
                 </a:solidFill>
@@ -6443,15 +6475,15 @@
               </a:defRPr>
             </a:pPr>
             <a:r>
-              <a:t>• Multi-Kitchen Routing: Load-balanced KOTs across separate culinary sections.</a:t>
-            </a:r>
-          </a:p>
-          <a:p>
-            <a:pPr>
-              <a:spcBef>
-                <a:spcPts val="600"/>
-              </a:spcBef>
-              <a:defRPr sz="1150">
+              <a:t>• Multiplayer Cart &amp; Floor Bridging: Real-time guest sync + floor captain terminals.</a:t>
+            </a:r>
+          </a:p>
+          <a:p>
+            <a:pPr>
+              <a:spcBef>
+                <a:spcPts val="400"/>
+              </a:spcBef>
+              <a:defRPr sz="1100">
                 <a:solidFill>
                   <a:srgbClr val="CBD5E1"/>
                 </a:solidFill>
@@ -6459,15 +6491,15 @@
               </a:defRPr>
             </a:pPr>
             <a:r>
-              <a:t>• Custom POS Integrations: 2-Way REST API bridge for Petpooja, POSist, RanceLab.</a:t>
-            </a:r>
-          </a:p>
-          <a:p>
-            <a:pPr>
-              <a:spcBef>
-                <a:spcPts val="600"/>
-              </a:spcBef>
-              <a:defRPr sz="1150">
+              <a:t>• Multi-Kitchen Smart Routing: Auto-splits Bar, Tandoor, Curry &amp; Pantry KDS.</a:t>
+            </a:r>
+          </a:p>
+          <a:p>
+            <a:pPr>
+              <a:spcBef>
+                <a:spcPts val="400"/>
+              </a:spcBef>
+              <a:defRPr sz="1100">
                 <a:solidFill>
                   <a:srgbClr val="CBD5E1"/>
                 </a:solidFill>
@@ -6475,15 +6507,15 @@
               </a:defRPr>
             </a:pPr>
             <a:r>
-              <a:t>• White-Label Branding: Custom domain, branded QR stands, and bespoke themes.</a:t>
-            </a:r>
-          </a:p>
-          <a:p>
-            <a:pPr>
-              <a:spcBef>
-                <a:spcPts val="600"/>
-              </a:spcBef>
-              <a:defRPr sz="1150">
+              <a:t>• Full 2-Way REST API Bridge: Live 86 item sync, bill settlements &amp; inventory.</a:t>
+            </a:r>
+          </a:p>
+          <a:p>
+            <a:pPr>
+              <a:spcBef>
+                <a:spcPts val="400"/>
+              </a:spcBef>
+              <a:defRPr sz="1100">
                 <a:solidFill>
                   <a:srgbClr val="CBD5E1"/>
                 </a:solidFill>
@@ -6491,15 +6523,15 @@
               </a:defRPr>
             </a:pPr>
             <a:r>
-              <a:t>• Branch Loyalty Rules: Location-specific wheel reward quotas &amp; fraud limits.</a:t>
-            </a:r>
-          </a:p>
-          <a:p>
-            <a:pPr>
-              <a:spcBef>
-                <a:spcPts val="600"/>
-              </a:spcBef>
-              <a:defRPr sz="1150">
+              <a:t>• Multi-Chef AI Studio: City-specific branch overrides &amp; franchise tone.</a:t>
+            </a:r>
+          </a:p>
+          <a:p>
+            <a:pPr>
+              <a:spcBef>
+                <a:spcPts val="400"/>
+              </a:spcBef>
+              <a:defRPr sz="1100">
                 <a:solidFill>
                   <a:srgbClr val="CBD5E1"/>
                 </a:solidFill>
@@ -6507,7 +6539,39 @@
               </a:defRPr>
             </a:pPr>
             <a:r>
-              <a:t>• 24/7 Dedicated SLA: Personal account manager and on-premise staff training.</a:t>
+              <a:t>• 100% White-Label: Custom domain (`order.brand.com`), zero Menuz branding.</a:t>
+            </a:r>
+          </a:p>
+          <a:p>
+            <a:pPr>
+              <a:spcBef>
+                <a:spcPts val="400"/>
+              </a:spcBef>
+              <a:defRPr sz="1100">
+                <a:solidFill>
+                  <a:srgbClr val="CBD5E1"/>
+                </a:solidFill>
+                <a:latin typeface="Arial"/>
+              </a:defRPr>
+            </a:pPr>
+            <a:r>
+              <a:t>• Granular Team RBAC: HQ Director, Regional GM, Manager, Chef &amp; Waiter roles.</a:t>
+            </a:r>
+          </a:p>
+          <a:p>
+            <a:pPr>
+              <a:spcBef>
+                <a:spcPts val="400"/>
+              </a:spcBef>
+              <a:defRPr sz="1100">
+                <a:solidFill>
+                  <a:srgbClr val="CBD5E1"/>
+                </a:solidFill>
+                <a:latin typeface="Arial"/>
+              </a:defRPr>
+            </a:pPr>
+            <a:r>
+              <a:t>• VIP 24/7 Priority SLA: Dedicated Director &amp; Weekend Rush War-Room (&lt;15m SLA).</a:t>
             </a:r>
           </a:p>
         </p:txBody>
@@ -6700,11 +6764,11 @@
                 <a:tableStyleId>{5C22544A-7EE6-4342-B048-85BDC9FD1C3A}</a:tableStyleId>
               </a:tblPr>
               <a:tblGrid>
-                <a:gridCol w="4297680"/>
-                <a:gridCol w="3200400"/>
-                <a:gridCol w="3200400"/>
+                <a:gridCol w="3931920"/>
+                <a:gridCol w="3383280"/>
+                <a:gridCol w="3383280"/>
               </a:tblGrid>
-              <a:tr h="457200">
+              <a:tr h="415636">
                 <a:tc>
                   <a:txBody>
                     <a:bodyPr/>
@@ -6778,7 +6842,7 @@
                   </a:tcPr>
                 </a:tc>
               </a:tr>
-              <a:tr h="457200">
+              <a:tr h="415636">
                 <a:tc>
                   <a:txBody>
                     <a:bodyPr/>
@@ -6793,7 +6857,7 @@
                         </a:defRPr>
                       </a:pPr>
                       <a:r>
-                        <a:t>Venue &amp; Table Scale</a:t>
+                        <a:t>Outlet Scale &amp; Hardware Kit</a:t>
                       </a:r>
                     </a:p>
                   </a:txBody>
@@ -6817,7 +6881,7 @@
                         </a:defRPr>
                       </a:pPr>
                       <a:r>
-                        <a:t>1 Location (Unlimited Tables)</a:t>
+                        <a:t>1 Venue (Up to 25 Tables • PDF Stickers)</a:t>
                       </a:r>
                     </a:p>
                   </a:txBody>
@@ -6841,7 +6905,7 @@
                         </a:defRPr>
                       </a:pPr>
                       <a:r>
-                        <a:t>Multi-Outlet (Unlimited Venues &amp; Tables)</a:t>
+                        <a:t>Unlimited Outlets &amp; Tables + Shipped Acrylic/Metal Stands</a:t>
                       </a:r>
                     </a:p>
                   </a:txBody>
@@ -6852,7 +6916,7 @@
                   </a:tcPr>
                 </a:tc>
               </a:tr>
-              <a:tr h="457200">
+              <a:tr h="415636">
                 <a:tc>
                   <a:txBody>
                     <a:bodyPr/>
@@ -6867,7 +6931,7 @@
                         </a:defRPr>
                       </a:pPr>
                       <a:r>
-                        <a:t>Interactive Dining &amp; Multiplayer Cart</a:t>
+                        <a:t>Interactive Dining &amp; Floor Sync</a:t>
                       </a:r>
                     </a:p>
                   </a:txBody>
@@ -6883,15 +6947,15 @@
                     <a:lstStyle/>
                     <a:p>
                       <a:pPr>
-                        <a:defRPr sz="1050" b="1">
+                        <a:defRPr sz="1050">
                           <a:solidFill>
-                            <a:srgbClr val="10B981"/>
+                            <a:srgbClr val="06B6D4"/>
                           </a:solidFill>
                           <a:latin typeface="Arial"/>
                         </a:defRPr>
                       </a:pPr>
                       <a:r>
-                        <a:t>✓ Full Access (Zero App Download)</a:t>
+                        <a:t>Standard Mobile Web Menu (Zero App)</a:t>
                       </a:r>
                     </a:p>
                   </a:txBody>
@@ -6907,15 +6971,15 @@
                     <a:lstStyle/>
                     <a:p>
                       <a:pPr>
-                        <a:defRPr sz="1050" b="1">
+                        <a:defRPr sz="1050">
                           <a:solidFill>
-                            <a:srgbClr val="10B981"/>
+                            <a:srgbClr val="F59E0B"/>
                           </a:solidFill>
                           <a:latin typeface="Arial"/>
                         </a:defRPr>
                       </a:pPr>
                       <a:r>
-                        <a:t>✓ Full Access (Zero App Download)</a:t>
+                        <a:t>Real-Time Multiplayer Sync + Floor Captain Terminals</a:t>
                       </a:r>
                     </a:p>
                   </a:txBody>
@@ -6926,7 +6990,7 @@
                   </a:tcPr>
                 </a:tc>
               </a:tr>
-              <a:tr h="457200">
+              <a:tr h="415636">
                 <a:tc>
                   <a:txBody>
                     <a:bodyPr/>
@@ -6941,155 +7005,7 @@
                         </a:defRPr>
                       </a:pPr>
                       <a:r>
-                        <a:t>Multilingual AI Menu Engine</a:t>
-                      </a:r>
-                    </a:p>
-                  </a:txBody>
-                  <a:tcPr>
-                    <a:solidFill>
-                      <a:srgbClr val="131C2E"/>
-                    </a:solidFill>
-                  </a:tcPr>
-                </a:tc>
-                <a:tc>
-                  <a:txBody>
-                    <a:bodyPr/>
-                    <a:lstStyle/>
-                    <a:p>
-                      <a:pPr>
-                        <a:defRPr sz="1050" b="1">
-                          <a:solidFill>
-                            <a:srgbClr val="10B981"/>
-                          </a:solidFill>
-                          <a:latin typeface="Arial"/>
-                        </a:defRPr>
-                      </a:pPr>
-                      <a:r>
-                        <a:t>✓ English, Hindi &amp; Marathi + Dietary</a:t>
-                      </a:r>
-                    </a:p>
-                  </a:txBody>
-                  <a:tcPr>
-                    <a:solidFill>
-                      <a:srgbClr val="131C2E"/>
-                    </a:solidFill>
-                  </a:tcPr>
-                </a:tc>
-                <a:tc>
-                  <a:txBody>
-                    <a:bodyPr/>
-                    <a:lstStyle/>
-                    <a:p>
-                      <a:pPr>
-                        <a:defRPr sz="1050" b="1">
-                          <a:solidFill>
-                            <a:srgbClr val="10B981"/>
-                          </a:solidFill>
-                          <a:latin typeface="Arial"/>
-                        </a:defRPr>
-                      </a:pPr>
-                      <a:r>
-                        <a:t>✓ English, Hindi &amp; Marathi + Dietary</a:t>
-                      </a:r>
-                    </a:p>
-                  </a:txBody>
-                  <a:tcPr>
-                    <a:solidFill>
-                      <a:srgbClr val="131C2E"/>
-                    </a:solidFill>
-                  </a:tcPr>
-                </a:tc>
-              </a:tr>
-              <a:tr h="457200">
-                <a:tc>
-                  <a:txBody>
-                    <a:bodyPr/>
-                    <a:lstStyle/>
-                    <a:p>
-                      <a:pPr>
-                        <a:defRPr sz="1050" b="1">
-                          <a:solidFill>
-                            <a:srgbClr val="FAFAFA"/>
-                          </a:solidFill>
-                          <a:latin typeface="Arial"/>
-                        </a:defRPr>
-                      </a:pPr>
-                      <a:r>
-                        <a:t>Kitchen KOT Thermal Printing</a:t>
-                      </a:r>
-                    </a:p>
-                  </a:txBody>
-                  <a:tcPr>
-                    <a:solidFill>
-                      <a:srgbClr val="0E1422"/>
-                    </a:solidFill>
-                  </a:tcPr>
-                </a:tc>
-                <a:tc>
-                  <a:txBody>
-                    <a:bodyPr/>
-                    <a:lstStyle/>
-                    <a:p>
-                      <a:pPr>
-                        <a:defRPr sz="1050" b="1">
-                          <a:solidFill>
-                            <a:srgbClr val="10B981"/>
-                          </a:solidFill>
-                          <a:latin typeface="Arial"/>
-                        </a:defRPr>
-                      </a:pPr>
-                      <a:r>
-                        <a:t>✓ Single Kitchen Station ESC/POS</a:t>
-                      </a:r>
-                    </a:p>
-                  </a:txBody>
-                  <a:tcPr>
-                    <a:solidFill>
-                      <a:srgbClr val="0E1422"/>
-                    </a:solidFill>
-                  </a:tcPr>
-                </a:tc>
-                <a:tc>
-                  <a:txBody>
-                    <a:bodyPr/>
-                    <a:lstStyle/>
-                    <a:p>
-                      <a:pPr>
-                        <a:defRPr sz="1050" b="1">
-                          <a:solidFill>
-                            <a:srgbClr val="10B981"/>
-                          </a:solidFill>
-                          <a:latin typeface="Arial"/>
-                        </a:defRPr>
-                      </a:pPr>
-                      <a:r>
-                        <a:t>✓ Multi-Kitchen &amp; Bar Routing</a:t>
-                      </a:r>
-                    </a:p>
-                  </a:txBody>
-                  <a:tcPr>
-                    <a:solidFill>
-                      <a:srgbClr val="0E1422"/>
-                    </a:solidFill>
-                  </a:tcPr>
-                </a:tc>
-              </a:tr>
-              <a:tr h="457200">
-                <a:tc>
-                  <a:txBody>
-                    <a:bodyPr/>
-                    <a:lstStyle/>
-                    <a:p>
-                      <a:pPr>
-                        <a:defRPr sz="1050" b="1">
-                          <a:solidFill>
-                            <a:srgbClr val="FAFAFA"/>
-                          </a:solidFill>
-                          <a:latin typeface="Arial"/>
-                        </a:defRPr>
-                      </a:pPr>
-                      <a:r>
-                        <a:t>POS Integrations</a:t>
+                        <a:t>Chef AI Studio &amp; Customization</a:t>
                       </a:r>
                     </a:p>
                   </a:txBody>
@@ -7113,7 +7029,7 @@
                         </a:defRPr>
                       </a:pPr>
                       <a:r>
-                        <a:t>Standard POS Bridge</a:t>
+                        <a:t>Single Venue Profile (Spice &amp; Allergen Guard)</a:t>
                       </a:r>
                     </a:p>
                   </a:txBody>
@@ -7137,7 +7053,7 @@
                         </a:defRPr>
                       </a:pPr>
                       <a:r>
-                        <a:t>Enterprise 2-Way REST API Sync</a:t>
+                        <a:t>Multi-Branch AI Studio + City Overrides &amp; Franchise Tone</a:t>
                       </a:r>
                     </a:p>
                   </a:txBody>
@@ -7148,7 +7064,7 @@
                   </a:tcPr>
                 </a:tc>
               </a:tr>
-              <a:tr h="457200">
+              <a:tr h="415636">
                 <a:tc>
                   <a:txBody>
                     <a:bodyPr/>
@@ -7163,155 +7079,7 @@
                         </a:defRPr>
                       </a:pPr>
                       <a:r>
-                        <a:t>Google Maps SEO &amp; AI Review Builder</a:t>
-                      </a:r>
-                    </a:p>
-                  </a:txBody>
-                  <a:tcPr>
-                    <a:solidFill>
-                      <a:srgbClr val="0E1422"/>
-                    </a:solidFill>
-                  </a:tcPr>
-                </a:tc>
-                <a:tc>
-                  <a:txBody>
-                    <a:bodyPr/>
-                    <a:lstStyle/>
-                    <a:p>
-                      <a:pPr>
-                        <a:defRPr sz="1050" b="1">
-                          <a:solidFill>
-                            <a:srgbClr val="10B981"/>
-                          </a:solidFill>
-                          <a:latin typeface="Arial"/>
-                        </a:defRPr>
-                      </a:pPr>
-                      <a:r>
-                        <a:t>✓ Included (1-Click Tags)</a:t>
-                      </a:r>
-                    </a:p>
-                  </a:txBody>
-                  <a:tcPr>
-                    <a:solidFill>
-                      <a:srgbClr val="0E1422"/>
-                    </a:solidFill>
-                  </a:tcPr>
-                </a:tc>
-                <a:tc>
-                  <a:txBody>
-                    <a:bodyPr/>
-                    <a:lstStyle/>
-                    <a:p>
-                      <a:pPr>
-                        <a:defRPr sz="1050" b="1">
-                          <a:solidFill>
-                            <a:srgbClr val="10B981"/>
-                          </a:solidFill>
-                          <a:latin typeface="Arial"/>
-                        </a:defRPr>
-                      </a:pPr>
-                      <a:r>
-                        <a:t>✓ Included (1-Click Tags)</a:t>
-                      </a:r>
-                    </a:p>
-                  </a:txBody>
-                  <a:tcPr>
-                    <a:solidFill>
-                      <a:srgbClr val="0E1422"/>
-                    </a:solidFill>
-                  </a:tcPr>
-                </a:tc>
-              </a:tr>
-              <a:tr h="457200">
-                <a:tc>
-                  <a:txBody>
-                    <a:bodyPr/>
-                    <a:lstStyle/>
-                    <a:p>
-                      <a:pPr>
-                        <a:defRPr sz="1050" b="1">
-                          <a:solidFill>
-                            <a:srgbClr val="FAFAFA"/>
-                          </a:solidFill>
-                          <a:latin typeface="Arial"/>
-                        </a:defRPr>
-                      </a:pPr>
-                      <a:r>
-                        <a:t>Gamified Wheel &amp; Retention</a:t>
-                      </a:r>
-                    </a:p>
-                  </a:txBody>
-                  <a:tcPr>
-                    <a:solidFill>
-                      <a:srgbClr val="131C2E"/>
-                    </a:solidFill>
-                  </a:tcPr>
-                </a:tc>
-                <a:tc>
-                  <a:txBody>
-                    <a:bodyPr/>
-                    <a:lstStyle/>
-                    <a:p>
-                      <a:pPr>
-                        <a:defRPr sz="1050" b="1">
-                          <a:solidFill>
-                            <a:srgbClr val="10B981"/>
-                          </a:solidFill>
-                          <a:latin typeface="Arial"/>
-                        </a:defRPr>
-                      </a:pPr>
-                      <a:r>
-                        <a:t>✓ Full Owner Control (Zero Discounts)</a:t>
-                      </a:r>
-                    </a:p>
-                  </a:txBody>
-                  <a:tcPr>
-                    <a:solidFill>
-                      <a:srgbClr val="131C2E"/>
-                    </a:solidFill>
-                  </a:tcPr>
-                </a:tc>
-                <a:tc>
-                  <a:txBody>
-                    <a:bodyPr/>
-                    <a:lstStyle/>
-                    <a:p>
-                      <a:pPr>
-                        <a:defRPr sz="1050" b="1">
-                          <a:solidFill>
-                            <a:srgbClr val="10B981"/>
-                          </a:solidFill>
-                          <a:latin typeface="Arial"/>
-                        </a:defRPr>
-                      </a:pPr>
-                      <a:r>
-                        <a:t>✓ Full Control + Branch Rules</a:t>
-                      </a:r>
-                    </a:p>
-                  </a:txBody>
-                  <a:tcPr>
-                    <a:solidFill>
-                      <a:srgbClr val="131C2E"/>
-                    </a:solidFill>
-                  </a:tcPr>
-                </a:tc>
-              </a:tr>
-              <a:tr h="457200">
-                <a:tc>
-                  <a:txBody>
-                    <a:bodyPr/>
-                    <a:lstStyle/>
-                    <a:p>
-                      <a:pPr>
-                        <a:defRPr sz="1050" b="1">
-                          <a:solidFill>
-                            <a:srgbClr val="FAFAFA"/>
-                          </a:solidFill>
-                          <a:latin typeface="Arial"/>
-                        </a:defRPr>
-                      </a:pPr>
-                      <a:r>
-                        <a:t>Multi-Branch Centralized HQ</a:t>
+                        <a:t>Kitchen KOT &amp; Order Routing</a:t>
                       </a:r>
                     </a:p>
                   </a:txBody>
@@ -7335,7 +7103,7 @@
                         </a:defRPr>
                       </a:pPr>
                       <a:r>
-                        <a:t>— (Single venue analytics)</a:t>
+                        <a:t>Single-Station KOT (1 Printer / WhatsApp)</a:t>
                       </a:r>
                     </a:p>
                   </a:txBody>
@@ -7351,15 +7119,15 @@
                     <a:lstStyle/>
                     <a:p>
                       <a:pPr>
-                        <a:defRPr sz="1050" b="1">
+                        <a:defRPr sz="1050">
                           <a:solidFill>
-                            <a:srgbClr val="10B981"/>
+                            <a:srgbClr val="F59E0B"/>
                           </a:solidFill>
                           <a:latin typeface="Arial"/>
                         </a:defRPr>
                       </a:pPr>
                       <a:r>
-                        <a:t>✓ Centralized Multi-Branch Dashboard</a:t>
+                        <a:t>Multi-Kitchen Smart Routing (Bar, Tandoor, Curry &amp; Pantry)</a:t>
                       </a:r>
                     </a:p>
                   </a:txBody>
@@ -7370,7 +7138,7 @@
                   </a:tcPr>
                 </a:tc>
               </a:tr>
-              <a:tr h="457200">
+              <a:tr h="415636">
                 <a:tc>
                   <a:txBody>
                     <a:bodyPr/>
@@ -7385,7 +7153,7 @@
                         </a:defRPr>
                       </a:pPr>
                       <a:r>
-                        <a:t>Support SLA &amp; Onboarding</a:t>
+                        <a:t>POS Integration Architecture</a:t>
                       </a:r>
                     </a:p>
                   </a:txBody>
@@ -7409,7 +7177,7 @@
                         </a:defRPr>
                       </a:pPr>
                       <a:r>
-                        <a:t>Standard Email &amp; Chat Support</a:t>
+                        <a:t>Standard 1-Way Cloud Order Relay</a:t>
                       </a:r>
                     </a:p>
                   </a:txBody>
@@ -7433,13 +7201,383 @@
                         </a:defRPr>
                       </a:pPr>
                       <a:r>
-                        <a:t>24/7 Dedicated Account Manager</a:t>
+                        <a:t>Full 2-Way REST API Bridge (Live 86 Sync &amp; Settlements)</a:t>
                       </a:r>
                     </a:p>
                   </a:txBody>
                   <a:tcPr>
                     <a:solidFill>
                       <a:srgbClr val="131C2E"/>
+                    </a:solidFill>
+                  </a:tcPr>
+                </a:tc>
+              </a:tr>
+              <a:tr h="415636">
+                <a:tc>
+                  <a:txBody>
+                    <a:bodyPr/>
+                    <a:lstStyle/>
+                    <a:p>
+                      <a:pPr>
+                        <a:defRPr sz="1050" b="1">
+                          <a:solidFill>
+                            <a:srgbClr val="FAFAFA"/>
+                          </a:solidFill>
+                          <a:latin typeface="Arial"/>
+                        </a:defRPr>
+                      </a:pPr>
+                      <a:r>
+                        <a:t>Google Maps SEO &amp; Reputation</a:t>
+                      </a:r>
+                    </a:p>
+                  </a:txBody>
+                  <a:tcPr>
+                    <a:solidFill>
+                      <a:srgbClr val="0E1422"/>
+                    </a:solidFill>
+                  </a:tcPr>
+                </a:tc>
+                <a:tc>
+                  <a:txBody>
+                    <a:bodyPr/>
+                    <a:lstStyle/>
+                    <a:p>
+                      <a:pPr>
+                        <a:defRPr sz="1050">
+                          <a:solidFill>
+                            <a:srgbClr val="06B6D4"/>
+                          </a:solidFill>
+                          <a:latin typeface="Arial"/>
+                        </a:defRPr>
+                      </a:pPr>
+                      <a:r>
+                        <a:t>Single-Branch 1-Click Review Assist + Floor Shield</a:t>
+                      </a:r>
+                    </a:p>
+                  </a:txBody>
+                  <a:tcPr>
+                    <a:solidFill>
+                      <a:srgbClr val="0E1422"/>
+                    </a:solidFill>
+                  </a:tcPr>
+                </a:tc>
+                <a:tc>
+                  <a:txBody>
+                    <a:bodyPr/>
+                    <a:lstStyle/>
+                    <a:p>
+                      <a:pPr>
+                        <a:defRPr sz="1050">
+                          <a:solidFill>
+                            <a:srgbClr val="F59E0B"/>
+                          </a:solidFill>
+                          <a:latin typeface="Arial"/>
+                        </a:defRPr>
+                      </a:pPr>
+                      <a:r>
+                        <a:t>Multi-Branch SEO Command Center &amp; City Benchmarks</a:t>
+                      </a:r>
+                    </a:p>
+                  </a:txBody>
+                  <a:tcPr>
+                    <a:solidFill>
+                      <a:srgbClr val="0E1422"/>
+                    </a:solidFill>
+                  </a:tcPr>
+                </a:tc>
+              </a:tr>
+              <a:tr h="415636">
+                <a:tc>
+                  <a:txBody>
+                    <a:bodyPr/>
+                    <a:lstStyle/>
+                    <a:p>
+                      <a:pPr>
+                        <a:defRPr sz="1050" b="1">
+                          <a:solidFill>
+                            <a:srgbClr val="FAFAFA"/>
+                          </a:solidFill>
+                          <a:latin typeface="Arial"/>
+                        </a:defRPr>
+                      </a:pPr>
+                      <a:r>
+                        <a:t>Gamified Loyalty &amp; Retention</a:t>
+                      </a:r>
+                    </a:p>
+                  </a:txBody>
+                  <a:tcPr>
+                    <a:solidFill>
+                      <a:srgbClr val="131C2E"/>
+                    </a:solidFill>
+                  </a:tcPr>
+                </a:tc>
+                <a:tc>
+                  <a:txBody>
+                    <a:bodyPr/>
+                    <a:lstStyle/>
+                    <a:p>
+                      <a:pPr>
+                        <a:defRPr sz="1050">
+                          <a:solidFill>
+                            <a:srgbClr val="06B6D4"/>
+                          </a:solidFill>
+                          <a:latin typeface="Arial"/>
+                        </a:defRPr>
+                      </a:pPr>
+                      <a:r>
+                        <a:t>Standard Venue Spin Wheel (Owner Controlled)</a:t>
+                      </a:r>
+                    </a:p>
+                  </a:txBody>
+                  <a:tcPr>
+                    <a:solidFill>
+                      <a:srgbClr val="131C2E"/>
+                    </a:solidFill>
+                  </a:tcPr>
+                </a:tc>
+                <a:tc>
+                  <a:txBody>
+                    <a:bodyPr/>
+                    <a:lstStyle/>
+                    <a:p>
+                      <a:pPr>
+                        <a:defRPr sz="1050">
+                          <a:solidFill>
+                            <a:srgbClr val="F59E0B"/>
+                          </a:solidFill>
+                          <a:latin typeface="Arial"/>
+                        </a:defRPr>
+                      </a:pPr>
+                      <a:r>
+                        <a:t>Cross-Outlet Loyalty Pass &amp; Geo-Targeted Campaigns</a:t>
+                      </a:r>
+                    </a:p>
+                  </a:txBody>
+                  <a:tcPr>
+                    <a:solidFill>
+                      <a:srgbClr val="131C2E"/>
+                    </a:solidFill>
+                  </a:tcPr>
+                </a:tc>
+              </a:tr>
+              <a:tr h="415636">
+                <a:tc>
+                  <a:txBody>
+                    <a:bodyPr/>
+                    <a:lstStyle/>
+                    <a:p>
+                      <a:pPr>
+                        <a:defRPr sz="1050" b="1">
+                          <a:solidFill>
+                            <a:srgbClr val="FAFAFA"/>
+                          </a:solidFill>
+                          <a:latin typeface="Arial"/>
+                        </a:defRPr>
+                      </a:pPr>
+                      <a:r>
+                        <a:t>Brand Identity &amp; Custom Domain</a:t>
+                      </a:r>
+                    </a:p>
+                  </a:txBody>
+                  <a:tcPr>
+                    <a:solidFill>
+                      <a:srgbClr val="0E1422"/>
+                    </a:solidFill>
+                  </a:tcPr>
+                </a:tc>
+                <a:tc>
+                  <a:txBody>
+                    <a:bodyPr/>
+                    <a:lstStyle/>
+                    <a:p>
+                      <a:pPr>
+                        <a:defRPr sz="1050">
+                          <a:solidFill>
+                            <a:srgbClr val="06B6D4"/>
+                          </a:solidFill>
+                          <a:latin typeface="Arial"/>
+                        </a:defRPr>
+                      </a:pPr>
+                      <a:r>
+                        <a:t>Hosted Menu (`menuz.in/r/slug` with logo)</a:t>
+                      </a:r>
+                    </a:p>
+                  </a:txBody>
+                  <a:tcPr>
+                    <a:solidFill>
+                      <a:srgbClr val="0E1422"/>
+                    </a:solidFill>
+                  </a:tcPr>
+                </a:tc>
+                <a:tc>
+                  <a:txBody>
+                    <a:bodyPr/>
+                    <a:lstStyle/>
+                    <a:p>
+                      <a:pPr>
+                        <a:defRPr sz="1050">
+                          <a:solidFill>
+                            <a:srgbClr val="F59E0B"/>
+                          </a:solidFill>
+                          <a:latin typeface="Arial"/>
+                        </a:defRPr>
+                      </a:pPr>
+                      <a:r>
+                        <a:t>100% White-Label (`order.brand.com` • Zero Menuz Badge)</a:t>
+                      </a:r>
+                    </a:p>
+                  </a:txBody>
+                  <a:tcPr>
+                    <a:solidFill>
+                      <a:srgbClr val="0E1422"/>
+                    </a:solidFill>
+                  </a:tcPr>
+                </a:tc>
+              </a:tr>
+              <a:tr h="415636">
+                <a:tc>
+                  <a:txBody>
+                    <a:bodyPr/>
+                    <a:lstStyle/>
+                    <a:p>
+                      <a:pPr>
+                        <a:defRPr sz="1050" b="1">
+                          <a:solidFill>
+                            <a:srgbClr val="FAFAFA"/>
+                          </a:solidFill>
+                          <a:latin typeface="Arial"/>
+                        </a:defRPr>
+                      </a:pPr>
+                      <a:r>
+                        <a:t>Team Governance &amp; RBAC</a:t>
+                      </a:r>
+                    </a:p>
+                  </a:txBody>
+                  <a:tcPr>
+                    <a:solidFill>
+                      <a:srgbClr val="131C2E"/>
+                    </a:solidFill>
+                  </a:tcPr>
+                </a:tc>
+                <a:tc>
+                  <a:txBody>
+                    <a:bodyPr/>
+                    <a:lstStyle/>
+                    <a:p>
+                      <a:pPr>
+                        <a:defRPr sz="1050">
+                          <a:solidFill>
+                            <a:srgbClr val="06B6D4"/>
+                          </a:solidFill>
+                          <a:latin typeface="Arial"/>
+                        </a:defRPr>
+                      </a:pPr>
+                      <a:r>
+                        <a:t>Single Owner / Floor Manager Access</a:t>
+                      </a:r>
+                    </a:p>
+                  </a:txBody>
+                  <a:tcPr>
+                    <a:solidFill>
+                      <a:srgbClr val="131C2E"/>
+                    </a:solidFill>
+                  </a:tcPr>
+                </a:tc>
+                <a:tc>
+                  <a:txBody>
+                    <a:bodyPr/>
+                    <a:lstStyle/>
+                    <a:p>
+                      <a:pPr>
+                        <a:defRPr sz="1050">
+                          <a:solidFill>
+                            <a:srgbClr val="F59E0B"/>
+                          </a:solidFill>
+                          <a:latin typeface="Arial"/>
+                        </a:defRPr>
+                      </a:pPr>
+                      <a:r>
+                        <a:t>Granular Multi-Role (HQ Director, GM, Manager, Chef, Waiter)</a:t>
+                      </a:r>
+                    </a:p>
+                  </a:txBody>
+                  <a:tcPr>
+                    <a:solidFill>
+                      <a:srgbClr val="131C2E"/>
+                    </a:solidFill>
+                  </a:tcPr>
+                </a:tc>
+              </a:tr>
+              <a:tr h="415640">
+                <a:tc>
+                  <a:txBody>
+                    <a:bodyPr/>
+                    <a:lstStyle/>
+                    <a:p>
+                      <a:pPr>
+                        <a:defRPr sz="1050" b="1">
+                          <a:solidFill>
+                            <a:srgbClr val="FAFAFA"/>
+                          </a:solidFill>
+                          <a:latin typeface="Arial"/>
+                        </a:defRPr>
+                      </a:pPr>
+                      <a:r>
+                        <a:t>Support SLA &amp; Operations</a:t>
+                      </a:r>
+                    </a:p>
+                  </a:txBody>
+                  <a:tcPr>
+                    <a:solidFill>
+                      <a:srgbClr val="0E1422"/>
+                    </a:solidFill>
+                  </a:tcPr>
+                </a:tc>
+                <a:tc>
+                  <a:txBody>
+                    <a:bodyPr/>
+                    <a:lstStyle/>
+                    <a:p>
+                      <a:pPr>
+                        <a:defRPr sz="1050">
+                          <a:solidFill>
+                            <a:srgbClr val="06B6D4"/>
+                          </a:solidFill>
+                          <a:latin typeface="Arial"/>
+                        </a:defRPr>
+                      </a:pPr>
+                      <a:r>
+                        <a:t>Business Hours Support (9 AM - 9 PM, &lt;4h SLA)</a:t>
+                      </a:r>
+                    </a:p>
+                  </a:txBody>
+                  <a:tcPr>
+                    <a:solidFill>
+                      <a:srgbClr val="0E1422"/>
+                    </a:solidFill>
+                  </a:tcPr>
+                </a:tc>
+                <a:tc>
+                  <a:txBody>
+                    <a:bodyPr/>
+                    <a:lstStyle/>
+                    <a:p>
+                      <a:pPr>
+                        <a:defRPr sz="1050">
+                          <a:solidFill>
+                            <a:srgbClr val="F59E0B"/>
+                          </a:solidFill>
+                          <a:latin typeface="Arial"/>
+                        </a:defRPr>
+                      </a:pPr>
+                      <a:r>
+                        <a:t>VIP 24/7 Priority Emergency SLA (Dedicated Director, &lt;15m)</a:t>
+                      </a:r>
+                    </a:p>
+                  </a:txBody>
+                  <a:tcPr>
+                    <a:solidFill>
+                      <a:srgbClr val="0E1422"/>
                     </a:solidFill>
                   </a:tcPr>
                 </a:tc>
